--- a/docs/Connect_Data_Model_Pitch.pptx
+++ b/docs/Connect_Data_Model_Pitch.pptx
@@ -797,7 +797,7 @@
           <a:lstStyle/>
           <a:p>
             <a:r>
-              <a:t>Round hub (~ OMOP visit) off participants; response_sessions = DevOps 'surveys' table; collection/kit/incentive/refusal facts key on (connect_id, round); v_participant_events = SMDB unified view. See data_model_events.dbml.</a:t>
+              <a:t>Round hub (~ OMOP visit) off participants; response_sessions = DevOps 'surveys' table; collection/kit/incentive/refusal facts key on (connect_id, round); v_participant_events = SMDB unified view. See dbml/data_model_events.dbml.</a:t>
             </a:r>
           </a:p>
         </p:txBody>
@@ -4907,8 +4907,8 @@
         </p:blipFill>
         <p:spPr>
           <a:xfrm>
-            <a:off x="2071102" y="1280160"/>
-            <a:ext cx="8049490" cy="5029200"/>
+            <a:off x="2039929" y="1280160"/>
+            <a:ext cx="8111836" cy="5029200"/>
           </a:xfrm>
           <a:prstGeom prst="rect">
             <a:avLst/>

--- a/docs/Connect_Data_Model_Pitch.pptx
+++ b/docs/Connect_Data_Model_Pitch.pptx
@@ -21,6 +21,10 @@
     <p:sldId id="269" r:id="rId21"/>
     <p:sldId id="270" r:id="rId22"/>
     <p:sldId id="271" r:id="rId23"/>
+    <p:sldId id="272" r:id="rId24"/>
+    <p:sldId id="273" r:id="rId25"/>
+    <p:sldId id="274" r:id="rId26"/>
+    <p:sldId id="275" r:id="rId27"/>
   </p:sldIdLst>
   <p:sldSz cx="12191695" cy="6858000" type="screen4x3"/>
   <p:notesSz cx="6858000" cy="9144000"/>
@@ -587,7 +591,7 @@
           <a:lstStyle/>
           <a:p>
             <a:r>
-              <a:t>Full Phase 2 ERD. Dense by design — the SVG (docs/connect_data_model.svg) zooms cleanly. See internal_pitch.md — Phase 2.</a:t>
+              <a:t>Phase 2 adds the placement bridge, sessions, version-scoped options, layers, governance. See internal_pitch.md — Phase 1 / Phase 2.</a:t>
             </a:r>
           </a:p>
         </p:txBody>
@@ -657,7 +661,7 @@
           <a:lstStyle/>
           <a:p>
             <a:r>
-              <a:t>Verdict: doable, nothing needs a capability Connect lacks — but it's dependencies + org/policy, not modeling. CIDTool verified 2026-06-22 as a small in-dev JS tool, not a production dimension emitter. Sequence: dims+placement+sessions first (mechanical); governance in parallel early (long pole, gates external release); concept plane/marts/OMOP deferred until pulled. BigQuery has no FK enforcement — relationships logical, enforced by transform + dbt tests. See CLAUDE.md — Phase 2 feasibility.</a:t>
+              <a:t>Full Phase 2 ERD. Dense by design — the SVG (docs/connect_data_model.svg) zooms cleanly. See internal_pitch.md — Phase 2.</a:t>
             </a:r>
           </a:p>
         </p:txBody>
@@ -727,7 +731,7 @@
           <a:lstStyle/>
           <a:p>
             <a:r>
-              <a:t>Same long-format thesis as our model, arrived at independently. The one fix: concept IDs, not strings. See CLAUDE.md — Event plane: DevOps long-format proposal; docs/devops_event_tables_memo.md.</a:t>
+              <a:t>Verdict: doable, nothing needs a capability Connect lacks — but it's dependencies + org/policy, not modeling. CIDTool verified 2026-06-22 as a small in-dev JS tool, not a production dimension emitter. Sequence: dims+placement+sessions first (mechanical); governance in parallel early (long pole, gates external release); concept plane/marts/OMOP deferred until pulled. BigQuery has no FK enforcement — relationships logical, enforced by transform + dbt tests. See CLAUDE.md — Phase 2 feasibility.</a:t>
             </a:r>
           </a:p>
         </p:txBody>
@@ -797,7 +801,7 @@
           <a:lstStyle/>
           <a:p>
             <a:r>
-              <a:t>Round hub (~ OMOP visit) off participants; response_sessions = DevOps 'surveys' table; collection/kit/incentive/refusal facts key on (connect_id, round); v_participant_events = SMDB unified view. See dbml/data_model_events.dbml.</a:t>
+              <a:t>Same long-format thesis as our model, arrived at independently. The one fix: concept IDs, not strings. See CLAUDE.md — Event plane: DevOps long-format proposal; docs/devops_event_tables_memo.md.</a:t>
             </a:r>
           </a:p>
         </p:txBody>
@@ -867,7 +871,7 @@
           <a:lstStyle/>
           <a:p>
             <a:r>
-              <a:t>This is the Marts layer (Phase 2, downstream of Core via dbt). Pitch = highest-value case of the OMOP 'write analytics once' thesis: derived variables defined once, canonically, with lineage — vs. re-coded per study (the 3 pain repos). dbt features map to our principles: dbt docs DAG = lineage to source (#12); SQL is the definition (no black box, #12); source()/ref()+access enforce Core→Analytic→Marts (#8); tests move much of the 7,025-rule QC into CI; sensitivity_tier flows via meta, enforced in IAM (#11); model versions/exposures = a derived-variable catalog. Recommend one mart PER construct (grouped), not a wide mega-table. Grain: participant, or participant×wave for longitudinal. Examples map to established cancer-prevention exposure domains (WCRF/AICR). See CLAUDE.md — Derived variables, lineage &amp; dbt / Mart catalog.</a:t>
+              <a:t>Round hub (~ OMOP visit) off participants; response_sessions = DevOps 'surveys' table; collection/kit/incentive/refusal facts key on (connect_id, round); v_participant_events = SMDB unified view. See dbml/data_model_events.dbml.</a:t>
             </a:r>
           </a:p>
         </p:txBody>
@@ -937,7 +941,7 @@
           <a:lstStyle/>
           <a:p>
             <a:r>
-              <a:t>Worked SQL for each row is in internal_pitch.md — Value proposition (Q1–Q5).</a:t>
+              <a:t>This is the Marts layer (Phase 2, downstream of Core via dbt). Pitch = highest-value case of the OMOP 'write analytics once' thesis: derived variables defined once, canonically, with lineage — vs. re-coded per study (the 3 pain repos). dbt features map to our principles: dbt docs DAG = lineage to source (#12); SQL is the definition (no black box, #12); source()/ref()+access enforce Core→Analytic→Marts (#8); tests move much of the 7,025-rule QC into CI; sensitivity_tier flows via meta, enforced in IAM (#11); model versions/exposures = a derived-variable catalog. Recommend one mart PER construct (grouped), not a wide mega-table. Grain: participant, or participant×wave for longitudinal. Examples map to established cancer-prevention exposure domains (WCRF/AICR). See CLAUDE.md — Derived variables, lineage &amp; dbt / Mart catalog.</a:t>
             </a:r>
           </a:p>
         </p:txBody>
@@ -1007,7 +1011,217 @@
           <a:lstStyle/>
           <a:p>
             <a:r>
-              <a:t>Ask: approve Phase 1 now; commit Phase 2 (esp. governance); consider pulling the concept-equivalence plane forward (geocoding). See internal_pitch.md — Recommendation.</a:t>
+              <a:t>Worked SQL for each row is in internal_pitch.md — Value proposition (Q1–Q5).</a:t>
+            </a:r>
+          </a:p>
+        </p:txBody>
+      </p:sp>
+      <p:sp>
+        <p:nvSpPr>
+          <p:cNvPr id="4" name="Slide Number Placeholder 3"/>
+          <p:cNvSpPr>
+            <a:spLocks noGrp="1"/>
+          </p:cNvSpPr>
+          <p:nvPr>
+            <p:ph type="sldNum" idx="5" sz="quarter"/>
+          </p:nvPr>
+        </p:nvSpPr>
+        <p:spPr/>
+      </p:sp>
+    </p:spTree>
+  </p:cSld>
+  <p:clrMapOvr>
+    <a:masterClrMapping/>
+  </p:clrMapOvr>
+</p:notes>
+</file>
+
+<file path=ppt/notesSlides/notesSlide17.xml><?xml version="1.0" encoding="utf-8"?>
+<p:notes xmlns:a="http://schemas.openxmlformats.org/drawingml/2006/main" xmlns:p="http://schemas.openxmlformats.org/presentationml/2006/main" xmlns:r="http://schemas.openxmlformats.org/officeDocument/2006/relationships">
+  <p:cSld>
+    <p:spTree>
+      <p:nvGrpSpPr>
+        <p:cNvPr id="1" name=""/>
+        <p:cNvGrpSpPr/>
+        <p:nvPr/>
+      </p:nvGrpSpPr>
+      <p:grpSpPr>
+        <a:xfrm>
+          <a:off x="0" y="0"/>
+          <a:ext cx="0" cy="0"/>
+          <a:chOff x="0" y="0"/>
+          <a:chExt cx="0" cy="0"/>
+        </a:xfrm>
+      </p:grpSpPr>
+      <p:sp>
+        <p:nvSpPr>
+          <p:cNvPr id="2" name="Slide Image Placeholder 1"/>
+          <p:cNvSpPr>
+            <a:spLocks noGrp="1"/>
+          </p:cNvSpPr>
+          <p:nvPr>
+            <p:ph type="sldImg" idx="2"/>
+          </p:nvPr>
+        </p:nvSpPr>
+        <p:spPr/>
+      </p:sp>
+      <p:sp>
+        <p:nvSpPr>
+          <p:cNvPr id="3" name="Notes Placeholder 2"/>
+          <p:cNvSpPr>
+            <a:spLocks noGrp="1"/>
+          </p:cNvSpPr>
+          <p:nvPr>
+            <p:ph type="body" idx="3" sz="quarter"/>
+          </p:nvPr>
+        </p:nvSpPr>
+        <p:spPr/>
+        <p:txBody>
+          <a:bodyPr/>
+          <a:lstStyle/>
+          <a:p>
+            <a:r>
+              <a:t>Demo data is synthetic (sql/demo_long_format.sql, runs in DuckDB ~ BigQuery). The labels come from joining the dictionary; analysts never memorize concept ids. v_long packages this join so it's literally SELECT * FROM v_long.</a:t>
+            </a:r>
+          </a:p>
+        </p:txBody>
+      </p:sp>
+      <p:sp>
+        <p:nvSpPr>
+          <p:cNvPr id="4" name="Slide Number Placeholder 3"/>
+          <p:cNvSpPr>
+            <a:spLocks noGrp="1"/>
+          </p:cNvSpPr>
+          <p:nvPr>
+            <p:ph type="sldNum" idx="5" sz="quarter"/>
+          </p:nvPr>
+        </p:nvSpPr>
+        <p:spPr/>
+      </p:sp>
+    </p:spTree>
+  </p:cSld>
+  <p:clrMapOvr>
+    <a:masterClrMapping/>
+  </p:clrMapOvr>
+</p:notes>
+</file>
+
+<file path=ppt/notesSlides/notesSlide18.xml><?xml version="1.0" encoding="utf-8"?>
+<p:notes xmlns:a="http://schemas.openxmlformats.org/drawingml/2006/main" xmlns:p="http://schemas.openxmlformats.org/presentationml/2006/main" xmlns:r="http://schemas.openxmlformats.org/officeDocument/2006/relationships">
+  <p:cSld>
+    <p:spTree>
+      <p:nvGrpSpPr>
+        <p:cNvPr id="1" name=""/>
+        <p:cNvGrpSpPr/>
+        <p:nvPr/>
+      </p:nvGrpSpPr>
+      <p:grpSpPr>
+        <a:xfrm>
+          <a:off x="0" y="0"/>
+          <a:ext cx="0" cy="0"/>
+          <a:chOff x="0" y="0"/>
+          <a:chExt cx="0" cy="0"/>
+        </a:xfrm>
+      </p:grpSpPr>
+      <p:sp>
+        <p:nvSpPr>
+          <p:cNvPr id="2" name="Slide Image Placeholder 1"/>
+          <p:cNvSpPr>
+            <a:spLocks noGrp="1"/>
+          </p:cNvSpPr>
+          <p:nvPr>
+            <p:ph type="sldImg" idx="2"/>
+          </p:nvPr>
+        </p:nvSpPr>
+        <p:spPr/>
+      </p:sp>
+      <p:sp>
+        <p:nvSpPr>
+          <p:cNvPr id="3" name="Notes Placeholder 2"/>
+          <p:cNvSpPr>
+            <a:spLocks noGrp="1"/>
+          </p:cNvSpPr>
+          <p:nvPr>
+            <p:ph type="body" idx="3" sz="quarter"/>
+          </p:nvPr>
+        </p:nvSpPr>
+        <p:spPr/>
+        <p:txBody>
+          <a:bodyPr/>
+          <a:lstStyle/>
+          <a:p>
+            <a:r>
+              <a:t>Reframed: the pivot is GENERIC and metadata-driven — no hardcoded column list (the opposite of a wide-table script). NOTE on completeness: DuckDB's PIVOT implicitly groups by every column not in ON/USING, so you must project to (id, name, value) first — that's the subquery shown; this exact statement runs. The fully-dynamic ON…USING form is DuckDB; BigQuery's PIVOT needs the value list (FOR question_text IN (...)) or dynamic SQL. pandas.pivot and tidyr::pivot_wider are fully dynamic and are what analysts already use. All three verified against sql/demo_long_format.sql (synthetic). Select-all is excluded (multi-valued → belongs in long, next slide). Parameterize by survey → a reusable get_wide() helper (tool built on the contract).</a:t>
+            </a:r>
+          </a:p>
+        </p:txBody>
+      </p:sp>
+      <p:sp>
+        <p:nvSpPr>
+          <p:cNvPr id="4" name="Slide Number Placeholder 3"/>
+          <p:cNvSpPr>
+            <a:spLocks noGrp="1"/>
+          </p:cNvSpPr>
+          <p:nvPr>
+            <p:ph type="sldNum" idx="5" sz="quarter"/>
+          </p:nvPr>
+        </p:nvSpPr>
+        <p:spPr/>
+      </p:sp>
+    </p:spTree>
+  </p:cSld>
+  <p:clrMapOvr>
+    <a:masterClrMapping/>
+  </p:clrMapOvr>
+</p:notes>
+</file>
+
+<file path=ppt/notesSlides/notesSlide19.xml><?xml version="1.0" encoding="utf-8"?>
+<p:notes xmlns:a="http://schemas.openxmlformats.org/drawingml/2006/main" xmlns:p="http://schemas.openxmlformats.org/presentationml/2006/main" xmlns:r="http://schemas.openxmlformats.org/officeDocument/2006/relationships">
+  <p:cSld>
+    <p:spTree>
+      <p:nvGrpSpPr>
+        <p:cNvPr id="1" name=""/>
+        <p:cNvGrpSpPr/>
+        <p:nvPr/>
+      </p:nvGrpSpPr>
+      <p:grpSpPr>
+        <a:xfrm>
+          <a:off x="0" y="0"/>
+          <a:ext cx="0" cy="0"/>
+          <a:chOff x="0" y="0"/>
+          <a:chExt cx="0" cy="0"/>
+        </a:xfrm>
+      </p:grpSpPr>
+      <p:sp>
+        <p:nvSpPr>
+          <p:cNvPr id="2" name="Slide Image Placeholder 1"/>
+          <p:cNvSpPr>
+            <a:spLocks noGrp="1"/>
+          </p:cNvSpPr>
+          <p:nvPr>
+            <p:ph type="sldImg" idx="2"/>
+          </p:nvPr>
+        </p:nvSpPr>
+        <p:spPr/>
+      </p:sp>
+      <p:sp>
+        <p:nvSpPr>
+          <p:cNvPr id="3" name="Notes Placeholder 2"/>
+          <p:cNvSpPr>
+            <a:spLocks noGrp="1"/>
+          </p:cNvSpPr>
+          <p:nvPr>
+            <p:ph type="body" idx="3" sz="quarter"/>
+          </p:nvPr>
+        </p:nvSpPr>
+        <p:spPr/>
+        <p:txBody>
+          <a:bodyPr/>
+          <a:lstStyle/>
+          <a:p>
+            <a:r>
+              <a:t>Counts are GROUP BY — often simpler than wide. Select-all is the standout: wide makes you know and sum a changing set of indicator columns; long is one group-by on response_label. Same query shape works for every question by swapping the concept id (e.g. Smoking Status -&gt; Never 2 / Former 2 / Current 1).</a:t>
             </a:r>
           </a:p>
         </p:txBody>
@@ -1077,7 +1291,77 @@
           <a:lstStyle/>
           <a:p>
             <a:r>
-              <a:t>Lead with the OMOP principle the team already accepts. See internal_pitch.md — Why a data model at all?</a:t>
+              <a:t>The opener: why model at all. Six plain-English value props — self-describing; queryable without tribal knowledge; metadata in the data (not sidecar files); standardized analyses; a schema contract tools can build on (and survive new data); shared abstractions (all select-all handled one way, all loops one way). Sets up the next slide: this is exactly the OMOP lesson. See internal_pitch.md — Why a data model at all?</a:t>
+            </a:r>
+          </a:p>
+        </p:txBody>
+      </p:sp>
+      <p:sp>
+        <p:nvSpPr>
+          <p:cNvPr id="4" name="Slide Number Placeholder 3"/>
+          <p:cNvSpPr>
+            <a:spLocks noGrp="1"/>
+          </p:cNvSpPr>
+          <p:nvPr>
+            <p:ph type="sldNum" idx="5" sz="quarter"/>
+          </p:nvPr>
+        </p:nvSpPr>
+        <p:spPr/>
+      </p:sp>
+    </p:spTree>
+  </p:cSld>
+  <p:clrMapOvr>
+    <a:masterClrMapping/>
+  </p:clrMapOvr>
+</p:notes>
+</file>
+
+<file path=ppt/notesSlides/notesSlide20.xml><?xml version="1.0" encoding="utf-8"?>
+<p:notes xmlns:a="http://schemas.openxmlformats.org/drawingml/2006/main" xmlns:p="http://schemas.openxmlformats.org/presentationml/2006/main" xmlns:r="http://schemas.openxmlformats.org/officeDocument/2006/relationships">
+  <p:cSld>
+    <p:spTree>
+      <p:nvGrpSpPr>
+        <p:cNvPr id="1" name=""/>
+        <p:cNvGrpSpPr/>
+        <p:nvPr/>
+      </p:nvGrpSpPr>
+      <p:grpSpPr>
+        <a:xfrm>
+          <a:off x="0" y="0"/>
+          <a:ext cx="0" cy="0"/>
+          <a:chOff x="0" y="0"/>
+          <a:chExt cx="0" cy="0"/>
+        </a:xfrm>
+      </p:grpSpPr>
+      <p:sp>
+        <p:nvSpPr>
+          <p:cNvPr id="2" name="Slide Image Placeholder 1"/>
+          <p:cNvSpPr>
+            <a:spLocks noGrp="1"/>
+          </p:cNvSpPr>
+          <p:nvPr>
+            <p:ph type="sldImg" idx="2"/>
+          </p:nvPr>
+        </p:nvSpPr>
+        <p:spPr/>
+      </p:sp>
+      <p:sp>
+        <p:nvSpPr>
+          <p:cNvPr id="3" name="Notes Placeholder 2"/>
+          <p:cNvSpPr>
+            <a:spLocks noGrp="1"/>
+          </p:cNvSpPr>
+          <p:nvPr>
+            <p:ph type="body" idx="3" sz="quarter"/>
+          </p:nvPr>
+        </p:nvSpPr>
+        <p:spPr/>
+        <p:txBody>
+          <a:bodyPr/>
+          <a:lstStyle/>
+          <a:p>
+            <a:r>
+              <a:t>Ask: approve Phase 1 now; commit Phase 2 (esp. governance); consider pulling the concept-equivalence plane forward (geocoding). See internal_pitch.md — Recommendation.</a:t>
             </a:r>
           </a:p>
         </p:txBody>
@@ -1147,7 +1431,7 @@
           <a:lstStyle/>
           <a:p>
             <a:r>
-              <a:t>The five pains. Punchline lands after the exhibits. See internal_pitch.md — Why — the problems we all live with.</a:t>
+              <a:t>Lead with the OMOP principle the team already accepts. See internal_pitch.md — Why a data model at all?</a:t>
             </a:r>
           </a:p>
         </p:txBody>
@@ -1217,7 +1501,7 @@
           <a:lstStyle/>
           <a:p>
             <a:r>
-              <a:t>A colleague's flagship report — evidence, not criticism. See internal_pitch.md — This isn't hypothetical.</a:t>
+              <a:t>The five pains. Punchline lands after the exhibits. See internal_pitch.md — Why — the problems we all live with.</a:t>
             </a:r>
           </a:p>
         </p:txBody>
@@ -1287,7 +1571,7 @@
           <a:lstStyle/>
           <a:p>
             <a:r>
-              <a:t>Recalibrated: ~35% directly generatable (value/type/length); a further ~50% skip-gated -&gt; becomes shared skip-logic data authored ONCE instead of re-coded across 3 repos (simple majority machine-generated, ~8% complex tail like percentDiff preserved as raw expression). ~15% genuinely custom. Contingent on the richer (QuickQ) skip_rule representation. Module 4 ~50% custom is the honest counter-case. See internal_pitch.md — QA/QC engine; CLAUDE.md — Skip-logic complexity &amp; coverage.</a:t>
+              <a:t>A colleague's flagship report — evidence, not criticism. See internal_pitch.md — This isn't hypothetical.</a:t>
             </a:r>
           </a:p>
         </p:txBody>
@@ -1357,7 +1641,7 @@
           <a:lstStyle/>
           <a:p>
             <a:r>
-              <a:t>Strongest case for the concept-equivalence plane; sits beyond Phase 2's first cut — argues to pull it forward. See internal_pitch.md — geocoding.</a:t>
+              <a:t>Recalibrated: ~35% directly generatable (value/type/length); a further ~50% skip-gated -&gt; becomes shared skip-logic data authored ONCE instead of re-coded across 3 repos (simple majority machine-generated, ~8% complex tail like percentDiff preserved as raw expression). ~15% genuinely custom. Contingent on the richer (QuickQ) skip_rule representation. Module 4 ~50% custom is the honest counter-case. See internal_pitch.md — QA/QC engine; CLAUDE.md — Skip-logic complexity &amp; coverage.</a:t>
             </a:r>
           </a:p>
         </p:txBody>
@@ -1427,7 +1711,7 @@
           <a:lstStyle/>
           <a:p>
             <a:r>
-              <a:t>Phase 1 model: CIDTool dictionary as-is + one responses fact. Same thesis carries to Phase 2. See internal_pitch.md — The idea / Phase 1.</a:t>
+              <a:t>Strongest case for the concept-equivalence plane; sits beyond Phase 2's first cut — argues to pull it forward. See internal_pitch.md — geocoding.</a:t>
             </a:r>
           </a:p>
         </p:txBody>
@@ -1497,7 +1781,7 @@
           <a:lstStyle/>
           <a:p>
             <a:r>
-              <a:t>EASE-IN framing for a skeptical audience. The current encoding isn't wrong — it faithfully mirrors physical storage (a multi-select really is N 0/1 columns). The model's improvement is logical: an option is an answer choice, not a question, so it belongs in response_options; 'selected' becomes the presence of a row instead of a synthetic Yes/No. Same tooth-loss example as the docs (899251483; options 812107266 accident / 452438775 decay / 886864375 other / 551489317 none; Yes/No = 353358909/104430631). Quest disambiguates select-all [ ] vs single-select ( ) vs grid |grid|. Nothing is thrown away; the dictionary remains the source of truth and this view sits on top. See CLAUDE.md — Source Question is overloaded.</a:t>
+              <a:t>Phase 1 model: CIDTool dictionary as-is + one responses fact. Same thesis carries to Phase 2. See internal_pitch.md — The idea / Phase 1.</a:t>
             </a:r>
           </a:p>
         </p:txBody>
@@ -1567,7 +1851,7 @@
           <a:lstStyle/>
           <a:p>
             <a:r>
-              <a:t>Phase 2 adds the placement bridge, sessions, version-scoped options, layers, governance. See internal_pitch.md — Phase 1 / Phase 2.</a:t>
+              <a:t>EASE-IN framing for a skeptical audience. The current encoding isn't wrong — it faithfully mirrors physical storage (a multi-select really is N 0/1 columns). The model's improvement is logical: an option is an answer choice, not a question, so it belongs in response_options; 'selected' becomes the presence of a row instead of a synthetic Yes/No. Same tooth-loss example as the docs (899251483; options 812107266 accident / 452438775 decay / 886864375 other / 551489317 none; Yes/No = 353358909/104430631). Quest disambiguates select-all [ ] vs single-select ( ) vs grid |grid|. Nothing is thrown away; the dictionary remains the source of truth and this view sits on top. See CLAUDE.md — Source Question is overloaded.</a:t>
             </a:r>
           </a:p>
         </p:txBody>
@@ -4832,6 +5116,533 @@
                 </a:solidFill>
                 <a:latin typeface="Calibri"/>
               </a:rPr>
+              <a:t>A two-phase path</a:t>
+            </a:r>
+          </a:p>
+          <a:p>
+            <a:r>
+              <a:rPr sz="1300" i="1">
+                <a:solidFill>
+                  <a:srgbClr val="BBD5D7"/>
+                </a:solidFill>
+              </a:rPr>
+              <a:t>Phase 1 proves it cheaply · Phase 2 builds the governed warehouse</a:t>
+            </a:r>
+          </a:p>
+        </p:txBody>
+      </p:sp>
+      <p:sp>
+        <p:nvSpPr>
+          <p:cNvPr id="3" name="Rectangle 2"/>
+          <p:cNvSpPr/>
+          <p:nvPr/>
+        </p:nvSpPr>
+        <p:spPr>
+          <a:xfrm>
+            <a:off x="0" y="1051560"/>
+            <a:ext cx="12191695" cy="54864"/>
+          </a:xfrm>
+          <a:prstGeom prst="rect">
+            <a:avLst/>
+          </a:prstGeom>
+          <a:solidFill>
+            <a:srgbClr val="2E8B8B"/>
+          </a:solidFill>
+          <a:ln>
+            <a:noFill/>
+          </a:ln>
+          <a:effectLst/>
+        </p:spPr>
+        <p:style>
+          <a:lnRef idx="1">
+            <a:schemeClr val="accent1"/>
+          </a:lnRef>
+          <a:fillRef idx="3">
+            <a:schemeClr val="accent1"/>
+          </a:fillRef>
+          <a:effectRef idx="2">
+            <a:schemeClr val="accent1"/>
+          </a:effectRef>
+          <a:fontRef idx="minor">
+            <a:schemeClr val="lt1"/>
+          </a:fontRef>
+        </p:style>
+        <p:txBody>
+          <a:bodyPr rtlCol="0" anchor="ctr"/>
+          <a:lstStyle/>
+          <a:p>
+            <a:pPr algn="ctr"/>
+          </a:p>
+        </p:txBody>
+      </p:sp>
+      <p:graphicFrame>
+        <p:nvGraphicFramePr>
+          <p:cNvPr id="4" name="Table 3"/>
+          <p:cNvGraphicFramePr>
+            <a:graphicFrameLocks noGrp="1"/>
+          </p:cNvGraphicFramePr>
+          <p:nvPr/>
+        </p:nvGraphicFramePr>
+        <p:xfrm>
+          <a:off x="548640" y="1554480"/>
+          <a:ext cx="11064240" cy="3108960"/>
+        </p:xfrm>
+        <a:graphic>
+          <a:graphicData uri="http://schemas.openxmlformats.org/drawingml/2006/table">
+            <a:tbl>
+              <a:tblPr firstRow="1" bandRow="1">
+                <a:tableStyleId>{5C22544A-7EE6-4342-B048-85BDC9FD1C3A}</a:tableStyleId>
+              </a:tblPr>
+              <a:tblGrid>
+                <a:gridCol w="1554480"/>
+                <a:gridCol w="4754880"/>
+                <a:gridCol w="4754880"/>
+              </a:tblGrid>
+              <a:tr h="621792">
+                <a:tc>
+                  <a:txBody>
+                    <a:bodyPr wrap="square"/>
+                    <a:lstStyle/>
+                    <a:p>
+                      <a:r>
+                        <a:rPr b="1" sz="1400">
+                          <a:solidFill>
+                            <a:srgbClr val="FFFFFF"/>
+                          </a:solidFill>
+                          <a:latin typeface="Calibri"/>
+                        </a:rPr>
+                        <a:t/>
+                      </a:r>
+                    </a:p>
+                  </a:txBody>
+                  <a:tcPr marL="73152" marR="73152" marT="27432" marB="27432" anchor="ctr">
+                    <a:solidFill>
+                      <a:srgbClr val="16324F"/>
+                    </a:solidFill>
+                  </a:tcPr>
+                </a:tc>
+                <a:tc>
+                  <a:txBody>
+                    <a:bodyPr wrap="square"/>
+                    <a:lstStyle/>
+                    <a:p>
+                      <a:r>
+                        <a:rPr b="1" sz="1400">
+                          <a:solidFill>
+                            <a:srgbClr val="FFFFFF"/>
+                          </a:solidFill>
+                          <a:latin typeface="Calibri"/>
+                        </a:rPr>
+                        <a:t>Phase 1 — Dictionary-Direct</a:t>
+                      </a:r>
+                    </a:p>
+                  </a:txBody>
+                  <a:tcPr marL="73152" marR="73152" marT="27432" marB="27432" anchor="ctr">
+                    <a:solidFill>
+                      <a:srgbClr val="16324F"/>
+                    </a:solidFill>
+                  </a:tcPr>
+                </a:tc>
+                <a:tc>
+                  <a:txBody>
+                    <a:bodyPr wrap="square"/>
+                    <a:lstStyle/>
+                    <a:p>
+                      <a:r>
+                        <a:rPr b="1" sz="1400">
+                          <a:solidFill>
+                            <a:srgbClr val="FFFFFF"/>
+                          </a:solidFill>
+                          <a:latin typeface="Calibri"/>
+                        </a:rPr>
+                        <a:t>Phase 2 — PR2 warehouse</a:t>
+                      </a:r>
+                    </a:p>
+                  </a:txBody>
+                  <a:tcPr marL="73152" marR="73152" marT="27432" marB="27432" anchor="ctr">
+                    <a:solidFill>
+                      <a:srgbClr val="16324F"/>
+                    </a:solidFill>
+                  </a:tcPr>
+                </a:tc>
+              </a:tr>
+              <a:tr h="621792">
+                <a:tc>
+                  <a:txBody>
+                    <a:bodyPr wrap="square"/>
+                    <a:lstStyle/>
+                    <a:p>
+                      <a:r>
+                        <a:rPr sz="1400" b="1">
+                          <a:solidFill>
+                            <a:srgbClr val="222A33"/>
+                          </a:solidFill>
+                          <a:latin typeface="Calibri"/>
+                        </a:rPr>
+                        <a:t>What</a:t>
+                      </a:r>
+                    </a:p>
+                  </a:txBody>
+                  <a:tcPr marL="73152" marR="73152" marT="27432" marB="27432" anchor="ctr">
+                    <a:solidFill>
+                      <a:srgbClr val="FFFFFF"/>
+                    </a:solidFill>
+                  </a:tcPr>
+                </a:tc>
+                <a:tc>
+                  <a:txBody>
+                    <a:bodyPr wrap="square"/>
+                    <a:lstStyle/>
+                    <a:p>
+                      <a:r>
+                        <a:rPr sz="1400">
+                          <a:solidFill>
+                            <a:srgbClr val="222A33"/>
+                          </a:solidFill>
+                          <a:latin typeface="Calibri"/>
+                        </a:rPr>
+                        <a:t>dictionary as-is + 1 responses table</a:t>
+                      </a:r>
+                    </a:p>
+                  </a:txBody>
+                  <a:tcPr marL="73152" marR="73152" marT="27432" marB="27432" anchor="ctr">
+                    <a:solidFill>
+                      <a:srgbClr val="FFFFFF"/>
+                    </a:solidFill>
+                  </a:tcPr>
+                </a:tc>
+                <a:tc>
+                  <a:txBody>
+                    <a:bodyPr wrap="square"/>
+                    <a:lstStyle/>
+                    <a:p>
+                      <a:r>
+                        <a:rPr sz="1400">
+                          <a:solidFill>
+                            <a:srgbClr val="222A33"/>
+                          </a:solidFill>
+                          <a:latin typeface="Calibri"/>
+                        </a:rPr>
+                        <a:t>cleaned dims, placement bridge, sessions, governance</a:t>
+                      </a:r>
+                    </a:p>
+                  </a:txBody>
+                  <a:tcPr marL="73152" marR="73152" marT="27432" marB="27432" anchor="ctr">
+                    <a:solidFill>
+                      <a:srgbClr val="FFFFFF"/>
+                    </a:solidFill>
+                  </a:tcPr>
+                </a:tc>
+              </a:tr>
+              <a:tr h="621792">
+                <a:tc>
+                  <a:txBody>
+                    <a:bodyPr wrap="square"/>
+                    <a:lstStyle/>
+                    <a:p>
+                      <a:r>
+                        <a:rPr sz="1400" b="1">
+                          <a:solidFill>
+                            <a:srgbClr val="222A33"/>
+                          </a:solidFill>
+                          <a:latin typeface="Calibri"/>
+                        </a:rPr>
+                        <a:t>Buys</a:t>
+                      </a:r>
+                    </a:p>
+                  </a:txBody>
+                  <a:tcPr marL="73152" marR="73152" marT="27432" marB="27432" anchor="ctr">
+                    <a:solidFill>
+                      <a:srgbClr val="EDF1F5"/>
+                    </a:solidFill>
+                  </a:tcPr>
+                </a:tc>
+                <a:tc>
+                  <a:txBody>
+                    <a:bodyPr wrap="square"/>
+                    <a:lstStyle/>
+                    <a:p>
+                      <a:r>
+                        <a:rPr sz="1400">
+                          <a:solidFill>
+                            <a:srgbClr val="222A33"/>
+                          </a:solidFill>
+                          <a:latin typeface="Calibri"/>
+                        </a:rPr>
+                        <a:t>stable schema, generic SQL, labels, v1/v2 pool</a:t>
+                      </a:r>
+                    </a:p>
+                  </a:txBody>
+                  <a:tcPr marL="73152" marR="73152" marT="27432" marB="27432" anchor="ctr">
+                    <a:solidFill>
+                      <a:srgbClr val="EDF1F5"/>
+                    </a:solidFill>
+                  </a:tcPr>
+                </a:tc>
+                <a:tc>
+                  <a:txBody>
+                    <a:bodyPr wrap="square"/>
+                    <a:lstStyle/>
+                    <a:p>
+                      <a:r>
+                        <a:rPr sz="1400">
+                          <a:solidFill>
+                            <a:srgbClr val="222A33"/>
+                          </a:solidFill>
+                          <a:latin typeface="Calibri"/>
+                        </a:rPr>
+                        <a:t>true missingness, governed access, marts, view library</a:t>
+                      </a:r>
+                    </a:p>
+                  </a:txBody>
+                  <a:tcPr marL="73152" marR="73152" marT="27432" marB="27432" anchor="ctr">
+                    <a:solidFill>
+                      <a:srgbClr val="EDF1F5"/>
+                    </a:solidFill>
+                  </a:tcPr>
+                </a:tc>
+              </a:tr>
+              <a:tr h="621792">
+                <a:tc>
+                  <a:txBody>
+                    <a:bodyPr wrap="square"/>
+                    <a:lstStyle/>
+                    <a:p>
+                      <a:r>
+                        <a:rPr sz="1400" b="1">
+                          <a:solidFill>
+                            <a:srgbClr val="222A33"/>
+                          </a:solidFill>
+                          <a:latin typeface="Calibri"/>
+                        </a:rPr>
+                        <a:t>Lift</a:t>
+                      </a:r>
+                    </a:p>
+                  </a:txBody>
+                  <a:tcPr marL="73152" marR="73152" marT="27432" marB="27432" anchor="ctr">
+                    <a:solidFill>
+                      <a:srgbClr val="FFFFFF"/>
+                    </a:solidFill>
+                  </a:tcPr>
+                </a:tc>
+                <a:tc>
+                  <a:txBody>
+                    <a:bodyPr wrap="square"/>
+                    <a:lstStyle/>
+                    <a:p>
+                      <a:r>
+                        <a:rPr sz="1400">
+                          <a:solidFill>
+                            <a:srgbClr val="222A33"/>
+                          </a:solidFill>
+                          <a:latin typeface="Calibri"/>
+                        </a:rPr>
+                        <a:t>low — reuses CleanConnect + dictionary</a:t>
+                      </a:r>
+                    </a:p>
+                  </a:txBody>
+                  <a:tcPr marL="73152" marR="73152" marT="27432" marB="27432" anchor="ctr">
+                    <a:solidFill>
+                      <a:srgbClr val="FFFFFF"/>
+                    </a:solidFill>
+                  </a:tcPr>
+                </a:tc>
+                <a:tc>
+                  <a:txBody>
+                    <a:bodyPr wrap="square"/>
+                    <a:lstStyle/>
+                    <a:p>
+                      <a:r>
+                        <a:rPr sz="1400">
+                          <a:solidFill>
+                            <a:srgbClr val="222A33"/>
+                          </a:solidFill>
+                          <a:latin typeface="Calibri"/>
+                        </a:rPr>
+                        <a:t>larger, phased — builds on Phase 1's fact</a:t>
+                      </a:r>
+                    </a:p>
+                  </a:txBody>
+                  <a:tcPr marL="73152" marR="73152" marT="27432" marB="27432" anchor="ctr">
+                    <a:solidFill>
+                      <a:srgbClr val="FFFFFF"/>
+                    </a:solidFill>
+                  </a:tcPr>
+                </a:tc>
+              </a:tr>
+              <a:tr h="621792">
+                <a:tc>
+                  <a:txBody>
+                    <a:bodyPr wrap="square"/>
+                    <a:lstStyle/>
+                    <a:p>
+                      <a:r>
+                        <a:rPr sz="1400" b="1">
+                          <a:solidFill>
+                            <a:srgbClr val="222A33"/>
+                          </a:solidFill>
+                          <a:latin typeface="Calibri"/>
+                        </a:rPr>
+                        <a:t>Release-ready</a:t>
+                      </a:r>
+                    </a:p>
+                  </a:txBody>
+                  <a:tcPr marL="73152" marR="73152" marT="27432" marB="27432" anchor="ctr">
+                    <a:solidFill>
+                      <a:srgbClr val="EDF1F5"/>
+                    </a:solidFill>
+                  </a:tcPr>
+                </a:tc>
+                <a:tc>
+                  <a:txBody>
+                    <a:bodyPr wrap="square"/>
+                    <a:lstStyle/>
+                    <a:p>
+                      <a:r>
+                        <a:rPr sz="1400">
+                          <a:solidFill>
+                            <a:srgbClr val="222A33"/>
+                          </a:solidFill>
+                          <a:latin typeface="Calibri"/>
+                        </a:rPr>
+                        <a:t>internal / analyst only</a:t>
+                      </a:r>
+                    </a:p>
+                  </a:txBody>
+                  <a:tcPr marL="73152" marR="73152" marT="27432" marB="27432" anchor="ctr">
+                    <a:solidFill>
+                      <a:srgbClr val="EDF1F5"/>
+                    </a:solidFill>
+                  </a:tcPr>
+                </a:tc>
+                <a:tc>
+                  <a:txBody>
+                    <a:bodyPr wrap="square"/>
+                    <a:lstStyle/>
+                    <a:p>
+                      <a:r>
+                        <a:rPr sz="1400">
+                          <a:solidFill>
+                            <a:srgbClr val="222A33"/>
+                          </a:solidFill>
+                          <a:latin typeface="Calibri"/>
+                        </a:rPr>
+                        <a:t>yes — external PR2 sharing</a:t>
+                      </a:r>
+                    </a:p>
+                  </a:txBody>
+                  <a:tcPr marL="73152" marR="73152" marT="27432" marB="27432" anchor="ctr">
+                    <a:solidFill>
+                      <a:srgbClr val="EDF1F5"/>
+                    </a:solidFill>
+                  </a:tcPr>
+                </a:tc>
+              </a:tr>
+            </a:tbl>
+          </a:graphicData>
+        </a:graphic>
+      </p:graphicFrame>
+      <p:sp>
+        <p:nvSpPr>
+          <p:cNvPr id="5" name="TextBox 4"/>
+          <p:cNvSpPr txBox="1"/>
+          <p:nvPr/>
+        </p:nvSpPr>
+        <p:spPr>
+          <a:xfrm>
+            <a:off x="548640" y="5120640"/>
+            <a:ext cx="11064240" cy="548640"/>
+          </a:xfrm>
+          <a:prstGeom prst="rect">
+            <a:avLst/>
+          </a:prstGeom>
+          <a:noFill/>
+        </p:spPr>
+        <p:txBody>
+          <a:bodyPr wrap="square">
+            <a:spAutoFit/>
+          </a:bodyPr>
+          <a:lstStyle/>
+          <a:p>
+            <a:pPr algn="l"/>
+            <a:r>
+              <a:rPr sz="1500" b="0" i="1">
+                <a:solidFill>
+                  <a:srgbClr val="5A636E"/>
+                </a:solidFill>
+                <a:latin typeface="Calibri"/>
+              </a:rPr>
+              <a:t>Same responses fact both phases — Phase 1 is a down payment, not throwaway work.</a:t>
+            </a:r>
+          </a:p>
+        </p:txBody>
+      </p:sp>
+    </p:spTree>
+  </p:cSld>
+  <p:clrMapOvr>
+    <a:masterClrMapping/>
+  </p:clrMapOvr>
+</p:sld>
+</file>
+
+<file path=ppt/slides/slide11.xml><?xml version="1.0" encoding="utf-8"?>
+<p:sld xmlns:a="http://schemas.openxmlformats.org/drawingml/2006/main" xmlns:p="http://schemas.openxmlformats.org/presentationml/2006/main" xmlns:r="http://schemas.openxmlformats.org/officeDocument/2006/relationships">
+  <p:cSld>
+    <p:spTree>
+      <p:nvGrpSpPr>
+        <p:cNvPr id="1" name=""/>
+        <p:cNvGrpSpPr/>
+        <p:nvPr/>
+      </p:nvGrpSpPr>
+      <p:grpSpPr/>
+      <p:sp>
+        <p:nvSpPr>
+          <p:cNvPr id="2" name="Rectangle 1"/>
+          <p:cNvSpPr/>
+          <p:nvPr/>
+        </p:nvSpPr>
+        <p:spPr>
+          <a:xfrm>
+            <a:off x="0" y="0"/>
+            <a:ext cx="12191695" cy="1051560"/>
+          </a:xfrm>
+          <a:prstGeom prst="rect">
+            <a:avLst/>
+          </a:prstGeom>
+          <a:solidFill>
+            <a:srgbClr val="16324F"/>
+          </a:solidFill>
+          <a:ln>
+            <a:noFill/>
+          </a:ln>
+          <a:effectLst/>
+        </p:spPr>
+        <p:style>
+          <a:lnRef idx="1">
+            <a:schemeClr val="accent1"/>
+          </a:lnRef>
+          <a:fillRef idx="3">
+            <a:schemeClr val="accent1"/>
+          </a:fillRef>
+          <a:effectRef idx="2">
+            <a:schemeClr val="accent1"/>
+          </a:effectRef>
+          <a:fontRef idx="minor">
+            <a:schemeClr val="lt1"/>
+          </a:fontRef>
+        </p:style>
+        <p:txBody>
+          <a:bodyPr rtlCol="0" anchor="ctr" lIns="457200" tIns="109728"/>
+          <a:lstStyle/>
+          <a:p>
+            <a:pPr algn="ctr"/>
+            <a:r>
+              <a:rPr sz="2800" b="1">
+                <a:solidFill>
+                  <a:srgbClr val="FFFFFF"/>
+                </a:solidFill>
+                <a:latin typeface="Calibri"/>
+              </a:rPr>
               <a:t>Phase 2 — the full model</a:t>
             </a:r>
           </a:p>
@@ -4958,7 +5769,7 @@
 </p:sld>
 </file>
 
-<file path=ppt/slides/slide11.xml><?xml version="1.0" encoding="utf-8"?>
+<file path=ppt/slides/slide12.xml><?xml version="1.0" encoding="utf-8"?>
 <p:sld xmlns:a="http://schemas.openxmlformats.org/drawingml/2006/main" xmlns:p="http://schemas.openxmlformats.org/presentationml/2006/main" xmlns:r="http://schemas.openxmlformats.org/officeDocument/2006/relationships">
   <p:cSld>
     <p:spTree>
@@ -5520,7 +6331,7 @@
 </p:sld>
 </file>
 
-<file path=ppt/slides/slide12.xml><?xml version="1.0" encoding="utf-8"?>
+<file path=ppt/slides/slide13.xml><?xml version="1.0" encoding="utf-8"?>
 <p:sld xmlns:a="http://schemas.openxmlformats.org/drawingml/2006/main" xmlns:p="http://schemas.openxmlformats.org/presentationml/2006/main" xmlns:r="http://schemas.openxmlformats.org/officeDocument/2006/relationships">
   <p:cSld>
     <p:spTree>
@@ -5767,7 +6578,7 @@
 </p:sld>
 </file>
 
-<file path=ppt/slides/slide13.xml><?xml version="1.0" encoding="utf-8"?>
+<file path=ppt/slides/slide14.xml><?xml version="1.0" encoding="utf-8"?>
 <p:sld xmlns:a="http://schemas.openxmlformats.org/drawingml/2006/main" xmlns:p="http://schemas.openxmlformats.org/presentationml/2006/main" xmlns:r="http://schemas.openxmlformats.org/officeDocument/2006/relationships">
   <p:cSld>
     <p:spTree>
@@ -5951,7 +6762,7 @@
 </p:sld>
 </file>
 
-<file path=ppt/slides/slide14.xml><?xml version="1.0" encoding="utf-8"?>
+<file path=ppt/slides/slide15.xml><?xml version="1.0" encoding="utf-8"?>
 <p:sld xmlns:a="http://schemas.openxmlformats.org/drawingml/2006/main" xmlns:p="http://schemas.openxmlformats.org/presentationml/2006/main" xmlns:r="http://schemas.openxmlformats.org/officeDocument/2006/relationships">
   <p:cSld>
     <p:spTree>
@@ -6616,7 +7427,7 @@
 </p:sld>
 </file>
 
-<file path=ppt/slides/slide15.xml><?xml version="1.0" encoding="utf-8"?>
+<file path=ppt/slides/slide16.xml><?xml version="1.0" encoding="utf-8"?>
 <p:sld xmlns:a="http://schemas.openxmlformats.org/drawingml/2006/main" xmlns:p="http://schemas.openxmlformats.org/presentationml/2006/main" xmlns:r="http://schemas.openxmlformats.org/officeDocument/2006/relationships">
   <p:cSld>
     <p:spTree>
@@ -7344,7 +8155,3273 @@
 </p:sld>
 </file>
 
-<file path=ppt/slides/slide16.xml><?xml version="1.0" encoding="utf-8"?>
+<file path=ppt/slides/slide17.xml><?xml version="1.0" encoding="utf-8"?>
+<p:sld xmlns:a="http://schemas.openxmlformats.org/drawingml/2006/main" xmlns:p="http://schemas.openxmlformats.org/presentationml/2006/main" xmlns:r="http://schemas.openxmlformats.org/officeDocument/2006/relationships">
+  <p:cSld>
+    <p:spTree>
+      <p:nvGrpSpPr>
+        <p:cNvPr id="1" name=""/>
+        <p:cNvGrpSpPr/>
+        <p:nvPr/>
+      </p:nvGrpSpPr>
+      <p:grpSpPr/>
+      <p:sp>
+        <p:nvSpPr>
+          <p:cNvPr id="2" name="Rectangle 1"/>
+          <p:cNvSpPr/>
+          <p:nvPr/>
+        </p:nvSpPr>
+        <p:spPr>
+          <a:xfrm>
+            <a:off x="0" y="0"/>
+            <a:ext cx="12191695" cy="1051560"/>
+          </a:xfrm>
+          <a:prstGeom prst="rect">
+            <a:avLst/>
+          </a:prstGeom>
+          <a:solidFill>
+            <a:srgbClr val="16324F"/>
+          </a:solidFill>
+          <a:ln>
+            <a:noFill/>
+          </a:ln>
+          <a:effectLst/>
+        </p:spPr>
+        <p:style>
+          <a:lnRef idx="1">
+            <a:schemeClr val="accent1"/>
+          </a:lnRef>
+          <a:fillRef idx="3">
+            <a:schemeClr val="accent1"/>
+          </a:fillRef>
+          <a:effectRef idx="2">
+            <a:schemeClr val="accent1"/>
+          </a:effectRef>
+          <a:fontRef idx="minor">
+            <a:schemeClr val="lt1"/>
+          </a:fontRef>
+        </p:style>
+        <p:txBody>
+          <a:bodyPr rtlCol="0" anchor="ctr" lIns="457200" tIns="109728"/>
+          <a:lstStyle/>
+          <a:p>
+            <a:pPr algn="ctr"/>
+            <a:r>
+              <a:rPr sz="2800" b="1">
+                <a:solidFill>
+                  <a:srgbClr val="FFFFFF"/>
+                </a:solidFill>
+                <a:latin typeface="Calibri"/>
+              </a:rPr>
+              <a:t>Analyzing long format (1/3) — labels are one join away</a:t>
+            </a:r>
+          </a:p>
+          <a:p>
+            <a:r>
+              <a:rPr sz="1300" i="1">
+                <a:solidFill>
+                  <a:srgbClr val="BBD5D7"/>
+                </a:solidFill>
+              </a:rPr>
+              <a:t>Every row says what it means: concept id + human label, side by side</a:t>
+            </a:r>
+          </a:p>
+        </p:txBody>
+      </p:sp>
+      <p:sp>
+        <p:nvSpPr>
+          <p:cNvPr id="3" name="Rectangle 2"/>
+          <p:cNvSpPr/>
+          <p:nvPr/>
+        </p:nvSpPr>
+        <p:spPr>
+          <a:xfrm>
+            <a:off x="0" y="1051560"/>
+            <a:ext cx="12191695" cy="54864"/>
+          </a:xfrm>
+          <a:prstGeom prst="rect">
+            <a:avLst/>
+          </a:prstGeom>
+          <a:solidFill>
+            <a:srgbClr val="2E8B8B"/>
+          </a:solidFill>
+          <a:ln>
+            <a:noFill/>
+          </a:ln>
+          <a:effectLst/>
+        </p:spPr>
+        <p:style>
+          <a:lnRef idx="1">
+            <a:schemeClr val="accent1"/>
+          </a:lnRef>
+          <a:fillRef idx="3">
+            <a:schemeClr val="accent1"/>
+          </a:fillRef>
+          <a:effectRef idx="2">
+            <a:schemeClr val="accent1"/>
+          </a:effectRef>
+          <a:fontRef idx="minor">
+            <a:schemeClr val="lt1"/>
+          </a:fontRef>
+        </p:style>
+        <p:txBody>
+          <a:bodyPr rtlCol="0" anchor="ctr"/>
+          <a:lstStyle/>
+          <a:p>
+            <a:pPr algn="ctr"/>
+          </a:p>
+        </p:txBody>
+      </p:sp>
+      <p:sp>
+        <p:nvSpPr>
+          <p:cNvPr id="4" name="Rectangle 3"/>
+          <p:cNvSpPr/>
+          <p:nvPr/>
+        </p:nvSpPr>
+        <p:spPr>
+          <a:xfrm>
+            <a:off x="457200" y="1325880"/>
+            <a:ext cx="5577840" cy="2468880"/>
+          </a:xfrm>
+          <a:prstGeom prst="rect">
+            <a:avLst/>
+          </a:prstGeom>
+          <a:solidFill>
+            <a:srgbClr val="1E2935"/>
+          </a:solidFill>
+          <a:ln>
+            <a:solidFill>
+              <a:srgbClr val="2E8B8B"/>
+            </a:solidFill>
+          </a:ln>
+          <a:effectLst/>
+        </p:spPr>
+        <p:style>
+          <a:lnRef idx="1">
+            <a:schemeClr val="accent1"/>
+          </a:lnRef>
+          <a:fillRef idx="3">
+            <a:schemeClr val="accent1"/>
+          </a:fillRef>
+          <a:effectRef idx="2">
+            <a:schemeClr val="accent1"/>
+          </a:effectRef>
+          <a:fontRef idx="minor">
+            <a:schemeClr val="lt1"/>
+          </a:fontRef>
+        </p:style>
+        <p:txBody>
+          <a:bodyPr rtlCol="0" anchor="t" wrap="square" lIns="182880" rIns="137160" tIns="109728"/>
+          <a:lstStyle/>
+          <a:p>
+            <a:pPr algn="ctr">
+              <a:lnSpc>
+                <a:spcPct val="100000"/>
+              </a:lnSpc>
+            </a:pPr>
+            <a:r>
+              <a:rPr sz="1250">
+                <a:solidFill>
+                  <a:srgbClr val="8BA6C0"/>
+                </a:solidFill>
+                <a:latin typeface="Courier New"/>
+              </a:rPr>
+              <a:t>-- one join attaches a label to every answer</a:t>
+            </a:r>
+          </a:p>
+          <a:p>
+            <a:pPr>
+              <a:lnSpc>
+                <a:spcPct val="100000"/>
+              </a:lnSpc>
+            </a:pPr>
+            <a:r>
+              <a:rPr sz="1250">
+                <a:solidFill>
+                  <a:srgbClr val="E6EDF3"/>
+                </a:solidFill>
+                <a:latin typeface="Courier New"/>
+              </a:rPr>
+              <a:t>SELECT connect_id, question_text,</a:t>
+            </a:r>
+          </a:p>
+          <a:p>
+            <a:pPr>
+              <a:lnSpc>
+                <a:spcPct val="100000"/>
+              </a:lnSpc>
+            </a:pPr>
+            <a:r>
+              <a:rPr sz="1250">
+                <a:solidFill>
+                  <a:srgbClr val="E6EDF3"/>
+                </a:solidFill>
+                <a:latin typeface="Courier New"/>
+              </a:rPr>
+              <a:t>       response_concept_id, response_label, value</a:t>
+            </a:r>
+          </a:p>
+          <a:p>
+            <a:pPr>
+              <a:lnSpc>
+                <a:spcPct val="100000"/>
+              </a:lnSpc>
+            </a:pPr>
+            <a:r>
+              <a:rPr sz="1250">
+                <a:solidFill>
+                  <a:srgbClr val="E6EDF3"/>
+                </a:solidFill>
+                <a:latin typeface="Courier New"/>
+              </a:rPr>
+              <a:t>FROM responses</a:t>
+            </a:r>
+          </a:p>
+          <a:p>
+            <a:pPr>
+              <a:lnSpc>
+                <a:spcPct val="100000"/>
+              </a:lnSpc>
+            </a:pPr>
+            <a:r>
+              <a:rPr sz="1250">
+                <a:solidFill>
+                  <a:srgbClr val="E6EDF3"/>
+                </a:solidFill>
+                <a:latin typeface="Courier New"/>
+              </a:rPr>
+              <a:t>JOIN question USING (question_concept_id)</a:t>
+            </a:r>
+          </a:p>
+          <a:p>
+            <a:pPr>
+              <a:lnSpc>
+                <a:spcPct val="100000"/>
+              </a:lnSpc>
+            </a:pPr>
+            <a:r>
+              <a:rPr sz="1250">
+                <a:solidFill>
+                  <a:srgbClr val="E6EDF3"/>
+                </a:solidFill>
+                <a:latin typeface="Courier New"/>
+              </a:rPr>
+              <a:t>LEFT JOIN response USING (response_concept_id)</a:t>
+            </a:r>
+          </a:p>
+          <a:p>
+            <a:pPr>
+              <a:lnSpc>
+                <a:spcPct val="100000"/>
+              </a:lnSpc>
+            </a:pPr>
+            <a:r>
+              <a:rPr sz="1250">
+                <a:solidFill>
+                  <a:srgbClr val="E6EDF3"/>
+                </a:solidFill>
+                <a:latin typeface="Courier New"/>
+              </a:rPr>
+              <a:t>WHERE connect_id = 1001;</a:t>
+            </a:r>
+          </a:p>
+        </p:txBody>
+      </p:sp>
+      <p:graphicFrame>
+        <p:nvGraphicFramePr>
+          <p:cNvPr id="5" name="Table 4"/>
+          <p:cNvGraphicFramePr>
+            <a:graphicFrameLocks noGrp="1"/>
+          </p:cNvGraphicFramePr>
+          <p:nvPr/>
+        </p:nvGraphicFramePr>
+        <p:xfrm>
+          <a:off x="6217920" y="1325880"/>
+          <a:ext cx="5486400" cy="2468880"/>
+        </p:xfrm>
+        <a:graphic>
+          <a:graphicData uri="http://schemas.openxmlformats.org/drawingml/2006/table">
+            <a:tbl>
+              <a:tblPr firstRow="1" bandRow="1">
+                <a:tableStyleId>{5C22544A-7EE6-4342-B048-85BDC9FD1C3A}</a:tableStyleId>
+              </a:tblPr>
+              <a:tblGrid>
+                <a:gridCol w="1554480"/>
+                <a:gridCol w="1005840"/>
+                <a:gridCol w="2377440"/>
+                <a:gridCol w="548640"/>
+              </a:tblGrid>
+              <a:tr h="352697">
+                <a:tc>
+                  <a:txBody>
+                    <a:bodyPr wrap="square"/>
+                    <a:lstStyle/>
+                    <a:p>
+                      <a:r>
+                        <a:rPr b="1" sz="1050">
+                          <a:solidFill>
+                            <a:srgbClr val="FFFFFF"/>
+                          </a:solidFill>
+                          <a:latin typeface="Calibri"/>
+                        </a:rPr>
+                        <a:t>question_text</a:t>
+                      </a:r>
+                    </a:p>
+                  </a:txBody>
+                  <a:tcPr marL="73152" marR="73152" marT="27432" marB="27432" anchor="ctr">
+                    <a:solidFill>
+                      <a:srgbClr val="16324F"/>
+                    </a:solidFill>
+                  </a:tcPr>
+                </a:tc>
+                <a:tc>
+                  <a:txBody>
+                    <a:bodyPr wrap="square"/>
+                    <a:lstStyle/>
+                    <a:p>
+                      <a:r>
+                        <a:rPr b="1" sz="1050">
+                          <a:solidFill>
+                            <a:srgbClr val="FFFFFF"/>
+                          </a:solidFill>
+                          <a:latin typeface="Calibri"/>
+                        </a:rPr>
+                        <a:t>resp. id</a:t>
+                      </a:r>
+                    </a:p>
+                  </a:txBody>
+                  <a:tcPr marL="73152" marR="73152" marT="27432" marB="27432" anchor="ctr">
+                    <a:solidFill>
+                      <a:srgbClr val="16324F"/>
+                    </a:solidFill>
+                  </a:tcPr>
+                </a:tc>
+                <a:tc>
+                  <a:txBody>
+                    <a:bodyPr wrap="square"/>
+                    <a:lstStyle/>
+                    <a:p>
+                      <a:r>
+                        <a:rPr b="1" sz="1050">
+                          <a:solidFill>
+                            <a:srgbClr val="FFFFFF"/>
+                          </a:solidFill>
+                          <a:latin typeface="Calibri"/>
+                        </a:rPr>
+                        <a:t>response_label</a:t>
+                      </a:r>
+                    </a:p>
+                  </a:txBody>
+                  <a:tcPr marL="73152" marR="73152" marT="27432" marB="27432" anchor="ctr">
+                    <a:solidFill>
+                      <a:srgbClr val="16324F"/>
+                    </a:solidFill>
+                  </a:tcPr>
+                </a:tc>
+                <a:tc>
+                  <a:txBody>
+                    <a:bodyPr wrap="square"/>
+                    <a:lstStyle/>
+                    <a:p>
+                      <a:r>
+                        <a:rPr b="1" sz="1050">
+                          <a:solidFill>
+                            <a:srgbClr val="FFFFFF"/>
+                          </a:solidFill>
+                          <a:latin typeface="Calibri"/>
+                        </a:rPr>
+                        <a:t>value</a:t>
+                      </a:r>
+                    </a:p>
+                  </a:txBody>
+                  <a:tcPr marL="73152" marR="73152" marT="27432" marB="27432" anchor="ctr">
+                    <a:solidFill>
+                      <a:srgbClr val="16324F"/>
+                    </a:solidFill>
+                  </a:tcPr>
+                </a:tc>
+              </a:tr>
+              <a:tr h="352697">
+                <a:tc>
+                  <a:txBody>
+                    <a:bodyPr wrap="square"/>
+                    <a:lstStyle/>
+                    <a:p>
+                      <a:r>
+                        <a:rPr sz="1050" b="1">
+                          <a:solidFill>
+                            <a:srgbClr val="222A33"/>
+                          </a:solidFill>
+                          <a:latin typeface="Calibri"/>
+                        </a:rPr>
+                        <a:t>Sex</a:t>
+                      </a:r>
+                    </a:p>
+                  </a:txBody>
+                  <a:tcPr marL="73152" marR="73152" marT="27432" marB="27432" anchor="ctr">
+                    <a:solidFill>
+                      <a:srgbClr val="FFFFFF"/>
+                    </a:solidFill>
+                  </a:tcPr>
+                </a:tc>
+                <a:tc>
+                  <a:txBody>
+                    <a:bodyPr wrap="square"/>
+                    <a:lstStyle/>
+                    <a:p>
+                      <a:r>
+                        <a:rPr sz="1050">
+                          <a:solidFill>
+                            <a:srgbClr val="222A33"/>
+                          </a:solidFill>
+                          <a:latin typeface="Calibri"/>
+                        </a:rPr>
+                        <a:t>536341288</a:t>
+                      </a:r>
+                    </a:p>
+                  </a:txBody>
+                  <a:tcPr marL="73152" marR="73152" marT="27432" marB="27432" anchor="ctr">
+                    <a:solidFill>
+                      <a:srgbClr val="FFFFFF"/>
+                    </a:solidFill>
+                  </a:tcPr>
+                </a:tc>
+                <a:tc>
+                  <a:txBody>
+                    <a:bodyPr wrap="square"/>
+                    <a:lstStyle/>
+                    <a:p>
+                      <a:r>
+                        <a:rPr sz="1050">
+                          <a:solidFill>
+                            <a:srgbClr val="222A33"/>
+                          </a:solidFill>
+                          <a:latin typeface="Calibri"/>
+                        </a:rPr>
+                        <a:t>Female</a:t>
+                      </a:r>
+                    </a:p>
+                  </a:txBody>
+                  <a:tcPr marL="73152" marR="73152" marT="27432" marB="27432" anchor="ctr">
+                    <a:solidFill>
+                      <a:srgbClr val="FFFFFF"/>
+                    </a:solidFill>
+                  </a:tcPr>
+                </a:tc>
+                <a:tc>
+                  <a:txBody>
+                    <a:bodyPr wrap="square"/>
+                    <a:lstStyle/>
+                    <a:p>
+                      <a:r>
+                        <a:rPr sz="1050">
+                          <a:solidFill>
+                            <a:srgbClr val="222A33"/>
+                          </a:solidFill>
+                          <a:latin typeface="Calibri"/>
+                        </a:rPr>
+                        <a:t/>
+                      </a:r>
+                    </a:p>
+                  </a:txBody>
+                  <a:tcPr marL="73152" marR="73152" marT="27432" marB="27432" anchor="ctr">
+                    <a:solidFill>
+                      <a:srgbClr val="FFFFFF"/>
+                    </a:solidFill>
+                  </a:tcPr>
+                </a:tc>
+              </a:tr>
+              <a:tr h="352697">
+                <a:tc>
+                  <a:txBody>
+                    <a:bodyPr wrap="square"/>
+                    <a:lstStyle/>
+                    <a:p>
+                      <a:r>
+                        <a:rPr sz="1050" b="1">
+                          <a:solidFill>
+                            <a:srgbClr val="222A33"/>
+                          </a:solidFill>
+                          <a:latin typeface="Calibri"/>
+                        </a:rPr>
+                        <a:t>Age</a:t>
+                      </a:r>
+                    </a:p>
+                  </a:txBody>
+                  <a:tcPr marL="73152" marR="73152" marT="27432" marB="27432" anchor="ctr">
+                    <a:solidFill>
+                      <a:srgbClr val="EDF1F5"/>
+                    </a:solidFill>
+                  </a:tcPr>
+                </a:tc>
+                <a:tc>
+                  <a:txBody>
+                    <a:bodyPr wrap="square"/>
+                    <a:lstStyle/>
+                    <a:p>
+                      <a:r>
+                        <a:rPr sz="1050">
+                          <a:solidFill>
+                            <a:srgbClr val="222A33"/>
+                          </a:solidFill>
+                          <a:latin typeface="Calibri"/>
+                        </a:rPr>
+                        <a:t/>
+                      </a:r>
+                    </a:p>
+                  </a:txBody>
+                  <a:tcPr marL="73152" marR="73152" marT="27432" marB="27432" anchor="ctr">
+                    <a:solidFill>
+                      <a:srgbClr val="EDF1F5"/>
+                    </a:solidFill>
+                  </a:tcPr>
+                </a:tc>
+                <a:tc>
+                  <a:txBody>
+                    <a:bodyPr wrap="square"/>
+                    <a:lstStyle/>
+                    <a:p>
+                      <a:r>
+                        <a:rPr sz="1050">
+                          <a:solidFill>
+                            <a:srgbClr val="222A33"/>
+                          </a:solidFill>
+                          <a:latin typeface="Calibri"/>
+                        </a:rPr>
+                        <a:t/>
+                      </a:r>
+                    </a:p>
+                  </a:txBody>
+                  <a:tcPr marL="73152" marR="73152" marT="27432" marB="27432" anchor="ctr">
+                    <a:solidFill>
+                      <a:srgbClr val="EDF1F5"/>
+                    </a:solidFill>
+                  </a:tcPr>
+                </a:tc>
+                <a:tc>
+                  <a:txBody>
+                    <a:bodyPr wrap="square"/>
+                    <a:lstStyle/>
+                    <a:p>
+                      <a:r>
+                        <a:rPr sz="1050">
+                          <a:solidFill>
+                            <a:srgbClr val="222A33"/>
+                          </a:solidFill>
+                          <a:latin typeface="Calibri"/>
+                        </a:rPr>
+                        <a:t>47</a:t>
+                      </a:r>
+                    </a:p>
+                  </a:txBody>
+                  <a:tcPr marL="73152" marR="73152" marT="27432" marB="27432" anchor="ctr">
+                    <a:solidFill>
+                      <a:srgbClr val="EDF1F5"/>
+                    </a:solidFill>
+                  </a:tcPr>
+                </a:tc>
+              </a:tr>
+              <a:tr h="352697">
+                <a:tc>
+                  <a:txBody>
+                    <a:bodyPr wrap="square"/>
+                    <a:lstStyle/>
+                    <a:p>
+                      <a:r>
+                        <a:rPr sz="1050" b="1">
+                          <a:solidFill>
+                            <a:srgbClr val="222A33"/>
+                          </a:solidFill>
+                          <a:latin typeface="Calibri"/>
+                        </a:rPr>
+                        <a:t>Smoking Status</a:t>
+                      </a:r>
+                    </a:p>
+                  </a:txBody>
+                  <a:tcPr marL="73152" marR="73152" marT="27432" marB="27432" anchor="ctr">
+                    <a:solidFill>
+                      <a:srgbClr val="FFFFFF"/>
+                    </a:solidFill>
+                  </a:tcPr>
+                </a:tc>
+                <a:tc>
+                  <a:txBody>
+                    <a:bodyPr wrap="square"/>
+                    <a:lstStyle/>
+                    <a:p>
+                      <a:r>
+                        <a:rPr sz="1050">
+                          <a:solidFill>
+                            <a:srgbClr val="222A33"/>
+                          </a:solidFill>
+                          <a:latin typeface="Calibri"/>
+                        </a:rPr>
+                        <a:t>700000002</a:t>
+                      </a:r>
+                    </a:p>
+                  </a:txBody>
+                  <a:tcPr marL="73152" marR="73152" marT="27432" marB="27432" anchor="ctr">
+                    <a:solidFill>
+                      <a:srgbClr val="FFFFFF"/>
+                    </a:solidFill>
+                  </a:tcPr>
+                </a:tc>
+                <a:tc>
+                  <a:txBody>
+                    <a:bodyPr wrap="square"/>
+                    <a:lstStyle/>
+                    <a:p>
+                      <a:r>
+                        <a:rPr sz="1050">
+                          <a:solidFill>
+                            <a:srgbClr val="222A33"/>
+                          </a:solidFill>
+                          <a:latin typeface="Calibri"/>
+                        </a:rPr>
+                        <a:t>Former</a:t>
+                      </a:r>
+                    </a:p>
+                  </a:txBody>
+                  <a:tcPr marL="73152" marR="73152" marT="27432" marB="27432" anchor="ctr">
+                    <a:solidFill>
+                      <a:srgbClr val="FFFFFF"/>
+                    </a:solidFill>
+                  </a:tcPr>
+                </a:tc>
+                <a:tc>
+                  <a:txBody>
+                    <a:bodyPr wrap="square"/>
+                    <a:lstStyle/>
+                    <a:p>
+                      <a:r>
+                        <a:rPr sz="1050">
+                          <a:solidFill>
+                            <a:srgbClr val="222A33"/>
+                          </a:solidFill>
+                          <a:latin typeface="Calibri"/>
+                        </a:rPr>
+                        <a:t/>
+                      </a:r>
+                    </a:p>
+                  </a:txBody>
+                  <a:tcPr marL="73152" marR="73152" marT="27432" marB="27432" anchor="ctr">
+                    <a:solidFill>
+                      <a:srgbClr val="FFFFFF"/>
+                    </a:solidFill>
+                  </a:tcPr>
+                </a:tc>
+              </a:tr>
+              <a:tr h="352697">
+                <a:tc>
+                  <a:txBody>
+                    <a:bodyPr wrap="square"/>
+                    <a:lstStyle/>
+                    <a:p>
+                      <a:r>
+                        <a:rPr sz="1050" b="1">
+                          <a:solidFill>
+                            <a:srgbClr val="222A33"/>
+                          </a:solidFill>
+                          <a:latin typeface="Calibri"/>
+                        </a:rPr>
+                        <a:t>Education</a:t>
+                      </a:r>
+                    </a:p>
+                  </a:txBody>
+                  <a:tcPr marL="73152" marR="73152" marT="27432" marB="27432" anchor="ctr">
+                    <a:solidFill>
+                      <a:srgbClr val="EDF1F5"/>
+                    </a:solidFill>
+                  </a:tcPr>
+                </a:tc>
+                <a:tc>
+                  <a:txBody>
+                    <a:bodyPr wrap="square"/>
+                    <a:lstStyle/>
+                    <a:p>
+                      <a:r>
+                        <a:rPr sz="1050">
+                          <a:solidFill>
+                            <a:srgbClr val="222A33"/>
+                          </a:solidFill>
+                          <a:latin typeface="Calibri"/>
+                        </a:rPr>
+                        <a:t>875342283</a:t>
+                      </a:r>
+                    </a:p>
+                  </a:txBody>
+                  <a:tcPr marL="73152" marR="73152" marT="27432" marB="27432" anchor="ctr">
+                    <a:solidFill>
+                      <a:srgbClr val="EDF1F5"/>
+                    </a:solidFill>
+                  </a:tcPr>
+                </a:tc>
+                <a:tc>
+                  <a:txBody>
+                    <a:bodyPr wrap="square"/>
+                    <a:lstStyle/>
+                    <a:p>
+                      <a:r>
+                        <a:rPr sz="1050">
+                          <a:solidFill>
+                            <a:srgbClr val="222A33"/>
+                          </a:solidFill>
+                          <a:latin typeface="Calibri"/>
+                        </a:rPr>
+                        <a:t>Bachelor's Degree</a:t>
+                      </a:r>
+                    </a:p>
+                  </a:txBody>
+                  <a:tcPr marL="73152" marR="73152" marT="27432" marB="27432" anchor="ctr">
+                    <a:solidFill>
+                      <a:srgbClr val="EDF1F5"/>
+                    </a:solidFill>
+                  </a:tcPr>
+                </a:tc>
+                <a:tc>
+                  <a:txBody>
+                    <a:bodyPr wrap="square"/>
+                    <a:lstStyle/>
+                    <a:p>
+                      <a:r>
+                        <a:rPr sz="1050">
+                          <a:solidFill>
+                            <a:srgbClr val="222A33"/>
+                          </a:solidFill>
+                          <a:latin typeface="Calibri"/>
+                        </a:rPr>
+                        <a:t/>
+                      </a:r>
+                    </a:p>
+                  </a:txBody>
+                  <a:tcPr marL="73152" marR="73152" marT="27432" marB="27432" anchor="ctr">
+                    <a:solidFill>
+                      <a:srgbClr val="EDF1F5"/>
+                    </a:solidFill>
+                  </a:tcPr>
+                </a:tc>
+              </a:tr>
+              <a:tr h="352697">
+                <a:tc>
+                  <a:txBody>
+                    <a:bodyPr wrap="square"/>
+                    <a:lstStyle/>
+                    <a:p>
+                      <a:r>
+                        <a:rPr sz="1050" b="1">
+                          <a:solidFill>
+                            <a:srgbClr val="222A33"/>
+                          </a:solidFill>
+                          <a:latin typeface="Calibri"/>
+                        </a:rPr>
+                        <a:t>Have you lost…teeth?</a:t>
+                      </a:r>
+                    </a:p>
+                  </a:txBody>
+                  <a:tcPr marL="73152" marR="73152" marT="27432" marB="27432" anchor="ctr">
+                    <a:solidFill>
+                      <a:srgbClr val="FFFFFF"/>
+                    </a:solidFill>
+                  </a:tcPr>
+                </a:tc>
+                <a:tc>
+                  <a:txBody>
+                    <a:bodyPr wrap="square"/>
+                    <a:lstStyle/>
+                    <a:p>
+                      <a:r>
+                        <a:rPr sz="1050">
+                          <a:solidFill>
+                            <a:srgbClr val="222A33"/>
+                          </a:solidFill>
+                          <a:latin typeface="Calibri"/>
+                        </a:rPr>
+                        <a:t>812107266</a:t>
+                      </a:r>
+                    </a:p>
+                  </a:txBody>
+                  <a:tcPr marL="73152" marR="73152" marT="27432" marB="27432" anchor="ctr">
+                    <a:solidFill>
+                      <a:srgbClr val="FFFFFF"/>
+                    </a:solidFill>
+                  </a:tcPr>
+                </a:tc>
+                <a:tc>
+                  <a:txBody>
+                    <a:bodyPr wrap="square"/>
+                    <a:lstStyle/>
+                    <a:p>
+                      <a:r>
+                        <a:rPr sz="1050">
+                          <a:solidFill>
+                            <a:srgbClr val="222A33"/>
+                          </a:solidFill>
+                          <a:latin typeface="Calibri"/>
+                        </a:rPr>
+                        <a:t>Yes, from accident or injury</a:t>
+                      </a:r>
+                    </a:p>
+                  </a:txBody>
+                  <a:tcPr marL="73152" marR="73152" marT="27432" marB="27432" anchor="ctr">
+                    <a:solidFill>
+                      <a:srgbClr val="FFFFFF"/>
+                    </a:solidFill>
+                  </a:tcPr>
+                </a:tc>
+                <a:tc>
+                  <a:txBody>
+                    <a:bodyPr wrap="square"/>
+                    <a:lstStyle/>
+                    <a:p>
+                      <a:r>
+                        <a:rPr sz="1050">
+                          <a:solidFill>
+                            <a:srgbClr val="222A33"/>
+                          </a:solidFill>
+                          <a:latin typeface="Calibri"/>
+                        </a:rPr>
+                        <a:t/>
+                      </a:r>
+                    </a:p>
+                  </a:txBody>
+                  <a:tcPr marL="73152" marR="73152" marT="27432" marB="27432" anchor="ctr">
+                    <a:solidFill>
+                      <a:srgbClr val="FFFFFF"/>
+                    </a:solidFill>
+                  </a:tcPr>
+                </a:tc>
+              </a:tr>
+              <a:tr h="352698">
+                <a:tc>
+                  <a:txBody>
+                    <a:bodyPr wrap="square"/>
+                    <a:lstStyle/>
+                    <a:p>
+                      <a:r>
+                        <a:rPr sz="1050" b="1">
+                          <a:solidFill>
+                            <a:srgbClr val="222A33"/>
+                          </a:solidFill>
+                          <a:latin typeface="Calibri"/>
+                        </a:rPr>
+                        <a:t>Have you lost…teeth?</a:t>
+                      </a:r>
+                    </a:p>
+                  </a:txBody>
+                  <a:tcPr marL="73152" marR="73152" marT="27432" marB="27432" anchor="ctr">
+                    <a:solidFill>
+                      <a:srgbClr val="EDF1F5"/>
+                    </a:solidFill>
+                  </a:tcPr>
+                </a:tc>
+                <a:tc>
+                  <a:txBody>
+                    <a:bodyPr wrap="square"/>
+                    <a:lstStyle/>
+                    <a:p>
+                      <a:r>
+                        <a:rPr sz="1050">
+                          <a:solidFill>
+                            <a:srgbClr val="222A33"/>
+                          </a:solidFill>
+                          <a:latin typeface="Calibri"/>
+                        </a:rPr>
+                        <a:t>452438775</a:t>
+                      </a:r>
+                    </a:p>
+                  </a:txBody>
+                  <a:tcPr marL="73152" marR="73152" marT="27432" marB="27432" anchor="ctr">
+                    <a:solidFill>
+                      <a:srgbClr val="EDF1F5"/>
+                    </a:solidFill>
+                  </a:tcPr>
+                </a:tc>
+                <a:tc>
+                  <a:txBody>
+                    <a:bodyPr wrap="square"/>
+                    <a:lstStyle/>
+                    <a:p>
+                      <a:r>
+                        <a:rPr sz="1050">
+                          <a:solidFill>
+                            <a:srgbClr val="222A33"/>
+                          </a:solidFill>
+                          <a:latin typeface="Calibri"/>
+                        </a:rPr>
+                        <a:t>Yes, from tooth decay or disease</a:t>
+                      </a:r>
+                    </a:p>
+                  </a:txBody>
+                  <a:tcPr marL="73152" marR="73152" marT="27432" marB="27432" anchor="ctr">
+                    <a:solidFill>
+                      <a:srgbClr val="EDF1F5"/>
+                    </a:solidFill>
+                  </a:tcPr>
+                </a:tc>
+                <a:tc>
+                  <a:txBody>
+                    <a:bodyPr wrap="square"/>
+                    <a:lstStyle/>
+                    <a:p>
+                      <a:r>
+                        <a:rPr sz="1050">
+                          <a:solidFill>
+                            <a:srgbClr val="222A33"/>
+                          </a:solidFill>
+                          <a:latin typeface="Calibri"/>
+                        </a:rPr>
+                        <a:t/>
+                      </a:r>
+                    </a:p>
+                  </a:txBody>
+                  <a:tcPr marL="73152" marR="73152" marT="27432" marB="27432" anchor="ctr">
+                    <a:solidFill>
+                      <a:srgbClr val="EDF1F5"/>
+                    </a:solidFill>
+                  </a:tcPr>
+                </a:tc>
+              </a:tr>
+            </a:tbl>
+          </a:graphicData>
+        </a:graphic>
+      </p:graphicFrame>
+      <p:sp>
+        <p:nvSpPr>
+          <p:cNvPr id="6" name="TextBox 5"/>
+          <p:cNvSpPr txBox="1"/>
+          <p:nvPr/>
+        </p:nvSpPr>
+        <p:spPr>
+          <a:xfrm>
+            <a:off x="457200" y="5852160"/>
+            <a:ext cx="11247120" cy="457200"/>
+          </a:xfrm>
+          <a:prstGeom prst="rect">
+            <a:avLst/>
+          </a:prstGeom>
+          <a:noFill/>
+        </p:spPr>
+        <p:txBody>
+          <a:bodyPr wrap="square">
+            <a:spAutoFit/>
+          </a:bodyPr>
+          <a:lstStyle/>
+          <a:p>
+            <a:pPr algn="l"/>
+            <a:r>
+              <a:rPr sz="1400" b="1" i="0">
+                <a:solidFill>
+                  <a:srgbClr val="CC7D15"/>
+                </a:solidFill>
+                <a:latin typeface="Calibri"/>
+              </a:rPr>
+              <a:t>No decoder ring, no 2,360-column map — the dictionary travels with the data.</a:t>
+            </a:r>
+          </a:p>
+        </p:txBody>
+      </p:sp>
+    </p:spTree>
+  </p:cSld>
+  <p:clrMapOvr>
+    <a:masterClrMapping/>
+  </p:clrMapOvr>
+</p:sld>
+</file>
+
+<file path=ppt/slides/slide18.xml><?xml version="1.0" encoding="utf-8"?>
+<p:sld xmlns:a="http://schemas.openxmlformats.org/drawingml/2006/main" xmlns:p="http://schemas.openxmlformats.org/presentationml/2006/main" xmlns:r="http://schemas.openxmlformats.org/officeDocument/2006/relationships">
+  <p:cSld>
+    <p:spTree>
+      <p:nvGrpSpPr>
+        <p:cNvPr id="1" name=""/>
+        <p:cNvGrpSpPr/>
+        <p:nvPr/>
+      </p:nvGrpSpPr>
+      <p:grpSpPr/>
+      <p:sp>
+        <p:nvSpPr>
+          <p:cNvPr id="2" name="Rectangle 1"/>
+          <p:cNvSpPr/>
+          <p:nvPr/>
+        </p:nvSpPr>
+        <p:spPr>
+          <a:xfrm>
+            <a:off x="0" y="0"/>
+            <a:ext cx="12191695" cy="1051560"/>
+          </a:xfrm>
+          <a:prstGeom prst="rect">
+            <a:avLst/>
+          </a:prstGeom>
+          <a:solidFill>
+            <a:srgbClr val="16324F"/>
+          </a:solidFill>
+          <a:ln>
+            <a:noFill/>
+          </a:ln>
+          <a:effectLst/>
+        </p:spPr>
+        <p:style>
+          <a:lnRef idx="1">
+            <a:schemeClr val="accent1"/>
+          </a:lnRef>
+          <a:fillRef idx="3">
+            <a:schemeClr val="accent1"/>
+          </a:fillRef>
+          <a:effectRef idx="2">
+            <a:schemeClr val="accent1"/>
+          </a:effectRef>
+          <a:fontRef idx="minor">
+            <a:schemeClr val="lt1"/>
+          </a:fontRef>
+        </p:style>
+        <p:txBody>
+          <a:bodyPr rtlCol="0" anchor="ctr" lIns="457200" tIns="109728"/>
+          <a:lstStyle/>
+          <a:p>
+            <a:pPr algn="ctr"/>
+            <a:r>
+              <a:rPr sz="2800" b="1">
+                <a:solidFill>
+                  <a:srgbClr val="FFFFFF"/>
+                </a:solidFill>
+                <a:latin typeface="Calibri"/>
+              </a:rPr>
+              <a:t>Analyzing long format (2/3) — wide is one generic PIVOT away</a:t>
+            </a:r>
+          </a:p>
+          <a:p>
+            <a:r>
+              <a:rPr sz="1300" i="1">
+                <a:solidFill>
+                  <a:srgbClr val="BBD5D7"/>
+                </a:solidFill>
+              </a:rPr>
+              <a:t>Pick your tool — one line, and none of them name a single column</a:t>
+            </a:r>
+          </a:p>
+        </p:txBody>
+      </p:sp>
+      <p:sp>
+        <p:nvSpPr>
+          <p:cNvPr id="3" name="Rectangle 2"/>
+          <p:cNvSpPr/>
+          <p:nvPr/>
+        </p:nvSpPr>
+        <p:spPr>
+          <a:xfrm>
+            <a:off x="0" y="1051560"/>
+            <a:ext cx="12191695" cy="54864"/>
+          </a:xfrm>
+          <a:prstGeom prst="rect">
+            <a:avLst/>
+          </a:prstGeom>
+          <a:solidFill>
+            <a:srgbClr val="2E8B8B"/>
+          </a:solidFill>
+          <a:ln>
+            <a:noFill/>
+          </a:ln>
+          <a:effectLst/>
+        </p:spPr>
+        <p:style>
+          <a:lnRef idx="1">
+            <a:schemeClr val="accent1"/>
+          </a:lnRef>
+          <a:fillRef idx="3">
+            <a:schemeClr val="accent1"/>
+          </a:fillRef>
+          <a:effectRef idx="2">
+            <a:schemeClr val="accent1"/>
+          </a:effectRef>
+          <a:fontRef idx="minor">
+            <a:schemeClr val="lt1"/>
+          </a:fontRef>
+        </p:style>
+        <p:txBody>
+          <a:bodyPr rtlCol="0" anchor="ctr"/>
+          <a:lstStyle/>
+          <a:p>
+            <a:pPr algn="ctr"/>
+          </a:p>
+        </p:txBody>
+      </p:sp>
+      <p:sp>
+        <p:nvSpPr>
+          <p:cNvPr id="4" name="Rectangle 3"/>
+          <p:cNvSpPr/>
+          <p:nvPr/>
+        </p:nvSpPr>
+        <p:spPr>
+          <a:xfrm>
+            <a:off x="457200" y="1261872"/>
+            <a:ext cx="11247120" cy="2697480"/>
+          </a:xfrm>
+          <a:prstGeom prst="rect">
+            <a:avLst/>
+          </a:prstGeom>
+          <a:solidFill>
+            <a:srgbClr val="1E2935"/>
+          </a:solidFill>
+          <a:ln>
+            <a:solidFill>
+              <a:srgbClr val="2E8B8B"/>
+            </a:solidFill>
+          </a:ln>
+          <a:effectLst/>
+        </p:spPr>
+        <p:style>
+          <a:lnRef idx="1">
+            <a:schemeClr val="accent1"/>
+          </a:lnRef>
+          <a:fillRef idx="3">
+            <a:schemeClr val="accent1"/>
+          </a:fillRef>
+          <a:effectRef idx="2">
+            <a:schemeClr val="accent1"/>
+          </a:effectRef>
+          <a:fontRef idx="minor">
+            <a:schemeClr val="lt1"/>
+          </a:fontRef>
+        </p:style>
+        <p:txBody>
+          <a:bodyPr rtlCol="0" anchor="t" wrap="square" lIns="182880" rIns="137160" tIns="109728"/>
+          <a:lstStyle/>
+          <a:p>
+            <a:pPr algn="ctr">
+              <a:lnSpc>
+                <a:spcPct val="100000"/>
+              </a:lnSpc>
+            </a:pPr>
+            <a:r>
+              <a:rPr sz="1200">
+                <a:solidFill>
+                  <a:srgbClr val="8BA6C0"/>
+                </a:solidFill>
+                <a:latin typeface="Courier New"/>
+              </a:rPr>
+              <a:t>-- SQL (DuckDB) — column names come from the DATA, not from you</a:t>
+            </a:r>
+          </a:p>
+          <a:p>
+            <a:pPr>
+              <a:lnSpc>
+                <a:spcPct val="100000"/>
+              </a:lnSpc>
+            </a:pPr>
+            <a:r>
+              <a:rPr sz="1200">
+                <a:solidFill>
+                  <a:srgbClr val="E6EDF3"/>
+                </a:solidFill>
+                <a:latin typeface="Courier New"/>
+              </a:rPr>
+              <a:t>PIVOT (FROM v_long SELECT connect_id, question_text, answer</a:t>
+            </a:r>
+          </a:p>
+          <a:p>
+            <a:pPr>
+              <a:lnSpc>
+                <a:spcPct val="100000"/>
+              </a:lnSpc>
+            </a:pPr>
+            <a:r>
+              <a:rPr sz="1200">
+                <a:solidFill>
+                  <a:srgbClr val="E6EDF3"/>
+                </a:solidFill>
+                <a:latin typeface="Courier New"/>
+              </a:rPr>
+              <a:t>       WHERE question_type &lt;&gt; 'multi_select')</a:t>
+            </a:r>
+          </a:p>
+          <a:p>
+            <a:pPr>
+              <a:lnSpc>
+                <a:spcPct val="100000"/>
+              </a:lnSpc>
+            </a:pPr>
+            <a:r>
+              <a:rPr sz="1200">
+                <a:solidFill>
+                  <a:srgbClr val="E6EDF3"/>
+                </a:solidFill>
+                <a:latin typeface="Courier New"/>
+              </a:rPr>
+              <a:t>  ON question_text USING any_value(answer);</a:t>
+            </a:r>
+          </a:p>
+          <a:p>
+            <a:pPr>
+              <a:lnSpc>
+                <a:spcPct val="100000"/>
+              </a:lnSpc>
+            </a:pPr>
+            <a:r>
+              <a:rPr sz="1200">
+                <a:solidFill>
+                  <a:srgbClr val="E6EDF3"/>
+                </a:solidFill>
+                <a:latin typeface="Courier New"/>
+              </a:rPr>
+              <a:t> </a:t>
+            </a:r>
+          </a:p>
+          <a:p>
+            <a:pPr>
+              <a:lnSpc>
+                <a:spcPct val="100000"/>
+              </a:lnSpc>
+            </a:pPr>
+            <a:r>
+              <a:rPr sz="1200">
+                <a:solidFill>
+                  <a:srgbClr val="8BA6C0"/>
+                </a:solidFill>
+                <a:latin typeface="Courier New"/>
+              </a:rPr>
+              <a:t># Python (pandas)</a:t>
+            </a:r>
+          </a:p>
+          <a:p>
+            <a:pPr>
+              <a:lnSpc>
+                <a:spcPct val="100000"/>
+              </a:lnSpc>
+            </a:pPr>
+            <a:r>
+              <a:rPr sz="1200">
+                <a:solidFill>
+                  <a:srgbClr val="E6EDF3"/>
+                </a:solidFill>
+                <a:latin typeface="Courier New"/>
+              </a:rPr>
+              <a:t>long.pivot(index='connect_id', columns='question_text', values='answer')</a:t>
+            </a:r>
+          </a:p>
+          <a:p>
+            <a:pPr>
+              <a:lnSpc>
+                <a:spcPct val="100000"/>
+              </a:lnSpc>
+            </a:pPr>
+            <a:r>
+              <a:rPr sz="1200">
+                <a:solidFill>
+                  <a:srgbClr val="E6EDF3"/>
+                </a:solidFill>
+                <a:latin typeface="Courier New"/>
+              </a:rPr>
+              <a:t> </a:t>
+            </a:r>
+          </a:p>
+          <a:p>
+            <a:pPr>
+              <a:lnSpc>
+                <a:spcPct val="100000"/>
+              </a:lnSpc>
+            </a:pPr>
+            <a:r>
+              <a:rPr sz="1200">
+                <a:solidFill>
+                  <a:srgbClr val="8BA6C0"/>
+                </a:solidFill>
+                <a:latin typeface="Courier New"/>
+              </a:rPr>
+              <a:t># R (tidyr)</a:t>
+            </a:r>
+          </a:p>
+          <a:p>
+            <a:pPr>
+              <a:lnSpc>
+                <a:spcPct val="100000"/>
+              </a:lnSpc>
+            </a:pPr>
+            <a:r>
+              <a:rPr sz="1200">
+                <a:solidFill>
+                  <a:srgbClr val="E6EDF3"/>
+                </a:solidFill>
+                <a:latin typeface="Courier New"/>
+              </a:rPr>
+              <a:t>pivot_wider(long, id_cols=connect_id, names_from=question_text, values_from=answer)</a:t>
+            </a:r>
+          </a:p>
+        </p:txBody>
+      </p:sp>
+      <p:graphicFrame>
+        <p:nvGraphicFramePr>
+          <p:cNvPr id="5" name="Table 4"/>
+          <p:cNvGraphicFramePr>
+            <a:graphicFrameLocks noGrp="1"/>
+          </p:cNvGraphicFramePr>
+          <p:nvPr/>
+        </p:nvGraphicFramePr>
+        <p:xfrm>
+          <a:off x="1463040" y="4160520"/>
+          <a:ext cx="9235440" cy="1554480"/>
+        </p:xfrm>
+        <a:graphic>
+          <a:graphicData uri="http://schemas.openxmlformats.org/drawingml/2006/table">
+            <a:tbl>
+              <a:tblPr firstRow="1" bandRow="1">
+                <a:tableStyleId>{5C22544A-7EE6-4342-B048-85BDC9FD1C3A}</a:tableStyleId>
+              </a:tblPr>
+              <a:tblGrid>
+                <a:gridCol w="1371600"/>
+                <a:gridCol w="914400"/>
+                <a:gridCol w="3931920"/>
+                <a:gridCol w="1371600"/>
+                <a:gridCol w="1645920"/>
+              </a:tblGrid>
+              <a:tr h="259080">
+                <a:tc>
+                  <a:txBody>
+                    <a:bodyPr wrap="square"/>
+                    <a:lstStyle/>
+                    <a:p>
+                      <a:r>
+                        <a:rPr b="1" sz="1150">
+                          <a:solidFill>
+                            <a:srgbClr val="FFFFFF"/>
+                          </a:solidFill>
+                          <a:latin typeface="Calibri"/>
+                        </a:rPr>
+                        <a:t>connect_id</a:t>
+                      </a:r>
+                    </a:p>
+                  </a:txBody>
+                  <a:tcPr marL="73152" marR="73152" marT="27432" marB="27432" anchor="ctr">
+                    <a:solidFill>
+                      <a:srgbClr val="16324F"/>
+                    </a:solidFill>
+                  </a:tcPr>
+                </a:tc>
+                <a:tc>
+                  <a:txBody>
+                    <a:bodyPr wrap="square"/>
+                    <a:lstStyle/>
+                    <a:p>
+                      <a:r>
+                        <a:rPr b="1" sz="1150">
+                          <a:solidFill>
+                            <a:srgbClr val="FFFFFF"/>
+                          </a:solidFill>
+                          <a:latin typeface="Calibri"/>
+                        </a:rPr>
+                        <a:t>Age</a:t>
+                      </a:r>
+                    </a:p>
+                  </a:txBody>
+                  <a:tcPr marL="73152" marR="73152" marT="27432" marB="27432" anchor="ctr">
+                    <a:solidFill>
+                      <a:srgbClr val="16324F"/>
+                    </a:solidFill>
+                  </a:tcPr>
+                </a:tc>
+                <a:tc>
+                  <a:txBody>
+                    <a:bodyPr wrap="square"/>
+                    <a:lstStyle/>
+                    <a:p>
+                      <a:r>
+                        <a:rPr b="1" sz="1150">
+                          <a:solidFill>
+                            <a:srgbClr val="FFFFFF"/>
+                          </a:solidFill>
+                          <a:latin typeface="Calibri"/>
+                        </a:rPr>
+                        <a:t>Education</a:t>
+                      </a:r>
+                    </a:p>
+                  </a:txBody>
+                  <a:tcPr marL="73152" marR="73152" marT="27432" marB="27432" anchor="ctr">
+                    <a:solidFill>
+                      <a:srgbClr val="16324F"/>
+                    </a:solidFill>
+                  </a:tcPr>
+                </a:tc>
+                <a:tc>
+                  <a:txBody>
+                    <a:bodyPr wrap="square"/>
+                    <a:lstStyle/>
+                    <a:p>
+                      <a:r>
+                        <a:rPr b="1" sz="1150">
+                          <a:solidFill>
+                            <a:srgbClr val="FFFFFF"/>
+                          </a:solidFill>
+                          <a:latin typeface="Calibri"/>
+                        </a:rPr>
+                        <a:t>Sex</a:t>
+                      </a:r>
+                    </a:p>
+                  </a:txBody>
+                  <a:tcPr marL="73152" marR="73152" marT="27432" marB="27432" anchor="ctr">
+                    <a:solidFill>
+                      <a:srgbClr val="16324F"/>
+                    </a:solidFill>
+                  </a:tcPr>
+                </a:tc>
+                <a:tc>
+                  <a:txBody>
+                    <a:bodyPr wrap="square"/>
+                    <a:lstStyle/>
+                    <a:p>
+                      <a:r>
+                        <a:rPr b="1" sz="1150">
+                          <a:solidFill>
+                            <a:srgbClr val="FFFFFF"/>
+                          </a:solidFill>
+                          <a:latin typeface="Calibri"/>
+                        </a:rPr>
+                        <a:t>Smoking Status</a:t>
+                      </a:r>
+                    </a:p>
+                  </a:txBody>
+                  <a:tcPr marL="73152" marR="73152" marT="27432" marB="27432" anchor="ctr">
+                    <a:solidFill>
+                      <a:srgbClr val="16324F"/>
+                    </a:solidFill>
+                  </a:tcPr>
+                </a:tc>
+              </a:tr>
+              <a:tr h="259080">
+                <a:tc>
+                  <a:txBody>
+                    <a:bodyPr wrap="square"/>
+                    <a:lstStyle/>
+                    <a:p>
+                      <a:r>
+                        <a:rPr sz="1150" b="1">
+                          <a:solidFill>
+                            <a:srgbClr val="222A33"/>
+                          </a:solidFill>
+                          <a:latin typeface="Calibri"/>
+                        </a:rPr>
+                        <a:t>1001</a:t>
+                      </a:r>
+                    </a:p>
+                  </a:txBody>
+                  <a:tcPr marL="73152" marR="73152" marT="27432" marB="27432" anchor="ctr">
+                    <a:solidFill>
+                      <a:srgbClr val="FFFFFF"/>
+                    </a:solidFill>
+                  </a:tcPr>
+                </a:tc>
+                <a:tc>
+                  <a:txBody>
+                    <a:bodyPr wrap="square"/>
+                    <a:lstStyle/>
+                    <a:p>
+                      <a:r>
+                        <a:rPr sz="1150">
+                          <a:solidFill>
+                            <a:srgbClr val="222A33"/>
+                          </a:solidFill>
+                          <a:latin typeface="Calibri"/>
+                        </a:rPr>
+                        <a:t>47</a:t>
+                      </a:r>
+                    </a:p>
+                  </a:txBody>
+                  <a:tcPr marL="73152" marR="73152" marT="27432" marB="27432" anchor="ctr">
+                    <a:solidFill>
+                      <a:srgbClr val="FFFFFF"/>
+                    </a:solidFill>
+                  </a:tcPr>
+                </a:tc>
+                <a:tc>
+                  <a:txBody>
+                    <a:bodyPr wrap="square"/>
+                    <a:lstStyle/>
+                    <a:p>
+                      <a:r>
+                        <a:rPr sz="1150">
+                          <a:solidFill>
+                            <a:srgbClr val="222A33"/>
+                          </a:solidFill>
+                          <a:latin typeface="Calibri"/>
+                        </a:rPr>
+                        <a:t>Bachelor's Degree</a:t>
+                      </a:r>
+                    </a:p>
+                  </a:txBody>
+                  <a:tcPr marL="73152" marR="73152" marT="27432" marB="27432" anchor="ctr">
+                    <a:solidFill>
+                      <a:srgbClr val="FFFFFF"/>
+                    </a:solidFill>
+                  </a:tcPr>
+                </a:tc>
+                <a:tc>
+                  <a:txBody>
+                    <a:bodyPr wrap="square"/>
+                    <a:lstStyle/>
+                    <a:p>
+                      <a:r>
+                        <a:rPr sz="1150">
+                          <a:solidFill>
+                            <a:srgbClr val="222A33"/>
+                          </a:solidFill>
+                          <a:latin typeface="Calibri"/>
+                        </a:rPr>
+                        <a:t>Female</a:t>
+                      </a:r>
+                    </a:p>
+                  </a:txBody>
+                  <a:tcPr marL="73152" marR="73152" marT="27432" marB="27432" anchor="ctr">
+                    <a:solidFill>
+                      <a:srgbClr val="FFFFFF"/>
+                    </a:solidFill>
+                  </a:tcPr>
+                </a:tc>
+                <a:tc>
+                  <a:txBody>
+                    <a:bodyPr wrap="square"/>
+                    <a:lstStyle/>
+                    <a:p>
+                      <a:r>
+                        <a:rPr sz="1150">
+                          <a:solidFill>
+                            <a:srgbClr val="222A33"/>
+                          </a:solidFill>
+                          <a:latin typeface="Calibri"/>
+                        </a:rPr>
+                        <a:t>Former</a:t>
+                      </a:r>
+                    </a:p>
+                  </a:txBody>
+                  <a:tcPr marL="73152" marR="73152" marT="27432" marB="27432" anchor="ctr">
+                    <a:solidFill>
+                      <a:srgbClr val="FFFFFF"/>
+                    </a:solidFill>
+                  </a:tcPr>
+                </a:tc>
+              </a:tr>
+              <a:tr h="259080">
+                <a:tc>
+                  <a:txBody>
+                    <a:bodyPr wrap="square"/>
+                    <a:lstStyle/>
+                    <a:p>
+                      <a:r>
+                        <a:rPr sz="1150" b="1">
+                          <a:solidFill>
+                            <a:srgbClr val="222A33"/>
+                          </a:solidFill>
+                          <a:latin typeface="Calibri"/>
+                        </a:rPr>
+                        <a:t>1002</a:t>
+                      </a:r>
+                    </a:p>
+                  </a:txBody>
+                  <a:tcPr marL="73152" marR="73152" marT="27432" marB="27432" anchor="ctr">
+                    <a:solidFill>
+                      <a:srgbClr val="EDF1F5"/>
+                    </a:solidFill>
+                  </a:tcPr>
+                </a:tc>
+                <a:tc>
+                  <a:txBody>
+                    <a:bodyPr wrap="square"/>
+                    <a:lstStyle/>
+                    <a:p>
+                      <a:r>
+                        <a:rPr sz="1150">
+                          <a:solidFill>
+                            <a:srgbClr val="222A33"/>
+                          </a:solidFill>
+                          <a:latin typeface="Calibri"/>
+                        </a:rPr>
+                        <a:t>62</a:t>
+                      </a:r>
+                    </a:p>
+                  </a:txBody>
+                  <a:tcPr marL="73152" marR="73152" marT="27432" marB="27432" anchor="ctr">
+                    <a:solidFill>
+                      <a:srgbClr val="EDF1F5"/>
+                    </a:solidFill>
+                  </a:tcPr>
+                </a:tc>
+                <a:tc>
+                  <a:txBody>
+                    <a:bodyPr wrap="square"/>
+                    <a:lstStyle/>
+                    <a:p>
+                      <a:r>
+                        <a:rPr sz="1150">
+                          <a:solidFill>
+                            <a:srgbClr val="222A33"/>
+                          </a:solidFill>
+                          <a:latin typeface="Calibri"/>
+                        </a:rPr>
+                        <a:t>High School Graduate or GED</a:t>
+                      </a:r>
+                    </a:p>
+                  </a:txBody>
+                  <a:tcPr marL="73152" marR="73152" marT="27432" marB="27432" anchor="ctr">
+                    <a:solidFill>
+                      <a:srgbClr val="EDF1F5"/>
+                    </a:solidFill>
+                  </a:tcPr>
+                </a:tc>
+                <a:tc>
+                  <a:txBody>
+                    <a:bodyPr wrap="square"/>
+                    <a:lstStyle/>
+                    <a:p>
+                      <a:r>
+                        <a:rPr sz="1150">
+                          <a:solidFill>
+                            <a:srgbClr val="222A33"/>
+                          </a:solidFill>
+                          <a:latin typeface="Calibri"/>
+                        </a:rPr>
+                        <a:t>Male</a:t>
+                      </a:r>
+                    </a:p>
+                  </a:txBody>
+                  <a:tcPr marL="73152" marR="73152" marT="27432" marB="27432" anchor="ctr">
+                    <a:solidFill>
+                      <a:srgbClr val="EDF1F5"/>
+                    </a:solidFill>
+                  </a:tcPr>
+                </a:tc>
+                <a:tc>
+                  <a:txBody>
+                    <a:bodyPr wrap="square"/>
+                    <a:lstStyle/>
+                    <a:p>
+                      <a:r>
+                        <a:rPr sz="1150">
+                          <a:solidFill>
+                            <a:srgbClr val="222A33"/>
+                          </a:solidFill>
+                          <a:latin typeface="Calibri"/>
+                        </a:rPr>
+                        <a:t>Current</a:t>
+                      </a:r>
+                    </a:p>
+                  </a:txBody>
+                  <a:tcPr marL="73152" marR="73152" marT="27432" marB="27432" anchor="ctr">
+                    <a:solidFill>
+                      <a:srgbClr val="EDF1F5"/>
+                    </a:solidFill>
+                  </a:tcPr>
+                </a:tc>
+              </a:tr>
+              <a:tr h="259080">
+                <a:tc>
+                  <a:txBody>
+                    <a:bodyPr wrap="square"/>
+                    <a:lstStyle/>
+                    <a:p>
+                      <a:r>
+                        <a:rPr sz="1150" b="1">
+                          <a:solidFill>
+                            <a:srgbClr val="222A33"/>
+                          </a:solidFill>
+                          <a:latin typeface="Calibri"/>
+                        </a:rPr>
+                        <a:t>1003</a:t>
+                      </a:r>
+                    </a:p>
+                  </a:txBody>
+                  <a:tcPr marL="73152" marR="73152" marT="27432" marB="27432" anchor="ctr">
+                    <a:solidFill>
+                      <a:srgbClr val="FFFFFF"/>
+                    </a:solidFill>
+                  </a:tcPr>
+                </a:tc>
+                <a:tc>
+                  <a:txBody>
+                    <a:bodyPr wrap="square"/>
+                    <a:lstStyle/>
+                    <a:p>
+                      <a:r>
+                        <a:rPr sz="1150">
+                          <a:solidFill>
+                            <a:srgbClr val="222A33"/>
+                          </a:solidFill>
+                          <a:latin typeface="Calibri"/>
+                        </a:rPr>
+                        <a:t>55</a:t>
+                      </a:r>
+                    </a:p>
+                  </a:txBody>
+                  <a:tcPr marL="73152" marR="73152" marT="27432" marB="27432" anchor="ctr">
+                    <a:solidFill>
+                      <a:srgbClr val="FFFFFF"/>
+                    </a:solidFill>
+                  </a:tcPr>
+                </a:tc>
+                <a:tc>
+                  <a:txBody>
+                    <a:bodyPr wrap="square"/>
+                    <a:lstStyle/>
+                    <a:p>
+                      <a:r>
+                        <a:rPr sz="1150">
+                          <a:solidFill>
+                            <a:srgbClr val="222A33"/>
+                          </a:solidFill>
+                          <a:latin typeface="Calibri"/>
+                        </a:rPr>
+                        <a:t>Advanced Degree</a:t>
+                      </a:r>
+                    </a:p>
+                  </a:txBody>
+                  <a:tcPr marL="73152" marR="73152" marT="27432" marB="27432" anchor="ctr">
+                    <a:solidFill>
+                      <a:srgbClr val="FFFFFF"/>
+                    </a:solidFill>
+                  </a:tcPr>
+                </a:tc>
+                <a:tc>
+                  <a:txBody>
+                    <a:bodyPr wrap="square"/>
+                    <a:lstStyle/>
+                    <a:p>
+                      <a:r>
+                        <a:rPr sz="1150">
+                          <a:solidFill>
+                            <a:srgbClr val="222A33"/>
+                          </a:solidFill>
+                          <a:latin typeface="Calibri"/>
+                        </a:rPr>
+                        <a:t>Female</a:t>
+                      </a:r>
+                    </a:p>
+                  </a:txBody>
+                  <a:tcPr marL="73152" marR="73152" marT="27432" marB="27432" anchor="ctr">
+                    <a:solidFill>
+                      <a:srgbClr val="FFFFFF"/>
+                    </a:solidFill>
+                  </a:tcPr>
+                </a:tc>
+                <a:tc>
+                  <a:txBody>
+                    <a:bodyPr wrap="square"/>
+                    <a:lstStyle/>
+                    <a:p>
+                      <a:r>
+                        <a:rPr sz="1150">
+                          <a:solidFill>
+                            <a:srgbClr val="222A33"/>
+                          </a:solidFill>
+                          <a:latin typeface="Calibri"/>
+                        </a:rPr>
+                        <a:t>Never</a:t>
+                      </a:r>
+                    </a:p>
+                  </a:txBody>
+                  <a:tcPr marL="73152" marR="73152" marT="27432" marB="27432" anchor="ctr">
+                    <a:solidFill>
+                      <a:srgbClr val="FFFFFF"/>
+                    </a:solidFill>
+                  </a:tcPr>
+                </a:tc>
+              </a:tr>
+              <a:tr h="259080">
+                <a:tc>
+                  <a:txBody>
+                    <a:bodyPr wrap="square"/>
+                    <a:lstStyle/>
+                    <a:p>
+                      <a:r>
+                        <a:rPr sz="1150" b="1">
+                          <a:solidFill>
+                            <a:srgbClr val="222A33"/>
+                          </a:solidFill>
+                          <a:latin typeface="Calibri"/>
+                        </a:rPr>
+                        <a:t>1004</a:t>
+                      </a:r>
+                    </a:p>
+                  </a:txBody>
+                  <a:tcPr marL="73152" marR="73152" marT="27432" marB="27432" anchor="ctr">
+                    <a:solidFill>
+                      <a:srgbClr val="EDF1F5"/>
+                    </a:solidFill>
+                  </a:tcPr>
+                </a:tc>
+                <a:tc>
+                  <a:txBody>
+                    <a:bodyPr wrap="square"/>
+                    <a:lstStyle/>
+                    <a:p>
+                      <a:r>
+                        <a:rPr sz="1150">
+                          <a:solidFill>
+                            <a:srgbClr val="222A33"/>
+                          </a:solidFill>
+                          <a:latin typeface="Calibri"/>
+                        </a:rPr>
+                        <a:t>39</a:t>
+                      </a:r>
+                    </a:p>
+                  </a:txBody>
+                  <a:tcPr marL="73152" marR="73152" marT="27432" marB="27432" anchor="ctr">
+                    <a:solidFill>
+                      <a:srgbClr val="EDF1F5"/>
+                    </a:solidFill>
+                  </a:tcPr>
+                </a:tc>
+                <a:tc>
+                  <a:txBody>
+                    <a:bodyPr wrap="square"/>
+                    <a:lstStyle/>
+                    <a:p>
+                      <a:r>
+                        <a:rPr sz="1150">
+                          <a:solidFill>
+                            <a:srgbClr val="222A33"/>
+                          </a:solidFill>
+                          <a:latin typeface="Calibri"/>
+                        </a:rPr>
+                        <a:t>Bachelor's Degree</a:t>
+                      </a:r>
+                    </a:p>
+                  </a:txBody>
+                  <a:tcPr marL="73152" marR="73152" marT="27432" marB="27432" anchor="ctr">
+                    <a:solidFill>
+                      <a:srgbClr val="EDF1F5"/>
+                    </a:solidFill>
+                  </a:tcPr>
+                </a:tc>
+                <a:tc>
+                  <a:txBody>
+                    <a:bodyPr wrap="square"/>
+                    <a:lstStyle/>
+                    <a:p>
+                      <a:r>
+                        <a:rPr sz="1150">
+                          <a:solidFill>
+                            <a:srgbClr val="222A33"/>
+                          </a:solidFill>
+                          <a:latin typeface="Calibri"/>
+                        </a:rPr>
+                        <a:t>Male</a:t>
+                      </a:r>
+                    </a:p>
+                  </a:txBody>
+                  <a:tcPr marL="73152" marR="73152" marT="27432" marB="27432" anchor="ctr">
+                    <a:solidFill>
+                      <a:srgbClr val="EDF1F5"/>
+                    </a:solidFill>
+                  </a:tcPr>
+                </a:tc>
+                <a:tc>
+                  <a:txBody>
+                    <a:bodyPr wrap="square"/>
+                    <a:lstStyle/>
+                    <a:p>
+                      <a:r>
+                        <a:rPr sz="1150">
+                          <a:solidFill>
+                            <a:srgbClr val="222A33"/>
+                          </a:solidFill>
+                          <a:latin typeface="Calibri"/>
+                        </a:rPr>
+                        <a:t>Never</a:t>
+                      </a:r>
+                    </a:p>
+                  </a:txBody>
+                  <a:tcPr marL="73152" marR="73152" marT="27432" marB="27432" anchor="ctr">
+                    <a:solidFill>
+                      <a:srgbClr val="EDF1F5"/>
+                    </a:solidFill>
+                  </a:tcPr>
+                </a:tc>
+              </a:tr>
+              <a:tr h="259080">
+                <a:tc>
+                  <a:txBody>
+                    <a:bodyPr wrap="square"/>
+                    <a:lstStyle/>
+                    <a:p>
+                      <a:r>
+                        <a:rPr sz="1150" b="1">
+                          <a:solidFill>
+                            <a:srgbClr val="222A33"/>
+                          </a:solidFill>
+                          <a:latin typeface="Calibri"/>
+                        </a:rPr>
+                        <a:t>1005</a:t>
+                      </a:r>
+                    </a:p>
+                  </a:txBody>
+                  <a:tcPr marL="73152" marR="73152" marT="27432" marB="27432" anchor="ctr">
+                    <a:solidFill>
+                      <a:srgbClr val="FFFFFF"/>
+                    </a:solidFill>
+                  </a:tcPr>
+                </a:tc>
+                <a:tc>
+                  <a:txBody>
+                    <a:bodyPr wrap="square"/>
+                    <a:lstStyle/>
+                    <a:p>
+                      <a:r>
+                        <a:rPr sz="1150">
+                          <a:solidFill>
+                            <a:srgbClr val="222A33"/>
+                          </a:solidFill>
+                          <a:latin typeface="Calibri"/>
+                        </a:rPr>
+                        <a:t>71</a:t>
+                      </a:r>
+                    </a:p>
+                  </a:txBody>
+                  <a:tcPr marL="73152" marR="73152" marT="27432" marB="27432" anchor="ctr">
+                    <a:solidFill>
+                      <a:srgbClr val="FFFFFF"/>
+                    </a:solidFill>
+                  </a:tcPr>
+                </a:tc>
+                <a:tc>
+                  <a:txBody>
+                    <a:bodyPr wrap="square"/>
+                    <a:lstStyle/>
+                    <a:p>
+                      <a:r>
+                        <a:rPr sz="1150">
+                          <a:solidFill>
+                            <a:srgbClr val="222A33"/>
+                          </a:solidFill>
+                          <a:latin typeface="Calibri"/>
+                        </a:rPr>
+                        <a:t>High School Graduate or GED</a:t>
+                      </a:r>
+                    </a:p>
+                  </a:txBody>
+                  <a:tcPr marL="73152" marR="73152" marT="27432" marB="27432" anchor="ctr">
+                    <a:solidFill>
+                      <a:srgbClr val="FFFFFF"/>
+                    </a:solidFill>
+                  </a:tcPr>
+                </a:tc>
+                <a:tc>
+                  <a:txBody>
+                    <a:bodyPr wrap="square"/>
+                    <a:lstStyle/>
+                    <a:p>
+                      <a:r>
+                        <a:rPr sz="1150">
+                          <a:solidFill>
+                            <a:srgbClr val="222A33"/>
+                          </a:solidFill>
+                          <a:latin typeface="Calibri"/>
+                        </a:rPr>
+                        <a:t>Female</a:t>
+                      </a:r>
+                    </a:p>
+                  </a:txBody>
+                  <a:tcPr marL="73152" marR="73152" marT="27432" marB="27432" anchor="ctr">
+                    <a:solidFill>
+                      <a:srgbClr val="FFFFFF"/>
+                    </a:solidFill>
+                  </a:tcPr>
+                </a:tc>
+                <a:tc>
+                  <a:txBody>
+                    <a:bodyPr wrap="square"/>
+                    <a:lstStyle/>
+                    <a:p>
+                      <a:r>
+                        <a:rPr sz="1150">
+                          <a:solidFill>
+                            <a:srgbClr val="222A33"/>
+                          </a:solidFill>
+                          <a:latin typeface="Calibri"/>
+                        </a:rPr>
+                        <a:t>Former</a:t>
+                      </a:r>
+                    </a:p>
+                  </a:txBody>
+                  <a:tcPr marL="73152" marR="73152" marT="27432" marB="27432" anchor="ctr">
+                    <a:solidFill>
+                      <a:srgbClr val="FFFFFF"/>
+                    </a:solidFill>
+                  </a:tcPr>
+                </a:tc>
+              </a:tr>
+            </a:tbl>
+          </a:graphicData>
+        </a:graphic>
+      </p:graphicFrame>
+      <p:sp>
+        <p:nvSpPr>
+          <p:cNvPr id="6" name="TextBox 5"/>
+          <p:cNvSpPr txBox="1"/>
+          <p:nvPr/>
+        </p:nvSpPr>
+        <p:spPr>
+          <a:xfrm>
+            <a:off x="457200" y="5852160"/>
+            <a:ext cx="11247120" cy="457200"/>
+          </a:xfrm>
+          <a:prstGeom prst="rect">
+            <a:avLst/>
+          </a:prstGeom>
+          <a:noFill/>
+        </p:spPr>
+        <p:txBody>
+          <a:bodyPr wrap="square">
+            <a:spAutoFit/>
+          </a:bodyPr>
+          <a:lstStyle/>
+          <a:p>
+            <a:pPr algn="l"/>
+            <a:r>
+              <a:rPr sz="1350" b="1" i="0">
+                <a:solidFill>
+                  <a:srgbClr val="CC7D15"/>
+                </a:solidFill>
+                <a:latin typeface="Calibri"/>
+              </a:rPr>
+              <a:t>Column names come from the data, not from you — add a question, get a new column. Wrap it once as get_wide(survey) and every team reuses it.</a:t>
+            </a:r>
+          </a:p>
+        </p:txBody>
+      </p:sp>
+      <p:sp>
+        <p:nvSpPr>
+          <p:cNvPr id="7" name="TextBox 6"/>
+          <p:cNvSpPr txBox="1"/>
+          <p:nvPr/>
+        </p:nvSpPr>
+        <p:spPr>
+          <a:xfrm>
+            <a:off x="457200" y="6327648"/>
+            <a:ext cx="11247120" cy="365760"/>
+          </a:xfrm>
+          <a:prstGeom prst="rect">
+            <a:avLst/>
+          </a:prstGeom>
+          <a:noFill/>
+        </p:spPr>
+        <p:txBody>
+          <a:bodyPr wrap="square">
+            <a:spAutoFit/>
+          </a:bodyPr>
+          <a:lstStyle/>
+          <a:p>
+            <a:pPr algn="l"/>
+            <a:r>
+              <a:rPr sz="1050" b="0" i="1">
+                <a:solidFill>
+                  <a:srgbClr val="5A636E"/>
+                </a:solidFill>
+                <a:latin typeface="Calibri"/>
+              </a:rPr>
+              <a:t>pandas &amp; tidyr discover columns automatically; BigQuery's PIVOT lists the values (or generate them with dynamic SQL). `long` = the single-value answers.</a:t>
+            </a:r>
+          </a:p>
+        </p:txBody>
+      </p:sp>
+    </p:spTree>
+  </p:cSld>
+  <p:clrMapOvr>
+    <a:masterClrMapping/>
+  </p:clrMapOvr>
+</p:sld>
+</file>
+
+<file path=ppt/slides/slide19.xml><?xml version="1.0" encoding="utf-8"?>
+<p:sld xmlns:a="http://schemas.openxmlformats.org/drawingml/2006/main" xmlns:p="http://schemas.openxmlformats.org/presentationml/2006/main" xmlns:r="http://schemas.openxmlformats.org/officeDocument/2006/relationships">
+  <p:cSld>
+    <p:spTree>
+      <p:nvGrpSpPr>
+        <p:cNvPr id="1" name=""/>
+        <p:cNvGrpSpPr/>
+        <p:nvPr/>
+      </p:nvGrpSpPr>
+      <p:grpSpPr/>
+      <p:sp>
+        <p:nvSpPr>
+          <p:cNvPr id="2" name="Rectangle 1"/>
+          <p:cNvSpPr/>
+          <p:nvPr/>
+        </p:nvSpPr>
+        <p:spPr>
+          <a:xfrm>
+            <a:off x="0" y="0"/>
+            <a:ext cx="12191695" cy="1051560"/>
+          </a:xfrm>
+          <a:prstGeom prst="rect">
+            <a:avLst/>
+          </a:prstGeom>
+          <a:solidFill>
+            <a:srgbClr val="16324F"/>
+          </a:solidFill>
+          <a:ln>
+            <a:noFill/>
+          </a:ln>
+          <a:effectLst/>
+        </p:spPr>
+        <p:style>
+          <a:lnRef idx="1">
+            <a:schemeClr val="accent1"/>
+          </a:lnRef>
+          <a:fillRef idx="3">
+            <a:schemeClr val="accent1"/>
+          </a:fillRef>
+          <a:effectRef idx="2">
+            <a:schemeClr val="accent1"/>
+          </a:effectRef>
+          <a:fontRef idx="minor">
+            <a:schemeClr val="lt1"/>
+          </a:fontRef>
+        </p:style>
+        <p:txBody>
+          <a:bodyPr rtlCol="0" anchor="ctr" lIns="457200" tIns="109728"/>
+          <a:lstStyle/>
+          <a:p>
+            <a:pPr algn="ctr"/>
+            <a:r>
+              <a:rPr sz="2800" b="1">
+                <a:solidFill>
+                  <a:srgbClr val="FFFFFF"/>
+                </a:solidFill>
+                <a:latin typeface="Calibri"/>
+              </a:rPr>
+              <a:t>Analyzing long format (3/3) — counts are a simple GROUP BY</a:t>
+            </a:r>
+          </a:p>
+          <a:p>
+            <a:r>
+              <a:rPr sz="1300" i="1">
+                <a:solidFill>
+                  <a:srgbClr val="BBD5D7"/>
+                </a:solidFill>
+              </a:rPr>
+              <a:t>And select-all gets *easier*: one group-by, no summing 0/1 columns</a:t>
+            </a:r>
+          </a:p>
+        </p:txBody>
+      </p:sp>
+      <p:sp>
+        <p:nvSpPr>
+          <p:cNvPr id="3" name="Rectangle 2"/>
+          <p:cNvSpPr/>
+          <p:nvPr/>
+        </p:nvSpPr>
+        <p:spPr>
+          <a:xfrm>
+            <a:off x="0" y="1051560"/>
+            <a:ext cx="12191695" cy="54864"/>
+          </a:xfrm>
+          <a:prstGeom prst="rect">
+            <a:avLst/>
+          </a:prstGeom>
+          <a:solidFill>
+            <a:srgbClr val="2E8B8B"/>
+          </a:solidFill>
+          <a:ln>
+            <a:noFill/>
+          </a:ln>
+          <a:effectLst/>
+        </p:spPr>
+        <p:style>
+          <a:lnRef idx="1">
+            <a:schemeClr val="accent1"/>
+          </a:lnRef>
+          <a:fillRef idx="3">
+            <a:schemeClr val="accent1"/>
+          </a:fillRef>
+          <a:effectRef idx="2">
+            <a:schemeClr val="accent1"/>
+          </a:effectRef>
+          <a:fontRef idx="minor">
+            <a:schemeClr val="lt1"/>
+          </a:fontRef>
+        </p:style>
+        <p:txBody>
+          <a:bodyPr rtlCol="0" anchor="ctr"/>
+          <a:lstStyle/>
+          <a:p>
+            <a:pPr algn="ctr"/>
+          </a:p>
+        </p:txBody>
+      </p:sp>
+      <p:sp>
+        <p:nvSpPr>
+          <p:cNvPr id="4" name="Rectangle 3"/>
+          <p:cNvSpPr/>
+          <p:nvPr/>
+        </p:nvSpPr>
+        <p:spPr>
+          <a:xfrm>
+            <a:off x="457200" y="1371600"/>
+            <a:ext cx="5486400" cy="2194560"/>
+          </a:xfrm>
+          <a:prstGeom prst="rect">
+            <a:avLst/>
+          </a:prstGeom>
+          <a:solidFill>
+            <a:srgbClr val="1E2935"/>
+          </a:solidFill>
+          <a:ln>
+            <a:solidFill>
+              <a:srgbClr val="2E8B8B"/>
+            </a:solidFill>
+          </a:ln>
+          <a:effectLst/>
+        </p:spPr>
+        <p:style>
+          <a:lnRef idx="1">
+            <a:schemeClr val="accent1"/>
+          </a:lnRef>
+          <a:fillRef idx="3">
+            <a:schemeClr val="accent1"/>
+          </a:fillRef>
+          <a:effectRef idx="2">
+            <a:schemeClr val="accent1"/>
+          </a:effectRef>
+          <a:fontRef idx="minor">
+            <a:schemeClr val="lt1"/>
+          </a:fontRef>
+        </p:style>
+        <p:txBody>
+          <a:bodyPr rtlCol="0" anchor="t" wrap="square" lIns="182880" rIns="137160" tIns="109728"/>
+          <a:lstStyle/>
+          <a:p>
+            <a:pPr algn="ctr">
+              <a:lnSpc>
+                <a:spcPct val="100000"/>
+              </a:lnSpc>
+            </a:pPr>
+            <a:r>
+              <a:rPr sz="1250">
+                <a:solidFill>
+                  <a:srgbClr val="8BA6C0"/>
+                </a:solidFill>
+                <a:latin typeface="Courier New"/>
+              </a:rPr>
+              <a:t>-- how many selected each tooth-loss reason?</a:t>
+            </a:r>
+          </a:p>
+          <a:p>
+            <a:pPr>
+              <a:lnSpc>
+                <a:spcPct val="100000"/>
+              </a:lnSpc>
+            </a:pPr>
+            <a:r>
+              <a:rPr sz="1250">
+                <a:solidFill>
+                  <a:srgbClr val="E6EDF3"/>
+                </a:solidFill>
+                <a:latin typeface="Courier New"/>
+              </a:rPr>
+              <a:t>SELECT response_label, COUNT(*) AS n</a:t>
+            </a:r>
+          </a:p>
+          <a:p>
+            <a:pPr>
+              <a:lnSpc>
+                <a:spcPct val="100000"/>
+              </a:lnSpc>
+            </a:pPr>
+            <a:r>
+              <a:rPr sz="1250">
+                <a:solidFill>
+                  <a:srgbClr val="E6EDF3"/>
+                </a:solidFill>
+                <a:latin typeface="Courier New"/>
+              </a:rPr>
+              <a:t>FROM v_long</a:t>
+            </a:r>
+          </a:p>
+          <a:p>
+            <a:pPr>
+              <a:lnSpc>
+                <a:spcPct val="100000"/>
+              </a:lnSpc>
+            </a:pPr>
+            <a:r>
+              <a:rPr sz="1250">
+                <a:solidFill>
+                  <a:srgbClr val="E6EDF3"/>
+                </a:solidFill>
+                <a:latin typeface="Courier New"/>
+              </a:rPr>
+              <a:t>WHERE question_concept_id = 899251483</a:t>
+            </a:r>
+          </a:p>
+          <a:p>
+            <a:pPr>
+              <a:lnSpc>
+                <a:spcPct val="100000"/>
+              </a:lnSpc>
+            </a:pPr>
+            <a:r>
+              <a:rPr sz="1250">
+                <a:solidFill>
+                  <a:srgbClr val="E6EDF3"/>
+                </a:solidFill>
+                <a:latin typeface="Courier New"/>
+              </a:rPr>
+              <a:t>GROUP BY response_label</a:t>
+            </a:r>
+          </a:p>
+          <a:p>
+            <a:pPr>
+              <a:lnSpc>
+                <a:spcPct val="100000"/>
+              </a:lnSpc>
+            </a:pPr>
+            <a:r>
+              <a:rPr sz="1250">
+                <a:solidFill>
+                  <a:srgbClr val="E6EDF3"/>
+                </a:solidFill>
+                <a:latin typeface="Courier New"/>
+              </a:rPr>
+              <a:t>ORDER BY n DESC;</a:t>
+            </a:r>
+          </a:p>
+        </p:txBody>
+      </p:sp>
+      <p:graphicFrame>
+        <p:nvGraphicFramePr>
+          <p:cNvPr id="5" name="Table 4"/>
+          <p:cNvGraphicFramePr>
+            <a:graphicFrameLocks noGrp="1"/>
+          </p:cNvGraphicFramePr>
+          <p:nvPr/>
+        </p:nvGraphicFramePr>
+        <p:xfrm>
+          <a:off x="6217920" y="1371600"/>
+          <a:ext cx="5486400" cy="1828800"/>
+        </p:xfrm>
+        <a:graphic>
+          <a:graphicData uri="http://schemas.openxmlformats.org/drawingml/2006/table">
+            <a:tbl>
+              <a:tblPr firstRow="1" bandRow="1">
+                <a:tableStyleId>{5C22544A-7EE6-4342-B048-85BDC9FD1C3A}</a:tableStyleId>
+              </a:tblPr>
+              <a:tblGrid>
+                <a:gridCol w="4297680"/>
+                <a:gridCol w="1188720"/>
+              </a:tblGrid>
+              <a:tr h="365760">
+                <a:tc>
+                  <a:txBody>
+                    <a:bodyPr wrap="square"/>
+                    <a:lstStyle/>
+                    <a:p>
+                      <a:r>
+                        <a:rPr b="1" sz="1150">
+                          <a:solidFill>
+                            <a:srgbClr val="FFFFFF"/>
+                          </a:solidFill>
+                          <a:latin typeface="Calibri"/>
+                        </a:rPr>
+                        <a:t>tooth_loss_reason</a:t>
+                      </a:r>
+                    </a:p>
+                  </a:txBody>
+                  <a:tcPr marL="73152" marR="73152" marT="27432" marB="27432" anchor="ctr">
+                    <a:solidFill>
+                      <a:srgbClr val="16324F"/>
+                    </a:solidFill>
+                  </a:tcPr>
+                </a:tc>
+                <a:tc>
+                  <a:txBody>
+                    <a:bodyPr wrap="square"/>
+                    <a:lstStyle/>
+                    <a:p>
+                      <a:r>
+                        <a:rPr b="1" sz="1150">
+                          <a:solidFill>
+                            <a:srgbClr val="FFFFFF"/>
+                          </a:solidFill>
+                          <a:latin typeface="Calibri"/>
+                        </a:rPr>
+                        <a:t>n</a:t>
+                      </a:r>
+                    </a:p>
+                  </a:txBody>
+                  <a:tcPr marL="73152" marR="73152" marT="27432" marB="27432" anchor="ctr">
+                    <a:solidFill>
+                      <a:srgbClr val="16324F"/>
+                    </a:solidFill>
+                  </a:tcPr>
+                </a:tc>
+              </a:tr>
+              <a:tr h="365760">
+                <a:tc>
+                  <a:txBody>
+                    <a:bodyPr wrap="square"/>
+                    <a:lstStyle/>
+                    <a:p>
+                      <a:r>
+                        <a:rPr sz="1150" b="1">
+                          <a:solidFill>
+                            <a:srgbClr val="222A33"/>
+                          </a:solidFill>
+                          <a:latin typeface="Calibri"/>
+                        </a:rPr>
+                        <a:t>Yes, from tooth decay or disease</a:t>
+                      </a:r>
+                    </a:p>
+                  </a:txBody>
+                  <a:tcPr marL="73152" marR="73152" marT="27432" marB="27432" anchor="ctr">
+                    <a:solidFill>
+                      <a:srgbClr val="FFFFFF"/>
+                    </a:solidFill>
+                  </a:tcPr>
+                </a:tc>
+                <a:tc>
+                  <a:txBody>
+                    <a:bodyPr wrap="square"/>
+                    <a:lstStyle/>
+                    <a:p>
+                      <a:r>
+                        <a:rPr sz="1150">
+                          <a:solidFill>
+                            <a:srgbClr val="222A33"/>
+                          </a:solidFill>
+                          <a:latin typeface="Calibri"/>
+                        </a:rPr>
+                        <a:t>2</a:t>
+                      </a:r>
+                    </a:p>
+                  </a:txBody>
+                  <a:tcPr marL="73152" marR="73152" marT="27432" marB="27432" anchor="ctr">
+                    <a:solidFill>
+                      <a:srgbClr val="FFFFFF"/>
+                    </a:solidFill>
+                  </a:tcPr>
+                </a:tc>
+              </a:tr>
+              <a:tr h="365760">
+                <a:tc>
+                  <a:txBody>
+                    <a:bodyPr wrap="square"/>
+                    <a:lstStyle/>
+                    <a:p>
+                      <a:r>
+                        <a:rPr sz="1150" b="1">
+                          <a:solidFill>
+                            <a:srgbClr val="222A33"/>
+                          </a:solidFill>
+                          <a:latin typeface="Calibri"/>
+                        </a:rPr>
+                        <a:t>Yes, from accident or injury</a:t>
+                      </a:r>
+                    </a:p>
+                  </a:txBody>
+                  <a:tcPr marL="73152" marR="73152" marT="27432" marB="27432" anchor="ctr">
+                    <a:solidFill>
+                      <a:srgbClr val="EDF1F5"/>
+                    </a:solidFill>
+                  </a:tcPr>
+                </a:tc>
+                <a:tc>
+                  <a:txBody>
+                    <a:bodyPr wrap="square"/>
+                    <a:lstStyle/>
+                    <a:p>
+                      <a:r>
+                        <a:rPr sz="1150">
+                          <a:solidFill>
+                            <a:srgbClr val="222A33"/>
+                          </a:solidFill>
+                          <a:latin typeface="Calibri"/>
+                        </a:rPr>
+                        <a:t>2</a:t>
+                      </a:r>
+                    </a:p>
+                  </a:txBody>
+                  <a:tcPr marL="73152" marR="73152" marT="27432" marB="27432" anchor="ctr">
+                    <a:solidFill>
+                      <a:srgbClr val="EDF1F5"/>
+                    </a:solidFill>
+                  </a:tcPr>
+                </a:tc>
+              </a:tr>
+              <a:tr h="365760">
+                <a:tc>
+                  <a:txBody>
+                    <a:bodyPr wrap="square"/>
+                    <a:lstStyle/>
+                    <a:p>
+                      <a:r>
+                        <a:rPr sz="1150" b="1">
+                          <a:solidFill>
+                            <a:srgbClr val="222A33"/>
+                          </a:solidFill>
+                          <a:latin typeface="Calibri"/>
+                        </a:rPr>
+                        <a:t>Yes, for some other reason</a:t>
+                      </a:r>
+                    </a:p>
+                  </a:txBody>
+                  <a:tcPr marL="73152" marR="73152" marT="27432" marB="27432" anchor="ctr">
+                    <a:solidFill>
+                      <a:srgbClr val="FFFFFF"/>
+                    </a:solidFill>
+                  </a:tcPr>
+                </a:tc>
+                <a:tc>
+                  <a:txBody>
+                    <a:bodyPr wrap="square"/>
+                    <a:lstStyle/>
+                    <a:p>
+                      <a:r>
+                        <a:rPr sz="1150">
+                          <a:solidFill>
+                            <a:srgbClr val="222A33"/>
+                          </a:solidFill>
+                          <a:latin typeface="Calibri"/>
+                        </a:rPr>
+                        <a:t>1</a:t>
+                      </a:r>
+                    </a:p>
+                  </a:txBody>
+                  <a:tcPr marL="73152" marR="73152" marT="27432" marB="27432" anchor="ctr">
+                    <a:solidFill>
+                      <a:srgbClr val="FFFFFF"/>
+                    </a:solidFill>
+                  </a:tcPr>
+                </a:tc>
+              </a:tr>
+              <a:tr h="365760">
+                <a:tc>
+                  <a:txBody>
+                    <a:bodyPr wrap="square"/>
+                    <a:lstStyle/>
+                    <a:p>
+                      <a:r>
+                        <a:rPr sz="1150" b="1">
+                          <a:solidFill>
+                            <a:srgbClr val="222A33"/>
+                          </a:solidFill>
+                          <a:latin typeface="Calibri"/>
+                        </a:rPr>
+                        <a:t>No, I haven't lost any teeth</a:t>
+                      </a:r>
+                    </a:p>
+                  </a:txBody>
+                  <a:tcPr marL="73152" marR="73152" marT="27432" marB="27432" anchor="ctr">
+                    <a:solidFill>
+                      <a:srgbClr val="EDF1F5"/>
+                    </a:solidFill>
+                  </a:tcPr>
+                </a:tc>
+                <a:tc>
+                  <a:txBody>
+                    <a:bodyPr wrap="square"/>
+                    <a:lstStyle/>
+                    <a:p>
+                      <a:r>
+                        <a:rPr sz="1150">
+                          <a:solidFill>
+                            <a:srgbClr val="222A33"/>
+                          </a:solidFill>
+                          <a:latin typeface="Calibri"/>
+                        </a:rPr>
+                        <a:t>1</a:t>
+                      </a:r>
+                    </a:p>
+                  </a:txBody>
+                  <a:tcPr marL="73152" marR="73152" marT="27432" marB="27432" anchor="ctr">
+                    <a:solidFill>
+                      <a:srgbClr val="EDF1F5"/>
+                    </a:solidFill>
+                  </a:tcPr>
+                </a:tc>
+              </a:tr>
+            </a:tbl>
+          </a:graphicData>
+        </a:graphic>
+      </p:graphicFrame>
+      <p:sp>
+        <p:nvSpPr>
+          <p:cNvPr id="6" name="TextBox 5"/>
+          <p:cNvSpPr txBox="1"/>
+          <p:nvPr/>
+        </p:nvSpPr>
+        <p:spPr>
+          <a:xfrm>
+            <a:off x="457200" y="3931920"/>
+            <a:ext cx="11247120" cy="548640"/>
+          </a:xfrm>
+          <a:prstGeom prst="rect">
+            <a:avLst/>
+          </a:prstGeom>
+          <a:noFill/>
+        </p:spPr>
+        <p:txBody>
+          <a:bodyPr wrap="square">
+            <a:spAutoFit/>
+          </a:bodyPr>
+          <a:lstStyle/>
+          <a:p>
+            <a:pPr algn="l"/>
+            <a:r>
+              <a:rPr sz="1300" b="0" i="1">
+                <a:solidFill>
+                  <a:srgbClr val="5A636E"/>
+                </a:solidFill>
+                <a:latin typeface="Calibri"/>
+              </a:rPr>
+              <a:t>In wide, that means summing N ever-changing 0/1 indicator columns; in long it's the same group-by you'd write for any question.</a:t>
+            </a:r>
+          </a:p>
+        </p:txBody>
+      </p:sp>
+      <p:sp>
+        <p:nvSpPr>
+          <p:cNvPr id="7" name="TextBox 6"/>
+          <p:cNvSpPr txBox="1"/>
+          <p:nvPr/>
+        </p:nvSpPr>
+        <p:spPr>
+          <a:xfrm>
+            <a:off x="457200" y="5897880"/>
+            <a:ext cx="11247120" cy="457200"/>
+          </a:xfrm>
+          <a:prstGeom prst="rect">
+            <a:avLst/>
+          </a:prstGeom>
+          <a:noFill/>
+        </p:spPr>
+        <p:txBody>
+          <a:bodyPr wrap="square">
+            <a:spAutoFit/>
+          </a:bodyPr>
+          <a:lstStyle/>
+          <a:p>
+            <a:pPr algn="l"/>
+            <a:r>
+              <a:rPr sz="1400" b="1" i="0">
+                <a:solidFill>
+                  <a:srgbClr val="CC7D15"/>
+                </a:solidFill>
+                <a:latin typeface="Calibri"/>
+              </a:rPr>
+              <a:t>Swap the concept id and the same one-liner counts smoking, education, anything — one pattern for every question.</a:t>
+            </a:r>
+          </a:p>
+        </p:txBody>
+      </p:sp>
+    </p:spTree>
+  </p:cSld>
+  <p:clrMapOvr>
+    <a:masterClrMapping/>
+  </p:clrMapOvr>
+</p:sld>
+</file>
+
+<file path=ppt/slides/slide2.xml><?xml version="1.0" encoding="utf-8"?>
+<p:sld xmlns:a="http://schemas.openxmlformats.org/drawingml/2006/main" xmlns:p="http://schemas.openxmlformats.org/presentationml/2006/main" xmlns:r="http://schemas.openxmlformats.org/officeDocument/2006/relationships">
+  <p:cSld>
+    <p:spTree>
+      <p:nvGrpSpPr>
+        <p:cNvPr id="1" name=""/>
+        <p:cNvGrpSpPr/>
+        <p:nvPr/>
+      </p:nvGrpSpPr>
+      <p:grpSpPr/>
+      <p:sp>
+        <p:nvSpPr>
+          <p:cNvPr id="2" name="Rectangle 1"/>
+          <p:cNvSpPr/>
+          <p:nvPr/>
+        </p:nvSpPr>
+        <p:spPr>
+          <a:xfrm>
+            <a:off x="0" y="0"/>
+            <a:ext cx="12191695" cy="1051560"/>
+          </a:xfrm>
+          <a:prstGeom prst="rect">
+            <a:avLst/>
+          </a:prstGeom>
+          <a:solidFill>
+            <a:srgbClr val="16324F"/>
+          </a:solidFill>
+          <a:ln>
+            <a:noFill/>
+          </a:ln>
+          <a:effectLst/>
+        </p:spPr>
+        <p:style>
+          <a:lnRef idx="1">
+            <a:schemeClr val="accent1"/>
+          </a:lnRef>
+          <a:fillRef idx="3">
+            <a:schemeClr val="accent1"/>
+          </a:fillRef>
+          <a:effectRef idx="2">
+            <a:schemeClr val="accent1"/>
+          </a:effectRef>
+          <a:fontRef idx="minor">
+            <a:schemeClr val="lt1"/>
+          </a:fontRef>
+        </p:style>
+        <p:txBody>
+          <a:bodyPr rtlCol="0" anchor="ctr" lIns="457200" tIns="109728"/>
+          <a:lstStyle/>
+          <a:p>
+            <a:pPr algn="ctr"/>
+            <a:r>
+              <a:rPr sz="2800" b="1">
+                <a:solidFill>
+                  <a:srgbClr val="FFFFFF"/>
+                </a:solidFill>
+                <a:latin typeface="Calibri"/>
+              </a:rPr>
+              <a:t>Why a data model?</a:t>
+            </a:r>
+          </a:p>
+          <a:p>
+            <a:r>
+              <a:rPr sz="1300" i="1">
+                <a:solidFill>
+                  <a:srgbClr val="BBD5D7"/>
+                </a:solidFill>
+              </a:rPr>
+              <a:t>Make the data explain itself — so analysis doesn't depend on tribal knowledge or bespoke code</a:t>
+            </a:r>
+          </a:p>
+        </p:txBody>
+      </p:sp>
+      <p:sp>
+        <p:nvSpPr>
+          <p:cNvPr id="3" name="Rectangle 2"/>
+          <p:cNvSpPr/>
+          <p:nvPr/>
+        </p:nvSpPr>
+        <p:spPr>
+          <a:xfrm>
+            <a:off x="0" y="1051560"/>
+            <a:ext cx="12191695" cy="54864"/>
+          </a:xfrm>
+          <a:prstGeom prst="rect">
+            <a:avLst/>
+          </a:prstGeom>
+          <a:solidFill>
+            <a:srgbClr val="2E8B8B"/>
+          </a:solidFill>
+          <a:ln>
+            <a:noFill/>
+          </a:ln>
+          <a:effectLst/>
+        </p:spPr>
+        <p:style>
+          <a:lnRef idx="1">
+            <a:schemeClr val="accent1"/>
+          </a:lnRef>
+          <a:fillRef idx="3">
+            <a:schemeClr val="accent1"/>
+          </a:fillRef>
+          <a:effectRef idx="2">
+            <a:schemeClr val="accent1"/>
+          </a:effectRef>
+          <a:fontRef idx="minor">
+            <a:schemeClr val="lt1"/>
+          </a:fontRef>
+        </p:style>
+        <p:txBody>
+          <a:bodyPr rtlCol="0" anchor="ctr"/>
+          <a:lstStyle/>
+          <a:p>
+            <a:pPr algn="ctr"/>
+          </a:p>
+        </p:txBody>
+      </p:sp>
+      <p:sp>
+        <p:nvSpPr>
+          <p:cNvPr id="4" name="Rounded Rectangle 3"/>
+          <p:cNvSpPr/>
+          <p:nvPr/>
+        </p:nvSpPr>
+        <p:spPr>
+          <a:xfrm>
+            <a:off x="457200" y="1874519"/>
+            <a:ext cx="3575304" cy="1737360"/>
+          </a:xfrm>
+          <a:prstGeom prst="roundRect">
+            <a:avLst/>
+          </a:prstGeom>
+          <a:solidFill>
+            <a:srgbClr val="EDF1F5"/>
+          </a:solidFill>
+          <a:ln>
+            <a:solidFill>
+              <a:srgbClr val="2E8B8B"/>
+            </a:solidFill>
+          </a:ln>
+          <a:effectLst/>
+        </p:spPr>
+        <p:style>
+          <a:lnRef idx="1">
+            <a:schemeClr val="accent1"/>
+          </a:lnRef>
+          <a:fillRef idx="3">
+            <a:schemeClr val="accent1"/>
+          </a:fillRef>
+          <a:effectRef idx="2">
+            <a:schemeClr val="accent1"/>
+          </a:effectRef>
+          <a:fontRef idx="minor">
+            <a:schemeClr val="lt1"/>
+          </a:fontRef>
+        </p:style>
+        <p:txBody>
+          <a:bodyPr rtlCol="0" anchor="t" wrap="square" lIns="164592" rIns="164592" tIns="128016"/>
+          <a:lstStyle/>
+          <a:p>
+            <a:pPr algn="ctr"/>
+            <a:r>
+              <a:rPr b="1" sz="1600">
+                <a:solidFill>
+                  <a:srgbClr val="16324F"/>
+                </a:solidFill>
+                <a:latin typeface="Calibri"/>
+              </a:rPr>
+              <a:t>Self-describing</a:t>
+            </a:r>
+          </a:p>
+          <a:p>
+            <a:pPr>
+              <a:spcBef>
+                <a:spcPts val="500"/>
+              </a:spcBef>
+            </a:pPr>
+            <a:r>
+              <a:rPr sz="1150">
+                <a:solidFill>
+                  <a:srgbClr val="5A636E"/>
+                </a:solidFill>
+                <a:latin typeface="Calibri"/>
+              </a:rPr>
+              <a:t>Meaning travels with the data — no decoder ring required.</a:t>
+            </a:r>
+          </a:p>
+        </p:txBody>
+      </p:sp>
+      <p:sp>
+        <p:nvSpPr>
+          <p:cNvPr id="5" name="Rounded Rectangle 4"/>
+          <p:cNvSpPr/>
+          <p:nvPr/>
+        </p:nvSpPr>
+        <p:spPr>
+          <a:xfrm>
+            <a:off x="4306824" y="1874519"/>
+            <a:ext cx="3575304" cy="1737360"/>
+          </a:xfrm>
+          <a:prstGeom prst="roundRect">
+            <a:avLst/>
+          </a:prstGeom>
+          <a:solidFill>
+            <a:srgbClr val="EDF1F5"/>
+          </a:solidFill>
+          <a:ln>
+            <a:solidFill>
+              <a:srgbClr val="2E8B8B"/>
+            </a:solidFill>
+          </a:ln>
+          <a:effectLst/>
+        </p:spPr>
+        <p:style>
+          <a:lnRef idx="1">
+            <a:schemeClr val="accent1"/>
+          </a:lnRef>
+          <a:fillRef idx="3">
+            <a:schemeClr val="accent1"/>
+          </a:fillRef>
+          <a:effectRef idx="2">
+            <a:schemeClr val="accent1"/>
+          </a:effectRef>
+          <a:fontRef idx="minor">
+            <a:schemeClr val="lt1"/>
+          </a:fontRef>
+        </p:style>
+        <p:txBody>
+          <a:bodyPr rtlCol="0" anchor="t" wrap="square" lIns="164592" rIns="164592" tIns="128016"/>
+          <a:lstStyle/>
+          <a:p>
+            <a:pPr algn="ctr"/>
+            <a:r>
+              <a:rPr b="1" sz="1600">
+                <a:solidFill>
+                  <a:srgbClr val="16324F"/>
+                </a:solidFill>
+                <a:latin typeface="Calibri"/>
+              </a:rPr>
+              <a:t>No tribal knowledge</a:t>
+            </a:r>
+          </a:p>
+          <a:p>
+            <a:pPr>
+              <a:spcBef>
+                <a:spcPts val="500"/>
+              </a:spcBef>
+            </a:pPr>
+            <a:r>
+              <a:rPr sz="1150">
+                <a:solidFill>
+                  <a:srgbClr val="5A636E"/>
+                </a:solidFill>
+                <a:latin typeface="Calibri"/>
+              </a:rPr>
+              <a:t>Labels, structure &amp; valid values live in the data — query it correctly without insider context.</a:t>
+            </a:r>
+          </a:p>
+        </p:txBody>
+      </p:sp>
+      <p:sp>
+        <p:nvSpPr>
+          <p:cNvPr id="6" name="Rounded Rectangle 5"/>
+          <p:cNvSpPr/>
+          <p:nvPr/>
+        </p:nvSpPr>
+        <p:spPr>
+          <a:xfrm>
+            <a:off x="8156448" y="1874519"/>
+            <a:ext cx="3575304" cy="1737360"/>
+          </a:xfrm>
+          <a:prstGeom prst="roundRect">
+            <a:avLst/>
+          </a:prstGeom>
+          <a:solidFill>
+            <a:srgbClr val="EDF1F5"/>
+          </a:solidFill>
+          <a:ln>
+            <a:solidFill>
+              <a:srgbClr val="2E8B8B"/>
+            </a:solidFill>
+          </a:ln>
+          <a:effectLst/>
+        </p:spPr>
+        <p:style>
+          <a:lnRef idx="1">
+            <a:schemeClr val="accent1"/>
+          </a:lnRef>
+          <a:fillRef idx="3">
+            <a:schemeClr val="accent1"/>
+          </a:fillRef>
+          <a:effectRef idx="2">
+            <a:schemeClr val="accent1"/>
+          </a:effectRef>
+          <a:fontRef idx="minor">
+            <a:schemeClr val="lt1"/>
+          </a:fontRef>
+        </p:style>
+        <p:txBody>
+          <a:bodyPr rtlCol="0" anchor="t" wrap="square" lIns="164592" rIns="164592" tIns="128016"/>
+          <a:lstStyle/>
+          <a:p>
+            <a:pPr algn="ctr"/>
+            <a:r>
+              <a:rPr b="1" sz="1600">
+                <a:solidFill>
+                  <a:srgbClr val="16324F"/>
+                </a:solidFill>
+                <a:latin typeface="Calibri"/>
+              </a:rPr>
+              <a:t>Metadata in the data</a:t>
+            </a:r>
+          </a:p>
+          <a:p>
+            <a:pPr>
+              <a:spcBef>
+                <a:spcPts val="500"/>
+              </a:spcBef>
+            </a:pPr>
+            <a:r>
+              <a:rPr sz="1150">
+                <a:solidFill>
+                  <a:srgbClr val="5A636E"/>
+                </a:solidFill>
+                <a:latin typeface="Calibri"/>
+              </a:rPr>
+              <a:t>Not in side-car spreadsheets or scripts that drift out of sync.</a:t>
+            </a:r>
+          </a:p>
+        </p:txBody>
+      </p:sp>
+      <p:sp>
+        <p:nvSpPr>
+          <p:cNvPr id="7" name="Rounded Rectangle 6"/>
+          <p:cNvSpPr/>
+          <p:nvPr/>
+        </p:nvSpPr>
+        <p:spPr>
+          <a:xfrm>
+            <a:off x="457200" y="3794760"/>
+            <a:ext cx="3575304" cy="1737360"/>
+          </a:xfrm>
+          <a:prstGeom prst="roundRect">
+            <a:avLst/>
+          </a:prstGeom>
+          <a:solidFill>
+            <a:srgbClr val="EDF1F5"/>
+          </a:solidFill>
+          <a:ln>
+            <a:solidFill>
+              <a:srgbClr val="2E8B8B"/>
+            </a:solidFill>
+          </a:ln>
+          <a:effectLst/>
+        </p:spPr>
+        <p:style>
+          <a:lnRef idx="1">
+            <a:schemeClr val="accent1"/>
+          </a:lnRef>
+          <a:fillRef idx="3">
+            <a:schemeClr val="accent1"/>
+          </a:fillRef>
+          <a:effectRef idx="2">
+            <a:schemeClr val="accent1"/>
+          </a:effectRef>
+          <a:fontRef idx="minor">
+            <a:schemeClr val="lt1"/>
+          </a:fontRef>
+        </p:style>
+        <p:txBody>
+          <a:bodyPr rtlCol="0" anchor="t" wrap="square" lIns="164592" rIns="164592" tIns="128016"/>
+          <a:lstStyle/>
+          <a:p>
+            <a:pPr algn="ctr"/>
+            <a:r>
+              <a:rPr b="1" sz="1600">
+                <a:solidFill>
+                  <a:srgbClr val="16324F"/>
+                </a:solidFill>
+                <a:latin typeface="Calibri"/>
+              </a:rPr>
+              <a:t>Standardized analyses</a:t>
+            </a:r>
+          </a:p>
+          <a:p>
+            <a:pPr>
+              <a:spcBef>
+                <a:spcPts val="500"/>
+              </a:spcBef>
+            </a:pPr>
+            <a:r>
+              <a:rPr sz="1150">
+                <a:solidFill>
+                  <a:srgbClr val="5A636E"/>
+                </a:solidFill>
+                <a:latin typeface="Calibri"/>
+              </a:rPr>
+              <a:t>The same question is answered the same way by everyone.</a:t>
+            </a:r>
+          </a:p>
+        </p:txBody>
+      </p:sp>
+      <p:sp>
+        <p:nvSpPr>
+          <p:cNvPr id="8" name="Rounded Rectangle 7"/>
+          <p:cNvSpPr/>
+          <p:nvPr/>
+        </p:nvSpPr>
+        <p:spPr>
+          <a:xfrm>
+            <a:off x="4306824" y="3794760"/>
+            <a:ext cx="3575304" cy="1737360"/>
+          </a:xfrm>
+          <a:prstGeom prst="roundRect">
+            <a:avLst/>
+          </a:prstGeom>
+          <a:solidFill>
+            <a:srgbClr val="EDF1F5"/>
+          </a:solidFill>
+          <a:ln>
+            <a:solidFill>
+              <a:srgbClr val="2E8B8B"/>
+            </a:solidFill>
+          </a:ln>
+          <a:effectLst/>
+        </p:spPr>
+        <p:style>
+          <a:lnRef idx="1">
+            <a:schemeClr val="accent1"/>
+          </a:lnRef>
+          <a:fillRef idx="3">
+            <a:schemeClr val="accent1"/>
+          </a:fillRef>
+          <a:effectRef idx="2">
+            <a:schemeClr val="accent1"/>
+          </a:effectRef>
+          <a:fontRef idx="minor">
+            <a:schemeClr val="lt1"/>
+          </a:fontRef>
+        </p:style>
+        <p:txBody>
+          <a:bodyPr rtlCol="0" anchor="t" wrap="square" lIns="164592" rIns="164592" tIns="128016"/>
+          <a:lstStyle/>
+          <a:p>
+            <a:pPr algn="ctr"/>
+            <a:r>
+              <a:rPr b="1" sz="1600">
+                <a:solidFill>
+                  <a:srgbClr val="16324F"/>
+                </a:solidFill>
+                <a:latin typeface="Calibri"/>
+              </a:rPr>
+              <a:t>A schema contract</a:t>
+            </a:r>
+          </a:p>
+          <a:p>
+            <a:pPr>
+              <a:spcBef>
+                <a:spcPts val="500"/>
+              </a:spcBef>
+            </a:pPr>
+            <a:r>
+              <a:rPr sz="1150">
+                <a:solidFill>
+                  <a:srgbClr val="5A636E"/>
+                </a:solidFill>
+                <a:latin typeface="Calibri"/>
+              </a:rPr>
+              <a:t>Tools built on it keep running when new data arrives.</a:t>
+            </a:r>
+          </a:p>
+        </p:txBody>
+      </p:sp>
+      <p:sp>
+        <p:nvSpPr>
+          <p:cNvPr id="9" name="Rounded Rectangle 8"/>
+          <p:cNvSpPr/>
+          <p:nvPr/>
+        </p:nvSpPr>
+        <p:spPr>
+          <a:xfrm>
+            <a:off x="8156448" y="3794760"/>
+            <a:ext cx="3575304" cy="1737360"/>
+          </a:xfrm>
+          <a:prstGeom prst="roundRect">
+            <a:avLst/>
+          </a:prstGeom>
+          <a:solidFill>
+            <a:srgbClr val="EDF1F5"/>
+          </a:solidFill>
+          <a:ln>
+            <a:solidFill>
+              <a:srgbClr val="2E8B8B"/>
+            </a:solidFill>
+          </a:ln>
+          <a:effectLst/>
+        </p:spPr>
+        <p:style>
+          <a:lnRef idx="1">
+            <a:schemeClr val="accent1"/>
+          </a:lnRef>
+          <a:fillRef idx="3">
+            <a:schemeClr val="accent1"/>
+          </a:fillRef>
+          <a:effectRef idx="2">
+            <a:schemeClr val="accent1"/>
+          </a:effectRef>
+          <a:fontRef idx="minor">
+            <a:schemeClr val="lt1"/>
+          </a:fontRef>
+        </p:style>
+        <p:txBody>
+          <a:bodyPr rtlCol="0" anchor="t" wrap="square" lIns="164592" rIns="164592" tIns="128016"/>
+          <a:lstStyle/>
+          <a:p>
+            <a:pPr algn="ctr"/>
+            <a:r>
+              <a:rPr b="1" sz="1600">
+                <a:solidFill>
+                  <a:srgbClr val="16324F"/>
+                </a:solidFill>
+                <a:latin typeface="Calibri"/>
+              </a:rPr>
+              <a:t>Shared abstractions</a:t>
+            </a:r>
+          </a:p>
+          <a:p>
+            <a:pPr>
+              <a:spcBef>
+                <a:spcPts val="500"/>
+              </a:spcBef>
+            </a:pPr>
+            <a:r>
+              <a:rPr sz="1150">
+                <a:solidFill>
+                  <a:srgbClr val="5A636E"/>
+                </a:solidFill>
+                <a:latin typeface="Calibri"/>
+              </a:rPr>
+              <a:t>Every select-all handled one way; every loop one way — no per-question code.</a:t>
+            </a:r>
+          </a:p>
+        </p:txBody>
+      </p:sp>
+      <p:sp>
+        <p:nvSpPr>
+          <p:cNvPr id="10" name="Rounded Rectangle 9"/>
+          <p:cNvSpPr/>
+          <p:nvPr/>
+        </p:nvSpPr>
+        <p:spPr>
+          <a:xfrm>
+            <a:off x="457200" y="5806440"/>
+            <a:ext cx="11274552" cy="658368"/>
+          </a:xfrm>
+          <a:prstGeom prst="roundRect">
+            <a:avLst/>
+          </a:prstGeom>
+          <a:solidFill>
+            <a:srgbClr val="16324F"/>
+          </a:solidFill>
+          <a:ln>
+            <a:noFill/>
+          </a:ln>
+          <a:effectLst/>
+        </p:spPr>
+        <p:style>
+          <a:lnRef idx="1">
+            <a:schemeClr val="accent1"/>
+          </a:lnRef>
+          <a:fillRef idx="3">
+            <a:schemeClr val="accent1"/>
+          </a:fillRef>
+          <a:effectRef idx="2">
+            <a:schemeClr val="accent1"/>
+          </a:effectRef>
+          <a:fontRef idx="minor">
+            <a:schemeClr val="lt1"/>
+          </a:fontRef>
+        </p:style>
+        <p:txBody>
+          <a:bodyPr rtlCol="0" anchor="ctr" wrap="square" lIns="228600"/>
+          <a:lstStyle/>
+          <a:p>
+            <a:pPr algn="ctr"/>
+            <a:r>
+              <a:rPr sz="1400" b="1">
+                <a:solidFill>
+                  <a:srgbClr val="FFFFFF"/>
+                </a:solidFill>
+                <a:latin typeface="Calibri"/>
+              </a:rPr>
+              <a:t>Today that knowledge lives in column-name conventions, spreadsheets, and analysts' heads. A data model puts it in the data.</a:t>
+            </a:r>
+          </a:p>
+        </p:txBody>
+      </p:sp>
+    </p:spTree>
+  </p:cSld>
+  <p:clrMapOvr>
+    <a:masterClrMapping/>
+  </p:clrMapOvr>
+</p:sld>
+</file>
+
+<file path=ppt/slides/slide20.xml><?xml version="1.0" encoding="utf-8"?>
 <p:sld xmlns:a="http://schemas.openxmlformats.org/drawingml/2006/main" xmlns:p="http://schemas.openxmlformats.org/presentationml/2006/main" xmlns:r="http://schemas.openxmlformats.org/officeDocument/2006/relationships">
   <p:cSld>
     <p:spTree>
@@ -7569,7 +11646,7 @@
 </p:sld>
 </file>
 
-<file path=ppt/slides/slide2.xml><?xml version="1.0" encoding="utf-8"?>
+<file path=ppt/slides/slide3.xml><?xml version="1.0" encoding="utf-8"?>
 <p:sld xmlns:a="http://schemas.openxmlformats.org/drawingml/2006/main" xmlns:p="http://schemas.openxmlformats.org/presentationml/2006/main" xmlns:r="http://schemas.openxmlformats.org/officeDocument/2006/relationships">
   <p:cSld>
     <p:spTree>
@@ -7627,7 +11704,7 @@
                 </a:solidFill>
                 <a:latin typeface="Calibri"/>
               </a:rPr>
-              <a:t>Why a data model at all?</a:t>
+              <a:t>…and it's the OMOP lesson — applied to our own data</a:t>
             </a:r>
           </a:p>
           <a:p>
@@ -8020,7 +12097,7 @@
 </p:sld>
 </file>
 
-<file path=ppt/slides/slide3.xml><?xml version="1.0" encoding="utf-8"?>
+<file path=ppt/slides/slide4.xml><?xml version="1.0" encoding="utf-8"?>
 <p:sld xmlns:a="http://schemas.openxmlformats.org/drawingml/2006/main" xmlns:p="http://schemas.openxmlformats.org/presentationml/2006/main" xmlns:r="http://schemas.openxmlformats.org/officeDocument/2006/relationships">
   <p:cSld>
     <p:spTree>
@@ -8283,7 +12360,7 @@
 </p:sld>
 </file>
 
-<file path=ppt/slides/slide4.xml><?xml version="1.0" encoding="utf-8"?>
+<file path=ppt/slides/slide5.xml><?xml version="1.0" encoding="utf-8"?>
 <p:sld xmlns:a="http://schemas.openxmlformats.org/drawingml/2006/main" xmlns:p="http://schemas.openxmlformats.org/presentationml/2006/main" xmlns:r="http://schemas.openxmlformats.org/officeDocument/2006/relationships">
   <p:cSld>
     <p:spTree>
@@ -8565,7 +12642,7 @@
 </p:sld>
 </file>
 
-<file path=ppt/slides/slide5.xml><?xml version="1.0" encoding="utf-8"?>
+<file path=ppt/slides/slide6.xml><?xml version="1.0" encoding="utf-8"?>
 <p:sld xmlns:a="http://schemas.openxmlformats.org/drawingml/2006/main" xmlns:p="http://schemas.openxmlformats.org/presentationml/2006/main" xmlns:r="http://schemas.openxmlformats.org/officeDocument/2006/relationships">
   <p:cSld>
     <p:spTree>
@@ -9263,7 +13340,7 @@
 </p:sld>
 </file>
 
-<file path=ppt/slides/slide6.xml><?xml version="1.0" encoding="utf-8"?>
+<file path=ppt/slides/slide7.xml><?xml version="1.0" encoding="utf-8"?>
 <p:sld xmlns:a="http://schemas.openxmlformats.org/drawingml/2006/main" xmlns:p="http://schemas.openxmlformats.org/presentationml/2006/main" xmlns:r="http://schemas.openxmlformats.org/officeDocument/2006/relationships">
   <p:cSld>
     <p:spTree>
@@ -9510,7 +13587,7 @@
 </p:sld>
 </file>
 
-<file path=ppt/slides/slide7.xml><?xml version="1.0" encoding="utf-8"?>
+<file path=ppt/slides/slide8.xml><?xml version="1.0" encoding="utf-8"?>
 <p:sld xmlns:a="http://schemas.openxmlformats.org/drawingml/2006/main" xmlns:p="http://schemas.openxmlformats.org/presentationml/2006/main" xmlns:r="http://schemas.openxmlformats.org/officeDocument/2006/relationships">
   <p:cSld>
     <p:spTree>
@@ -9694,7 +13771,7 @@
 </p:sld>
 </file>
 
-<file path=ppt/slides/slide8.xml><?xml version="1.0" encoding="utf-8"?>
+<file path=ppt/slides/slide9.xml><?xml version="1.0" encoding="utf-8"?>
 <p:sld xmlns:a="http://schemas.openxmlformats.org/drawingml/2006/main" xmlns:p="http://schemas.openxmlformats.org/presentationml/2006/main" xmlns:r="http://schemas.openxmlformats.org/officeDocument/2006/relationships">
   <p:cSld>
     <p:spTree>
@@ -10244,533 +14321,6 @@
                 <a:latin typeface="Calibri"/>
               </a:rPr>
               <a:t>Phased &amp; low-risk: the dictionary tables are untouched; this is a view we layer on — adopt it where it helps, keep everything else as-is.</a:t>
-            </a:r>
-          </a:p>
-        </p:txBody>
-      </p:sp>
-    </p:spTree>
-  </p:cSld>
-  <p:clrMapOvr>
-    <a:masterClrMapping/>
-  </p:clrMapOvr>
-</p:sld>
-</file>
-
-<file path=ppt/slides/slide9.xml><?xml version="1.0" encoding="utf-8"?>
-<p:sld xmlns:a="http://schemas.openxmlformats.org/drawingml/2006/main" xmlns:p="http://schemas.openxmlformats.org/presentationml/2006/main" xmlns:r="http://schemas.openxmlformats.org/officeDocument/2006/relationships">
-  <p:cSld>
-    <p:spTree>
-      <p:nvGrpSpPr>
-        <p:cNvPr id="1" name=""/>
-        <p:cNvGrpSpPr/>
-        <p:nvPr/>
-      </p:nvGrpSpPr>
-      <p:grpSpPr/>
-      <p:sp>
-        <p:nvSpPr>
-          <p:cNvPr id="2" name="Rectangle 1"/>
-          <p:cNvSpPr/>
-          <p:nvPr/>
-        </p:nvSpPr>
-        <p:spPr>
-          <a:xfrm>
-            <a:off x="0" y="0"/>
-            <a:ext cx="12191695" cy="1051560"/>
-          </a:xfrm>
-          <a:prstGeom prst="rect">
-            <a:avLst/>
-          </a:prstGeom>
-          <a:solidFill>
-            <a:srgbClr val="16324F"/>
-          </a:solidFill>
-          <a:ln>
-            <a:noFill/>
-          </a:ln>
-          <a:effectLst/>
-        </p:spPr>
-        <p:style>
-          <a:lnRef idx="1">
-            <a:schemeClr val="accent1"/>
-          </a:lnRef>
-          <a:fillRef idx="3">
-            <a:schemeClr val="accent1"/>
-          </a:fillRef>
-          <a:effectRef idx="2">
-            <a:schemeClr val="accent1"/>
-          </a:effectRef>
-          <a:fontRef idx="minor">
-            <a:schemeClr val="lt1"/>
-          </a:fontRef>
-        </p:style>
-        <p:txBody>
-          <a:bodyPr rtlCol="0" anchor="ctr" lIns="457200" tIns="109728"/>
-          <a:lstStyle/>
-          <a:p>
-            <a:pPr algn="ctr"/>
-            <a:r>
-              <a:rPr sz="2800" b="1">
-                <a:solidFill>
-                  <a:srgbClr val="FFFFFF"/>
-                </a:solidFill>
-                <a:latin typeface="Calibri"/>
-              </a:rPr>
-              <a:t>A two-phase path</a:t>
-            </a:r>
-          </a:p>
-          <a:p>
-            <a:r>
-              <a:rPr sz="1300" i="1">
-                <a:solidFill>
-                  <a:srgbClr val="BBD5D7"/>
-                </a:solidFill>
-              </a:rPr>
-              <a:t>Phase 1 proves it cheaply · Phase 2 builds the governed warehouse</a:t>
-            </a:r>
-          </a:p>
-        </p:txBody>
-      </p:sp>
-      <p:sp>
-        <p:nvSpPr>
-          <p:cNvPr id="3" name="Rectangle 2"/>
-          <p:cNvSpPr/>
-          <p:nvPr/>
-        </p:nvSpPr>
-        <p:spPr>
-          <a:xfrm>
-            <a:off x="0" y="1051560"/>
-            <a:ext cx="12191695" cy="54864"/>
-          </a:xfrm>
-          <a:prstGeom prst="rect">
-            <a:avLst/>
-          </a:prstGeom>
-          <a:solidFill>
-            <a:srgbClr val="2E8B8B"/>
-          </a:solidFill>
-          <a:ln>
-            <a:noFill/>
-          </a:ln>
-          <a:effectLst/>
-        </p:spPr>
-        <p:style>
-          <a:lnRef idx="1">
-            <a:schemeClr val="accent1"/>
-          </a:lnRef>
-          <a:fillRef idx="3">
-            <a:schemeClr val="accent1"/>
-          </a:fillRef>
-          <a:effectRef idx="2">
-            <a:schemeClr val="accent1"/>
-          </a:effectRef>
-          <a:fontRef idx="minor">
-            <a:schemeClr val="lt1"/>
-          </a:fontRef>
-        </p:style>
-        <p:txBody>
-          <a:bodyPr rtlCol="0" anchor="ctr"/>
-          <a:lstStyle/>
-          <a:p>
-            <a:pPr algn="ctr"/>
-          </a:p>
-        </p:txBody>
-      </p:sp>
-      <p:graphicFrame>
-        <p:nvGraphicFramePr>
-          <p:cNvPr id="4" name="Table 3"/>
-          <p:cNvGraphicFramePr>
-            <a:graphicFrameLocks noGrp="1"/>
-          </p:cNvGraphicFramePr>
-          <p:nvPr/>
-        </p:nvGraphicFramePr>
-        <p:xfrm>
-          <a:off x="548640" y="1554480"/>
-          <a:ext cx="11064240" cy="3108960"/>
-        </p:xfrm>
-        <a:graphic>
-          <a:graphicData uri="http://schemas.openxmlformats.org/drawingml/2006/table">
-            <a:tbl>
-              <a:tblPr firstRow="1" bandRow="1">
-                <a:tableStyleId>{5C22544A-7EE6-4342-B048-85BDC9FD1C3A}</a:tableStyleId>
-              </a:tblPr>
-              <a:tblGrid>
-                <a:gridCol w="1554480"/>
-                <a:gridCol w="4754880"/>
-                <a:gridCol w="4754880"/>
-              </a:tblGrid>
-              <a:tr h="621792">
-                <a:tc>
-                  <a:txBody>
-                    <a:bodyPr wrap="square"/>
-                    <a:lstStyle/>
-                    <a:p>
-                      <a:r>
-                        <a:rPr b="1" sz="1400">
-                          <a:solidFill>
-                            <a:srgbClr val="FFFFFF"/>
-                          </a:solidFill>
-                          <a:latin typeface="Calibri"/>
-                        </a:rPr>
-                        <a:t/>
-                      </a:r>
-                    </a:p>
-                  </a:txBody>
-                  <a:tcPr marL="73152" marR="73152" marT="27432" marB="27432" anchor="ctr">
-                    <a:solidFill>
-                      <a:srgbClr val="16324F"/>
-                    </a:solidFill>
-                  </a:tcPr>
-                </a:tc>
-                <a:tc>
-                  <a:txBody>
-                    <a:bodyPr wrap="square"/>
-                    <a:lstStyle/>
-                    <a:p>
-                      <a:r>
-                        <a:rPr b="1" sz="1400">
-                          <a:solidFill>
-                            <a:srgbClr val="FFFFFF"/>
-                          </a:solidFill>
-                          <a:latin typeface="Calibri"/>
-                        </a:rPr>
-                        <a:t>Phase 1 — Dictionary-Direct</a:t>
-                      </a:r>
-                    </a:p>
-                  </a:txBody>
-                  <a:tcPr marL="73152" marR="73152" marT="27432" marB="27432" anchor="ctr">
-                    <a:solidFill>
-                      <a:srgbClr val="16324F"/>
-                    </a:solidFill>
-                  </a:tcPr>
-                </a:tc>
-                <a:tc>
-                  <a:txBody>
-                    <a:bodyPr wrap="square"/>
-                    <a:lstStyle/>
-                    <a:p>
-                      <a:r>
-                        <a:rPr b="1" sz="1400">
-                          <a:solidFill>
-                            <a:srgbClr val="FFFFFF"/>
-                          </a:solidFill>
-                          <a:latin typeface="Calibri"/>
-                        </a:rPr>
-                        <a:t>Phase 2 — PR2 warehouse</a:t>
-                      </a:r>
-                    </a:p>
-                  </a:txBody>
-                  <a:tcPr marL="73152" marR="73152" marT="27432" marB="27432" anchor="ctr">
-                    <a:solidFill>
-                      <a:srgbClr val="16324F"/>
-                    </a:solidFill>
-                  </a:tcPr>
-                </a:tc>
-              </a:tr>
-              <a:tr h="621792">
-                <a:tc>
-                  <a:txBody>
-                    <a:bodyPr wrap="square"/>
-                    <a:lstStyle/>
-                    <a:p>
-                      <a:r>
-                        <a:rPr sz="1400" b="1">
-                          <a:solidFill>
-                            <a:srgbClr val="222A33"/>
-                          </a:solidFill>
-                          <a:latin typeface="Calibri"/>
-                        </a:rPr>
-                        <a:t>What</a:t>
-                      </a:r>
-                    </a:p>
-                  </a:txBody>
-                  <a:tcPr marL="73152" marR="73152" marT="27432" marB="27432" anchor="ctr">
-                    <a:solidFill>
-                      <a:srgbClr val="FFFFFF"/>
-                    </a:solidFill>
-                  </a:tcPr>
-                </a:tc>
-                <a:tc>
-                  <a:txBody>
-                    <a:bodyPr wrap="square"/>
-                    <a:lstStyle/>
-                    <a:p>
-                      <a:r>
-                        <a:rPr sz="1400">
-                          <a:solidFill>
-                            <a:srgbClr val="222A33"/>
-                          </a:solidFill>
-                          <a:latin typeface="Calibri"/>
-                        </a:rPr>
-                        <a:t>dictionary as-is + 1 responses table</a:t>
-                      </a:r>
-                    </a:p>
-                  </a:txBody>
-                  <a:tcPr marL="73152" marR="73152" marT="27432" marB="27432" anchor="ctr">
-                    <a:solidFill>
-                      <a:srgbClr val="FFFFFF"/>
-                    </a:solidFill>
-                  </a:tcPr>
-                </a:tc>
-                <a:tc>
-                  <a:txBody>
-                    <a:bodyPr wrap="square"/>
-                    <a:lstStyle/>
-                    <a:p>
-                      <a:r>
-                        <a:rPr sz="1400">
-                          <a:solidFill>
-                            <a:srgbClr val="222A33"/>
-                          </a:solidFill>
-                          <a:latin typeface="Calibri"/>
-                        </a:rPr>
-                        <a:t>cleaned dims, placement bridge, sessions, governance</a:t>
-                      </a:r>
-                    </a:p>
-                  </a:txBody>
-                  <a:tcPr marL="73152" marR="73152" marT="27432" marB="27432" anchor="ctr">
-                    <a:solidFill>
-                      <a:srgbClr val="FFFFFF"/>
-                    </a:solidFill>
-                  </a:tcPr>
-                </a:tc>
-              </a:tr>
-              <a:tr h="621792">
-                <a:tc>
-                  <a:txBody>
-                    <a:bodyPr wrap="square"/>
-                    <a:lstStyle/>
-                    <a:p>
-                      <a:r>
-                        <a:rPr sz="1400" b="1">
-                          <a:solidFill>
-                            <a:srgbClr val="222A33"/>
-                          </a:solidFill>
-                          <a:latin typeface="Calibri"/>
-                        </a:rPr>
-                        <a:t>Buys</a:t>
-                      </a:r>
-                    </a:p>
-                  </a:txBody>
-                  <a:tcPr marL="73152" marR="73152" marT="27432" marB="27432" anchor="ctr">
-                    <a:solidFill>
-                      <a:srgbClr val="EDF1F5"/>
-                    </a:solidFill>
-                  </a:tcPr>
-                </a:tc>
-                <a:tc>
-                  <a:txBody>
-                    <a:bodyPr wrap="square"/>
-                    <a:lstStyle/>
-                    <a:p>
-                      <a:r>
-                        <a:rPr sz="1400">
-                          <a:solidFill>
-                            <a:srgbClr val="222A33"/>
-                          </a:solidFill>
-                          <a:latin typeface="Calibri"/>
-                        </a:rPr>
-                        <a:t>stable schema, generic SQL, labels, v1/v2 pool</a:t>
-                      </a:r>
-                    </a:p>
-                  </a:txBody>
-                  <a:tcPr marL="73152" marR="73152" marT="27432" marB="27432" anchor="ctr">
-                    <a:solidFill>
-                      <a:srgbClr val="EDF1F5"/>
-                    </a:solidFill>
-                  </a:tcPr>
-                </a:tc>
-                <a:tc>
-                  <a:txBody>
-                    <a:bodyPr wrap="square"/>
-                    <a:lstStyle/>
-                    <a:p>
-                      <a:r>
-                        <a:rPr sz="1400">
-                          <a:solidFill>
-                            <a:srgbClr val="222A33"/>
-                          </a:solidFill>
-                          <a:latin typeface="Calibri"/>
-                        </a:rPr>
-                        <a:t>true missingness, governed access, marts, view library</a:t>
-                      </a:r>
-                    </a:p>
-                  </a:txBody>
-                  <a:tcPr marL="73152" marR="73152" marT="27432" marB="27432" anchor="ctr">
-                    <a:solidFill>
-                      <a:srgbClr val="EDF1F5"/>
-                    </a:solidFill>
-                  </a:tcPr>
-                </a:tc>
-              </a:tr>
-              <a:tr h="621792">
-                <a:tc>
-                  <a:txBody>
-                    <a:bodyPr wrap="square"/>
-                    <a:lstStyle/>
-                    <a:p>
-                      <a:r>
-                        <a:rPr sz="1400" b="1">
-                          <a:solidFill>
-                            <a:srgbClr val="222A33"/>
-                          </a:solidFill>
-                          <a:latin typeface="Calibri"/>
-                        </a:rPr>
-                        <a:t>Lift</a:t>
-                      </a:r>
-                    </a:p>
-                  </a:txBody>
-                  <a:tcPr marL="73152" marR="73152" marT="27432" marB="27432" anchor="ctr">
-                    <a:solidFill>
-                      <a:srgbClr val="FFFFFF"/>
-                    </a:solidFill>
-                  </a:tcPr>
-                </a:tc>
-                <a:tc>
-                  <a:txBody>
-                    <a:bodyPr wrap="square"/>
-                    <a:lstStyle/>
-                    <a:p>
-                      <a:r>
-                        <a:rPr sz="1400">
-                          <a:solidFill>
-                            <a:srgbClr val="222A33"/>
-                          </a:solidFill>
-                          <a:latin typeface="Calibri"/>
-                        </a:rPr>
-                        <a:t>low — reuses CleanConnect + dictionary</a:t>
-                      </a:r>
-                    </a:p>
-                  </a:txBody>
-                  <a:tcPr marL="73152" marR="73152" marT="27432" marB="27432" anchor="ctr">
-                    <a:solidFill>
-                      <a:srgbClr val="FFFFFF"/>
-                    </a:solidFill>
-                  </a:tcPr>
-                </a:tc>
-                <a:tc>
-                  <a:txBody>
-                    <a:bodyPr wrap="square"/>
-                    <a:lstStyle/>
-                    <a:p>
-                      <a:r>
-                        <a:rPr sz="1400">
-                          <a:solidFill>
-                            <a:srgbClr val="222A33"/>
-                          </a:solidFill>
-                          <a:latin typeface="Calibri"/>
-                        </a:rPr>
-                        <a:t>larger, phased — builds on Phase 1's fact</a:t>
-                      </a:r>
-                    </a:p>
-                  </a:txBody>
-                  <a:tcPr marL="73152" marR="73152" marT="27432" marB="27432" anchor="ctr">
-                    <a:solidFill>
-                      <a:srgbClr val="FFFFFF"/>
-                    </a:solidFill>
-                  </a:tcPr>
-                </a:tc>
-              </a:tr>
-              <a:tr h="621792">
-                <a:tc>
-                  <a:txBody>
-                    <a:bodyPr wrap="square"/>
-                    <a:lstStyle/>
-                    <a:p>
-                      <a:r>
-                        <a:rPr sz="1400" b="1">
-                          <a:solidFill>
-                            <a:srgbClr val="222A33"/>
-                          </a:solidFill>
-                          <a:latin typeface="Calibri"/>
-                        </a:rPr>
-                        <a:t>Release-ready</a:t>
-                      </a:r>
-                    </a:p>
-                  </a:txBody>
-                  <a:tcPr marL="73152" marR="73152" marT="27432" marB="27432" anchor="ctr">
-                    <a:solidFill>
-                      <a:srgbClr val="EDF1F5"/>
-                    </a:solidFill>
-                  </a:tcPr>
-                </a:tc>
-                <a:tc>
-                  <a:txBody>
-                    <a:bodyPr wrap="square"/>
-                    <a:lstStyle/>
-                    <a:p>
-                      <a:r>
-                        <a:rPr sz="1400">
-                          <a:solidFill>
-                            <a:srgbClr val="222A33"/>
-                          </a:solidFill>
-                          <a:latin typeface="Calibri"/>
-                        </a:rPr>
-                        <a:t>internal / analyst only</a:t>
-                      </a:r>
-                    </a:p>
-                  </a:txBody>
-                  <a:tcPr marL="73152" marR="73152" marT="27432" marB="27432" anchor="ctr">
-                    <a:solidFill>
-                      <a:srgbClr val="EDF1F5"/>
-                    </a:solidFill>
-                  </a:tcPr>
-                </a:tc>
-                <a:tc>
-                  <a:txBody>
-                    <a:bodyPr wrap="square"/>
-                    <a:lstStyle/>
-                    <a:p>
-                      <a:r>
-                        <a:rPr sz="1400">
-                          <a:solidFill>
-                            <a:srgbClr val="222A33"/>
-                          </a:solidFill>
-                          <a:latin typeface="Calibri"/>
-                        </a:rPr>
-                        <a:t>yes — external PR2 sharing</a:t>
-                      </a:r>
-                    </a:p>
-                  </a:txBody>
-                  <a:tcPr marL="73152" marR="73152" marT="27432" marB="27432" anchor="ctr">
-                    <a:solidFill>
-                      <a:srgbClr val="EDF1F5"/>
-                    </a:solidFill>
-                  </a:tcPr>
-                </a:tc>
-              </a:tr>
-            </a:tbl>
-          </a:graphicData>
-        </a:graphic>
-      </p:graphicFrame>
-      <p:sp>
-        <p:nvSpPr>
-          <p:cNvPr id="5" name="TextBox 4"/>
-          <p:cNvSpPr txBox="1"/>
-          <p:nvPr/>
-        </p:nvSpPr>
-        <p:spPr>
-          <a:xfrm>
-            <a:off x="548640" y="5120640"/>
-            <a:ext cx="11064240" cy="548640"/>
-          </a:xfrm>
-          <a:prstGeom prst="rect">
-            <a:avLst/>
-          </a:prstGeom>
-          <a:noFill/>
-        </p:spPr>
-        <p:txBody>
-          <a:bodyPr wrap="square">
-            <a:spAutoFit/>
-          </a:bodyPr>
-          <a:lstStyle/>
-          <a:p>
-            <a:pPr algn="l"/>
-            <a:r>
-              <a:rPr sz="1500" b="0" i="1">
-                <a:solidFill>
-                  <a:srgbClr val="5A636E"/>
-                </a:solidFill>
-                <a:latin typeface="Calibri"/>
-              </a:rPr>
-              <a:t>Same responses fact both phases — Phase 1 is a down payment, not throwaway work.</a:t>
             </a:r>
           </a:p>
         </p:txBody>

--- a/docs/Connect_Data_Model_Pitch.pptx
+++ b/docs/Connect_Data_Model_Pitch.pptx
@@ -23,8 +23,6 @@
     <p:sldId id="271" r:id="rId23"/>
     <p:sldId id="272" r:id="rId24"/>
     <p:sldId id="273" r:id="rId25"/>
-    <p:sldId id="274" r:id="rId26"/>
-    <p:sldId id="275" r:id="rId27"/>
   </p:sldIdLst>
   <p:sldSz cx="12191695" cy="6858000" type="screen4x3"/>
   <p:notesSz cx="6858000" cy="9144000"/>
@@ -521,7 +519,7 @@
           <a:lstStyle/>
           <a:p>
             <a:r>
-              <a:t>We already believe in this idea (OMOP) — we just never applied it to our own Connect data. Two phases: a fast Phase 1 win, then the governed PR2 warehouse. See internal_pitch.md — The ask.</a:t>
+              <a:t>We already believe in this idea (OMOP) — we just never applied it to our own Connect data. The accepted model is Dictionary-Direct; further capabilities are adopted as incremental enhancements. See internal_pitch.md — The ask.</a:t>
             </a:r>
           </a:p>
         </p:txBody>
@@ -591,7 +589,7 @@
           <a:lstStyle/>
           <a:p>
             <a:r>
-              <a:t>Phase 2 adds the placement bridge, sessions, version-scoped options, layers, governance. See internal_pitch.md — Phase 1 / Phase 2.</a:t>
+              <a:t>The larger redesign was not adopted wholesale; its features are these incremental enhancements on the accepted Dictionary-Direct model. Each attaches to the same responses fact and keeps the dictionary as the source of truth. Honest dependencies (from the backlog): CIDTool maturity for dims, a Quest parser for skip_logic, and governance as an org/IRB effort. See docs/enhancement_backlog.md.</a:t>
             </a:r>
           </a:p>
         </p:txBody>
@@ -661,7 +659,7 @@
           <a:lstStyle/>
           <a:p>
             <a:r>
-              <a:t>Full Phase 2 ERD. Dense by design — the SVG (docs/connect_data_model.svg) zooms cleanly. See internal_pitch.md — Phase 2.</a:t>
+              <a:t>Same long-format thesis as our model, arrived at independently. The one fix: concept IDs, not strings. See CLAUDE.md — Event plane: DevOps long-format proposal; docs/devops_event_tables_memo.md.</a:t>
             </a:r>
           </a:p>
         </p:txBody>
@@ -731,7 +729,7 @@
           <a:lstStyle/>
           <a:p>
             <a:r>
-              <a:t>Verdict: doable, nothing needs a capability Connect lacks — but it's dependencies + org/policy, not modeling. CIDTool verified 2026-06-22 as a small in-dev JS tool, not a production dimension emitter. Sequence: dims+placement+sessions first (mechanical); governance in parallel early (long pole, gates external release); concept plane/marts/OMOP deferred until pulled. BigQuery has no FK enforcement — relationships logical, enforced by transform + dbt tests. See CLAUDE.md — Phase 2 feasibility.</a:t>
+              <a:t>Round hub (~ OMOP visit) off participants; response_sessions = DevOps 'surveys' table; collection/kit/incentive/refusal facts key on (connect_id, round); v_participant_events = SMDB unified view. See dbml/data_model_events.dbml.</a:t>
             </a:r>
           </a:p>
         </p:txBody>
@@ -801,7 +799,7 @@
           <a:lstStyle/>
           <a:p>
             <a:r>
-              <a:t>Same long-format thesis as our model, arrived at independently. The one fix: concept IDs, not strings. See CLAUDE.md — Event plane: DevOps long-format proposal; docs/devops_event_tables_memo.md.</a:t>
+              <a:t>This is the analytics-marts enhancement (#8), downstream of the model via dbt. Pitch = highest-value case of the OMOP 'write analytics once' thesis: derived variables defined once, canonically, with lineage — vs. re-coded per study (the 3 pain repos). dbt features map to our principles: dbt docs DAG = lineage to source (#12); SQL is the definition (no black box, #12); source()/ref()+access enforce Core→Analytic→Marts (#8); tests move much of the 7,025-rule QC into CI; sensitivity_tier flows via meta, enforced in IAM (#11); model versions/exposures = a derived-variable catalog. Recommend one mart PER construct (grouped), not a wide mega-table. Grain: participant, or participant×wave for longitudinal. Examples map to established cancer-prevention exposure domains (WCRF/AICR). See CLAUDE.md — Derived variables, lineage &amp; dbt / Mart catalog.</a:t>
             </a:r>
           </a:p>
         </p:txBody>
@@ -871,7 +869,7 @@
           <a:lstStyle/>
           <a:p>
             <a:r>
-              <a:t>Round hub (~ OMOP visit) off participants; response_sessions = DevOps 'surveys' table; collection/kit/incentive/refusal facts key on (connect_id, round); v_participant_events = SMDB unified view. See dbml/data_model_events.dbml.</a:t>
+              <a:t>Worked SQL for each row is in internal_pitch.md — Value proposition (Q1–Q5).</a:t>
             </a:r>
           </a:p>
         </p:txBody>
@@ -941,7 +939,7 @@
           <a:lstStyle/>
           <a:p>
             <a:r>
-              <a:t>This is the Marts layer (Phase 2, downstream of Core via dbt). Pitch = highest-value case of the OMOP 'write analytics once' thesis: derived variables defined once, canonically, with lineage — vs. re-coded per study (the 3 pain repos). dbt features map to our principles: dbt docs DAG = lineage to source (#12); SQL is the definition (no black box, #12); source()/ref()+access enforce Core→Analytic→Marts (#8); tests move much of the 7,025-rule QC into CI; sensitivity_tier flows via meta, enforced in IAM (#11); model versions/exposures = a derived-variable catalog. Recommend one mart PER construct (grouped), not a wide mega-table. Grain: participant, or participant×wave for longitudinal. Examples map to established cancer-prevention exposure domains (WCRF/AICR). See CLAUDE.md — Derived variables, lineage &amp; dbt / Mart catalog.</a:t>
+              <a:t>Demo data is synthetic (sql/demo_long_format.sql, runs in DuckDB ~ BigQuery). The labels come from joining the dictionary; analysts never memorize concept ids. v_long packages this join so it's literally SELECT * FROM v_long.</a:t>
             </a:r>
           </a:p>
         </p:txBody>
@@ -1011,7 +1009,7 @@
           <a:lstStyle/>
           <a:p>
             <a:r>
-              <a:t>Worked SQL for each row is in internal_pitch.md — Value proposition (Q1–Q5).</a:t>
+              <a:t>Reframed: the pivot is GENERIC and metadata-driven — no hardcoded column list (the opposite of a wide-table script). NOTE on completeness: DuckDB's PIVOT implicitly groups by every column not in ON/USING, so you must project to (id, name, value) first — that's the subquery shown; this exact statement runs. The fully-dynamic ON…USING form is DuckDB; BigQuery's PIVOT needs the value list (FOR question_text IN (...)) or dynamic SQL. pandas.pivot and tidyr::pivot_wider are fully dynamic and are what analysts already use. All three verified against sql/demo_long_format.sql (synthetic). Select-all is excluded (multi-valued → belongs in long, next slide). Parameterize by survey → a reusable get_wide() helper (tool built on the contract).</a:t>
             </a:r>
           </a:p>
         </p:txBody>
@@ -1081,7 +1079,7 @@
           <a:lstStyle/>
           <a:p>
             <a:r>
-              <a:t>Demo data is synthetic (sql/demo_long_format.sql, runs in DuckDB ~ BigQuery). The labels come from joining the dictionary; analysts never memorize concept ids. v_long packages this join so it's literally SELECT * FROM v_long.</a:t>
+              <a:t>Counts are GROUP BY — often simpler than wide. Select-all is the standout: wide makes you know and sum a changing set of indicator columns; long is one group-by on response_label. Same query shape works for every question by swapping the concept id (e.g. Smoking Status -&gt; Never 2 / Former 2 / Current 1).</a:t>
             </a:r>
           </a:p>
         </p:txBody>
@@ -1151,77 +1149,7 @@
           <a:lstStyle/>
           <a:p>
             <a:r>
-              <a:t>Reframed: the pivot is GENERIC and metadata-driven — no hardcoded column list (the opposite of a wide-table script). NOTE on completeness: DuckDB's PIVOT implicitly groups by every column not in ON/USING, so you must project to (id, name, value) first — that's the subquery shown; this exact statement runs. The fully-dynamic ON…USING form is DuckDB; BigQuery's PIVOT needs the value list (FOR question_text IN (...)) or dynamic SQL. pandas.pivot and tidyr::pivot_wider are fully dynamic and are what analysts already use. All three verified against sql/demo_long_format.sql (synthetic). Select-all is excluded (multi-valued → belongs in long, next slide). Parameterize by survey → a reusable get_wide() helper (tool built on the contract).</a:t>
-            </a:r>
-          </a:p>
-        </p:txBody>
-      </p:sp>
-      <p:sp>
-        <p:nvSpPr>
-          <p:cNvPr id="4" name="Slide Number Placeholder 3"/>
-          <p:cNvSpPr>
-            <a:spLocks noGrp="1"/>
-          </p:cNvSpPr>
-          <p:nvPr>
-            <p:ph type="sldNum" idx="5" sz="quarter"/>
-          </p:nvPr>
-        </p:nvSpPr>
-        <p:spPr/>
-      </p:sp>
-    </p:spTree>
-  </p:cSld>
-  <p:clrMapOvr>
-    <a:masterClrMapping/>
-  </p:clrMapOvr>
-</p:notes>
-</file>
-
-<file path=ppt/notesSlides/notesSlide19.xml><?xml version="1.0" encoding="utf-8"?>
-<p:notes xmlns:a="http://schemas.openxmlformats.org/drawingml/2006/main" xmlns:p="http://schemas.openxmlformats.org/presentationml/2006/main" xmlns:r="http://schemas.openxmlformats.org/officeDocument/2006/relationships">
-  <p:cSld>
-    <p:spTree>
-      <p:nvGrpSpPr>
-        <p:cNvPr id="1" name=""/>
-        <p:cNvGrpSpPr/>
-        <p:nvPr/>
-      </p:nvGrpSpPr>
-      <p:grpSpPr>
-        <a:xfrm>
-          <a:off x="0" y="0"/>
-          <a:ext cx="0" cy="0"/>
-          <a:chOff x="0" y="0"/>
-          <a:chExt cx="0" cy="0"/>
-        </a:xfrm>
-      </p:grpSpPr>
-      <p:sp>
-        <p:nvSpPr>
-          <p:cNvPr id="2" name="Slide Image Placeholder 1"/>
-          <p:cNvSpPr>
-            <a:spLocks noGrp="1"/>
-          </p:cNvSpPr>
-          <p:nvPr>
-            <p:ph type="sldImg" idx="2"/>
-          </p:nvPr>
-        </p:nvSpPr>
-        <p:spPr/>
-      </p:sp>
-      <p:sp>
-        <p:nvSpPr>
-          <p:cNvPr id="3" name="Notes Placeholder 2"/>
-          <p:cNvSpPr>
-            <a:spLocks noGrp="1"/>
-          </p:cNvSpPr>
-          <p:nvPr>
-            <p:ph type="body" idx="3" sz="quarter"/>
-          </p:nvPr>
-        </p:nvSpPr>
-        <p:spPr/>
-        <p:txBody>
-          <a:bodyPr/>
-          <a:lstStyle/>
-          <a:p>
-            <a:r>
-              <a:t>Counts are GROUP BY — often simpler than wide. Select-all is the standout: wide makes you know and sum a changing set of indicator columns; long is one group-by on response_label. Same query shape works for every question by swapping the concept id (e.g. Smoking Status -&gt; Never 2 / Former 2 / Current 1).</a:t>
+              <a:t>Ask: stand up the accepted model now; adopt enhancements incrementally (esp. governance #7 and dbt marts #8); consider pulling the concept-equivalence enhancement forward (geocoding). See internal_pitch.md — Recommendation.</a:t>
             </a:r>
           </a:p>
         </p:txBody>
@@ -1316,76 +1244,6 @@
 </p:notes>
 </file>
 
-<file path=ppt/notesSlides/notesSlide20.xml><?xml version="1.0" encoding="utf-8"?>
-<p:notes xmlns:a="http://schemas.openxmlformats.org/drawingml/2006/main" xmlns:p="http://schemas.openxmlformats.org/presentationml/2006/main" xmlns:r="http://schemas.openxmlformats.org/officeDocument/2006/relationships">
-  <p:cSld>
-    <p:spTree>
-      <p:nvGrpSpPr>
-        <p:cNvPr id="1" name=""/>
-        <p:cNvGrpSpPr/>
-        <p:nvPr/>
-      </p:nvGrpSpPr>
-      <p:grpSpPr>
-        <a:xfrm>
-          <a:off x="0" y="0"/>
-          <a:ext cx="0" cy="0"/>
-          <a:chOff x="0" y="0"/>
-          <a:chExt cx="0" cy="0"/>
-        </a:xfrm>
-      </p:grpSpPr>
-      <p:sp>
-        <p:nvSpPr>
-          <p:cNvPr id="2" name="Slide Image Placeholder 1"/>
-          <p:cNvSpPr>
-            <a:spLocks noGrp="1"/>
-          </p:cNvSpPr>
-          <p:nvPr>
-            <p:ph type="sldImg" idx="2"/>
-          </p:nvPr>
-        </p:nvSpPr>
-        <p:spPr/>
-      </p:sp>
-      <p:sp>
-        <p:nvSpPr>
-          <p:cNvPr id="3" name="Notes Placeholder 2"/>
-          <p:cNvSpPr>
-            <a:spLocks noGrp="1"/>
-          </p:cNvSpPr>
-          <p:nvPr>
-            <p:ph type="body" idx="3" sz="quarter"/>
-          </p:nvPr>
-        </p:nvSpPr>
-        <p:spPr/>
-        <p:txBody>
-          <a:bodyPr/>
-          <a:lstStyle/>
-          <a:p>
-            <a:r>
-              <a:t>Ask: approve Phase 1 now; commit Phase 2 (esp. governance); consider pulling the concept-equivalence plane forward (geocoding). See internal_pitch.md — Recommendation.</a:t>
-            </a:r>
-          </a:p>
-        </p:txBody>
-      </p:sp>
-      <p:sp>
-        <p:nvSpPr>
-          <p:cNvPr id="4" name="Slide Number Placeholder 3"/>
-          <p:cNvSpPr>
-            <a:spLocks noGrp="1"/>
-          </p:cNvSpPr>
-          <p:nvPr>
-            <p:ph type="sldNum" idx="5" sz="quarter"/>
-          </p:nvPr>
-        </p:nvSpPr>
-        <p:spPr/>
-      </p:sp>
-    </p:spTree>
-  </p:cSld>
-  <p:clrMapOvr>
-    <a:masterClrMapping/>
-  </p:clrMapOvr>
-</p:notes>
-</file>
-
 <file path=ppt/notesSlides/notesSlide3.xml><?xml version="1.0" encoding="utf-8"?>
 <p:notes xmlns:a="http://schemas.openxmlformats.org/drawingml/2006/main" xmlns:p="http://schemas.openxmlformats.org/presentationml/2006/main" xmlns:r="http://schemas.openxmlformats.org/officeDocument/2006/relationships">
   <p:cSld>
@@ -1711,7 +1569,7 @@
           <a:lstStyle/>
           <a:p>
             <a:r>
-              <a:t>Strongest case for the concept-equivalence plane; sits beyond Phase 2's first cut — argues to pull it forward. See internal_pitch.md — geocoding.</a:t>
+              <a:t>Strongest case for the concept-equivalence enhancement — argues to pull it forward. See internal_pitch.md — geocoding.</a:t>
             </a:r>
           </a:p>
         </p:txBody>
@@ -1781,7 +1639,7 @@
           <a:lstStyle/>
           <a:p>
             <a:r>
-              <a:t>Phase 1 model: CIDTool dictionary as-is + one responses fact. Same thesis carries to Phase 2. See internal_pitch.md — The idea / Phase 1.</a:t>
+              <a:t>The model: CIDTool dictionary as-is + one responses fact. See internal_pitch.md — The model.</a:t>
             </a:r>
           </a:p>
         </p:txBody>
@@ -5010,7 +4868,7 @@
                 </a:solidFill>
                 <a:latin typeface="Calibri"/>
               </a:rPr>
-              <a:t>Why a data model — and a two-phase path to the PR2 research warehouse</a:t>
+              <a:t>Why a data model — the accepted Dictionary-Direct model + its enhancement roadmap for PR2</a:t>
             </a:r>
           </a:p>
         </p:txBody>
@@ -5116,7 +4974,7 @@
                 </a:solidFill>
                 <a:latin typeface="Calibri"/>
               </a:rPr>
-              <a:t>A two-phase path</a:t>
+              <a:t>Incremental enhancements — the roadmap</a:t>
             </a:r>
           </a:p>
           <a:p>
@@ -5126,7 +4984,7 @@
                   <a:srgbClr val="BBD5D7"/>
                 </a:solidFill>
               </a:rPr>
-              <a:t>Phase 1 proves it cheaply · Phase 2 builds the governed warehouse</a:t>
+              <a:t>Each a bounded add-on to the accepted model — same responses fact, dictionary stays the source of truth</a:t>
             </a:r>
           </a:p>
         </p:txBody>
@@ -5184,8 +5042,8 @@
           <p:nvPr/>
         </p:nvGraphicFramePr>
         <p:xfrm>
-          <a:off x="548640" y="1554480"/>
-          <a:ext cx="11064240" cy="3108960"/>
+          <a:off x="548640" y="1325880"/>
+          <a:ext cx="11064240" cy="4297680"/>
         </p:xfrm>
         <a:graphic>
           <a:graphicData uri="http://schemas.openxmlformats.org/drawingml/2006/table">
@@ -5194,24 +5052,24 @@
                 <a:tableStyleId>{5C22544A-7EE6-4342-B048-85BDC9FD1C3A}</a:tableStyleId>
               </a:tblPr>
               <a:tblGrid>
-                <a:gridCol w="1554480"/>
-                <a:gridCol w="4754880"/>
-                <a:gridCol w="4754880"/>
+                <a:gridCol w="502920"/>
+                <a:gridCol w="4160520"/>
+                <a:gridCol w="6400800"/>
               </a:tblGrid>
-              <a:tr h="621792">
-                <a:tc>
-                  <a:txBody>
-                    <a:bodyPr wrap="square"/>
-                    <a:lstStyle/>
-                    <a:p>
-                      <a:r>
-                        <a:rPr b="1" sz="1400">
+              <a:tr h="429768">
+                <a:tc>
+                  <a:txBody>
+                    <a:bodyPr wrap="square"/>
+                    <a:lstStyle/>
+                    <a:p>
+                      <a:r>
+                        <a:rPr b="1" sz="1300">
                           <a:solidFill>
                             <a:srgbClr val="FFFFFF"/>
                           </a:solidFill>
                           <a:latin typeface="Calibri"/>
                         </a:rPr>
-                        <a:t/>
+                        <a:t>#</a:t>
                       </a:r>
                     </a:p>
                   </a:txBody>
@@ -5227,13 +5085,13 @@
                     <a:lstStyle/>
                     <a:p>
                       <a:r>
-                        <a:rPr b="1" sz="1400">
+                        <a:rPr b="1" sz="1300">
                           <a:solidFill>
                             <a:srgbClr val="FFFFFF"/>
                           </a:solidFill>
                           <a:latin typeface="Calibri"/>
                         </a:rPr>
-                        <a:t>Phase 1 — Dictionary-Direct</a:t>
+                        <a:t>Enhancement</a:t>
                       </a:r>
                     </a:p>
                   </a:txBody>
@@ -5249,13 +5107,13 @@
                     <a:lstStyle/>
                     <a:p>
                       <a:r>
-                        <a:rPr b="1" sz="1400">
+                        <a:rPr b="1" sz="1300">
                           <a:solidFill>
                             <a:srgbClr val="FFFFFF"/>
                           </a:solidFill>
                           <a:latin typeface="Calibri"/>
                         </a:rPr>
-                        <a:t>Phase 2 — PR2 warehouse</a:t>
+                        <a:t>Value</a:t>
                       </a:r>
                     </a:p>
                   </a:txBody>
@@ -5266,20 +5124,20 @@
                   </a:tcPr>
                 </a:tc>
               </a:tr>
-              <a:tr h="621792">
-                <a:tc>
-                  <a:txBody>
-                    <a:bodyPr wrap="square"/>
-                    <a:lstStyle/>
-                    <a:p>
-                      <a:r>
-                        <a:rPr sz="1400" b="1">
-                          <a:solidFill>
-                            <a:srgbClr val="222A33"/>
-                          </a:solidFill>
-                          <a:latin typeface="Calibri"/>
-                        </a:rPr>
-                        <a:t>What</a:t>
+              <a:tr h="429768">
+                <a:tc>
+                  <a:txBody>
+                    <a:bodyPr wrap="square"/>
+                    <a:lstStyle/>
+                    <a:p>
+                      <a:r>
+                        <a:rPr sz="1250" b="1">
+                          <a:solidFill>
+                            <a:srgbClr val="222A33"/>
+                          </a:solidFill>
+                          <a:latin typeface="Calibri"/>
+                        </a:rPr>
+                        <a:t>1</a:t>
                       </a:r>
                     </a:p>
                   </a:txBody>
@@ -5295,13 +5153,13 @@
                     <a:lstStyle/>
                     <a:p>
                       <a:r>
-                        <a:rPr sz="1400">
-                          <a:solidFill>
-                            <a:srgbClr val="222A33"/>
-                          </a:solidFill>
-                          <a:latin typeface="Calibri"/>
-                        </a:rPr>
-                        <a:t>dictionary as-is + 1 responses table</a:t>
+                        <a:rPr sz="1250">
+                          <a:solidFill>
+                            <a:srgbClr val="222A33"/>
+                          </a:solidFill>
+                          <a:latin typeface="Calibri"/>
+                        </a:rPr>
+                        <a:t>Normalized question-type view</a:t>
                       </a:r>
                     </a:p>
                   </a:txBody>
@@ -5317,13 +5175,13 @@
                     <a:lstStyle/>
                     <a:p>
                       <a:r>
-                        <a:rPr sz="1400">
-                          <a:solidFill>
-                            <a:srgbClr val="222A33"/>
-                          </a:solidFill>
-                          <a:latin typeface="Calibri"/>
-                        </a:rPr>
-                        <a:t>cleaned dims, placement bridge, sessions, governance</a:t>
+                        <a:rPr sz="1250">
+                          <a:solidFill>
+                            <a:srgbClr val="222A33"/>
+                          </a:solidFill>
+                          <a:latin typeface="Calibri"/>
+                        </a:rPr>
+                        <a:t>templated per-type SQL across surveys</a:t>
                       </a:r>
                     </a:p>
                   </a:txBody>
@@ -5334,20 +5192,20 @@
                   </a:tcPr>
                 </a:tc>
               </a:tr>
-              <a:tr h="621792">
-                <a:tc>
-                  <a:txBody>
-                    <a:bodyPr wrap="square"/>
-                    <a:lstStyle/>
-                    <a:p>
-                      <a:r>
-                        <a:rPr sz="1400" b="1">
-                          <a:solidFill>
-                            <a:srgbClr val="222A33"/>
-                          </a:solidFill>
-                          <a:latin typeface="Calibri"/>
-                        </a:rPr>
-                        <a:t>Buys</a:t>
+              <a:tr h="429768">
+                <a:tc>
+                  <a:txBody>
+                    <a:bodyPr wrap="square"/>
+                    <a:lstStyle/>
+                    <a:p>
+                      <a:r>
+                        <a:rPr sz="1250" b="1">
+                          <a:solidFill>
+                            <a:srgbClr val="222A33"/>
+                          </a:solidFill>
+                          <a:latin typeface="Calibri"/>
+                        </a:rPr>
+                        <a:t>2</a:t>
                       </a:r>
                     </a:p>
                   </a:txBody>
@@ -5363,13 +5221,13 @@
                     <a:lstStyle/>
                     <a:p>
                       <a:r>
-                        <a:rPr sz="1400">
-                          <a:solidFill>
-                            <a:srgbClr val="222A33"/>
-                          </a:solidFill>
-                          <a:latin typeface="Calibri"/>
-                        </a:rPr>
-                        <a:t>stable schema, generic SQL, labels, v1/v2 pool</a:t>
+                        <a:rPr sz="1250">
+                          <a:solidFill>
+                            <a:srgbClr val="222A33"/>
+                          </a:solidFill>
+                          <a:latin typeface="Calibri"/>
+                        </a:rPr>
+                        <a:t>Typed value columns</a:t>
                       </a:r>
                     </a:p>
                   </a:txBody>
@@ -5385,13 +5243,13 @@
                     <a:lstStyle/>
                     <a:p>
                       <a:r>
-                        <a:rPr sz="1400">
-                          <a:solidFill>
-                            <a:srgbClr val="222A33"/>
-                          </a:solidFill>
-                          <a:latin typeface="Calibri"/>
-                        </a:rPr>
-                        <a:t>true missingness, governed access, marts, view library</a:t>
+                        <a:rPr sz="1250">
+                          <a:solidFill>
+                            <a:srgbClr val="222A33"/>
+                          </a:solidFill>
+                          <a:latin typeface="Calibri"/>
+                        </a:rPr>
+                        <a:t>numeric analysis; coded answers join labels</a:t>
                       </a:r>
                     </a:p>
                   </a:txBody>
@@ -5402,20 +5260,20 @@
                   </a:tcPr>
                 </a:tc>
               </a:tr>
-              <a:tr h="621792">
-                <a:tc>
-                  <a:txBody>
-                    <a:bodyPr wrap="square"/>
-                    <a:lstStyle/>
-                    <a:p>
-                      <a:r>
-                        <a:rPr sz="1400" b="1">
-                          <a:solidFill>
-                            <a:srgbClr val="222A33"/>
-                          </a:solidFill>
-                          <a:latin typeface="Calibri"/>
-                        </a:rPr>
-                        <a:t>Lift</a:t>
+              <a:tr h="429768">
+                <a:tc>
+                  <a:txBody>
+                    <a:bodyPr wrap="square"/>
+                    <a:lstStyle/>
+                    <a:p>
+                      <a:r>
+                        <a:rPr sz="1250" b="1">
+                          <a:solidFill>
+                            <a:srgbClr val="222A33"/>
+                          </a:solidFill>
+                          <a:latin typeface="Calibri"/>
+                        </a:rPr>
+                        <a:t>3</a:t>
                       </a:r>
                     </a:p>
                   </a:txBody>
@@ -5431,13 +5289,13 @@
                     <a:lstStyle/>
                     <a:p>
                       <a:r>
-                        <a:rPr sz="1400">
-                          <a:solidFill>
-                            <a:srgbClr val="222A33"/>
-                          </a:solidFill>
-                          <a:latin typeface="Calibri"/>
-                        </a:rPr>
-                        <a:t>low — reuses CleanConnect + dictionary</a:t>
+                        <a:rPr sz="1250">
+                          <a:solidFill>
+                            <a:srgbClr val="222A33"/>
+                          </a:solidFill>
+                          <a:latin typeface="Calibri"/>
+                        </a:rPr>
+                        <a:t>Improved version handling</a:t>
                       </a:r>
                     </a:p>
                   </a:txBody>
@@ -5453,13 +5311,13 @@
                     <a:lstStyle/>
                     <a:p>
                       <a:r>
-                        <a:rPr sz="1400">
-                          <a:solidFill>
-                            <a:srgbClr val="222A33"/>
-                          </a:solidFill>
-                          <a:latin typeface="Calibri"/>
-                        </a:rPr>
-                        <a:t>larger, phased — builds on Phase 1's fact</a:t>
+                        <a:rPr sz="1250">
+                          <a:solidFill>
+                            <a:srgbClr val="222A33"/>
+                          </a:solidFill>
+                          <a:latin typeface="Calibri"/>
+                        </a:rPr>
+                        <a:t>unify V1/V2; offered-vs-not-selected answerable</a:t>
                       </a:r>
                     </a:p>
                   </a:txBody>
@@ -5470,20 +5328,20 @@
                   </a:tcPr>
                 </a:tc>
               </a:tr>
-              <a:tr h="621792">
-                <a:tc>
-                  <a:txBody>
-                    <a:bodyPr wrap="square"/>
-                    <a:lstStyle/>
-                    <a:p>
-                      <a:r>
-                        <a:rPr sz="1400" b="1">
-                          <a:solidFill>
-                            <a:srgbClr val="222A33"/>
-                          </a:solidFill>
-                          <a:latin typeface="Calibri"/>
-                        </a:rPr>
-                        <a:t>Release-ready</a:t>
+              <a:tr h="429768">
+                <a:tc>
+                  <a:txBody>
+                    <a:bodyPr wrap="square"/>
+                    <a:lstStyle/>
+                    <a:p>
+                      <a:r>
+                        <a:rPr sz="1250" b="1">
+                          <a:solidFill>
+                            <a:srgbClr val="222A33"/>
+                          </a:solidFill>
+                          <a:latin typeface="Calibri"/>
+                        </a:rPr>
+                        <a:t>4</a:t>
                       </a:r>
                     </a:p>
                   </a:txBody>
@@ -5499,13 +5357,13 @@
                     <a:lstStyle/>
                     <a:p>
                       <a:r>
-                        <a:rPr sz="1400">
-                          <a:solidFill>
-                            <a:srgbClr val="222A33"/>
-                          </a:solidFill>
-                          <a:latin typeface="Calibri"/>
-                        </a:rPr>
-                        <a:t>internal / analyst only</a:t>
+                        <a:rPr sz="1250">
+                          <a:solidFill>
+                            <a:srgbClr val="222A33"/>
+                          </a:solidFill>
+                          <a:latin typeface="Calibri"/>
+                        </a:rPr>
+                        <a:t>skip_logic (from Quest)</a:t>
                       </a:r>
                     </a:p>
                   </a:txBody>
@@ -5521,19 +5379,359 @@
                     <a:lstStyle/>
                     <a:p>
                       <a:r>
-                        <a:rPr sz="1400">
-                          <a:solidFill>
-                            <a:srgbClr val="222A33"/>
-                          </a:solidFill>
-                          <a:latin typeface="Calibri"/>
-                        </a:rPr>
-                        <a:t>yes — external PR2 sharing</a:t>
+                        <a:rPr sz="1250">
+                          <a:solidFill>
+                            <a:srgbClr val="222A33"/>
+                          </a:solidFill>
+                          <a:latin typeface="Calibri"/>
+                        </a:rPr>
+                        <a:t>skip logic queryable; most QA/QC rules generated</a:t>
                       </a:r>
                     </a:p>
                   </a:txBody>
                   <a:tcPr marL="73152" marR="73152" marT="27432" marB="27432" anchor="ctr">
                     <a:solidFill>
                       <a:srgbClr val="EDF1F5"/>
+                    </a:solidFill>
+                  </a:tcPr>
+                </a:tc>
+              </a:tr>
+              <a:tr h="429768">
+                <a:tc>
+                  <a:txBody>
+                    <a:bodyPr wrap="square"/>
+                    <a:lstStyle/>
+                    <a:p>
+                      <a:r>
+                        <a:rPr sz="1250" b="1">
+                          <a:solidFill>
+                            <a:srgbClr val="222A33"/>
+                          </a:solidFill>
+                          <a:latin typeface="Calibri"/>
+                        </a:rPr>
+                        <a:t>5</a:t>
+                      </a:r>
+                    </a:p>
+                  </a:txBody>
+                  <a:tcPr marL="73152" marR="73152" marT="27432" marB="27432" anchor="ctr">
+                    <a:solidFill>
+                      <a:srgbClr val="FFFFFF"/>
+                    </a:solidFill>
+                  </a:tcPr>
+                </a:tc>
+                <a:tc>
+                  <a:txBody>
+                    <a:bodyPr wrap="square"/>
+                    <a:lstStyle/>
+                    <a:p>
+                      <a:r>
+                        <a:rPr sz="1250">
+                          <a:solidFill>
+                            <a:srgbClr val="222A33"/>
+                          </a:solidFill>
+                          <a:latin typeface="Calibri"/>
+                        </a:rPr>
+                        <a:t>response_sessions</a:t>
+                      </a:r>
+                    </a:p>
+                  </a:txBody>
+                  <a:tcPr marL="73152" marR="73152" marT="27432" marB="27432" anchor="ctr">
+                    <a:solidFill>
+                      <a:srgbClr val="FFFFFF"/>
+                    </a:solidFill>
+                  </a:tcPr>
+                </a:tc>
+                <a:tc>
+                  <a:txBody>
+                    <a:bodyPr wrap="square"/>
+                    <a:lstStyle/>
+                    <a:p>
+                      <a:r>
+                        <a:rPr sz="1250">
+                          <a:solidFill>
+                            <a:srgbClr val="222A33"/>
+                          </a:solidFill>
+                          <a:latin typeface="Calibri"/>
+                        </a:rPr>
+                        <a:t>true missingness (not-asked vs not-answered)</a:t>
+                      </a:r>
+                    </a:p>
+                  </a:txBody>
+                  <a:tcPr marL="73152" marR="73152" marT="27432" marB="27432" anchor="ctr">
+                    <a:solidFill>
+                      <a:srgbClr val="FFFFFF"/>
+                    </a:solidFill>
+                  </a:tcPr>
+                </a:tc>
+              </a:tr>
+              <a:tr h="429768">
+                <a:tc>
+                  <a:txBody>
+                    <a:bodyPr wrap="square"/>
+                    <a:lstStyle/>
+                    <a:p>
+                      <a:r>
+                        <a:rPr sz="1250" b="1">
+                          <a:solidFill>
+                            <a:srgbClr val="222A33"/>
+                          </a:solidFill>
+                          <a:latin typeface="Calibri"/>
+                        </a:rPr>
+                        <a:t>6</a:t>
+                      </a:r>
+                    </a:p>
+                  </a:txBody>
+                  <a:tcPr marL="73152" marR="73152" marT="27432" marB="27432" anchor="ctr">
+                    <a:solidFill>
+                      <a:srgbClr val="EDF1F5"/>
+                    </a:solidFill>
+                  </a:tcPr>
+                </a:tc>
+                <a:tc>
+                  <a:txBody>
+                    <a:bodyPr wrap="square"/>
+                    <a:lstStyle/>
+                    <a:p>
+                      <a:r>
+                        <a:rPr sz="1250">
+                          <a:solidFill>
+                            <a:srgbClr val="222A33"/>
+                          </a:solidFill>
+                          <a:latin typeface="Calibri"/>
+                        </a:rPr>
+                        <a:t>Concept equivalence (demo built)</a:t>
+                      </a:r>
+                    </a:p>
+                  </a:txBody>
+                  <a:tcPr marL="73152" marR="73152" marT="27432" marB="27432" anchor="ctr">
+                    <a:solidFill>
+                      <a:srgbClr val="EDF1F5"/>
+                    </a:solidFill>
+                  </a:tcPr>
+                </a:tc>
+                <a:tc>
+                  <a:txBody>
+                    <a:bodyPr wrap="square"/>
+                    <a:lstStyle/>
+                    <a:p>
+                      <a:r>
+                        <a:rPr sz="1250">
+                          <a:solidFill>
+                            <a:srgbClr val="222A33"/>
+                          </a:solidFill>
+                          <a:latin typeface="Calibri"/>
+                        </a:rPr>
+                        <a:t>harmonize reused fields once, as data</a:t>
+                      </a:r>
+                    </a:p>
+                  </a:txBody>
+                  <a:tcPr marL="73152" marR="73152" marT="27432" marB="27432" anchor="ctr">
+                    <a:solidFill>
+                      <a:srgbClr val="EDF1F5"/>
+                    </a:solidFill>
+                  </a:tcPr>
+                </a:tc>
+              </a:tr>
+              <a:tr h="429768">
+                <a:tc>
+                  <a:txBody>
+                    <a:bodyPr wrap="square"/>
+                    <a:lstStyle/>
+                    <a:p>
+                      <a:r>
+                        <a:rPr sz="1250" b="1">
+                          <a:solidFill>
+                            <a:srgbClr val="222A33"/>
+                          </a:solidFill>
+                          <a:latin typeface="Calibri"/>
+                        </a:rPr>
+                        <a:t>7</a:t>
+                      </a:r>
+                    </a:p>
+                  </a:txBody>
+                  <a:tcPr marL="73152" marR="73152" marT="27432" marB="27432" anchor="ctr">
+                    <a:solidFill>
+                      <a:srgbClr val="FFFFFF"/>
+                    </a:solidFill>
+                  </a:tcPr>
+                </a:tc>
+                <a:tc>
+                  <a:txBody>
+                    <a:bodyPr wrap="square"/>
+                    <a:lstStyle/>
+                    <a:p>
+                      <a:r>
+                        <a:rPr sz="1250">
+                          <a:solidFill>
+                            <a:srgbClr val="222A33"/>
+                          </a:solidFill>
+                          <a:latin typeface="Calibri"/>
+                        </a:rPr>
+                        <a:t>Governance (sensitivity + IAM)</a:t>
+                      </a:r>
+                    </a:p>
+                  </a:txBody>
+                  <a:tcPr marL="73152" marR="73152" marT="27432" marB="27432" anchor="ctr">
+                    <a:solidFill>
+                      <a:srgbClr val="FFFFFF"/>
+                    </a:solidFill>
+                  </a:tcPr>
+                </a:tc>
+                <a:tc>
+                  <a:txBody>
+                    <a:bodyPr wrap="square"/>
+                    <a:lstStyle/>
+                    <a:p>
+                      <a:r>
+                        <a:rPr sz="1250">
+                          <a:solidFill>
+                            <a:srgbClr val="222A33"/>
+                          </a:solidFill>
+                          <a:latin typeface="Calibri"/>
+                        </a:rPr>
+                        <a:t>external-release readiness (PHI/PII) for PR2</a:t>
+                      </a:r>
+                    </a:p>
+                  </a:txBody>
+                  <a:tcPr marL="73152" marR="73152" marT="27432" marB="27432" anchor="ctr">
+                    <a:solidFill>
+                      <a:srgbClr val="FFFFFF"/>
+                    </a:solidFill>
+                  </a:tcPr>
+                </a:tc>
+              </a:tr>
+              <a:tr h="429768">
+                <a:tc>
+                  <a:txBody>
+                    <a:bodyPr wrap="square"/>
+                    <a:lstStyle/>
+                    <a:p>
+                      <a:r>
+                        <a:rPr sz="1250" b="1">
+                          <a:solidFill>
+                            <a:srgbClr val="222A33"/>
+                          </a:solidFill>
+                          <a:latin typeface="Calibri"/>
+                        </a:rPr>
+                        <a:t>8</a:t>
+                      </a:r>
+                    </a:p>
+                  </a:txBody>
+                  <a:tcPr marL="73152" marR="73152" marT="27432" marB="27432" anchor="ctr">
+                    <a:solidFill>
+                      <a:srgbClr val="EDF1F5"/>
+                    </a:solidFill>
+                  </a:tcPr>
+                </a:tc>
+                <a:tc>
+                  <a:txBody>
+                    <a:bodyPr wrap="square"/>
+                    <a:lstStyle/>
+                    <a:p>
+                      <a:r>
+                        <a:rPr sz="1250">
+                          <a:solidFill>
+                            <a:srgbClr val="222A33"/>
+                          </a:solidFill>
+                          <a:latin typeface="Calibri"/>
+                        </a:rPr>
+                        <a:t>Analytics marts (dbt)</a:t>
+                      </a:r>
+                    </a:p>
+                  </a:txBody>
+                  <a:tcPr marL="73152" marR="73152" marT="27432" marB="27432" anchor="ctr">
+                    <a:solidFill>
+                      <a:srgbClr val="EDF1F5"/>
+                    </a:solidFill>
+                  </a:tcPr>
+                </a:tc>
+                <a:tc>
+                  <a:txBody>
+                    <a:bodyPr wrap="square"/>
+                    <a:lstStyle/>
+                    <a:p>
+                      <a:r>
+                        <a:rPr sz="1250">
+                          <a:solidFill>
+                            <a:srgbClr val="222A33"/>
+                          </a:solidFill>
+                          <a:latin typeface="Calibri"/>
+                        </a:rPr>
+                        <a:t>curated, reproducible derived variables + lineage</a:t>
+                      </a:r>
+                    </a:p>
+                  </a:txBody>
+                  <a:tcPr marL="73152" marR="73152" marT="27432" marB="27432" anchor="ctr">
+                    <a:solidFill>
+                      <a:srgbClr val="EDF1F5"/>
+                    </a:solidFill>
+                  </a:tcPr>
+                </a:tc>
+              </a:tr>
+              <a:tr h="429768">
+                <a:tc>
+                  <a:txBody>
+                    <a:bodyPr wrap="square"/>
+                    <a:lstStyle/>
+                    <a:p>
+                      <a:r>
+                        <a:rPr sz="1250" b="1">
+                          <a:solidFill>
+                            <a:srgbClr val="222A33"/>
+                          </a:solidFill>
+                          <a:latin typeface="Calibri"/>
+                        </a:rPr>
+                        <a:t>9</a:t>
+                      </a:r>
+                    </a:p>
+                  </a:txBody>
+                  <a:tcPr marL="73152" marR="73152" marT="27432" marB="27432" anchor="ctr">
+                    <a:solidFill>
+                      <a:srgbClr val="FFFFFF"/>
+                    </a:solidFill>
+                  </a:tcPr>
+                </a:tc>
+                <a:tc>
+                  <a:txBody>
+                    <a:bodyPr wrap="square"/>
+                    <a:lstStyle/>
+                    <a:p>
+                      <a:r>
+                        <a:rPr sz="1250">
+                          <a:solidFill>
+                            <a:srgbClr val="222A33"/>
+                          </a:solidFill>
+                          <a:latin typeface="Calibri"/>
+                        </a:rPr>
+                        <a:t>Event plane</a:t>
+                      </a:r>
+                    </a:p>
+                  </a:txBody>
+                  <a:tcPr marL="73152" marR="73152" marT="27432" marB="27432" anchor="ctr">
+                    <a:solidFill>
+                      <a:srgbClr val="FFFFFF"/>
+                    </a:solidFill>
+                  </a:tcPr>
+                </a:tc>
+                <a:tc>
+                  <a:txBody>
+                    <a:bodyPr wrap="square"/>
+                    <a:lstStyle/>
+                    <a:p>
+                      <a:r>
+                        <a:rPr sz="1250">
+                          <a:solidFill>
+                            <a:srgbClr val="222A33"/>
+                          </a:solidFill>
+                          <a:latin typeface="Calibri"/>
+                        </a:rPr>
+                        <a:t>long-format win for operational/biospecimen data</a:t>
+                      </a:r>
+                    </a:p>
+                  </a:txBody>
+                  <a:tcPr marL="73152" marR="73152" marT="27432" marB="27432" anchor="ctr">
+                    <a:solidFill>
+                      <a:srgbClr val="FFFFFF"/>
                     </a:solidFill>
                   </a:tcPr>
                 </a:tc>
@@ -5550,8 +5748,8 @@
         </p:nvSpPr>
         <p:spPr>
           <a:xfrm>
-            <a:off x="548640" y="5120640"/>
-            <a:ext cx="11064240" cy="548640"/>
+            <a:off x="548640" y="5852160"/>
+            <a:ext cx="11064240" cy="640080"/>
           </a:xfrm>
           <a:prstGeom prst="rect">
             <a:avLst/>
@@ -5566,13 +5764,13 @@
           <a:p>
             <a:pPr algn="l"/>
             <a:r>
-              <a:rPr sz="1500" b="0" i="1">
+              <a:rPr sz="1400" b="1" i="0">
                 <a:solidFill>
-                  <a:srgbClr val="5A636E"/>
+                  <a:srgbClr val="CC7D15"/>
                 </a:solidFill>
                 <a:latin typeface="Calibri"/>
               </a:rPr>
-              <a:t>Same responses fact both phases — Phase 1 is a down payment, not throwaway work.</a:t>
+              <a:t>Adopt one at a time as need pulls it in. Governance (#7) gates external sharing; dbt marts (#8) deliver the most researcher value. See enhancement_backlog.md.</a:t>
             </a:r>
           </a:p>
         </p:txBody>
@@ -5643,7 +5841,7 @@
                 </a:solidFill>
                 <a:latin typeface="Calibri"/>
               </a:rPr>
-              <a:t>Phase 2 — the full model</a:t>
+              <a:t>New: events are going long-format too</a:t>
             </a:r>
           </a:p>
           <a:p>
@@ -5653,7 +5851,7 @@
                   <a:srgbClr val="BBD5D7"/>
                 </a:solidFill>
               </a:rPr>
-              <a:t>The researcher-facing, governed warehouse for PR2</a:t>
+              <a:t>DevOps is moving follow-ups from nested columns to per-type event tables</a:t>
             </a:r>
           </a:p>
         </p:txBody>
@@ -5702,40 +5900,16 @@
           </a:p>
         </p:txBody>
       </p:sp>
-      <p:pic>
-        <p:nvPicPr>
-          <p:cNvPr id="4" name="Picture 3" descr="model_b_full.png"/>
-          <p:cNvPicPr>
-            <a:picLocks noChangeAspect="1"/>
-          </p:cNvPicPr>
+      <p:sp>
+        <p:nvSpPr>
+          <p:cNvPr id="4" name="TextBox 3"/>
+          <p:cNvSpPr txBox="1"/>
           <p:nvPr/>
-        </p:nvPicPr>
-        <p:blipFill>
-          <a:blip r:embed="rId2"/>
-          <a:stretch>
-            <a:fillRect/>
-          </a:stretch>
-        </p:blipFill>
+        </p:nvSpPr>
         <p:spPr>
           <a:xfrm>
-            <a:off x="2039929" y="1280160"/>
-            <a:ext cx="8111836" cy="5029200"/>
-          </a:xfrm>
-          <a:prstGeom prst="rect">
-            <a:avLst/>
-          </a:prstGeom>
-        </p:spPr>
-      </p:pic>
-      <p:sp>
-        <p:nvSpPr>
-          <p:cNvPr id="5" name="TextBox 4"/>
-          <p:cNvSpPr txBox="1"/>
-          <p:nvPr/>
-        </p:nvSpPr>
-        <p:spPr>
-          <a:xfrm>
-            <a:off x="457200" y="6400800"/>
-            <a:ext cx="11247120" cy="365760"/>
+            <a:off x="640080" y="1417320"/>
+            <a:ext cx="10881360" cy="3108960"/>
           </a:xfrm>
           <a:prstGeom prst="rect">
             <a:avLst/>
@@ -5748,15 +5922,102 @@
           </a:bodyPr>
           <a:lstStyle/>
           <a:p>
-            <a:pPr algn="ctr"/>
-            <a:r>
-              <a:rPr sz="1100" b="0" i="1">
+            <a:pPr>
+              <a:spcAft>
+                <a:spcPts val="1300"/>
+              </a:spcAft>
+            </a:pPr>
+            <a:r>
+              <a:rPr sz="1800">
                 <a:solidFill>
-                  <a:srgbClr val="5A636E"/>
+                  <a:srgbClr val="222A33"/>
                 </a:solidFill>
                 <a:latin typeface="Calibri"/>
               </a:rPr>
-              <a:t>Placement bridge · sessions · version-scoped options · governance · Core→Analytic→Marts.</a:t>
+              <a:t>•  Per-type long tables: activities · collections · kits · surveys · incentives · refusals (+ collectionDetails)</a:t>
+            </a:r>
+          </a:p>
+          <a:p>
+            <a:pPr>
+              <a:spcAft>
+                <a:spcPts val="1300"/>
+              </a:spcAft>
+            </a:pPr>
+            <a:r>
+              <a:rPr sz="1800">
+                <a:solidFill>
+                  <a:srgbClr val="222A33"/>
+                </a:solidFill>
+                <a:latin typeface="Calibri"/>
+              </a:rPr>
+              <a:t>•  Shared key on every table: (Connect ID, Round) — Round + activity type = the encounter</a:t>
+            </a:r>
+          </a:p>
+          <a:p>
+            <a:pPr>
+              <a:spcAft>
+                <a:spcPts val="1300"/>
+              </a:spcAft>
+            </a:pPr>
+            <a:r>
+              <a:rPr sz="1800">
+                <a:solidFill>
+                  <a:srgbClr val="222A33"/>
+                </a:solidFill>
+                <a:latin typeface="Calibri"/>
+              </a:rPr>
+              <a:t>•  collectionDetails: ~120 nested fields → 14 columns; a new round/specimen = zero schema change</a:t>
+            </a:r>
+          </a:p>
+          <a:p>
+            <a:pPr>
+              <a:spcAft>
+                <a:spcPts val="1300"/>
+              </a:spcAft>
+            </a:pPr>
+            <a:r>
+              <a:rPr sz="1800">
+                <a:solidFill>
+                  <a:srgbClr val="222A33"/>
+                </a:solidFill>
+                <a:latin typeface="Calibri"/>
+              </a:rPr>
+              <a:t>•  Risk: human-readable names &amp; values dropped the concept IDs → won't link to Primary/Secondary Source</a:t>
+            </a:r>
+          </a:p>
+        </p:txBody>
+      </p:sp>
+      <p:sp>
+        <p:nvSpPr>
+          <p:cNvPr id="5" name="TextBox 4"/>
+          <p:cNvSpPr txBox="1"/>
+          <p:nvPr/>
+        </p:nvSpPr>
+        <p:spPr>
+          <a:xfrm>
+            <a:off x="640080" y="5577840"/>
+            <a:ext cx="10881360" cy="731520"/>
+          </a:xfrm>
+          <a:prstGeom prst="rect">
+            <a:avLst/>
+          </a:prstGeom>
+          <a:noFill/>
+        </p:spPr>
+        <p:txBody>
+          <a:bodyPr wrap="square">
+            <a:spAutoFit/>
+          </a:bodyPr>
+          <a:lstStyle/>
+          <a:p>
+            <a:pPr algn="l"/>
+            <a:r>
+              <a:rPr sz="1600" b="1" i="0">
+                <a:solidFill>
+                  <a:srgbClr val="CC7D15"/>
+                </a:solidFill>
+                <a:latin typeface="Calibri"/>
+              </a:rPr>
+              <a:t>Keep the long format — re-attach a concept_id to every column &amp; value (one vocab, one ID: Mouthwash = MW = Home Mouthwash).</a:t>
             </a:r>
           </a:p>
         </p:txBody>
@@ -5827,7 +6088,7 @@
                 </a:solidFill>
                 <a:latin typeface="Calibri"/>
               </a:rPr>
-              <a:t>Is Phase 2 doable today?</a:t>
+              <a:t>Draft: the reconciled event plane</a:t>
             </a:r>
           </a:p>
           <a:p>
@@ -5837,7 +6098,7 @@
                   <a:srgbClr val="BBD5D7"/>
                 </a:solidFill>
               </a:rPr>
-              <a:t>Yes — technically achievable on our existing artifacts. The risks are dependencies, not the schema.</a:t>
+              <a:t>Round = the encounter; surveys &amp; events share it; concept-typed columns keep dictionary links</a:t>
             </a:r>
           </a:p>
         </p:txBody>
@@ -5886,16 +6147,40 @@
           </a:p>
         </p:txBody>
       </p:sp>
-      <p:sp>
-        <p:nvSpPr>
-          <p:cNvPr id="4" name="TextBox 3"/>
+      <p:pic>
+        <p:nvPicPr>
+          <p:cNvPr id="4" name="Picture 3" descr="event_plane.png"/>
+          <p:cNvPicPr>
+            <a:picLocks noChangeAspect="1"/>
+          </p:cNvPicPr>
+          <p:nvPr/>
+        </p:nvPicPr>
+        <p:blipFill>
+          <a:blip r:embed="rId2"/>
+          <a:stretch>
+            <a:fillRect/>
+          </a:stretch>
+        </p:blipFill>
+        <p:spPr>
+          <a:xfrm>
+            <a:off x="3206526" y="1280160"/>
+            <a:ext cx="5778643" cy="4892040"/>
+          </a:xfrm>
+          <a:prstGeom prst="rect">
+            <a:avLst/>
+          </a:prstGeom>
+        </p:spPr>
+      </p:pic>
+      <p:sp>
+        <p:nvSpPr>
+          <p:cNvPr id="5" name="TextBox 4"/>
           <p:cNvSpPr txBox="1"/>
           <p:nvPr/>
         </p:nvSpPr>
         <p:spPr>
           <a:xfrm>
-            <a:off x="502920" y="1234440"/>
-            <a:ext cx="11155680" cy="640080"/>
+            <a:off x="457200" y="6355080"/>
+            <a:ext cx="11247120" cy="365760"/>
           </a:xfrm>
           <a:prstGeom prst="rect">
             <a:avLst/>
@@ -5908,417 +6193,15 @@
           </a:bodyPr>
           <a:lstStyle/>
           <a:p>
-            <a:pPr algn="l"/>
-            <a:r>
-              <a:rPr sz="1400" b="1" i="0">
+            <a:pPr algn="ctr"/>
+            <a:r>
+              <a:rPr sz="1100" b="0" i="1">
                 <a:solidFill>
-                  <a:srgbClr val="2E8B8B"/>
+                  <a:srgbClr val="5A636E"/>
                 </a:solidFill>
                 <a:latin typeface="Calibri"/>
               </a:rPr>
-              <a:t>De-risked already: builds on Phase 1's same fact · CleanConnect did the cleaning · sessions derivable · hardest structures need no new tables.</a:t>
-            </a:r>
-          </a:p>
-        </p:txBody>
-      </p:sp>
-      <p:graphicFrame>
-        <p:nvGraphicFramePr>
-          <p:cNvPr id="5" name="Table 4"/>
-          <p:cNvGraphicFramePr>
-            <a:graphicFrameLocks noGrp="1"/>
-          </p:cNvGraphicFramePr>
-          <p:nvPr/>
-        </p:nvGraphicFramePr>
-        <p:xfrm>
-          <a:off x="548640" y="2057400"/>
-          <a:ext cx="11064240" cy="2697480"/>
-        </p:xfrm>
-        <a:graphic>
-          <a:graphicData uri="http://schemas.openxmlformats.org/drawingml/2006/table">
-            <a:tbl>
-              <a:tblPr firstRow="1" bandRow="1">
-                <a:tableStyleId>{5C22544A-7EE6-4342-B048-85BDC9FD1C3A}</a:tableStyleId>
-              </a:tblPr>
-              <a:tblGrid>
-                <a:gridCol w="2468880"/>
-                <a:gridCol w="4572000"/>
-                <a:gridCol w="4023360"/>
-              </a:tblGrid>
-              <a:tr h="539496">
-                <a:tc>
-                  <a:txBody>
-                    <a:bodyPr wrap="square"/>
-                    <a:lstStyle/>
-                    <a:p>
-                      <a:r>
-                        <a:rPr b="1" sz="1300">
-                          <a:solidFill>
-                            <a:srgbClr val="FFFFFF"/>
-                          </a:solidFill>
-                          <a:latin typeface="Calibri"/>
-                        </a:rPr>
-                        <a:t>Honest risk</a:t>
-                      </a:r>
-                    </a:p>
-                  </a:txBody>
-                  <a:tcPr marL="73152" marR="73152" marT="27432" marB="27432" anchor="ctr">
-                    <a:solidFill>
-                      <a:srgbClr val="16324F"/>
-                    </a:solidFill>
-                  </a:tcPr>
-                </a:tc>
-                <a:tc>
-                  <a:txBody>
-                    <a:bodyPr wrap="square"/>
-                    <a:lstStyle/>
-                    <a:p>
-                      <a:r>
-                        <a:rPr b="1" sz="1300">
-                          <a:solidFill>
-                            <a:srgbClr val="FFFFFF"/>
-                          </a:solidFill>
-                          <a:latin typeface="Calibri"/>
-                        </a:rPr>
-                        <a:t>Why</a:t>
-                      </a:r>
-                    </a:p>
-                  </a:txBody>
-                  <a:tcPr marL="73152" marR="73152" marT="27432" marB="27432" anchor="ctr">
-                    <a:solidFill>
-                      <a:srgbClr val="16324F"/>
-                    </a:solidFill>
-                  </a:tcPr>
-                </a:tc>
-                <a:tc>
-                  <a:txBody>
-                    <a:bodyPr wrap="square"/>
-                    <a:lstStyle/>
-                    <a:p>
-                      <a:r>
-                        <a:rPr b="1" sz="1300">
-                          <a:solidFill>
-                            <a:srgbClr val="FFFFFF"/>
-                          </a:solidFill>
-                          <a:latin typeface="Calibri"/>
-                        </a:rPr>
-                        <a:t>How we de-risk</a:t>
-                      </a:r>
-                    </a:p>
-                  </a:txBody>
-                  <a:tcPr marL="73152" marR="73152" marT="27432" marB="27432" anchor="ctr">
-                    <a:solidFill>
-                      <a:srgbClr val="16324F"/>
-                    </a:solidFill>
-                  </a:tcPr>
-                </a:tc>
-              </a:tr>
-              <a:tr h="539496">
-                <a:tc>
-                  <a:txBody>
-                    <a:bodyPr wrap="square"/>
-                    <a:lstStyle/>
-                    <a:p>
-                      <a:r>
-                        <a:rPr sz="1250" b="1">
-                          <a:solidFill>
-                            <a:srgbClr val="222A33"/>
-                          </a:solidFill>
-                          <a:latin typeface="Calibri"/>
-                        </a:rPr>
-                        <a:t>CIDTool maturity</a:t>
-                      </a:r>
-                    </a:p>
-                  </a:txBody>
-                  <a:tcPr marL="73152" marR="73152" marT="27432" marB="27432" anchor="ctr">
-                    <a:solidFill>
-                      <a:srgbClr val="FFFFFF"/>
-                    </a:solidFill>
-                  </a:tcPr>
-                </a:tc>
-                <a:tc>
-                  <a:txBody>
-                    <a:bodyPr wrap="square"/>
-                    <a:lstStyle/>
-                    <a:p>
-                      <a:r>
-                        <a:rPr sz="1250">
-                          <a:solidFill>
-                            <a:srgbClr val="222A33"/>
-                          </a:solidFill>
-                          <a:latin typeface="Calibri"/>
-                        </a:rPr>
-                        <a:t>dimensions come from it; it's still an in-dev tool</a:t>
-                      </a:r>
-                    </a:p>
-                  </a:txBody>
-                  <a:tcPr marL="73152" marR="73152" marT="27432" marB="27432" anchor="ctr">
-                    <a:solidFill>
-                      <a:srgbClr val="FFFFFF"/>
-                    </a:solidFill>
-                  </a:tcPr>
-                </a:tc>
-                <a:tc>
-                  <a:txBody>
-                    <a:bodyPr wrap="square"/>
-                    <a:lstStyle/>
-                    <a:p>
-                      <a:r>
-                        <a:rPr sz="1250">
-                          <a:solidFill>
-                            <a:srgbClr val="222A33"/>
-                          </a:solidFill>
-                          <a:latin typeface="Calibri"/>
-                        </a:rPr>
-                        <a:t>audit its output now / be ready to build the transform</a:t>
-                      </a:r>
-                    </a:p>
-                  </a:txBody>
-                  <a:tcPr marL="73152" marR="73152" marT="27432" marB="27432" anchor="ctr">
-                    <a:solidFill>
-                      <a:srgbClr val="FFFFFF"/>
-                    </a:solidFill>
-                  </a:tcPr>
-                </a:tc>
-              </a:tr>
-              <a:tr h="539496">
-                <a:tc>
-                  <a:txBody>
-                    <a:bodyPr wrap="square"/>
-                    <a:lstStyle/>
-                    <a:p>
-                      <a:r>
-                        <a:rPr sz="1250" b="1">
-                          <a:solidFill>
-                            <a:srgbClr val="222A33"/>
-                          </a:solidFill>
-                          <a:latin typeface="Calibri"/>
-                        </a:rPr>
-                        <a:t>Quest parser</a:t>
-                      </a:r>
-                    </a:p>
-                  </a:txBody>
-                  <a:tcPr marL="73152" marR="73152" marT="27432" marB="27432" anchor="ctr">
-                    <a:solidFill>
-                      <a:srgbClr val="EDF1F5"/>
-                    </a:solidFill>
-                  </a:tcPr>
-                </a:tc>
-                <a:tc>
-                  <a:txBody>
-                    <a:bodyPr wrap="square"/>
-                    <a:lstStyle/>
-                    <a:p>
-                      <a:r>
-                        <a:rPr sz="1250">
-                          <a:solidFill>
-                            <a:srgbClr val="222A33"/>
-                          </a:solidFill>
-                          <a:latin typeface="Calibri"/>
-                        </a:rPr>
-                        <a:t>skip logic, order, loops — no parser exists yet</a:t>
-                      </a:r>
-                    </a:p>
-                  </a:txBody>
-                  <a:tcPr marL="73152" marR="73152" marT="27432" marB="27432" anchor="ctr">
-                    <a:solidFill>
-                      <a:srgbClr val="EDF1F5"/>
-                    </a:solidFill>
-                  </a:tcPr>
-                </a:tc>
-                <a:tc>
-                  <a:txBody>
-                    <a:bodyPr wrap="square"/>
-                    <a:lstStyle/>
-                    <a:p>
-                      <a:r>
-                        <a:rPr sz="1250">
-                          <a:solidFill>
-                            <a:srgbClr val="222A33"/>
-                          </a:solidFill>
-                          <a:latin typeface="Calibri"/>
-                        </a:rPr>
-                        <a:t>prototype on module 1 first</a:t>
-                      </a:r>
-                    </a:p>
-                  </a:txBody>
-                  <a:tcPr marL="73152" marR="73152" marT="27432" marB="27432" anchor="ctr">
-                    <a:solidFill>
-                      <a:srgbClr val="EDF1F5"/>
-                    </a:solidFill>
-                  </a:tcPr>
-                </a:tc>
-              </a:tr>
-              <a:tr h="539496">
-                <a:tc>
-                  <a:txBody>
-                    <a:bodyPr wrap="square"/>
-                    <a:lstStyle/>
-                    <a:p>
-                      <a:r>
-                        <a:rPr sz="1250" b="1">
-                          <a:solidFill>
-                            <a:srgbClr val="222A33"/>
-                          </a:solidFill>
-                          <a:latin typeface="Calibri"/>
-                        </a:rPr>
-                        <a:t>Governance</a:t>
-                      </a:r>
-                    </a:p>
-                  </a:txBody>
-                  <a:tcPr marL="73152" marR="73152" marT="27432" marB="27432" anchor="ctr">
-                    <a:solidFill>
-                      <a:srgbClr val="FFFFFF"/>
-                    </a:solidFill>
-                  </a:tcPr>
-                </a:tc>
-                <a:tc>
-                  <a:txBody>
-                    <a:bodyPr wrap="square"/>
-                    <a:lstStyle/>
-                    <a:p>
-                      <a:r>
-                        <a:rPr sz="1250">
-                          <a:solidFill>
-                            <a:srgbClr val="222A33"/>
-                          </a:solidFill>
-                          <a:latin typeface="Calibri"/>
-                        </a:rPr>
-                        <a:t>IRB / date-shift / suppression / IAM — org, not just code</a:t>
-                      </a:r>
-                    </a:p>
-                  </a:txBody>
-                  <a:tcPr marL="73152" marR="73152" marT="27432" marB="27432" anchor="ctr">
-                    <a:solidFill>
-                      <a:srgbClr val="FFFFFF"/>
-                    </a:solidFill>
-                  </a:tcPr>
-                </a:tc>
-                <a:tc>
-                  <a:txBody>
-                    <a:bodyPr wrap="square"/>
-                    <a:lstStyle/>
-                    <a:p>
-                      <a:r>
-                        <a:rPr sz="1250">
-                          <a:solidFill>
-                            <a:srgbClr val="222A33"/>
-                          </a:solidFill>
-                          <a:latin typeface="Calibri"/>
-                        </a:rPr>
-                        <a:t>start as a parallel workstream early</a:t>
-                      </a:r>
-                    </a:p>
-                  </a:txBody>
-                  <a:tcPr marL="73152" marR="73152" marT="27432" marB="27432" anchor="ctr">
-                    <a:solidFill>
-                      <a:srgbClr val="FFFFFF"/>
-                    </a:solidFill>
-                  </a:tcPr>
-                </a:tc>
-              </a:tr>
-              <a:tr h="539496">
-                <a:tc>
-                  <a:txBody>
-                    <a:bodyPr wrap="square"/>
-                    <a:lstStyle/>
-                    <a:p>
-                      <a:r>
-                        <a:rPr sz="1250" b="1">
-                          <a:solidFill>
-                            <a:srgbClr val="222A33"/>
-                          </a:solidFill>
-                          <a:latin typeface="Calibri"/>
-                        </a:rPr>
-                        <a:t>Cross-team timing</a:t>
-                      </a:r>
-                    </a:p>
-                  </a:txBody>
-                  <a:tcPr marL="73152" marR="73152" marT="27432" marB="27432" anchor="ctr">
-                    <a:solidFill>
-                      <a:srgbClr val="EDF1F5"/>
-                    </a:solidFill>
-                  </a:tcPr>
-                </a:tc>
-                <a:tc>
-                  <a:txBody>
-                    <a:bodyPr wrap="square"/>
-                    <a:lstStyle/>
-                    <a:p>
-                      <a:r>
-                        <a:rPr sz="1250">
-                          <a:solidFill>
-                            <a:srgbClr val="222A33"/>
-                          </a:solidFill>
-                          <a:latin typeface="Calibri"/>
-                        </a:rPr>
-                        <a:t>couples to PR2 + CleanConnect + DevOps events</a:t>
-                      </a:r>
-                    </a:p>
-                  </a:txBody>
-                  <a:tcPr marL="73152" marR="73152" marT="27432" marB="27432" anchor="ctr">
-                    <a:solidFill>
-                      <a:srgbClr val="EDF1F5"/>
-                    </a:solidFill>
-                  </a:tcPr>
-                </a:tc>
-                <a:tc>
-                  <a:txBody>
-                    <a:bodyPr wrap="square"/>
-                    <a:lstStyle/>
-                    <a:p>
-                      <a:r>
-                        <a:rPr sz="1250">
-                          <a:solidFill>
-                            <a:srgbClr val="222A33"/>
-                          </a:solidFill>
-                          <a:latin typeface="Calibri"/>
-                        </a:rPr>
-                        <a:t>sequence around them; keep Phase 1 independent</a:t>
-                      </a:r>
-                    </a:p>
-                  </a:txBody>
-                  <a:tcPr marL="73152" marR="73152" marT="27432" marB="27432" anchor="ctr">
-                    <a:solidFill>
-                      <a:srgbClr val="EDF1F5"/>
-                    </a:solidFill>
-                  </a:tcPr>
-                </a:tc>
-              </a:tr>
-            </a:tbl>
-          </a:graphicData>
-        </a:graphic>
-      </p:graphicFrame>
-      <p:sp>
-        <p:nvSpPr>
-          <p:cNvPr id="6" name="TextBox 5"/>
-          <p:cNvSpPr txBox="1"/>
-          <p:nvPr/>
-        </p:nvSpPr>
-        <p:spPr>
-          <a:xfrm>
-            <a:off x="548640" y="5852160"/>
-            <a:ext cx="11064240" cy="548640"/>
-          </a:xfrm>
-          <a:prstGeom prst="rect">
-            <a:avLst/>
-          </a:prstGeom>
-          <a:noFill/>
-        </p:spPr>
-        <p:txBody>
-          <a:bodyPr wrap="square">
-            <a:spAutoFit/>
-          </a:bodyPr>
-          <a:lstStyle/>
-          <a:p>
-            <a:pPr algn="l"/>
-            <a:r>
-              <a:rPr sz="1500" b="1" i="0">
-                <a:solidFill>
-                  <a:srgbClr val="CC7D15"/>
-                </a:solidFill>
-                <a:latin typeface="Calibri"/>
-              </a:rPr>
-              <a:t>So Phase 2 is a funded, multi-quarter, multi-stakeholder program — not a single sprint. Which is exactly why we start with Phase 1.</a:t>
+              <a:t>Separate per-type event facts + a unified view (the SMDB summary). DRAFT — pending DevOps confirmation of Round-as-encounter.</a:t>
             </a:r>
           </a:p>
         </p:txBody>
@@ -6389,7 +6272,7 @@
                 </a:solidFill>
                 <a:latin typeface="Calibri"/>
               </a:rPr>
-              <a:t>New: events are going long-format too</a:t>
+              <a:t>Curated derived variables (dbt marts)</a:t>
             </a:r>
           </a:p>
           <a:p>
@@ -6399,7 +6282,7 @@
                   <a:srgbClr val="BBD5D7"/>
                 </a:solidFill>
               </a:rPr>
-              <a:t>DevOps is moving follow-ups from nested columns to per-type event tables</a:t>
+              <a:t>Define each research variable once — tested, governed, lineage to source</a:t>
             </a:r>
           </a:p>
         </p:txBody>
@@ -6456,8 +6339,8 @@
         </p:nvSpPr>
         <p:spPr>
           <a:xfrm>
-            <a:off x="640080" y="1417320"/>
-            <a:ext cx="10881360" cy="3108960"/>
+            <a:off x="502920" y="1234440"/>
+            <a:ext cx="11155680" cy="640080"/>
           </a:xfrm>
           <a:prstGeom prst="rect">
             <a:avLst/>
@@ -6470,81 +6353,464 @@
           </a:bodyPr>
           <a:lstStyle/>
           <a:p>
-            <a:pPr>
-              <a:spcAft>
-                <a:spcPts val="1300"/>
-              </a:spcAft>
-            </a:pPr>
-            <a:r>
-              <a:rPr sz="1800">
+            <a:pPr algn="l"/>
+            <a:r>
+              <a:rPr sz="1500" b="1" i="0">
                 <a:solidFill>
-                  <a:srgbClr val="222A33"/>
+                  <a:srgbClr val="2E8B8B"/>
                 </a:solidFill>
                 <a:latin typeface="Calibri"/>
               </a:rPr>
-              <a:t>•  Per-type long tables: activities · collections · kits · surveys · incentives · refusals (+ collectionDetails)</a:t>
-            </a:r>
-          </a:p>
-          <a:p>
-            <a:pPr>
-              <a:spcAft>
-                <a:spcPts val="1300"/>
-              </a:spcAft>
-            </a:pPr>
-            <a:r>
-              <a:rPr sz="1800">
-                <a:solidFill>
-                  <a:srgbClr val="222A33"/>
-                </a:solidFill>
-                <a:latin typeface="Calibri"/>
-              </a:rPr>
-              <a:t>•  Shared key on every table: (Connect ID, Round) — Round + activity type = the encounter</a:t>
-            </a:r>
-          </a:p>
-          <a:p>
-            <a:pPr>
-              <a:spcAft>
-                <a:spcPts val="1300"/>
-              </a:spcAft>
-            </a:pPr>
-            <a:r>
-              <a:rPr sz="1800">
-                <a:solidFill>
-                  <a:srgbClr val="222A33"/>
-                </a:solidFill>
-                <a:latin typeface="Calibri"/>
-              </a:rPr>
-              <a:t>•  collectionDetails: ~120 nested fields → 14 columns; a new round/specimen = zero schema change</a:t>
-            </a:r>
-          </a:p>
-          <a:p>
-            <a:pPr>
-              <a:spcAft>
-                <a:spcPts val="1300"/>
-              </a:spcAft>
-            </a:pPr>
-            <a:r>
-              <a:rPr sz="1800">
-                <a:solidFill>
-                  <a:srgbClr val="222A33"/>
-                </a:solidFill>
-                <a:latin typeface="Calibri"/>
-              </a:rPr>
-              <a:t>•  Risk: human-readable names &amp; values dropped the concept IDs → won't link to Primary/Secondary Source</a:t>
-            </a:r>
-          </a:p>
-        </p:txBody>
-      </p:sp>
-      <p:sp>
-        <p:nvSpPr>
-          <p:cNvPr id="5" name="TextBox 4"/>
+              <a:t>The payoff of "write analytics once": a canonical pack-years / BMI / risk score every researcher reuses — not re-derived per study.</a:t>
+            </a:r>
+          </a:p>
+        </p:txBody>
+      </p:sp>
+      <p:graphicFrame>
+        <p:nvGraphicFramePr>
+          <p:cNvPr id="5" name="Table 4"/>
+          <p:cNvGraphicFramePr>
+            <a:graphicFrameLocks noGrp="1"/>
+          </p:cNvGraphicFramePr>
+          <p:nvPr/>
+        </p:nvGraphicFramePr>
+        <p:xfrm>
+          <a:off x="548640" y="2057400"/>
+          <a:ext cx="11064240" cy="2560320"/>
+        </p:xfrm>
+        <a:graphic>
+          <a:graphicData uri="http://schemas.openxmlformats.org/drawingml/2006/table">
+            <a:tbl>
+              <a:tblPr firstRow="1" bandRow="1">
+                <a:tableStyleId>{5C22544A-7EE6-4342-B048-85BDC9FD1C3A}</a:tableStyleId>
+              </a:tblPr>
+              <a:tblGrid>
+                <a:gridCol w="2103120"/>
+                <a:gridCol w="5120640"/>
+                <a:gridCol w="3840480"/>
+              </a:tblGrid>
+              <a:tr h="426720">
+                <a:tc>
+                  <a:txBody>
+                    <a:bodyPr wrap="square"/>
+                    <a:lstStyle/>
+                    <a:p>
+                      <a:r>
+                        <a:rPr b="1" sz="1300">
+                          <a:solidFill>
+                            <a:srgbClr val="FFFFFF"/>
+                          </a:solidFill>
+                          <a:latin typeface="Calibri"/>
+                        </a:rPr>
+                        <a:t>Group</a:t>
+                      </a:r>
+                    </a:p>
+                  </a:txBody>
+                  <a:tcPr marL="73152" marR="73152" marT="27432" marB="27432" anchor="ctr">
+                    <a:solidFill>
+                      <a:srgbClr val="16324F"/>
+                    </a:solidFill>
+                  </a:tcPr>
+                </a:tc>
+                <a:tc>
+                  <a:txBody>
+                    <a:bodyPr wrap="square"/>
+                    <a:lstStyle/>
+                    <a:p>
+                      <a:r>
+                        <a:rPr b="1" sz="1300">
+                          <a:solidFill>
+                            <a:srgbClr val="FFFFFF"/>
+                          </a:solidFill>
+                          <a:latin typeface="Calibri"/>
+                        </a:rPr>
+                        <a:t>Example marts</a:t>
+                      </a:r>
+                    </a:p>
+                  </a:txBody>
+                  <a:tcPr marL="73152" marR="73152" marT="27432" marB="27432" anchor="ctr">
+                    <a:solidFill>
+                      <a:srgbClr val="16324F"/>
+                    </a:solidFill>
+                  </a:tcPr>
+                </a:tc>
+                <a:tc>
+                  <a:txBody>
+                    <a:bodyPr wrap="square"/>
+                    <a:lstStyle/>
+                    <a:p>
+                      <a:r>
+                        <a:rPr b="1" sz="1300">
+                          <a:solidFill>
+                            <a:srgbClr val="FFFFFF"/>
+                          </a:solidFill>
+                          <a:latin typeface="Calibri"/>
+                        </a:rPr>
+                        <a:t>Canonical derived variable</a:t>
+                      </a:r>
+                    </a:p>
+                  </a:txBody>
+                  <a:tcPr marL="73152" marR="73152" marT="27432" marB="27432" anchor="ctr">
+                    <a:solidFill>
+                      <a:srgbClr val="16324F"/>
+                    </a:solidFill>
+                  </a:tcPr>
+                </a:tc>
+              </a:tr>
+              <a:tr h="426720">
+                <a:tc>
+                  <a:txBody>
+                    <a:bodyPr wrap="square"/>
+                    <a:lstStyle/>
+                    <a:p>
+                      <a:r>
+                        <a:rPr sz="1250" b="1">
+                          <a:solidFill>
+                            <a:srgbClr val="222A33"/>
+                          </a:solidFill>
+                          <a:latin typeface="Calibri"/>
+                        </a:rPr>
+                        <a:t>Behavioral</a:t>
+                      </a:r>
+                    </a:p>
+                  </a:txBody>
+                  <a:tcPr marL="73152" marR="73152" marT="27432" marB="27432" anchor="ctr">
+                    <a:solidFill>
+                      <a:srgbClr val="FFFFFF"/>
+                    </a:solidFill>
+                  </a:tcPr>
+                </a:tc>
+                <a:tc>
+                  <a:txBody>
+                    <a:bodyPr wrap="square"/>
+                    <a:lstStyle/>
+                    <a:p>
+                      <a:r>
+                        <a:rPr sz="1250">
+                          <a:solidFill>
+                            <a:srgbClr val="222A33"/>
+                          </a:solidFill>
+                          <a:latin typeface="Calibri"/>
+                        </a:rPr>
+                        <a:t>smoking · alcohol · physical_activity · diet</a:t>
+                      </a:r>
+                    </a:p>
+                  </a:txBody>
+                  <a:tcPr marL="73152" marR="73152" marT="27432" marB="27432" anchor="ctr">
+                    <a:solidFill>
+                      <a:srgbClr val="FFFFFF"/>
+                    </a:solidFill>
+                  </a:tcPr>
+                </a:tc>
+                <a:tc>
+                  <a:txBody>
+                    <a:bodyPr wrap="square"/>
+                    <a:lstStyle/>
+                    <a:p>
+                      <a:r>
+                        <a:rPr sz="1250">
+                          <a:solidFill>
+                            <a:srgbClr val="222A33"/>
+                          </a:solidFill>
+                          <a:latin typeface="Calibri"/>
+                        </a:rPr>
+                        <a:t>pack-years · MET-hours/week</a:t>
+                      </a:r>
+                    </a:p>
+                  </a:txBody>
+                  <a:tcPr marL="73152" marR="73152" marT="27432" marB="27432" anchor="ctr">
+                    <a:solidFill>
+                      <a:srgbClr val="FFFFFF"/>
+                    </a:solidFill>
+                  </a:tcPr>
+                </a:tc>
+              </a:tr>
+              <a:tr h="426720">
+                <a:tc>
+                  <a:txBody>
+                    <a:bodyPr wrap="square"/>
+                    <a:lstStyle/>
+                    <a:p>
+                      <a:r>
+                        <a:rPr sz="1250" b="1">
+                          <a:solidFill>
+                            <a:srgbClr val="222A33"/>
+                          </a:solidFill>
+                          <a:latin typeface="Calibri"/>
+                        </a:rPr>
+                        <a:t>Anthropometric</a:t>
+                      </a:r>
+                    </a:p>
+                  </a:txBody>
+                  <a:tcPr marL="73152" marR="73152" marT="27432" marB="27432" anchor="ctr">
+                    <a:solidFill>
+                      <a:srgbClr val="EDF1F5"/>
+                    </a:solidFill>
+                  </a:tcPr>
+                </a:tc>
+                <a:tc>
+                  <a:txBody>
+                    <a:bodyPr wrap="square"/>
+                    <a:lstStyle/>
+                    <a:p>
+                      <a:r>
+                        <a:rPr sz="1250">
+                          <a:solidFill>
+                            <a:srgbClr val="222A33"/>
+                          </a:solidFill>
+                          <a:latin typeface="Calibri"/>
+                        </a:rPr>
+                        <a:t>anthropometry</a:t>
+                      </a:r>
+                    </a:p>
+                  </a:txBody>
+                  <a:tcPr marL="73152" marR="73152" marT="27432" marB="27432" anchor="ctr">
+                    <a:solidFill>
+                      <a:srgbClr val="EDF1F5"/>
+                    </a:solidFill>
+                  </a:tcPr>
+                </a:tc>
+                <a:tc>
+                  <a:txBody>
+                    <a:bodyPr wrap="square"/>
+                    <a:lstStyle/>
+                    <a:p>
+                      <a:r>
+                        <a:rPr sz="1250">
+                          <a:solidFill>
+                            <a:srgbClr val="222A33"/>
+                          </a:solidFill>
+                          <a:latin typeface="Calibri"/>
+                        </a:rPr>
+                        <a:t>BMI (height + weight)</a:t>
+                      </a:r>
+                    </a:p>
+                  </a:txBody>
+                  <a:tcPr marL="73152" marR="73152" marT="27432" marB="27432" anchor="ctr">
+                    <a:solidFill>
+                      <a:srgbClr val="EDF1F5"/>
+                    </a:solidFill>
+                  </a:tcPr>
+                </a:tc>
+              </a:tr>
+              <a:tr h="426720">
+                <a:tc>
+                  <a:txBody>
+                    <a:bodyPr wrap="square"/>
+                    <a:lstStyle/>
+                    <a:p>
+                      <a:r>
+                        <a:rPr sz="1250" b="1">
+                          <a:solidFill>
+                            <a:srgbClr val="222A33"/>
+                          </a:solidFill>
+                          <a:latin typeface="Calibri"/>
+                        </a:rPr>
+                        <a:t>Host</a:t>
+                      </a:r>
+                    </a:p>
+                  </a:txBody>
+                  <a:tcPr marL="73152" marR="73152" marT="27432" marB="27432" anchor="ctr">
+                    <a:solidFill>
+                      <a:srgbClr val="FFFFFF"/>
+                    </a:solidFill>
+                  </a:tcPr>
+                </a:tc>
+                <a:tc>
+                  <a:txBody>
+                    <a:bodyPr wrap="square"/>
+                    <a:lstStyle/>
+                    <a:p>
+                      <a:r>
+                        <a:rPr sz="1250">
+                          <a:solidFill>
+                            <a:srgbClr val="222A33"/>
+                          </a:solidFill>
+                          <a:latin typeface="Calibri"/>
+                        </a:rPr>
+                        <a:t>reproductive_history · family_history · genetic_risk</a:t>
+                      </a:r>
+                    </a:p>
+                  </a:txBody>
+                  <a:tcPr marL="73152" marR="73152" marT="27432" marB="27432" anchor="ctr">
+                    <a:solidFill>
+                      <a:srgbClr val="FFFFFF"/>
+                    </a:solidFill>
+                  </a:tcPr>
+                </a:tc>
+                <a:tc>
+                  <a:txBody>
+                    <a:bodyPr wrap="square"/>
+                    <a:lstStyle/>
+                    <a:p>
+                      <a:r>
+                        <a:rPr sz="1250">
+                          <a:solidFill>
+                            <a:srgbClr val="222A33"/>
+                          </a:solidFill>
+                          <a:latin typeface="Calibri"/>
+                        </a:rPr>
+                        <a:t>parity · hereditary-risk flag · polygenic risk score</a:t>
+                      </a:r>
+                    </a:p>
+                  </a:txBody>
+                  <a:tcPr marL="73152" marR="73152" marT="27432" marB="27432" anchor="ctr">
+                    <a:solidFill>
+                      <a:srgbClr val="FFFFFF"/>
+                    </a:solidFill>
+                  </a:tcPr>
+                </a:tc>
+              </a:tr>
+              <a:tr h="426720">
+                <a:tc>
+                  <a:txBody>
+                    <a:bodyPr wrap="square"/>
+                    <a:lstStyle/>
+                    <a:p>
+                      <a:r>
+                        <a:rPr sz="1250" b="1">
+                          <a:solidFill>
+                            <a:srgbClr val="222A33"/>
+                          </a:solidFill>
+                          <a:latin typeface="Calibri"/>
+                        </a:rPr>
+                        <a:t>Clinical</a:t>
+                      </a:r>
+                    </a:p>
+                  </a:txBody>
+                  <a:tcPr marL="73152" marR="73152" marT="27432" marB="27432" anchor="ctr">
+                    <a:solidFill>
+                      <a:srgbClr val="EDF1F5"/>
+                    </a:solidFill>
+                  </a:tcPr>
+                </a:tc>
+                <a:tc>
+                  <a:txBody>
+                    <a:bodyPr wrap="square"/>
+                    <a:lstStyle/>
+                    <a:p>
+                      <a:r>
+                        <a:rPr sz="1250">
+                          <a:solidFill>
+                            <a:srgbClr val="222A33"/>
+                          </a:solidFill>
+                          <a:latin typeface="Calibri"/>
+                        </a:rPr>
+                        <a:t>medical_history · medications · screening_history</a:t>
+                      </a:r>
+                    </a:p>
+                  </a:txBody>
+                  <a:tcPr marL="73152" marR="73152" marT="27432" marB="27432" anchor="ctr">
+                    <a:solidFill>
+                      <a:srgbClr val="EDF1F5"/>
+                    </a:solidFill>
+                  </a:tcPr>
+                </a:tc>
+                <a:tc>
+                  <a:txBody>
+                    <a:bodyPr wrap="square"/>
+                    <a:lstStyle/>
+                    <a:p>
+                      <a:r>
+                        <a:rPr sz="1250">
+                          <a:solidFill>
+                            <a:srgbClr val="222A33"/>
+                          </a:solidFill>
+                          <a:latin typeface="Calibri"/>
+                        </a:rPr>
+                        <a:t>comorbidity index · regular aspirin use · up-to-date-with-screening</a:t>
+                      </a:r>
+                    </a:p>
+                  </a:txBody>
+                  <a:tcPr marL="73152" marR="73152" marT="27432" marB="27432" anchor="ctr">
+                    <a:solidFill>
+                      <a:srgbClr val="EDF1F5"/>
+                    </a:solidFill>
+                  </a:tcPr>
+                </a:tc>
+              </a:tr>
+              <a:tr h="426720">
+                <a:tc>
+                  <a:txBody>
+                    <a:bodyPr wrap="square"/>
+                    <a:lstStyle/>
+                    <a:p>
+                      <a:r>
+                        <a:rPr sz="1250" b="1">
+                          <a:solidFill>
+                            <a:srgbClr val="222A33"/>
+                          </a:solidFill>
+                          <a:latin typeface="Calibri"/>
+                        </a:rPr>
+                        <a:t>Environmental</a:t>
+                      </a:r>
+                    </a:p>
+                  </a:txBody>
+                  <a:tcPr marL="73152" marR="73152" marT="27432" marB="27432" anchor="ctr">
+                    <a:solidFill>
+                      <a:srgbClr val="FFFFFF"/>
+                    </a:solidFill>
+                  </a:tcPr>
+                </a:tc>
+                <a:tc>
+                  <a:txBody>
+                    <a:bodyPr wrap="square"/>
+                    <a:lstStyle/>
+                    <a:p>
+                      <a:r>
+                        <a:rPr sz="1250">
+                          <a:solidFill>
+                            <a:srgbClr val="222A33"/>
+                          </a:solidFill>
+                          <a:latin typeface="Calibri"/>
+                        </a:rPr>
+                        <a:t>environmental_exposures</a:t>
+                      </a:r>
+                    </a:p>
+                  </a:txBody>
+                  <a:tcPr marL="73152" marR="73152" marT="27432" marB="27432" anchor="ctr">
+                    <a:solidFill>
+                      <a:srgbClr val="FFFFFF"/>
+                    </a:solidFill>
+                  </a:tcPr>
+                </a:tc>
+                <a:tc>
+                  <a:txBody>
+                    <a:bodyPr wrap="square"/>
+                    <a:lstStyle/>
+                    <a:p>
+                      <a:r>
+                        <a:rPr sz="1250">
+                          <a:solidFill>
+                            <a:srgbClr val="222A33"/>
+                          </a:solidFill>
+                          <a:latin typeface="Calibri"/>
+                        </a:rPr>
+                        <a:t>Area Deprivation Index (from geocoded address)</a:t>
+                      </a:r>
+                    </a:p>
+                  </a:txBody>
+                  <a:tcPr marL="73152" marR="73152" marT="27432" marB="27432" anchor="ctr">
+                    <a:solidFill>
+                      <a:srgbClr val="FFFFFF"/>
+                    </a:solidFill>
+                  </a:tcPr>
+                </a:tc>
+              </a:tr>
+            </a:tbl>
+          </a:graphicData>
+        </a:graphic>
+      </p:graphicFrame>
+      <p:sp>
+        <p:nvSpPr>
+          <p:cNvPr id="6" name="TextBox 5"/>
           <p:cNvSpPr txBox="1"/>
           <p:nvPr/>
         </p:nvSpPr>
         <p:spPr>
           <a:xfrm>
-            <a:off x="640080" y="5577840"/>
-            <a:ext cx="10881360" cy="731520"/>
+            <a:off x="548640" y="5715000"/>
+            <a:ext cx="11064240" cy="502920"/>
           </a:xfrm>
           <a:prstGeom prst="rect">
             <a:avLst/>
@@ -6559,13 +6825,48 @@
           <a:p>
             <a:pPr algn="l"/>
             <a:r>
-              <a:rPr sz="1600" b="1" i="0">
+              <a:rPr sz="1300" b="1" i="0">
                 <a:solidFill>
                   <a:srgbClr val="CC7D15"/>
                 </a:solidFill>
                 <a:latin typeface="Calibri"/>
               </a:rPr>
-              <a:t>Keep the long format — re-attach a concept_id to every column &amp; value (one vocab, one ID: Mouthwash = MW = Home Mouthwash).</a:t>
+              <a:t>Why dbt: model-level lineage to source · tests = contracts in CI · one-directional layer boundary · sensitivity tiers flow to marts (enforced in IAM).</a:t>
+            </a:r>
+          </a:p>
+        </p:txBody>
+      </p:sp>
+      <p:sp>
+        <p:nvSpPr>
+          <p:cNvPr id="7" name="TextBox 6"/>
+          <p:cNvSpPr txBox="1"/>
+          <p:nvPr/>
+        </p:nvSpPr>
+        <p:spPr>
+          <a:xfrm>
+            <a:off x="548640" y="6217920"/>
+            <a:ext cx="11064240" cy="457200"/>
+          </a:xfrm>
+          <a:prstGeom prst="rect">
+            <a:avLst/>
+          </a:prstGeom>
+          <a:noFill/>
+        </p:spPr>
+        <p:txBody>
+          <a:bodyPr wrap="square">
+            <a:spAutoFit/>
+          </a:bodyPr>
+          <a:lstStyle/>
+          <a:p>
+            <a:pPr algn="l"/>
+            <a:r>
+              <a:rPr sz="1100" b="0" i="1">
+                <a:solidFill>
+                  <a:srgbClr val="5A636E"/>
+                </a:solidFill>
+                <a:latin typeface="Calibri"/>
+              </a:rPr>
+              <a:t>Honest: derivation is real epi work (owner + sign-off per variable); marts are curated, not the only access — raw responses stay reachable.</a:t>
             </a:r>
           </a:p>
         </p:txBody>
@@ -6636,7 +6937,7 @@
                 </a:solidFill>
                 <a:latin typeface="Calibri"/>
               </a:rPr>
-              <a:t>Draft: the reconciled event plane</a:t>
+              <a:t>Same queries, two ways</a:t>
             </a:r>
           </a:p>
           <a:p>
@@ -6646,7 +6947,7 @@
                   <a:srgbClr val="BBD5D7"/>
                 </a:solidFill>
               </a:rPr>
-              <a:t>Round = the encounter; surveys &amp; events share it; concept-typed columns keep dictionary links</a:t>
+              <a:t>From painful/impossible → routine</a:t>
             </a:r>
           </a:p>
         </p:txBody>
@@ -6695,855 +6996,6 @@
           </a:p>
         </p:txBody>
       </p:sp>
-      <p:pic>
-        <p:nvPicPr>
-          <p:cNvPr id="4" name="Picture 3" descr="event_plane.png"/>
-          <p:cNvPicPr>
-            <a:picLocks noChangeAspect="1"/>
-          </p:cNvPicPr>
-          <p:nvPr/>
-        </p:nvPicPr>
-        <p:blipFill>
-          <a:blip r:embed="rId2"/>
-          <a:stretch>
-            <a:fillRect/>
-          </a:stretch>
-        </p:blipFill>
-        <p:spPr>
-          <a:xfrm>
-            <a:off x="3206526" y="1280160"/>
-            <a:ext cx="5778643" cy="4892040"/>
-          </a:xfrm>
-          <a:prstGeom prst="rect">
-            <a:avLst/>
-          </a:prstGeom>
-        </p:spPr>
-      </p:pic>
-      <p:sp>
-        <p:nvSpPr>
-          <p:cNvPr id="5" name="TextBox 4"/>
-          <p:cNvSpPr txBox="1"/>
-          <p:nvPr/>
-        </p:nvSpPr>
-        <p:spPr>
-          <a:xfrm>
-            <a:off x="457200" y="6355080"/>
-            <a:ext cx="11247120" cy="365760"/>
-          </a:xfrm>
-          <a:prstGeom prst="rect">
-            <a:avLst/>
-          </a:prstGeom>
-          <a:noFill/>
-        </p:spPr>
-        <p:txBody>
-          <a:bodyPr wrap="square">
-            <a:spAutoFit/>
-          </a:bodyPr>
-          <a:lstStyle/>
-          <a:p>
-            <a:pPr algn="ctr"/>
-            <a:r>
-              <a:rPr sz="1100" b="0" i="1">
-                <a:solidFill>
-                  <a:srgbClr val="5A636E"/>
-                </a:solidFill>
-                <a:latin typeface="Calibri"/>
-              </a:rPr>
-              <a:t>Separate per-type event facts + a unified view (the SMDB summary). DRAFT — pending DevOps confirmation of Round-as-encounter.</a:t>
-            </a:r>
-          </a:p>
-        </p:txBody>
-      </p:sp>
-    </p:spTree>
-  </p:cSld>
-  <p:clrMapOvr>
-    <a:masterClrMapping/>
-  </p:clrMapOvr>
-</p:sld>
-</file>
-
-<file path=ppt/slides/slide15.xml><?xml version="1.0" encoding="utf-8"?>
-<p:sld xmlns:a="http://schemas.openxmlformats.org/drawingml/2006/main" xmlns:p="http://schemas.openxmlformats.org/presentationml/2006/main" xmlns:r="http://schemas.openxmlformats.org/officeDocument/2006/relationships">
-  <p:cSld>
-    <p:spTree>
-      <p:nvGrpSpPr>
-        <p:cNvPr id="1" name=""/>
-        <p:cNvGrpSpPr/>
-        <p:nvPr/>
-      </p:nvGrpSpPr>
-      <p:grpSpPr/>
-      <p:sp>
-        <p:nvSpPr>
-          <p:cNvPr id="2" name="Rectangle 1"/>
-          <p:cNvSpPr/>
-          <p:nvPr/>
-        </p:nvSpPr>
-        <p:spPr>
-          <a:xfrm>
-            <a:off x="0" y="0"/>
-            <a:ext cx="12191695" cy="1051560"/>
-          </a:xfrm>
-          <a:prstGeom prst="rect">
-            <a:avLst/>
-          </a:prstGeom>
-          <a:solidFill>
-            <a:srgbClr val="16324F"/>
-          </a:solidFill>
-          <a:ln>
-            <a:noFill/>
-          </a:ln>
-          <a:effectLst/>
-        </p:spPr>
-        <p:style>
-          <a:lnRef idx="1">
-            <a:schemeClr val="accent1"/>
-          </a:lnRef>
-          <a:fillRef idx="3">
-            <a:schemeClr val="accent1"/>
-          </a:fillRef>
-          <a:effectRef idx="2">
-            <a:schemeClr val="accent1"/>
-          </a:effectRef>
-          <a:fontRef idx="minor">
-            <a:schemeClr val="lt1"/>
-          </a:fontRef>
-        </p:style>
-        <p:txBody>
-          <a:bodyPr rtlCol="0" anchor="ctr" lIns="457200" tIns="109728"/>
-          <a:lstStyle/>
-          <a:p>
-            <a:pPr algn="ctr"/>
-            <a:r>
-              <a:rPr sz="2800" b="1">
-                <a:solidFill>
-                  <a:srgbClr val="FFFFFF"/>
-                </a:solidFill>
-                <a:latin typeface="Calibri"/>
-              </a:rPr>
-              <a:t>Curated derived variables (dbt marts)</a:t>
-            </a:r>
-          </a:p>
-          <a:p>
-            <a:r>
-              <a:rPr sz="1300" i="1">
-                <a:solidFill>
-                  <a:srgbClr val="BBD5D7"/>
-                </a:solidFill>
-              </a:rPr>
-              <a:t>Define each research variable once — tested, governed, lineage to source</a:t>
-            </a:r>
-          </a:p>
-        </p:txBody>
-      </p:sp>
-      <p:sp>
-        <p:nvSpPr>
-          <p:cNvPr id="3" name="Rectangle 2"/>
-          <p:cNvSpPr/>
-          <p:nvPr/>
-        </p:nvSpPr>
-        <p:spPr>
-          <a:xfrm>
-            <a:off x="0" y="1051560"/>
-            <a:ext cx="12191695" cy="54864"/>
-          </a:xfrm>
-          <a:prstGeom prst="rect">
-            <a:avLst/>
-          </a:prstGeom>
-          <a:solidFill>
-            <a:srgbClr val="2E8B8B"/>
-          </a:solidFill>
-          <a:ln>
-            <a:noFill/>
-          </a:ln>
-          <a:effectLst/>
-        </p:spPr>
-        <p:style>
-          <a:lnRef idx="1">
-            <a:schemeClr val="accent1"/>
-          </a:lnRef>
-          <a:fillRef idx="3">
-            <a:schemeClr val="accent1"/>
-          </a:fillRef>
-          <a:effectRef idx="2">
-            <a:schemeClr val="accent1"/>
-          </a:effectRef>
-          <a:fontRef idx="minor">
-            <a:schemeClr val="lt1"/>
-          </a:fontRef>
-        </p:style>
-        <p:txBody>
-          <a:bodyPr rtlCol="0" anchor="ctr"/>
-          <a:lstStyle/>
-          <a:p>
-            <a:pPr algn="ctr"/>
-          </a:p>
-        </p:txBody>
-      </p:sp>
-      <p:sp>
-        <p:nvSpPr>
-          <p:cNvPr id="4" name="TextBox 3"/>
-          <p:cNvSpPr txBox="1"/>
-          <p:nvPr/>
-        </p:nvSpPr>
-        <p:spPr>
-          <a:xfrm>
-            <a:off x="502920" y="1234440"/>
-            <a:ext cx="11155680" cy="640080"/>
-          </a:xfrm>
-          <a:prstGeom prst="rect">
-            <a:avLst/>
-          </a:prstGeom>
-          <a:noFill/>
-        </p:spPr>
-        <p:txBody>
-          <a:bodyPr wrap="square">
-            <a:spAutoFit/>
-          </a:bodyPr>
-          <a:lstStyle/>
-          <a:p>
-            <a:pPr algn="l"/>
-            <a:r>
-              <a:rPr sz="1500" b="1" i="0">
-                <a:solidFill>
-                  <a:srgbClr val="2E8B8B"/>
-                </a:solidFill>
-                <a:latin typeface="Calibri"/>
-              </a:rPr>
-              <a:t>The payoff of "write analytics once": a canonical pack-years / BMI / risk score every researcher reuses — not re-derived per study.</a:t>
-            </a:r>
-          </a:p>
-        </p:txBody>
-      </p:sp>
-      <p:graphicFrame>
-        <p:nvGraphicFramePr>
-          <p:cNvPr id="5" name="Table 4"/>
-          <p:cNvGraphicFramePr>
-            <a:graphicFrameLocks noGrp="1"/>
-          </p:cNvGraphicFramePr>
-          <p:nvPr/>
-        </p:nvGraphicFramePr>
-        <p:xfrm>
-          <a:off x="548640" y="2057400"/>
-          <a:ext cx="11064240" cy="2560320"/>
-        </p:xfrm>
-        <a:graphic>
-          <a:graphicData uri="http://schemas.openxmlformats.org/drawingml/2006/table">
-            <a:tbl>
-              <a:tblPr firstRow="1" bandRow="1">
-                <a:tableStyleId>{5C22544A-7EE6-4342-B048-85BDC9FD1C3A}</a:tableStyleId>
-              </a:tblPr>
-              <a:tblGrid>
-                <a:gridCol w="2103120"/>
-                <a:gridCol w="5120640"/>
-                <a:gridCol w="3840480"/>
-              </a:tblGrid>
-              <a:tr h="426720">
-                <a:tc>
-                  <a:txBody>
-                    <a:bodyPr wrap="square"/>
-                    <a:lstStyle/>
-                    <a:p>
-                      <a:r>
-                        <a:rPr b="1" sz="1300">
-                          <a:solidFill>
-                            <a:srgbClr val="FFFFFF"/>
-                          </a:solidFill>
-                          <a:latin typeface="Calibri"/>
-                        </a:rPr>
-                        <a:t>Group</a:t>
-                      </a:r>
-                    </a:p>
-                  </a:txBody>
-                  <a:tcPr marL="73152" marR="73152" marT="27432" marB="27432" anchor="ctr">
-                    <a:solidFill>
-                      <a:srgbClr val="16324F"/>
-                    </a:solidFill>
-                  </a:tcPr>
-                </a:tc>
-                <a:tc>
-                  <a:txBody>
-                    <a:bodyPr wrap="square"/>
-                    <a:lstStyle/>
-                    <a:p>
-                      <a:r>
-                        <a:rPr b="1" sz="1300">
-                          <a:solidFill>
-                            <a:srgbClr val="FFFFFF"/>
-                          </a:solidFill>
-                          <a:latin typeface="Calibri"/>
-                        </a:rPr>
-                        <a:t>Example marts</a:t>
-                      </a:r>
-                    </a:p>
-                  </a:txBody>
-                  <a:tcPr marL="73152" marR="73152" marT="27432" marB="27432" anchor="ctr">
-                    <a:solidFill>
-                      <a:srgbClr val="16324F"/>
-                    </a:solidFill>
-                  </a:tcPr>
-                </a:tc>
-                <a:tc>
-                  <a:txBody>
-                    <a:bodyPr wrap="square"/>
-                    <a:lstStyle/>
-                    <a:p>
-                      <a:r>
-                        <a:rPr b="1" sz="1300">
-                          <a:solidFill>
-                            <a:srgbClr val="FFFFFF"/>
-                          </a:solidFill>
-                          <a:latin typeface="Calibri"/>
-                        </a:rPr>
-                        <a:t>Canonical derived variable</a:t>
-                      </a:r>
-                    </a:p>
-                  </a:txBody>
-                  <a:tcPr marL="73152" marR="73152" marT="27432" marB="27432" anchor="ctr">
-                    <a:solidFill>
-                      <a:srgbClr val="16324F"/>
-                    </a:solidFill>
-                  </a:tcPr>
-                </a:tc>
-              </a:tr>
-              <a:tr h="426720">
-                <a:tc>
-                  <a:txBody>
-                    <a:bodyPr wrap="square"/>
-                    <a:lstStyle/>
-                    <a:p>
-                      <a:r>
-                        <a:rPr sz="1250" b="1">
-                          <a:solidFill>
-                            <a:srgbClr val="222A33"/>
-                          </a:solidFill>
-                          <a:latin typeface="Calibri"/>
-                        </a:rPr>
-                        <a:t>Behavioral</a:t>
-                      </a:r>
-                    </a:p>
-                  </a:txBody>
-                  <a:tcPr marL="73152" marR="73152" marT="27432" marB="27432" anchor="ctr">
-                    <a:solidFill>
-                      <a:srgbClr val="FFFFFF"/>
-                    </a:solidFill>
-                  </a:tcPr>
-                </a:tc>
-                <a:tc>
-                  <a:txBody>
-                    <a:bodyPr wrap="square"/>
-                    <a:lstStyle/>
-                    <a:p>
-                      <a:r>
-                        <a:rPr sz="1250">
-                          <a:solidFill>
-                            <a:srgbClr val="222A33"/>
-                          </a:solidFill>
-                          <a:latin typeface="Calibri"/>
-                        </a:rPr>
-                        <a:t>smoking · alcohol · physical_activity · diet</a:t>
-                      </a:r>
-                    </a:p>
-                  </a:txBody>
-                  <a:tcPr marL="73152" marR="73152" marT="27432" marB="27432" anchor="ctr">
-                    <a:solidFill>
-                      <a:srgbClr val="FFFFFF"/>
-                    </a:solidFill>
-                  </a:tcPr>
-                </a:tc>
-                <a:tc>
-                  <a:txBody>
-                    <a:bodyPr wrap="square"/>
-                    <a:lstStyle/>
-                    <a:p>
-                      <a:r>
-                        <a:rPr sz="1250">
-                          <a:solidFill>
-                            <a:srgbClr val="222A33"/>
-                          </a:solidFill>
-                          <a:latin typeface="Calibri"/>
-                        </a:rPr>
-                        <a:t>pack-years · MET-hours/week</a:t>
-                      </a:r>
-                    </a:p>
-                  </a:txBody>
-                  <a:tcPr marL="73152" marR="73152" marT="27432" marB="27432" anchor="ctr">
-                    <a:solidFill>
-                      <a:srgbClr val="FFFFFF"/>
-                    </a:solidFill>
-                  </a:tcPr>
-                </a:tc>
-              </a:tr>
-              <a:tr h="426720">
-                <a:tc>
-                  <a:txBody>
-                    <a:bodyPr wrap="square"/>
-                    <a:lstStyle/>
-                    <a:p>
-                      <a:r>
-                        <a:rPr sz="1250" b="1">
-                          <a:solidFill>
-                            <a:srgbClr val="222A33"/>
-                          </a:solidFill>
-                          <a:latin typeface="Calibri"/>
-                        </a:rPr>
-                        <a:t>Anthropometric</a:t>
-                      </a:r>
-                    </a:p>
-                  </a:txBody>
-                  <a:tcPr marL="73152" marR="73152" marT="27432" marB="27432" anchor="ctr">
-                    <a:solidFill>
-                      <a:srgbClr val="EDF1F5"/>
-                    </a:solidFill>
-                  </a:tcPr>
-                </a:tc>
-                <a:tc>
-                  <a:txBody>
-                    <a:bodyPr wrap="square"/>
-                    <a:lstStyle/>
-                    <a:p>
-                      <a:r>
-                        <a:rPr sz="1250">
-                          <a:solidFill>
-                            <a:srgbClr val="222A33"/>
-                          </a:solidFill>
-                          <a:latin typeface="Calibri"/>
-                        </a:rPr>
-                        <a:t>anthropometry</a:t>
-                      </a:r>
-                    </a:p>
-                  </a:txBody>
-                  <a:tcPr marL="73152" marR="73152" marT="27432" marB="27432" anchor="ctr">
-                    <a:solidFill>
-                      <a:srgbClr val="EDF1F5"/>
-                    </a:solidFill>
-                  </a:tcPr>
-                </a:tc>
-                <a:tc>
-                  <a:txBody>
-                    <a:bodyPr wrap="square"/>
-                    <a:lstStyle/>
-                    <a:p>
-                      <a:r>
-                        <a:rPr sz="1250">
-                          <a:solidFill>
-                            <a:srgbClr val="222A33"/>
-                          </a:solidFill>
-                          <a:latin typeface="Calibri"/>
-                        </a:rPr>
-                        <a:t>BMI (height + weight)</a:t>
-                      </a:r>
-                    </a:p>
-                  </a:txBody>
-                  <a:tcPr marL="73152" marR="73152" marT="27432" marB="27432" anchor="ctr">
-                    <a:solidFill>
-                      <a:srgbClr val="EDF1F5"/>
-                    </a:solidFill>
-                  </a:tcPr>
-                </a:tc>
-              </a:tr>
-              <a:tr h="426720">
-                <a:tc>
-                  <a:txBody>
-                    <a:bodyPr wrap="square"/>
-                    <a:lstStyle/>
-                    <a:p>
-                      <a:r>
-                        <a:rPr sz="1250" b="1">
-                          <a:solidFill>
-                            <a:srgbClr val="222A33"/>
-                          </a:solidFill>
-                          <a:latin typeface="Calibri"/>
-                        </a:rPr>
-                        <a:t>Host</a:t>
-                      </a:r>
-                    </a:p>
-                  </a:txBody>
-                  <a:tcPr marL="73152" marR="73152" marT="27432" marB="27432" anchor="ctr">
-                    <a:solidFill>
-                      <a:srgbClr val="FFFFFF"/>
-                    </a:solidFill>
-                  </a:tcPr>
-                </a:tc>
-                <a:tc>
-                  <a:txBody>
-                    <a:bodyPr wrap="square"/>
-                    <a:lstStyle/>
-                    <a:p>
-                      <a:r>
-                        <a:rPr sz="1250">
-                          <a:solidFill>
-                            <a:srgbClr val="222A33"/>
-                          </a:solidFill>
-                          <a:latin typeface="Calibri"/>
-                        </a:rPr>
-                        <a:t>reproductive_history · family_history · genetic_risk</a:t>
-                      </a:r>
-                    </a:p>
-                  </a:txBody>
-                  <a:tcPr marL="73152" marR="73152" marT="27432" marB="27432" anchor="ctr">
-                    <a:solidFill>
-                      <a:srgbClr val="FFFFFF"/>
-                    </a:solidFill>
-                  </a:tcPr>
-                </a:tc>
-                <a:tc>
-                  <a:txBody>
-                    <a:bodyPr wrap="square"/>
-                    <a:lstStyle/>
-                    <a:p>
-                      <a:r>
-                        <a:rPr sz="1250">
-                          <a:solidFill>
-                            <a:srgbClr val="222A33"/>
-                          </a:solidFill>
-                          <a:latin typeface="Calibri"/>
-                        </a:rPr>
-                        <a:t>parity · hereditary-risk flag · polygenic risk score</a:t>
-                      </a:r>
-                    </a:p>
-                  </a:txBody>
-                  <a:tcPr marL="73152" marR="73152" marT="27432" marB="27432" anchor="ctr">
-                    <a:solidFill>
-                      <a:srgbClr val="FFFFFF"/>
-                    </a:solidFill>
-                  </a:tcPr>
-                </a:tc>
-              </a:tr>
-              <a:tr h="426720">
-                <a:tc>
-                  <a:txBody>
-                    <a:bodyPr wrap="square"/>
-                    <a:lstStyle/>
-                    <a:p>
-                      <a:r>
-                        <a:rPr sz="1250" b="1">
-                          <a:solidFill>
-                            <a:srgbClr val="222A33"/>
-                          </a:solidFill>
-                          <a:latin typeface="Calibri"/>
-                        </a:rPr>
-                        <a:t>Clinical</a:t>
-                      </a:r>
-                    </a:p>
-                  </a:txBody>
-                  <a:tcPr marL="73152" marR="73152" marT="27432" marB="27432" anchor="ctr">
-                    <a:solidFill>
-                      <a:srgbClr val="EDF1F5"/>
-                    </a:solidFill>
-                  </a:tcPr>
-                </a:tc>
-                <a:tc>
-                  <a:txBody>
-                    <a:bodyPr wrap="square"/>
-                    <a:lstStyle/>
-                    <a:p>
-                      <a:r>
-                        <a:rPr sz="1250">
-                          <a:solidFill>
-                            <a:srgbClr val="222A33"/>
-                          </a:solidFill>
-                          <a:latin typeface="Calibri"/>
-                        </a:rPr>
-                        <a:t>medical_history · medications · screening_history</a:t>
-                      </a:r>
-                    </a:p>
-                  </a:txBody>
-                  <a:tcPr marL="73152" marR="73152" marT="27432" marB="27432" anchor="ctr">
-                    <a:solidFill>
-                      <a:srgbClr val="EDF1F5"/>
-                    </a:solidFill>
-                  </a:tcPr>
-                </a:tc>
-                <a:tc>
-                  <a:txBody>
-                    <a:bodyPr wrap="square"/>
-                    <a:lstStyle/>
-                    <a:p>
-                      <a:r>
-                        <a:rPr sz="1250">
-                          <a:solidFill>
-                            <a:srgbClr val="222A33"/>
-                          </a:solidFill>
-                          <a:latin typeface="Calibri"/>
-                        </a:rPr>
-                        <a:t>comorbidity index · regular aspirin use · up-to-date-with-screening</a:t>
-                      </a:r>
-                    </a:p>
-                  </a:txBody>
-                  <a:tcPr marL="73152" marR="73152" marT="27432" marB="27432" anchor="ctr">
-                    <a:solidFill>
-                      <a:srgbClr val="EDF1F5"/>
-                    </a:solidFill>
-                  </a:tcPr>
-                </a:tc>
-              </a:tr>
-              <a:tr h="426720">
-                <a:tc>
-                  <a:txBody>
-                    <a:bodyPr wrap="square"/>
-                    <a:lstStyle/>
-                    <a:p>
-                      <a:r>
-                        <a:rPr sz="1250" b="1">
-                          <a:solidFill>
-                            <a:srgbClr val="222A33"/>
-                          </a:solidFill>
-                          <a:latin typeface="Calibri"/>
-                        </a:rPr>
-                        <a:t>Environmental</a:t>
-                      </a:r>
-                    </a:p>
-                  </a:txBody>
-                  <a:tcPr marL="73152" marR="73152" marT="27432" marB="27432" anchor="ctr">
-                    <a:solidFill>
-                      <a:srgbClr val="FFFFFF"/>
-                    </a:solidFill>
-                  </a:tcPr>
-                </a:tc>
-                <a:tc>
-                  <a:txBody>
-                    <a:bodyPr wrap="square"/>
-                    <a:lstStyle/>
-                    <a:p>
-                      <a:r>
-                        <a:rPr sz="1250">
-                          <a:solidFill>
-                            <a:srgbClr val="222A33"/>
-                          </a:solidFill>
-                          <a:latin typeface="Calibri"/>
-                        </a:rPr>
-                        <a:t>environmental_exposures</a:t>
-                      </a:r>
-                    </a:p>
-                  </a:txBody>
-                  <a:tcPr marL="73152" marR="73152" marT="27432" marB="27432" anchor="ctr">
-                    <a:solidFill>
-                      <a:srgbClr val="FFFFFF"/>
-                    </a:solidFill>
-                  </a:tcPr>
-                </a:tc>
-                <a:tc>
-                  <a:txBody>
-                    <a:bodyPr wrap="square"/>
-                    <a:lstStyle/>
-                    <a:p>
-                      <a:r>
-                        <a:rPr sz="1250">
-                          <a:solidFill>
-                            <a:srgbClr val="222A33"/>
-                          </a:solidFill>
-                          <a:latin typeface="Calibri"/>
-                        </a:rPr>
-                        <a:t>Area Deprivation Index (from geocoded address)</a:t>
-                      </a:r>
-                    </a:p>
-                  </a:txBody>
-                  <a:tcPr marL="73152" marR="73152" marT="27432" marB="27432" anchor="ctr">
-                    <a:solidFill>
-                      <a:srgbClr val="FFFFFF"/>
-                    </a:solidFill>
-                  </a:tcPr>
-                </a:tc>
-              </a:tr>
-            </a:tbl>
-          </a:graphicData>
-        </a:graphic>
-      </p:graphicFrame>
-      <p:sp>
-        <p:nvSpPr>
-          <p:cNvPr id="6" name="TextBox 5"/>
-          <p:cNvSpPr txBox="1"/>
-          <p:nvPr/>
-        </p:nvSpPr>
-        <p:spPr>
-          <a:xfrm>
-            <a:off x="548640" y="5715000"/>
-            <a:ext cx="11064240" cy="502920"/>
-          </a:xfrm>
-          <a:prstGeom prst="rect">
-            <a:avLst/>
-          </a:prstGeom>
-          <a:noFill/>
-        </p:spPr>
-        <p:txBody>
-          <a:bodyPr wrap="square">
-            <a:spAutoFit/>
-          </a:bodyPr>
-          <a:lstStyle/>
-          <a:p>
-            <a:pPr algn="l"/>
-            <a:r>
-              <a:rPr sz="1300" b="1" i="0">
-                <a:solidFill>
-                  <a:srgbClr val="CC7D15"/>
-                </a:solidFill>
-                <a:latin typeface="Calibri"/>
-              </a:rPr>
-              <a:t>Why dbt: model-level lineage to source · tests = contracts in CI · one-directional layer boundary · sensitivity tiers flow to marts (enforced in IAM).</a:t>
-            </a:r>
-          </a:p>
-        </p:txBody>
-      </p:sp>
-      <p:sp>
-        <p:nvSpPr>
-          <p:cNvPr id="7" name="TextBox 6"/>
-          <p:cNvSpPr txBox="1"/>
-          <p:nvPr/>
-        </p:nvSpPr>
-        <p:spPr>
-          <a:xfrm>
-            <a:off x="548640" y="6217920"/>
-            <a:ext cx="11064240" cy="457200"/>
-          </a:xfrm>
-          <a:prstGeom prst="rect">
-            <a:avLst/>
-          </a:prstGeom>
-          <a:noFill/>
-        </p:spPr>
-        <p:txBody>
-          <a:bodyPr wrap="square">
-            <a:spAutoFit/>
-          </a:bodyPr>
-          <a:lstStyle/>
-          <a:p>
-            <a:pPr algn="l"/>
-            <a:r>
-              <a:rPr sz="1100" b="0" i="1">
-                <a:solidFill>
-                  <a:srgbClr val="5A636E"/>
-                </a:solidFill>
-                <a:latin typeface="Calibri"/>
-              </a:rPr>
-              <a:t>Honest: derivation is real epi work (owner + sign-off per variable); marts are curated, not the only access — raw responses stay reachable.</a:t>
-            </a:r>
-          </a:p>
-        </p:txBody>
-      </p:sp>
-    </p:spTree>
-  </p:cSld>
-  <p:clrMapOvr>
-    <a:masterClrMapping/>
-  </p:clrMapOvr>
-</p:sld>
-</file>
-
-<file path=ppt/slides/slide16.xml><?xml version="1.0" encoding="utf-8"?>
-<p:sld xmlns:a="http://schemas.openxmlformats.org/drawingml/2006/main" xmlns:p="http://schemas.openxmlformats.org/presentationml/2006/main" xmlns:r="http://schemas.openxmlformats.org/officeDocument/2006/relationships">
-  <p:cSld>
-    <p:spTree>
-      <p:nvGrpSpPr>
-        <p:cNvPr id="1" name=""/>
-        <p:cNvGrpSpPr/>
-        <p:nvPr/>
-      </p:nvGrpSpPr>
-      <p:grpSpPr/>
-      <p:sp>
-        <p:nvSpPr>
-          <p:cNvPr id="2" name="Rectangle 1"/>
-          <p:cNvSpPr/>
-          <p:nvPr/>
-        </p:nvSpPr>
-        <p:spPr>
-          <a:xfrm>
-            <a:off x="0" y="0"/>
-            <a:ext cx="12191695" cy="1051560"/>
-          </a:xfrm>
-          <a:prstGeom prst="rect">
-            <a:avLst/>
-          </a:prstGeom>
-          <a:solidFill>
-            <a:srgbClr val="16324F"/>
-          </a:solidFill>
-          <a:ln>
-            <a:noFill/>
-          </a:ln>
-          <a:effectLst/>
-        </p:spPr>
-        <p:style>
-          <a:lnRef idx="1">
-            <a:schemeClr val="accent1"/>
-          </a:lnRef>
-          <a:fillRef idx="3">
-            <a:schemeClr val="accent1"/>
-          </a:fillRef>
-          <a:effectRef idx="2">
-            <a:schemeClr val="accent1"/>
-          </a:effectRef>
-          <a:fontRef idx="minor">
-            <a:schemeClr val="lt1"/>
-          </a:fontRef>
-        </p:style>
-        <p:txBody>
-          <a:bodyPr rtlCol="0" anchor="ctr" lIns="457200" tIns="109728"/>
-          <a:lstStyle/>
-          <a:p>
-            <a:pPr algn="ctr"/>
-            <a:r>
-              <a:rPr sz="2800" b="1">
-                <a:solidFill>
-                  <a:srgbClr val="FFFFFF"/>
-                </a:solidFill>
-                <a:latin typeface="Calibri"/>
-              </a:rPr>
-              <a:t>Same queries, three ways</a:t>
-            </a:r>
-          </a:p>
-          <a:p>
-            <a:r>
-              <a:rPr sz="1300" i="1">
-                <a:solidFill>
-                  <a:srgbClr val="BBD5D7"/>
-                </a:solidFill>
-              </a:rPr>
-              <a:t>From painful/impossible → routine → trivial</a:t>
-            </a:r>
-          </a:p>
-        </p:txBody>
-      </p:sp>
-      <p:sp>
-        <p:nvSpPr>
-          <p:cNvPr id="3" name="Rectangle 2"/>
-          <p:cNvSpPr/>
-          <p:nvPr/>
-        </p:nvSpPr>
-        <p:spPr>
-          <a:xfrm>
-            <a:off x="0" y="1051560"/>
-            <a:ext cx="12191695" cy="54864"/>
-          </a:xfrm>
-          <a:prstGeom prst="rect">
-            <a:avLst/>
-          </a:prstGeom>
-          <a:solidFill>
-            <a:srgbClr val="2E8B8B"/>
-          </a:solidFill>
-          <a:ln>
-            <a:noFill/>
-          </a:ln>
-          <a:effectLst/>
-        </p:spPr>
-        <p:style>
-          <a:lnRef idx="1">
-            <a:schemeClr val="accent1"/>
-          </a:lnRef>
-          <a:fillRef idx="3">
-            <a:schemeClr val="accent1"/>
-          </a:fillRef>
-          <a:effectRef idx="2">
-            <a:schemeClr val="accent1"/>
-          </a:effectRef>
-          <a:fontRef idx="minor">
-            <a:schemeClr val="lt1"/>
-          </a:fontRef>
-        </p:style>
-        <p:txBody>
-          <a:bodyPr rtlCol="0" anchor="ctr"/>
-          <a:lstStyle/>
-          <a:p>
-            <a:pPr algn="ctr"/>
-          </a:p>
-        </p:txBody>
-      </p:sp>
       <p:graphicFrame>
         <p:nvGraphicFramePr>
           <p:cNvPr id="4" name="Table 3"/>
@@ -7625,7 +7077,7 @@
                           </a:solidFill>
                           <a:latin typeface="Calibri"/>
                         </a:rPr>
-                        <a:t>Phase 1</a:t>
+                        <a:t>The model</a:t>
                       </a:r>
                     </a:p>
                   </a:txBody>
@@ -7647,7 +7099,7 @@
                           </a:solidFill>
                           <a:latin typeface="Calibri"/>
                         </a:rPr>
-                        <a:t>Phase 2</a:t>
+                        <a:t>With an enhancement</a:t>
                       </a:r>
                     </a:p>
                   </a:txBody>
@@ -7827,7 +7279,7 @@
                           </a:solidFill>
                           <a:latin typeface="Calibri"/>
                         </a:rPr>
-                        <a:t>precomputed aggregate</a:t>
+                        <a:t>precomputed mart aggregate</a:t>
                       </a:r>
                     </a:p>
                   </a:txBody>
@@ -7917,7 +7369,7 @@
                           </a:solidFill>
                           <a:latin typeface="Calibri"/>
                         </a:rPr>
-                        <a:t>sessions + skip logic</a:t>
+                        <a:t>sessions + skip_logic (#5/#4)</a:t>
                       </a:r>
                     </a:p>
                   </a:txBody>
@@ -8007,7 +7459,7 @@
                           </a:solidFill>
                           <a:latin typeface="Calibri"/>
                         </a:rPr>
-                        <a:t>sensitivity tier + IAM</a:t>
+                        <a:t>sensitivity tier + IAM (#7)</a:t>
                       </a:r>
                     </a:p>
                   </a:txBody>
@@ -8097,7 +7549,7 @@
                           </a:solidFill>
                           <a:latin typeface="Calibri"/>
                         </a:rPr>
-                        <a:t>equivalence plane (planned)</a:t>
+                        <a:t>concept equivalence (#6)</a:t>
                       </a:r>
                     </a:p>
                   </a:txBody>
@@ -8142,7 +7594,7 @@
                 </a:solidFill>
                 <a:latin typeface="Calibri"/>
               </a:rPr>
-              <a:t>Phase 1 fixes the loud, everyday pains; Phase 2 unlocks missingness, governance &amp; harmonization.</a:t>
+              <a:t>The model fixes the loud, everyday pains; enhancements unlock missingness, governance &amp; harmonization.</a:t>
             </a:r>
           </a:p>
         </p:txBody>
@@ -8155,7 +7607,7 @@
 </p:sld>
 </file>
 
-<file path=ppt/slides/slide17.xml><?xml version="1.0" encoding="utf-8"?>
+<file path=ppt/slides/slide15.xml><?xml version="1.0" encoding="utf-8"?>
 <p:sld xmlns:a="http://schemas.openxmlformats.org/drawingml/2006/main" xmlns:p="http://schemas.openxmlformats.org/presentationml/2006/main" xmlns:r="http://schemas.openxmlformats.org/officeDocument/2006/relationships">
   <p:cSld>
     <p:spTree>
@@ -9128,7 +8580,7 @@
 </p:sld>
 </file>
 
-<file path=ppt/slides/slide18.xml><?xml version="1.0" encoding="utf-8"?>
+<file path=ppt/slides/slide16.xml><?xml version="1.0" encoding="utf-8"?>
 <p:sld xmlns:a="http://schemas.openxmlformats.org/drawingml/2006/main" xmlns:p="http://schemas.openxmlformats.org/presentationml/2006/main" xmlns:r="http://schemas.openxmlformats.org/officeDocument/2006/relationships">
   <p:cSld>
     <p:spTree>
@@ -10227,7 +9679,7 @@
 </p:sld>
 </file>
 
-<file path=ppt/slides/slide19.xml><?xml version="1.0" encoding="utf-8"?>
+<file path=ppt/slides/slide17.xml><?xml version="1.0" encoding="utf-8"?>
 <p:sld xmlns:a="http://schemas.openxmlformats.org/drawingml/2006/main" xmlns:p="http://schemas.openxmlformats.org/presentationml/2006/main" xmlns:r="http://schemas.openxmlformats.org/officeDocument/2006/relationships">
   <p:cSld>
     <p:spTree>
@@ -10817,6 +10269,231 @@
 </p:sld>
 </file>
 
+<file path=ppt/slides/slide18.xml><?xml version="1.0" encoding="utf-8"?>
+<p:sld xmlns:a="http://schemas.openxmlformats.org/drawingml/2006/main" xmlns:p="http://schemas.openxmlformats.org/presentationml/2006/main" xmlns:r="http://schemas.openxmlformats.org/officeDocument/2006/relationships">
+  <p:cSld>
+    <p:spTree>
+      <p:nvGrpSpPr>
+        <p:cNvPr id="1" name=""/>
+        <p:cNvGrpSpPr/>
+        <p:nvPr/>
+      </p:nvGrpSpPr>
+      <p:grpSpPr/>
+      <p:sp>
+        <p:nvSpPr>
+          <p:cNvPr id="2" name="Rectangle 1"/>
+          <p:cNvSpPr/>
+          <p:nvPr/>
+        </p:nvSpPr>
+        <p:spPr>
+          <a:xfrm>
+            <a:off x="0" y="0"/>
+            <a:ext cx="12191695" cy="1051560"/>
+          </a:xfrm>
+          <a:prstGeom prst="rect">
+            <a:avLst/>
+          </a:prstGeom>
+          <a:solidFill>
+            <a:srgbClr val="16324F"/>
+          </a:solidFill>
+          <a:ln>
+            <a:noFill/>
+          </a:ln>
+          <a:effectLst/>
+        </p:spPr>
+        <p:style>
+          <a:lnRef idx="1">
+            <a:schemeClr val="accent1"/>
+          </a:lnRef>
+          <a:fillRef idx="3">
+            <a:schemeClr val="accent1"/>
+          </a:fillRef>
+          <a:effectRef idx="2">
+            <a:schemeClr val="accent1"/>
+          </a:effectRef>
+          <a:fontRef idx="minor">
+            <a:schemeClr val="lt1"/>
+          </a:fontRef>
+        </p:style>
+        <p:txBody>
+          <a:bodyPr rtlCol="0" anchor="ctr" lIns="457200" tIns="109728"/>
+          <a:lstStyle/>
+          <a:p>
+            <a:pPr algn="ctr"/>
+            <a:r>
+              <a:rPr sz="2800" b="1">
+                <a:solidFill>
+                  <a:srgbClr val="FFFFFF"/>
+                </a:solidFill>
+                <a:latin typeface="Calibri"/>
+              </a:rPr>
+              <a:t>Recommendation</a:t>
+            </a:r>
+          </a:p>
+        </p:txBody>
+      </p:sp>
+      <p:sp>
+        <p:nvSpPr>
+          <p:cNvPr id="3" name="Rectangle 2"/>
+          <p:cNvSpPr/>
+          <p:nvPr/>
+        </p:nvSpPr>
+        <p:spPr>
+          <a:xfrm>
+            <a:off x="0" y="1051560"/>
+            <a:ext cx="12191695" cy="54864"/>
+          </a:xfrm>
+          <a:prstGeom prst="rect">
+            <a:avLst/>
+          </a:prstGeom>
+          <a:solidFill>
+            <a:srgbClr val="2E8B8B"/>
+          </a:solidFill>
+          <a:ln>
+            <a:noFill/>
+          </a:ln>
+          <a:effectLst/>
+        </p:spPr>
+        <p:style>
+          <a:lnRef idx="1">
+            <a:schemeClr val="accent1"/>
+          </a:lnRef>
+          <a:fillRef idx="3">
+            <a:schemeClr val="accent1"/>
+          </a:fillRef>
+          <a:effectRef idx="2">
+            <a:schemeClr val="accent1"/>
+          </a:effectRef>
+          <a:fontRef idx="minor">
+            <a:schemeClr val="lt1"/>
+          </a:fontRef>
+        </p:style>
+        <p:txBody>
+          <a:bodyPr rtlCol="0" anchor="ctr"/>
+          <a:lstStyle/>
+          <a:p>
+            <a:pPr algn="ctr"/>
+          </a:p>
+        </p:txBody>
+      </p:sp>
+      <p:sp>
+        <p:nvSpPr>
+          <p:cNvPr id="4" name="TextBox 3"/>
+          <p:cNvSpPr txBox="1"/>
+          <p:nvPr/>
+        </p:nvSpPr>
+        <p:spPr>
+          <a:xfrm>
+            <a:off x="731520" y="1645920"/>
+            <a:ext cx="10698480" cy="2194560"/>
+          </a:xfrm>
+          <a:prstGeom prst="rect">
+            <a:avLst/>
+          </a:prstGeom>
+          <a:noFill/>
+        </p:spPr>
+        <p:txBody>
+          <a:bodyPr wrap="square">
+            <a:spAutoFit/>
+          </a:bodyPr>
+          <a:lstStyle/>
+          <a:p>
+            <a:pPr>
+              <a:spcAft>
+                <a:spcPts val="1800"/>
+              </a:spcAft>
+            </a:pPr>
+            <a:r>
+              <a:rPr sz="2100">
+                <a:solidFill>
+                  <a:srgbClr val="222A33"/>
+                </a:solidFill>
+                <a:latin typeface="Calibri"/>
+              </a:rPr>
+              <a:t>•  The Dictionary-Direct model is accepted — stand it up (low cost, low risk, immediately useful)</a:t>
+            </a:r>
+          </a:p>
+          <a:p>
+            <a:pPr>
+              <a:spcAft>
+                <a:spcPts val="1800"/>
+              </a:spcAft>
+            </a:pPr>
+            <a:r>
+              <a:rPr sz="2100">
+                <a:solidFill>
+                  <a:srgbClr val="222A33"/>
+                </a:solidFill>
+                <a:latin typeface="Calibri"/>
+              </a:rPr>
+              <a:t>•  Adopt enhancements incrementally — prioritize governance (#7, gates external sharing) and dbt analytics marts (#8, most researcher value)</a:t>
+            </a:r>
+          </a:p>
+        </p:txBody>
+      </p:sp>
+      <p:sp>
+        <p:nvSpPr>
+          <p:cNvPr id="5" name="Rounded Rectangle 4"/>
+          <p:cNvSpPr/>
+          <p:nvPr/>
+        </p:nvSpPr>
+        <p:spPr>
+          <a:xfrm>
+            <a:off x="731520" y="4206240"/>
+            <a:ext cx="10698480" cy="1280160"/>
+          </a:xfrm>
+          <a:prstGeom prst="roundRect">
+            <a:avLst/>
+          </a:prstGeom>
+          <a:solidFill>
+            <a:srgbClr val="EDF1F5"/>
+          </a:solidFill>
+          <a:ln>
+            <a:solidFill>
+              <a:srgbClr val="2E8B8B"/>
+            </a:solidFill>
+          </a:ln>
+          <a:effectLst/>
+        </p:spPr>
+        <p:style>
+          <a:lnRef idx="1">
+            <a:schemeClr val="accent1"/>
+          </a:lnRef>
+          <a:fillRef idx="3">
+            <a:schemeClr val="accent1"/>
+          </a:fillRef>
+          <a:effectRef idx="2">
+            <a:schemeClr val="accent1"/>
+          </a:effectRef>
+          <a:fontRef idx="minor">
+            <a:schemeClr val="lt1"/>
+          </a:fontRef>
+        </p:style>
+        <p:txBody>
+          <a:bodyPr rtlCol="0" anchor="ctr" wrap="square" lIns="274320"/>
+          <a:lstStyle/>
+          <a:p>
+            <a:pPr algn="ctr"/>
+            <a:r>
+              <a:rPr sz="1800" b="1">
+                <a:solidFill>
+                  <a:srgbClr val="16324F"/>
+                </a:solidFill>
+                <a:latin typeface="Calibri"/>
+              </a:rPr>
+              <a:t>The model is the accepted foundation.   Enhancements make it the governed, shareable product PR2 needs.</a:t>
+            </a:r>
+          </a:p>
+        </p:txBody>
+      </p:sp>
+    </p:spTree>
+  </p:cSld>
+  <p:clrMapOvr>
+    <a:masterClrMapping/>
+  </p:clrMapOvr>
+</p:sld>
+</file>
+
 <file path=ppt/slides/slide2.xml><?xml version="1.0" encoding="utf-8"?>
 <p:sld xmlns:a="http://schemas.openxmlformats.org/drawingml/2006/main" xmlns:p="http://schemas.openxmlformats.org/presentationml/2006/main" xmlns:r="http://schemas.openxmlformats.org/officeDocument/2006/relationships">
   <p:cSld>
@@ -11421,7 +11098,7 @@
 </p:sld>
 </file>
 
-<file path=ppt/slides/slide20.xml><?xml version="1.0" encoding="utf-8"?>
+<file path=ppt/slides/slide3.xml><?xml version="1.0" encoding="utf-8"?>
 <p:sld xmlns:a="http://schemas.openxmlformats.org/drawingml/2006/main" xmlns:p="http://schemas.openxmlformats.org/presentationml/2006/main" xmlns:r="http://schemas.openxmlformats.org/officeDocument/2006/relationships">
   <p:cSld>
     <p:spTree>
@@ -11479,7 +11156,17 @@
                 </a:solidFill>
                 <a:latin typeface="Calibri"/>
               </a:rPr>
-              <a:t>Recommendation</a:t>
+              <a:t>…and it's the OMOP lesson — applied to our own data</a:t>
+            </a:r>
+          </a:p>
+          <a:p>
+            <a:r>
+              <a:rPr sz="1300" i="1">
+                <a:solidFill>
+                  <a:srgbClr val="BBD5D7"/>
+                </a:solidFill>
+              </a:rPr>
+              <a:t>The power isn't the table layout — it's relationships defined as data</a:t>
             </a:r>
           </a:p>
         </p:txBody>
@@ -11536,8 +11223,8 @@
         </p:nvSpPr>
         <p:spPr>
           <a:xfrm>
-            <a:off x="731520" y="1645920"/>
-            <a:ext cx="10698480" cy="2194560"/>
+            <a:off x="457200" y="1280160"/>
+            <a:ext cx="11247120" cy="640080"/>
           </a:xfrm>
           <a:prstGeom prst="rect">
             <a:avLst/>
@@ -11550,90 +11237,306 @@
           </a:bodyPr>
           <a:lstStyle/>
           <a:p>
-            <a:pPr>
-              <a:spcAft>
-                <a:spcPts val="1800"/>
-              </a:spcAft>
-            </a:pPr>
-            <a:r>
-              <a:rPr sz="2100">
+            <a:pPr algn="l"/>
+            <a:r>
+              <a:rPr sz="1700" b="1" i="0">
                 <a:solidFill>
-                  <a:srgbClr val="222A33"/>
+                  <a:srgbClr val="2E8B8B"/>
                 </a:solidFill>
                 <a:latin typeface="Calibri"/>
               </a:rPr>
-              <a:t>•  Approve Phase 1 now — low cost, low risk, immediately useful; its responses fact carries into Phase 2 unchanged</a:t>
-            </a:r>
-          </a:p>
-          <a:p>
-            <a:pPr>
-              <a:spcAft>
-                <a:spcPts val="1800"/>
-              </a:spcAft>
-            </a:pPr>
-            <a:r>
-              <a:rPr sz="2100">
+              <a:t>Defined relationships between concepts &amp; domains → analytics written once, reused across teams. That is exactly why we adopted OMOP.</a:t>
+            </a:r>
+          </a:p>
+        </p:txBody>
+      </p:sp>
+      <p:graphicFrame>
+        <p:nvGraphicFramePr>
+          <p:cNvPr id="5" name="Table 4"/>
+          <p:cNvGraphicFramePr>
+            <a:graphicFrameLocks noGrp="1"/>
+          </p:cNvGraphicFramePr>
+          <p:nvPr/>
+        </p:nvGraphicFramePr>
+        <p:xfrm>
+          <a:off x="548640" y="2057400"/>
+          <a:ext cx="11064240" cy="2743200"/>
+        </p:xfrm>
+        <a:graphic>
+          <a:graphicData uri="http://schemas.openxmlformats.org/drawingml/2006/table">
+            <a:tbl>
+              <a:tblPr firstRow="1" bandRow="1">
+                <a:tableStyleId>{5C22544A-7EE6-4342-B048-85BDC9FD1C3A}</a:tableStyleId>
+              </a:tblPr>
+              <a:tblGrid>
+                <a:gridCol w="5394960"/>
+                <a:gridCol w="5669280"/>
+              </a:tblGrid>
+              <a:tr h="548640">
+                <a:tc>
+                  <a:txBody>
+                    <a:bodyPr wrap="square"/>
+                    <a:lstStyle/>
+                    <a:p>
+                      <a:r>
+                        <a:rPr b="1" sz="1400">
+                          <a:solidFill>
+                            <a:srgbClr val="FFFFFF"/>
+                          </a:solidFill>
+                          <a:latin typeface="Calibri"/>
+                        </a:rPr>
+                        <a:t>What OMOP defines</a:t>
+                      </a:r>
+                    </a:p>
+                  </a:txBody>
+                  <a:tcPr marL="73152" marR="73152" marT="27432" marB="27432" anchor="ctr">
+                    <a:solidFill>
+                      <a:srgbClr val="16324F"/>
+                    </a:solidFill>
+                  </a:tcPr>
+                </a:tc>
+                <a:tc>
+                  <a:txBody>
+                    <a:bodyPr wrap="square"/>
+                    <a:lstStyle/>
+                    <a:p>
+                      <a:r>
+                        <a:rPr b="1" sz="1400">
+                          <a:solidFill>
+                            <a:srgbClr val="FFFFFF"/>
+                          </a:solidFill>
+                          <a:latin typeface="Calibri"/>
+                        </a:rPr>
+                        <a:t>The same idea in our model</a:t>
+                      </a:r>
+                    </a:p>
+                  </a:txBody>
+                  <a:tcPr marL="73152" marR="73152" marT="27432" marB="27432" anchor="ctr">
+                    <a:solidFill>
+                      <a:srgbClr val="16324F"/>
+                    </a:solidFill>
+                  </a:tcPr>
+                </a:tc>
+              </a:tr>
+              <a:tr h="548640">
+                <a:tc>
+                  <a:txBody>
+                    <a:bodyPr wrap="square"/>
+                    <a:lstStyle/>
+                    <a:p>
+                      <a:r>
+                        <a:rPr sz="1400" b="1">
+                          <a:solidFill>
+                            <a:srgbClr val="222A33"/>
+                          </a:solidFill>
+                          <a:latin typeface="Calibri"/>
+                        </a:rPr>
+                        <a:t>concept — analyze standard concepts, not source codes</a:t>
+                      </a:r>
+                    </a:p>
+                  </a:txBody>
+                  <a:tcPr marL="73152" marR="73152" marT="27432" marB="27432" anchor="ctr">
+                    <a:solidFill>
+                      <a:srgbClr val="FFFFFF"/>
+                    </a:solidFill>
+                  </a:tcPr>
+                </a:tc>
+                <a:tc>
+                  <a:txBody>
+                    <a:bodyPr wrap="square"/>
+                    <a:lstStyle/>
+                    <a:p>
+                      <a:r>
+                        <a:rPr sz="1400">
+                          <a:solidFill>
+                            <a:srgbClr val="222A33"/>
+                          </a:solidFill>
+                          <a:latin typeface="Calibri"/>
+                        </a:rPr>
+                        <a:t>concept-ID spine — query concepts, not d_ columns</a:t>
+                      </a:r>
+                    </a:p>
+                  </a:txBody>
+                  <a:tcPr marL="73152" marR="73152" marT="27432" marB="27432" anchor="ctr">
+                    <a:solidFill>
+                      <a:srgbClr val="FFFFFF"/>
+                    </a:solidFill>
+                  </a:tcPr>
+                </a:tc>
+              </a:tr>
+              <a:tr h="548640">
+                <a:tc>
+                  <a:txBody>
+                    <a:bodyPr wrap="square"/>
+                    <a:lstStyle/>
+                    <a:p>
+                      <a:r>
+                        <a:rPr sz="1400" b="1">
+                          <a:solidFill>
+                            <a:srgbClr val="222A33"/>
+                          </a:solidFill>
+                          <a:latin typeface="Calibri"/>
+                        </a:rPr>
+                        <a:t>concept_relationship / concept_ancestor — link &amp; roll up</a:t>
+                      </a:r>
+                    </a:p>
+                  </a:txBody>
+                  <a:tcPr marL="73152" marR="73152" marT="27432" marB="27432" anchor="ctr">
+                    <a:solidFill>
+                      <a:srgbClr val="EDF1F5"/>
+                    </a:solidFill>
+                  </a:tcPr>
+                </a:tc>
+                <a:tc>
+                  <a:txBody>
+                    <a:bodyPr wrap="square"/>
+                    <a:lstStyle/>
+                    <a:p>
+                      <a:r>
+                        <a:rPr sz="1400">
+                          <a:solidFill>
+                            <a:srgbClr val="222A33"/>
+                          </a:solidFill>
+                          <a:latin typeface="Calibri"/>
+                        </a:rPr>
+                        <a:t>concept_relationship / question_equivalence (planned)</a:t>
+                      </a:r>
+                    </a:p>
+                  </a:txBody>
+                  <a:tcPr marL="73152" marR="73152" marT="27432" marB="27432" anchor="ctr">
+                    <a:solidFill>
+                      <a:srgbClr val="EDF1F5"/>
+                    </a:solidFill>
+                  </a:tcPr>
+                </a:tc>
+              </a:tr>
+              <a:tr h="548640">
+                <a:tc>
+                  <a:txBody>
+                    <a:bodyPr wrap="square"/>
+                    <a:lstStyle/>
+                    <a:p>
+                      <a:r>
+                        <a:rPr sz="1400" b="1">
+                          <a:solidFill>
+                            <a:srgbClr val="222A33"/>
+                          </a:solidFill>
+                          <a:latin typeface="Calibri"/>
+                        </a:rPr>
+                        <a:t>long event tables + _source_concept_id</a:t>
+                      </a:r>
+                    </a:p>
+                  </a:txBody>
+                  <a:tcPr marL="73152" marR="73152" marT="27432" marB="27432" anchor="ctr">
+                    <a:solidFill>
+                      <a:srgbClr val="FFFFFF"/>
+                    </a:solidFill>
+                  </a:tcPr>
+                </a:tc>
+                <a:tc>
+                  <a:txBody>
+                    <a:bodyPr wrap="square"/>
+                    <a:lstStyle/>
+                    <a:p>
+                      <a:r>
+                        <a:rPr sz="1400">
+                          <a:solidFill>
+                            <a:srgbClr val="222A33"/>
+                          </a:solidFill>
+                          <a:latin typeface="Calibri"/>
+                        </a:rPr>
+                        <a:t>long responses fact + retained source columns</a:t>
+                      </a:r>
+                    </a:p>
+                  </a:txBody>
+                  <a:tcPr marL="73152" marR="73152" marT="27432" marB="27432" anchor="ctr">
+                    <a:solidFill>
+                      <a:srgbClr val="FFFFFF"/>
+                    </a:solidFill>
+                  </a:tcPr>
+                </a:tc>
+              </a:tr>
+              <a:tr h="548640">
+                <a:tc>
+                  <a:txBody>
+                    <a:bodyPr wrap="square"/>
+                    <a:lstStyle/>
+                    <a:p>
+                      <a:r>
+                        <a:rPr sz="1400" b="1">
+                          <a:solidFill>
+                            <a:srgbClr val="222A33"/>
+                          </a:solidFill>
+                          <a:latin typeface="Calibri"/>
+                        </a:rPr>
+                        <a:t>standard model → tools reused across 200 sites</a:t>
+                      </a:r>
+                    </a:p>
+                  </a:txBody>
+                  <a:tcPr marL="73152" marR="73152" marT="27432" marB="27432" anchor="ctr">
+                    <a:solidFill>
+                      <a:srgbClr val="EDF1F5"/>
+                    </a:solidFill>
+                  </a:tcPr>
+                </a:tc>
+                <a:tc>
+                  <a:txBody>
+                    <a:bodyPr wrap="square"/>
+                    <a:lstStyle/>
+                    <a:p>
+                      <a:r>
+                        <a:rPr sz="1400">
+                          <a:solidFill>
+                            <a:srgbClr val="222A33"/>
+                          </a:solidFill>
+                          <a:latin typeface="Calibri"/>
+                        </a:rPr>
+                        <a:t>stable contract → shared views/tools across teams + PR2</a:t>
+                      </a:r>
+                    </a:p>
+                  </a:txBody>
+                  <a:tcPr marL="73152" marR="73152" marT="27432" marB="27432" anchor="ctr">
+                    <a:solidFill>
+                      <a:srgbClr val="EDF1F5"/>
+                    </a:solidFill>
+                  </a:tcPr>
+                </a:tc>
+              </a:tr>
+            </a:tbl>
+          </a:graphicData>
+        </a:graphic>
+      </p:graphicFrame>
+      <p:sp>
+        <p:nvSpPr>
+          <p:cNvPr id="6" name="TextBox 5"/>
+          <p:cNvSpPr txBox="1"/>
+          <p:nvPr/>
+        </p:nvSpPr>
+        <p:spPr>
+          <a:xfrm>
+            <a:off x="548640" y="5852160"/>
+            <a:ext cx="11064240" cy="640080"/>
+          </a:xfrm>
+          <a:prstGeom prst="rect">
+            <a:avLst/>
+          </a:prstGeom>
+          <a:noFill/>
+        </p:spPr>
+        <p:txBody>
+          <a:bodyPr wrap="square">
+            <a:spAutoFit/>
+          </a:bodyPr>
+          <a:lstStyle/>
+          <a:p>
+            <a:pPr algn="l"/>
+            <a:r>
+              <a:rPr sz="1200" b="0" i="1">
                 <a:solidFill>
-                  <a:srgbClr val="222A33"/>
+                  <a:srgbClr val="5A636E"/>
                 </a:solidFill>
                 <a:latin typeface="Calibri"/>
               </a:rPr>
-              <a:t>•  Commit to Phase 2 — governance + lineage; non-negotiable for sharing data externally through PR2</a:t>
-            </a:r>
-          </a:p>
-        </p:txBody>
-      </p:sp>
-      <p:sp>
-        <p:nvSpPr>
-          <p:cNvPr id="5" name="Rounded Rectangle 4"/>
-          <p:cNvSpPr/>
-          <p:nvPr/>
-        </p:nvSpPr>
-        <p:spPr>
-          <a:xfrm>
-            <a:off x="731520" y="4206240"/>
-            <a:ext cx="10698480" cy="1280160"/>
-          </a:xfrm>
-          <a:prstGeom prst="roundRect">
-            <a:avLst/>
-          </a:prstGeom>
-          <a:solidFill>
-            <a:srgbClr val="EDF1F5"/>
-          </a:solidFill>
-          <a:ln>
-            <a:solidFill>
-              <a:srgbClr val="2E8B8B"/>
-            </a:solidFill>
-          </a:ln>
-          <a:effectLst/>
-        </p:spPr>
-        <p:style>
-          <a:lnRef idx="1">
-            <a:schemeClr val="accent1"/>
-          </a:lnRef>
-          <a:fillRef idx="3">
-            <a:schemeClr val="accent1"/>
-          </a:fillRef>
-          <a:effectRef idx="2">
-            <a:schemeClr val="accent1"/>
-          </a:effectRef>
-          <a:fontRef idx="minor">
-            <a:schemeClr val="lt1"/>
-          </a:fontRef>
-        </p:style>
-        <p:txBody>
-          <a:bodyPr rtlCol="0" anchor="ctr" wrap="square" lIns="274320"/>
-          <a:lstStyle/>
-          <a:p>
-            <a:pPr algn="ctr"/>
-            <a:r>
-              <a:rPr sz="1800" b="1">
-                <a:solidFill>
-                  <a:srgbClr val="16324F"/>
-                </a:solidFill>
-                <a:latin typeface="Calibri"/>
-              </a:rPr>
-              <a:t>Phase 1 = an internal quick win that proves the model.   Phase 2 = the governed, shareable product.</a:t>
+              <a:t>One source, not many — no cross-site network effect; reuse comes from the relationships, across our teams &amp; researchers. OMOP becomes a downstream export.</a:t>
             </a:r>
           </a:p>
         </p:txBody>
@@ -11646,7 +11549,7 @@
 </p:sld>
 </file>
 
-<file path=ppt/slides/slide3.xml><?xml version="1.0" encoding="utf-8"?>
+<file path=ppt/slides/slide4.xml><?xml version="1.0" encoding="utf-8"?>
 <p:sld xmlns:a="http://schemas.openxmlformats.org/drawingml/2006/main" xmlns:p="http://schemas.openxmlformats.org/presentationml/2006/main" xmlns:r="http://schemas.openxmlformats.org/officeDocument/2006/relationships">
   <p:cSld>
     <p:spTree>
@@ -11704,7 +11607,7 @@
                 </a:solidFill>
                 <a:latin typeface="Calibri"/>
               </a:rPr>
-              <a:t>…and it's the OMOP lesson — applied to our own data</a:t>
+              <a:t>The problem: we analyze raw source data</a:t>
             </a:r>
           </a:p>
           <a:p>
@@ -11714,7 +11617,7 @@
                   <a:srgbClr val="BBD5D7"/>
                 </a:solidFill>
               </a:rPr>
-              <a:t>The power isn't the table layout — it's relationships defined as data</a:t>
+              <a:t>Our analysis-ready data is wide tables of opaque concept-ID columns</a:t>
             </a:r>
           </a:p>
         </p:txBody>
@@ -11771,8 +11674,8 @@
         </p:nvSpPr>
         <p:spPr>
           <a:xfrm>
-            <a:off x="457200" y="1280160"/>
-            <a:ext cx="11247120" cy="640080"/>
+            <a:off x="640080" y="1463040"/>
+            <a:ext cx="10789920" cy="3291840"/>
           </a:xfrm>
           <a:prstGeom prst="rect">
             <a:avLst/>
@@ -11785,285 +11688,97 @@
           </a:bodyPr>
           <a:lstStyle/>
           <a:p>
-            <a:pPr algn="l"/>
-            <a:r>
-              <a:rPr sz="1700" b="1" i="0">
+            <a:pPr>
+              <a:spcAft>
+                <a:spcPts val="1400"/>
+              </a:spcAft>
+            </a:pPr>
+            <a:r>
+              <a:rPr sz="2000">
                 <a:solidFill>
-                  <a:srgbClr val="2E8B8B"/>
+                  <a:srgbClr val="222A33"/>
                 </a:solidFill>
                 <a:latin typeface="Calibri"/>
               </a:rPr>
-              <a:t>Defined relationships between concepts &amp; domains → analytics written once, reused across teams. That is exactly why we adopted OMOP.</a:t>
-            </a:r>
-          </a:p>
-        </p:txBody>
-      </p:sp>
-      <p:graphicFrame>
-        <p:nvGraphicFramePr>
-          <p:cNvPr id="5" name="Table 4"/>
-          <p:cNvGraphicFramePr>
-            <a:graphicFrameLocks noGrp="1"/>
-          </p:cNvGraphicFramePr>
-          <p:nvPr/>
-        </p:nvGraphicFramePr>
-        <p:xfrm>
-          <a:off x="548640" y="2057400"/>
-          <a:ext cx="11064240" cy="2743200"/>
-        </p:xfrm>
-        <a:graphic>
-          <a:graphicData uri="http://schemas.openxmlformats.org/drawingml/2006/table">
-            <a:tbl>
-              <a:tblPr firstRow="1" bandRow="1">
-                <a:tableStyleId>{5C22544A-7EE6-4342-B048-85BDC9FD1C3A}</a:tableStyleId>
-              </a:tblPr>
-              <a:tblGrid>
-                <a:gridCol w="5394960"/>
-                <a:gridCol w="5669280"/>
-              </a:tblGrid>
-              <a:tr h="548640">
-                <a:tc>
-                  <a:txBody>
-                    <a:bodyPr wrap="square"/>
-                    <a:lstStyle/>
-                    <a:p>
-                      <a:r>
-                        <a:rPr b="1" sz="1400">
-                          <a:solidFill>
-                            <a:srgbClr val="FFFFFF"/>
-                          </a:solidFill>
-                          <a:latin typeface="Calibri"/>
-                        </a:rPr>
-                        <a:t>What OMOP defines</a:t>
-                      </a:r>
-                    </a:p>
-                  </a:txBody>
-                  <a:tcPr marL="73152" marR="73152" marT="27432" marB="27432" anchor="ctr">
-                    <a:solidFill>
-                      <a:srgbClr val="16324F"/>
-                    </a:solidFill>
-                  </a:tcPr>
-                </a:tc>
-                <a:tc>
-                  <a:txBody>
-                    <a:bodyPr wrap="square"/>
-                    <a:lstStyle/>
-                    <a:p>
-                      <a:r>
-                        <a:rPr b="1" sz="1400">
-                          <a:solidFill>
-                            <a:srgbClr val="FFFFFF"/>
-                          </a:solidFill>
-                          <a:latin typeface="Calibri"/>
-                        </a:rPr>
-                        <a:t>The same idea in our model</a:t>
-                      </a:r>
-                    </a:p>
-                  </a:txBody>
-                  <a:tcPr marL="73152" marR="73152" marT="27432" marB="27432" anchor="ctr">
-                    <a:solidFill>
-                      <a:srgbClr val="16324F"/>
-                    </a:solidFill>
-                  </a:tcPr>
-                </a:tc>
-              </a:tr>
-              <a:tr h="548640">
-                <a:tc>
-                  <a:txBody>
-                    <a:bodyPr wrap="square"/>
-                    <a:lstStyle/>
-                    <a:p>
-                      <a:r>
-                        <a:rPr sz="1400" b="1">
-                          <a:solidFill>
-                            <a:srgbClr val="222A33"/>
-                          </a:solidFill>
-                          <a:latin typeface="Calibri"/>
-                        </a:rPr>
-                        <a:t>concept — analyze standard concepts, not source codes</a:t>
-                      </a:r>
-                    </a:p>
-                  </a:txBody>
-                  <a:tcPr marL="73152" marR="73152" marT="27432" marB="27432" anchor="ctr">
-                    <a:solidFill>
-                      <a:srgbClr val="FFFFFF"/>
-                    </a:solidFill>
-                  </a:tcPr>
-                </a:tc>
-                <a:tc>
-                  <a:txBody>
-                    <a:bodyPr wrap="square"/>
-                    <a:lstStyle/>
-                    <a:p>
-                      <a:r>
-                        <a:rPr sz="1400">
-                          <a:solidFill>
-                            <a:srgbClr val="222A33"/>
-                          </a:solidFill>
-                          <a:latin typeface="Calibri"/>
-                        </a:rPr>
-                        <a:t>concept-ID spine — query concepts, not d_ columns</a:t>
-                      </a:r>
-                    </a:p>
-                  </a:txBody>
-                  <a:tcPr marL="73152" marR="73152" marT="27432" marB="27432" anchor="ctr">
-                    <a:solidFill>
-                      <a:srgbClr val="FFFFFF"/>
-                    </a:solidFill>
-                  </a:tcPr>
-                </a:tc>
-              </a:tr>
-              <a:tr h="548640">
-                <a:tc>
-                  <a:txBody>
-                    <a:bodyPr wrap="square"/>
-                    <a:lstStyle/>
-                    <a:p>
-                      <a:r>
-                        <a:rPr sz="1400" b="1">
-                          <a:solidFill>
-                            <a:srgbClr val="222A33"/>
-                          </a:solidFill>
-                          <a:latin typeface="Calibri"/>
-                        </a:rPr>
-                        <a:t>concept_relationship / concept_ancestor — link &amp; roll up</a:t>
-                      </a:r>
-                    </a:p>
-                  </a:txBody>
-                  <a:tcPr marL="73152" marR="73152" marT="27432" marB="27432" anchor="ctr">
-                    <a:solidFill>
-                      <a:srgbClr val="EDF1F5"/>
-                    </a:solidFill>
-                  </a:tcPr>
-                </a:tc>
-                <a:tc>
-                  <a:txBody>
-                    <a:bodyPr wrap="square"/>
-                    <a:lstStyle/>
-                    <a:p>
-                      <a:r>
-                        <a:rPr sz="1400">
-                          <a:solidFill>
-                            <a:srgbClr val="222A33"/>
-                          </a:solidFill>
-                          <a:latin typeface="Calibri"/>
-                        </a:rPr>
-                        <a:t>concept_relationship / question_equivalence (planned)</a:t>
-                      </a:r>
-                    </a:p>
-                  </a:txBody>
-                  <a:tcPr marL="73152" marR="73152" marT="27432" marB="27432" anchor="ctr">
-                    <a:solidFill>
-                      <a:srgbClr val="EDF1F5"/>
-                    </a:solidFill>
-                  </a:tcPr>
-                </a:tc>
-              </a:tr>
-              <a:tr h="548640">
-                <a:tc>
-                  <a:txBody>
-                    <a:bodyPr wrap="square"/>
-                    <a:lstStyle/>
-                    <a:p>
-                      <a:r>
-                        <a:rPr sz="1400" b="1">
-                          <a:solidFill>
-                            <a:srgbClr val="222A33"/>
-                          </a:solidFill>
-                          <a:latin typeface="Calibri"/>
-                        </a:rPr>
-                        <a:t>long event tables + _source_concept_id</a:t>
-                      </a:r>
-                    </a:p>
-                  </a:txBody>
-                  <a:tcPr marL="73152" marR="73152" marT="27432" marB="27432" anchor="ctr">
-                    <a:solidFill>
-                      <a:srgbClr val="FFFFFF"/>
-                    </a:solidFill>
-                  </a:tcPr>
-                </a:tc>
-                <a:tc>
-                  <a:txBody>
-                    <a:bodyPr wrap="square"/>
-                    <a:lstStyle/>
-                    <a:p>
-                      <a:r>
-                        <a:rPr sz="1400">
-                          <a:solidFill>
-                            <a:srgbClr val="222A33"/>
-                          </a:solidFill>
-                          <a:latin typeface="Calibri"/>
-                        </a:rPr>
-                        <a:t>long responses fact + retained source columns</a:t>
-                      </a:r>
-                    </a:p>
-                  </a:txBody>
-                  <a:tcPr marL="73152" marR="73152" marT="27432" marB="27432" anchor="ctr">
-                    <a:solidFill>
-                      <a:srgbClr val="FFFFFF"/>
-                    </a:solidFill>
-                  </a:tcPr>
-                </a:tc>
-              </a:tr>
-              <a:tr h="548640">
-                <a:tc>
-                  <a:txBody>
-                    <a:bodyPr wrap="square"/>
-                    <a:lstStyle/>
-                    <a:p>
-                      <a:r>
-                        <a:rPr sz="1400" b="1">
-                          <a:solidFill>
-                            <a:srgbClr val="222A33"/>
-                          </a:solidFill>
-                          <a:latin typeface="Calibri"/>
-                        </a:rPr>
-                        <a:t>standard model → tools reused across 200 sites</a:t>
-                      </a:r>
-                    </a:p>
-                  </a:txBody>
-                  <a:tcPr marL="73152" marR="73152" marT="27432" marB="27432" anchor="ctr">
-                    <a:solidFill>
-                      <a:srgbClr val="EDF1F5"/>
-                    </a:solidFill>
-                  </a:tcPr>
-                </a:tc>
-                <a:tc>
-                  <a:txBody>
-                    <a:bodyPr wrap="square"/>
-                    <a:lstStyle/>
-                    <a:p>
-                      <a:r>
-                        <a:rPr sz="1400">
-                          <a:solidFill>
-                            <a:srgbClr val="222A33"/>
-                          </a:solidFill>
-                          <a:latin typeface="Calibri"/>
-                        </a:rPr>
-                        <a:t>stable contract → shared views/tools across teams + PR2</a:t>
-                      </a:r>
-                    </a:p>
-                  </a:txBody>
-                  <a:tcPr marL="73152" marR="73152" marT="27432" marB="27432" anchor="ctr">
-                    <a:solidFill>
-                      <a:srgbClr val="EDF1F5"/>
-                    </a:solidFill>
-                  </a:tcPr>
-                </a:tc>
-              </a:tr>
-            </a:tbl>
-          </a:graphicData>
-        </a:graphic>
-      </p:graphicFrame>
-      <p:sp>
-        <p:nvSpPr>
-          <p:cNvPr id="6" name="TextBox 5"/>
+              <a:t>•  Dancing schema — every new answer/option/loop adds columns; pipelines break</a:t>
+            </a:r>
+          </a:p>
+          <a:p>
+            <a:pPr>
+              <a:spcAft>
+                <a:spcPts val="1400"/>
+              </a:spcAft>
+            </a:pPr>
+            <a:r>
+              <a:rPr sz="2000">
+                <a:solidFill>
+                  <a:srgbClr val="222A33"/>
+                </a:solidFill>
+                <a:latin typeface="Calibri"/>
+              </a:rPr>
+              <a:t>•  Not generically queryable — every analysis hardcodes column names</a:t>
+            </a:r>
+          </a:p>
+          <a:p>
+            <a:pPr>
+              <a:spcAft>
+                <a:spcPts val="1400"/>
+              </a:spcAft>
+            </a:pPr>
+            <a:r>
+              <a:rPr sz="2000">
+                <a:solidFill>
+                  <a:srgbClr val="222A33"/>
+                </a:solidFill>
+                <a:latin typeface="Calibri"/>
+              </a:rPr>
+              <a:t>•  Version drift — v1/v2 columns reconciled by hand</a:t>
+            </a:r>
+          </a:p>
+          <a:p>
+            <a:pPr>
+              <a:spcAft>
+                <a:spcPts val="1400"/>
+              </a:spcAft>
+            </a:pPr>
+            <a:r>
+              <a:rPr sz="2000">
+                <a:solidFill>
+                  <a:srgbClr val="222A33"/>
+                </a:solidFill>
+                <a:latin typeface="Calibri"/>
+              </a:rPr>
+              <a:t>•  Ambiguous missingness — blank = not selected? not shown? not taken?</a:t>
+            </a:r>
+          </a:p>
+          <a:p>
+            <a:pPr>
+              <a:spcAft>
+                <a:spcPts val="1400"/>
+              </a:spcAft>
+            </a:pPr>
+            <a:r>
+              <a:rPr sz="2000">
+                <a:solidFill>
+                  <a:srgbClr val="222A33"/>
+                </a:solidFill>
+                <a:latin typeface="Calibri"/>
+              </a:rPr>
+              <a:t>•  No built-in governance — PHI/PII is a manual, unenforced allow-list</a:t>
+            </a:r>
+          </a:p>
+        </p:txBody>
+      </p:sp>
+      <p:sp>
+        <p:nvSpPr>
+          <p:cNvPr id="5" name="TextBox 4"/>
           <p:cNvSpPr txBox="1"/>
           <p:nvPr/>
         </p:nvSpPr>
         <p:spPr>
           <a:xfrm>
-            <a:off x="548640" y="5852160"/>
-            <a:ext cx="11064240" cy="640080"/>
+            <a:off x="640080" y="5669280"/>
+            <a:ext cx="10789920" cy="640080"/>
           </a:xfrm>
           <a:prstGeom prst="rect">
             <a:avLst/>
@@ -12078,13 +11793,13 @@
           <a:p>
             <a:pPr algn="l"/>
             <a:r>
-              <a:rPr sz="1200" b="0" i="1">
+              <a:rPr sz="1600" b="1" i="0">
                 <a:solidFill>
-                  <a:srgbClr val="5A636E"/>
+                  <a:srgbClr val="CC7D15"/>
                 </a:solidFill>
                 <a:latin typeface="Calibri"/>
               </a:rPr>
-              <a:t>One source, not many — no cross-site network effect; reuse comes from the relationships, across our teams &amp; researchers. OMOP becomes a downstream export.</a:t>
+              <a:t>In OMOP terms, these wide tables are source data — and we're analyzing them raw.</a:t>
             </a:r>
           </a:p>
         </p:txBody>
@@ -12097,7 +11812,7 @@
 </p:sld>
 </file>
 
-<file path=ppt/slides/slide4.xml><?xml version="1.0" encoding="utf-8"?>
+<file path=ppt/slides/slide5.xml><?xml version="1.0" encoding="utf-8"?>
 <p:sld xmlns:a="http://schemas.openxmlformats.org/drawingml/2006/main" xmlns:p="http://schemas.openxmlformats.org/presentationml/2006/main" xmlns:r="http://schemas.openxmlformats.org/officeDocument/2006/relationships">
   <p:cSld>
     <p:spTree>
@@ -12155,7 +11870,7 @@
                 </a:solidFill>
                 <a:latin typeface="Calibri"/>
               </a:rPr>
-              <a:t>The problem: we analyze raw source data</a:t>
+              <a:t>Exhibit 1 — our own Module 1 report</a:t>
             </a:r>
           </a:p>
           <a:p>
@@ -12165,7 +11880,7 @@
                   <a:srgbClr val="BBD5D7"/>
                 </a:solidFill>
               </a:rPr>
-              <a:t>Our analysis-ready data is wide tables of opaque concept-ID columns</a:t>
+              <a:t>"Merged Module 1 Summary Statistics" · 6,234 lines · scheduled pipeline</a:t>
             </a:r>
           </a:p>
         </p:txBody>
@@ -12222,8 +11937,8 @@
         </p:nvSpPr>
         <p:spPr>
           <a:xfrm>
-            <a:off x="640080" y="1463040"/>
-            <a:ext cx="10789920" cy="3291840"/>
+            <a:off x="640080" y="1325880"/>
+            <a:ext cx="10789920" cy="548640"/>
           </a:xfrm>
           <a:prstGeom prst="rect">
             <a:avLst/>
@@ -12236,90 +11951,109 @@
           </a:bodyPr>
           <a:lstStyle/>
           <a:p>
+            <a:pPr algn="l"/>
+            <a:r>
+              <a:rPr sz="1800" b="1" i="0">
+                <a:solidFill>
+                  <a:srgbClr val="2E8B8B"/>
+                </a:solidFill>
+                <a:latin typeface="Calibri"/>
+              </a:rPr>
+              <a:t>~650 lines rebuild the model by hand before the first statistic:</a:t>
+            </a:r>
+          </a:p>
+        </p:txBody>
+      </p:sp>
+      <p:sp>
+        <p:nvSpPr>
+          <p:cNvPr id="5" name="TextBox 4"/>
+          <p:cNvSpPr txBox="1"/>
+          <p:nvPr/>
+        </p:nvSpPr>
+        <p:spPr>
+          <a:xfrm>
+            <a:off x="640080" y="2011680"/>
+            <a:ext cx="10789920" cy="2743200"/>
+          </a:xfrm>
+          <a:prstGeom prst="rect">
+            <a:avLst/>
+          </a:prstGeom>
+          <a:noFill/>
+        </p:spPr>
+        <p:txBody>
+          <a:bodyPr wrap="square">
+            <a:spAutoFit/>
+          </a:bodyPr>
+          <a:lstStyle/>
+          <a:p>
             <a:pPr>
               <a:spcAft>
-                <a:spcPts val="1400"/>
+                <a:spcPts val="1200"/>
               </a:spcAft>
             </a:pPr>
             <a:r>
-              <a:rPr sz="2000">
+              <a:rPr sz="1800">
                 <a:solidFill>
                   <a:srgbClr val="222A33"/>
                 </a:solidFill>
                 <a:latin typeface="Calibri"/>
               </a:rPr>
-              <a:t>•  Dancing schema — every new answer/option/loop adds columns; pipelines break</a:t>
+              <a:t>•  Hand-rolled v1/v2 merge — re-runs every refresh, column-name dependent</a:t>
             </a:r>
           </a:p>
           <a:p>
             <a:pPr>
               <a:spcAft>
-                <a:spcPts val="1400"/>
+                <a:spcPts val="1200"/>
               </a:spcAft>
             </a:pPr>
             <a:r>
-              <a:rPr sz="2000">
+              <a:rPr sz="1800">
                 <a:solidFill>
                   <a:srgbClr val="222A33"/>
                 </a:solidFill>
                 <a:latin typeface="Calibri"/>
               </a:rPr>
-              <a:t>•  Not generically queryable — every analysis hardcodes column names</a:t>
+              <a:t>•  150-entry label dictionary typed by hand — with duplicate-key bugs &amp; typos</a:t>
             </a:r>
           </a:p>
           <a:p>
             <a:pPr>
               <a:spcAft>
-                <a:spcPts val="1400"/>
+                <a:spcPts val="1200"/>
               </a:spcAft>
             </a:pPr>
             <a:r>
-              <a:rPr sz="2000">
+              <a:rPr sz="1800">
                 <a:solidFill>
                   <a:srgbClr val="222A33"/>
                 </a:solidFill>
                 <a:latin typeface="Calibri"/>
               </a:rPr>
-              <a:t>•  Version drift — v1/v2 columns reconciled by hand</a:t>
+              <a:t>•  Skip logic &amp; loops reimplemented as bespoke functions</a:t>
             </a:r>
           </a:p>
           <a:p>
             <a:pPr>
               <a:spcAft>
-                <a:spcPts val="1400"/>
+                <a:spcPts val="1200"/>
               </a:spcAft>
             </a:pPr>
             <a:r>
-              <a:rPr sz="2000">
+              <a:rPr sz="1800">
                 <a:solidFill>
                   <a:srgbClr val="222A33"/>
                 </a:solidFill>
                 <a:latin typeface="Calibri"/>
               </a:rPr>
-              <a:t>•  Ambiguous missingness — blank = not selected? not shown? not taken?</a:t>
-            </a:r>
-          </a:p>
-          <a:p>
-            <a:pPr>
-              <a:spcAft>
-                <a:spcPts val="1400"/>
-              </a:spcAft>
-            </a:pPr>
-            <a:r>
-              <a:rPr sz="2000">
-                <a:solidFill>
-                  <a:srgbClr val="222A33"/>
-                </a:solidFill>
-                <a:latin typeface="Calibri"/>
-              </a:rPr>
-              <a:t>•  No built-in governance — PHI/PII is a manual, unenforced allow-list</a:t>
-            </a:r>
-          </a:p>
-        </p:txBody>
-      </p:sp>
-      <p:sp>
-        <p:nvSpPr>
-          <p:cNvPr id="5" name="TextBox 4"/>
+              <a:t>•  Every missing value → "Skipped this Question" — 3 cases conflated (counts inflated)</a:t>
+            </a:r>
+          </a:p>
+        </p:txBody>
+      </p:sp>
+      <p:sp>
+        <p:nvSpPr>
+          <p:cNvPr id="6" name="TextBox 5"/>
           <p:cNvSpPr txBox="1"/>
           <p:nvPr/>
         </p:nvSpPr>
@@ -12341,13 +12075,13 @@
           <a:p>
             <a:pPr algn="l"/>
             <a:r>
-              <a:rPr sz="1600" b="1" i="0">
+              <a:rPr sz="1500" b="0" i="1">
                 <a:solidFill>
-                  <a:srgbClr val="CC7D15"/>
+                  <a:srgbClr val="5A636E"/>
                 </a:solidFill>
                 <a:latin typeface="Calibri"/>
               </a:rPr>
-              <a:t>In OMOP terms, these wide tables are source data — and we're analyzing them raw.</a:t>
+              <a:t>→ The model does the merge once (GROUP BY concept), generates labels, and makes skip/loops data.</a:t>
             </a:r>
           </a:p>
         </p:txBody>
@@ -12360,7 +12094,7 @@
 </p:sld>
 </file>
 
-<file path=ppt/slides/slide5.xml><?xml version="1.0" encoding="utf-8"?>
+<file path=ppt/slides/slide6.xml><?xml version="1.0" encoding="utf-8"?>
 <p:sld xmlns:a="http://schemas.openxmlformats.org/drawingml/2006/main" xmlns:p="http://schemas.openxmlformats.org/presentationml/2006/main" xmlns:r="http://schemas.openxmlformats.org/officeDocument/2006/relationships">
   <p:cSld>
     <p:spTree>
@@ -12418,7 +12152,7 @@
                 </a:solidFill>
                 <a:latin typeface="Calibri"/>
               </a:rPr>
-              <a:t>Exhibit 1 — our own Module 1 report</a:t>
+              <a:t>Exhibit 2 — the QA/QC engine</a:t>
             </a:r>
           </a:p>
           <a:p>
@@ -12428,7 +12162,7 @@
                   <a:srgbClr val="BBD5D7"/>
                 </a:solidFill>
               </a:rPr>
-              <a:t>"Merged Module 1 Summary Statistics" · 6,234 lines · scheduled pipeline</a:t>
+              <a:t>1,271-line engine + 14 Excel workbooks = 7,025 hand-written rules</a:t>
             </a:r>
           </a:p>
         </p:txBody>
@@ -12477,16 +12211,519 @@
           </a:p>
         </p:txBody>
       </p:sp>
-      <p:sp>
-        <p:nvSpPr>
-          <p:cNvPr id="4" name="TextBox 3"/>
+      <p:graphicFrame>
+        <p:nvGraphicFramePr>
+          <p:cNvPr id="4" name="Table 3"/>
+          <p:cNvGraphicFramePr>
+            <a:graphicFrameLocks noGrp="1"/>
+          </p:cNvGraphicFramePr>
+          <p:nvPr/>
+        </p:nvGraphicFramePr>
+        <p:xfrm>
+          <a:off x="548640" y="1371600"/>
+          <a:ext cx="11064240" cy="3383280"/>
+        </p:xfrm>
+        <a:graphic>
+          <a:graphicData uri="http://schemas.openxmlformats.org/drawingml/2006/table">
+            <a:tbl>
+              <a:tblPr firstRow="1" bandRow="1">
+                <a:tableStyleId>{5C22544A-7EE6-4342-B048-85BDC9FD1C3A}</a:tableStyleId>
+              </a:tblPr>
+              <a:tblGrid>
+                <a:gridCol w="4206240"/>
+                <a:gridCol w="3017520"/>
+                <a:gridCol w="3840480"/>
+              </a:tblGrid>
+              <a:tr h="483325">
+                <a:tc>
+                  <a:txBody>
+                    <a:bodyPr wrap="square"/>
+                    <a:lstStyle/>
+                    <a:p>
+                      <a:r>
+                        <a:rPr b="1" sz="1400">
+                          <a:solidFill>
+                            <a:srgbClr val="FFFFFF"/>
+                          </a:solidFill>
+                          <a:latin typeface="Calibri"/>
+                        </a:rPr>
+                        <a:t>The rule checks…</a:t>
+                      </a:r>
+                    </a:p>
+                  </a:txBody>
+                  <a:tcPr marL="73152" marR="73152" marT="27432" marB="27432" anchor="ctr">
+                    <a:solidFill>
+                      <a:srgbClr val="16324F"/>
+                    </a:solidFill>
+                  </a:tcPr>
+                </a:tc>
+                <a:tc>
+                  <a:txBody>
+                    <a:bodyPr wrap="square"/>
+                    <a:lstStyle/>
+                    <a:p>
+                      <a:r>
+                        <a:rPr b="1" sz="1400">
+                          <a:solidFill>
+                            <a:srgbClr val="FFFFFF"/>
+                          </a:solidFill>
+                          <a:latin typeface="Calibri"/>
+                        </a:rPr>
+                        <a:t># (all 14 workbooks)</a:t>
+                      </a:r>
+                    </a:p>
+                  </a:txBody>
+                  <a:tcPr marL="73152" marR="73152" marT="27432" marB="27432" anchor="ctr">
+                    <a:solidFill>
+                      <a:srgbClr val="16324F"/>
+                    </a:solidFill>
+                  </a:tcPr>
+                </a:tc>
+                <a:tc>
+                  <a:txBody>
+                    <a:bodyPr wrap="square"/>
+                    <a:lstStyle/>
+                    <a:p>
+                      <a:r>
+                        <a:rPr b="1" sz="1400">
+                          <a:solidFill>
+                            <a:srgbClr val="FFFFFF"/>
+                          </a:solidFill>
+                          <a:latin typeface="Calibri"/>
+                        </a:rPr>
+                        <a:t>Already in the model as</a:t>
+                      </a:r>
+                    </a:p>
+                  </a:txBody>
+                  <a:tcPr marL="73152" marR="73152" marT="27432" marB="27432" anchor="ctr">
+                    <a:solidFill>
+                      <a:srgbClr val="16324F"/>
+                    </a:solidFill>
+                  </a:tcPr>
+                </a:tc>
+              </a:tr>
+              <a:tr h="483325">
+                <a:tc>
+                  <a:txBody>
+                    <a:bodyPr wrap="square"/>
+                    <a:lstStyle/>
+                    <a:p>
+                      <a:r>
+                        <a:rPr sz="1400" b="1">
+                          <a:solidFill>
+                            <a:srgbClr val="222A33"/>
+                          </a:solidFill>
+                          <a:latin typeface="Calibri"/>
+                        </a:rPr>
+                        <a:t>Cross-variable condition</a:t>
+                      </a:r>
+                    </a:p>
+                  </a:txBody>
+                  <a:tcPr marL="73152" marR="73152" marT="27432" marB="27432" anchor="ctr">
+                    <a:solidFill>
+                      <a:srgbClr val="FFFFFF"/>
+                    </a:solidFill>
+                  </a:tcPr>
+                </a:tc>
+                <a:tc>
+                  <a:txBody>
+                    <a:bodyPr wrap="square"/>
+                    <a:lstStyle/>
+                    <a:p>
+                      <a:r>
+                        <a:rPr sz="1400">
+                          <a:solidFill>
+                            <a:srgbClr val="222A33"/>
+                          </a:solidFill>
+                          <a:latin typeface="Calibri"/>
+                        </a:rPr>
+                        <a:t>3,454  (49%)</a:t>
+                      </a:r>
+                    </a:p>
+                  </a:txBody>
+                  <a:tcPr marL="73152" marR="73152" marT="27432" marB="27432" anchor="ctr">
+                    <a:solidFill>
+                      <a:srgbClr val="FFFFFF"/>
+                    </a:solidFill>
+                  </a:tcPr>
+                </a:tc>
+                <a:tc>
+                  <a:txBody>
+                    <a:bodyPr wrap="square"/>
+                    <a:lstStyle/>
+                    <a:p>
+                      <a:r>
+                        <a:rPr sz="1400">
+                          <a:solidFill>
+                            <a:srgbClr val="222A33"/>
+                          </a:solidFill>
+                          <a:latin typeface="Calibri"/>
+                        </a:rPr>
+                        <a:t>skip_logic</a:t>
+                      </a:r>
+                    </a:p>
+                  </a:txBody>
+                  <a:tcPr marL="73152" marR="73152" marT="27432" marB="27432" anchor="ctr">
+                    <a:solidFill>
+                      <a:srgbClr val="FFFFFF"/>
+                    </a:solidFill>
+                  </a:tcPr>
+                </a:tc>
+              </a:tr>
+              <a:tr h="483325">
+                <a:tc>
+                  <a:txBody>
+                    <a:bodyPr wrap="square"/>
+                    <a:lstStyle/>
+                    <a:p>
+                      <a:r>
+                        <a:rPr sz="1400" b="1">
+                          <a:solidFill>
+                            <a:srgbClr val="222A33"/>
+                          </a:solidFill>
+                          <a:latin typeface="Calibri"/>
+                        </a:rPr>
+                        <a:t>Numeric / date / time</a:t>
+                      </a:r>
+                    </a:p>
+                  </a:txBody>
+                  <a:tcPr marL="73152" marR="73152" marT="27432" marB="27432" anchor="ctr">
+                    <a:solidFill>
+                      <a:srgbClr val="EDF1F5"/>
+                    </a:solidFill>
+                  </a:tcPr>
+                </a:tc>
+                <a:tc>
+                  <a:txBody>
+                    <a:bodyPr wrap="square"/>
+                    <a:lstStyle/>
+                    <a:p>
+                      <a:r>
+                        <a:rPr sz="1400">
+                          <a:solidFill>
+                            <a:srgbClr val="222A33"/>
+                          </a:solidFill>
+                          <a:latin typeface="Calibri"/>
+                        </a:rPr>
+                        <a:t>883  (13%)</a:t>
+                      </a:r>
+                    </a:p>
+                  </a:txBody>
+                  <a:tcPr marL="73152" marR="73152" marT="27432" marB="27432" anchor="ctr">
+                    <a:solidFill>
+                      <a:srgbClr val="EDF1F5"/>
+                    </a:solidFill>
+                  </a:tcPr>
+                </a:tc>
+                <a:tc>
+                  <a:txBody>
+                    <a:bodyPr wrap="square"/>
+                    <a:lstStyle/>
+                    <a:p>
+                      <a:r>
+                        <a:rPr sz="1400">
+                          <a:solidFill>
+                            <a:srgbClr val="222A33"/>
+                          </a:solidFill>
+                          <a:latin typeface="Calibri"/>
+                        </a:rPr>
+                        <a:t>variable_metadata.variable_type</a:t>
+                      </a:r>
+                    </a:p>
+                  </a:txBody>
+                  <a:tcPr marL="73152" marR="73152" marT="27432" marB="27432" anchor="ctr">
+                    <a:solidFill>
+                      <a:srgbClr val="EDF1F5"/>
+                    </a:solidFill>
+                  </a:tcPr>
+                </a:tc>
+              </a:tr>
+              <a:tr h="483325">
+                <a:tc>
+                  <a:txBody>
+                    <a:bodyPr wrap="square"/>
+                    <a:lstStyle/>
+                    <a:p>
+                      <a:r>
+                        <a:rPr sz="1400" b="1">
+                          <a:solidFill>
+                            <a:srgbClr val="222A33"/>
+                          </a:solidFill>
+                          <a:latin typeface="Calibri"/>
+                        </a:rPr>
+                        <a:t>String length</a:t>
+                      </a:r>
+                    </a:p>
+                  </a:txBody>
+                  <a:tcPr marL="73152" marR="73152" marT="27432" marB="27432" anchor="ctr">
+                    <a:solidFill>
+                      <a:srgbClr val="FFFFFF"/>
+                    </a:solidFill>
+                  </a:tcPr>
+                </a:tc>
+                <a:tc>
+                  <a:txBody>
+                    <a:bodyPr wrap="square"/>
+                    <a:lstStyle/>
+                    <a:p>
+                      <a:r>
+                        <a:rPr sz="1400">
+                          <a:solidFill>
+                            <a:srgbClr val="222A33"/>
+                          </a:solidFill>
+                          <a:latin typeface="Calibri"/>
+                        </a:rPr>
+                        <a:t>792  (11%)</a:t>
+                      </a:r>
+                    </a:p>
+                  </a:txBody>
+                  <a:tcPr marL="73152" marR="73152" marT="27432" marB="27432" anchor="ctr">
+                    <a:solidFill>
+                      <a:srgbClr val="FFFFFF"/>
+                    </a:solidFill>
+                  </a:tcPr>
+                </a:tc>
+                <a:tc>
+                  <a:txBody>
+                    <a:bodyPr wrap="square"/>
+                    <a:lstStyle/>
+                    <a:p>
+                      <a:r>
+                        <a:rPr sz="1400">
+                          <a:solidFill>
+                            <a:srgbClr val="222A33"/>
+                          </a:solidFill>
+                          <a:latin typeface="Calibri"/>
+                        </a:rPr>
+                        <a:t>variable_metadata.variable_length</a:t>
+                      </a:r>
+                    </a:p>
+                  </a:txBody>
+                  <a:tcPr marL="73152" marR="73152" marT="27432" marB="27432" anchor="ctr">
+                    <a:solidFill>
+                      <a:srgbClr val="FFFFFF"/>
+                    </a:solidFill>
+                  </a:tcPr>
+                </a:tc>
+              </a:tr>
+              <a:tr h="483325">
+                <a:tc>
+                  <a:txBody>
+                    <a:bodyPr wrap="square"/>
+                    <a:lstStyle/>
+                    <a:p>
+                      <a:r>
+                        <a:rPr sz="1400" b="1">
+                          <a:solidFill>
+                            <a:srgbClr val="222A33"/>
+                          </a:solidFill>
+                          <a:latin typeface="Calibri"/>
+                        </a:rPr>
+                        <a:t>Answer ∈ valid option set</a:t>
+                      </a:r>
+                    </a:p>
+                  </a:txBody>
+                  <a:tcPr marL="73152" marR="73152" marT="27432" marB="27432" anchor="ctr">
+                    <a:solidFill>
+                      <a:srgbClr val="EDF1F5"/>
+                    </a:solidFill>
+                  </a:tcPr>
+                </a:tc>
+                <a:tc>
+                  <a:txBody>
+                    <a:bodyPr wrap="square"/>
+                    <a:lstStyle/>
+                    <a:p>
+                      <a:r>
+                        <a:rPr sz="1400">
+                          <a:solidFill>
+                            <a:srgbClr val="222A33"/>
+                          </a:solidFill>
+                          <a:latin typeface="Calibri"/>
+                        </a:rPr>
+                        <a:t>773  (11%)</a:t>
+                      </a:r>
+                    </a:p>
+                  </a:txBody>
+                  <a:tcPr marL="73152" marR="73152" marT="27432" marB="27432" anchor="ctr">
+                    <a:solidFill>
+                      <a:srgbClr val="EDF1F5"/>
+                    </a:solidFill>
+                  </a:tcPr>
+                </a:tc>
+                <a:tc>
+                  <a:txBody>
+                    <a:bodyPr wrap="square"/>
+                    <a:lstStyle/>
+                    <a:p>
+                      <a:r>
+                        <a:rPr sz="1400">
+                          <a:solidFill>
+                            <a:srgbClr val="222A33"/>
+                          </a:solidFill>
+                          <a:latin typeface="Calibri"/>
+                        </a:rPr>
+                        <a:t>response_options</a:t>
+                      </a:r>
+                    </a:p>
+                  </a:txBody>
+                  <a:tcPr marL="73152" marR="73152" marT="27432" marB="27432" anchor="ctr">
+                    <a:solidFill>
+                      <a:srgbClr val="EDF1F5"/>
+                    </a:solidFill>
+                  </a:tcPr>
+                </a:tc>
+              </a:tr>
+              <a:tr h="483325">
+                <a:tc>
+                  <a:txBody>
+                    <a:bodyPr wrap="square"/>
+                    <a:lstStyle/>
+                    <a:p>
+                      <a:r>
+                        <a:rPr sz="1400" b="1">
+                          <a:solidFill>
+                            <a:srgbClr val="222A33"/>
+                          </a:solidFill>
+                          <a:latin typeface="Calibri"/>
+                        </a:rPr>
+                        <a:t>Populated / required</a:t>
+                      </a:r>
+                    </a:p>
+                  </a:txBody>
+                  <a:tcPr marL="73152" marR="73152" marT="27432" marB="27432" anchor="ctr">
+                    <a:solidFill>
+                      <a:srgbClr val="FFFFFF"/>
+                    </a:solidFill>
+                  </a:tcPr>
+                </a:tc>
+                <a:tc>
+                  <a:txBody>
+                    <a:bodyPr wrap="square"/>
+                    <a:lstStyle/>
+                    <a:p>
+                      <a:r>
+                        <a:rPr sz="1400">
+                          <a:solidFill>
+                            <a:srgbClr val="222A33"/>
+                          </a:solidFill>
+                          <a:latin typeface="Calibri"/>
+                        </a:rPr>
+                        <a:t>65  (1%)</a:t>
+                      </a:r>
+                    </a:p>
+                  </a:txBody>
+                  <a:tcPr marL="73152" marR="73152" marT="27432" marB="27432" anchor="ctr">
+                    <a:solidFill>
+                      <a:srgbClr val="FFFFFF"/>
+                    </a:solidFill>
+                  </a:tcPr>
+                </a:tc>
+                <a:tc>
+                  <a:txBody>
+                    <a:bodyPr wrap="square"/>
+                    <a:lstStyle/>
+                    <a:p>
+                      <a:r>
+                        <a:rPr sz="1400">
+                          <a:solidFill>
+                            <a:srgbClr val="222A33"/>
+                          </a:solidFill>
+                          <a:latin typeface="Calibri"/>
+                        </a:rPr>
+                        <a:t>skip_logic / is_required</a:t>
+                      </a:r>
+                    </a:p>
+                  </a:txBody>
+                  <a:tcPr marL="73152" marR="73152" marT="27432" marB="27432" anchor="ctr">
+                    <a:solidFill>
+                      <a:srgbClr val="FFFFFF"/>
+                    </a:solidFill>
+                  </a:tcPr>
+                </a:tc>
+              </a:tr>
+              <a:tr h="483330">
+                <a:tc>
+                  <a:txBody>
+                    <a:bodyPr wrap="square"/>
+                    <a:lstStyle/>
+                    <a:p>
+                      <a:r>
+                        <a:rPr sz="1400" b="1">
+                          <a:solidFill>
+                            <a:srgbClr val="222A33"/>
+                          </a:solidFill>
+                          <a:latin typeface="Calibri"/>
+                        </a:rPr>
+                        <a:t>Genuinely custom</a:t>
+                      </a:r>
+                    </a:p>
+                  </a:txBody>
+                  <a:tcPr marL="73152" marR="73152" marT="27432" marB="27432" anchor="ctr">
+                    <a:solidFill>
+                      <a:srgbClr val="EDF1F5"/>
+                    </a:solidFill>
+                  </a:tcPr>
+                </a:tc>
+                <a:tc>
+                  <a:txBody>
+                    <a:bodyPr wrap="square"/>
+                    <a:lstStyle/>
+                    <a:p>
+                      <a:r>
+                        <a:rPr sz="1400">
+                          <a:solidFill>
+                            <a:srgbClr val="222A33"/>
+                          </a:solidFill>
+                          <a:latin typeface="Calibri"/>
+                        </a:rPr>
+                        <a:t>1,058  (15%)</a:t>
+                      </a:r>
+                    </a:p>
+                  </a:txBody>
+                  <a:tcPr marL="73152" marR="73152" marT="27432" marB="27432" anchor="ctr">
+                    <a:solidFill>
+                      <a:srgbClr val="EDF1F5"/>
+                    </a:solidFill>
+                  </a:tcPr>
+                </a:tc>
+                <a:tc>
+                  <a:txBody>
+                    <a:bodyPr wrap="square"/>
+                    <a:lstStyle/>
+                    <a:p>
+                      <a:r>
+                        <a:rPr sz="1400">
+                          <a:solidFill>
+                            <a:srgbClr val="222A33"/>
+                          </a:solidFill>
+                          <a:latin typeface="Calibri"/>
+                        </a:rPr>
+                        <a:t>— needs authoring</a:t>
+                      </a:r>
+                    </a:p>
+                  </a:txBody>
+                  <a:tcPr marL="73152" marR="73152" marT="27432" marB="27432" anchor="ctr">
+                    <a:solidFill>
+                      <a:srgbClr val="EDF1F5"/>
+                    </a:solidFill>
+                  </a:tcPr>
+                </a:tc>
+              </a:tr>
+            </a:tbl>
+          </a:graphicData>
+        </a:graphic>
+      </p:graphicFrame>
+      <p:sp>
+        <p:nvSpPr>
+          <p:cNvPr id="5" name="TextBox 4"/>
           <p:cNvSpPr txBox="1"/>
           <p:nvPr/>
         </p:nvSpPr>
         <p:spPr>
           <a:xfrm>
-            <a:off x="640080" y="1325880"/>
-            <a:ext cx="10789920" cy="548640"/>
+            <a:off x="548640" y="5623560"/>
+            <a:ext cx="11064240" cy="502920"/>
           </a:xfrm>
           <a:prstGeom prst="rect">
             <a:avLst/>
@@ -12501,27 +12738,27 @@
           <a:p>
             <a:pPr algn="l"/>
             <a:r>
-              <a:rPr sz="1800" b="1" i="0">
+              <a:rPr sz="1500" b="1" i="0">
                 <a:solidFill>
-                  <a:srgbClr val="2E8B8B"/>
+                  <a:srgbClr val="CC7D15"/>
                 </a:solidFill>
                 <a:latin typeface="Calibri"/>
               </a:rPr>
-              <a:t>~650 lines rebuild the model by hand before the first statistic:</a:t>
-            </a:r>
-          </a:p>
-        </p:txBody>
-      </p:sp>
-      <p:sp>
-        <p:nvSpPr>
-          <p:cNvPr id="5" name="TextBox 4"/>
+              <a:t>Most re-state metadata the model centralizes; complex cross-variable logic is authored once — not re-coded in 3 places.</a:t>
+            </a:r>
+          </a:p>
+        </p:txBody>
+      </p:sp>
+      <p:sp>
+        <p:nvSpPr>
+          <p:cNvPr id="6" name="TextBox 5"/>
           <p:cNvSpPr txBox="1"/>
           <p:nvPr/>
         </p:nvSpPr>
         <p:spPr>
           <a:xfrm>
-            <a:off x="640080" y="2011680"/>
-            <a:ext cx="10789920" cy="2743200"/>
+            <a:off x="548640" y="6144768"/>
+            <a:ext cx="11064240" cy="502920"/>
           </a:xfrm>
           <a:prstGeom prst="rect">
             <a:avLst/>
@@ -12534,102 +12771,15 @@
           </a:bodyPr>
           <a:lstStyle/>
           <a:p>
-            <a:pPr>
-              <a:spcAft>
-                <a:spcPts val="1200"/>
-              </a:spcAft>
-            </a:pPr>
-            <a:r>
-              <a:rPr sz="1800">
-                <a:solidFill>
-                  <a:srgbClr val="222A33"/>
-                </a:solidFill>
-                <a:latin typeface="Calibri"/>
-              </a:rPr>
-              <a:t>•  Hand-rolled v1/v2 merge — re-runs every refresh, column-name dependent</a:t>
-            </a:r>
-          </a:p>
-          <a:p>
-            <a:pPr>
-              <a:spcAft>
-                <a:spcPts val="1200"/>
-              </a:spcAft>
-            </a:pPr>
-            <a:r>
-              <a:rPr sz="1800">
-                <a:solidFill>
-                  <a:srgbClr val="222A33"/>
-                </a:solidFill>
-                <a:latin typeface="Calibri"/>
-              </a:rPr>
-              <a:t>•  150-entry label dictionary typed by hand — with duplicate-key bugs &amp; typos</a:t>
-            </a:r>
-          </a:p>
-          <a:p>
-            <a:pPr>
-              <a:spcAft>
-                <a:spcPts val="1200"/>
-              </a:spcAft>
-            </a:pPr>
-            <a:r>
-              <a:rPr sz="1800">
-                <a:solidFill>
-                  <a:srgbClr val="222A33"/>
-                </a:solidFill>
-                <a:latin typeface="Calibri"/>
-              </a:rPr>
-              <a:t>•  Skip logic &amp; loops reimplemented as bespoke functions</a:t>
-            </a:r>
-          </a:p>
-          <a:p>
-            <a:pPr>
-              <a:spcAft>
-                <a:spcPts val="1200"/>
-              </a:spcAft>
-            </a:pPr>
-            <a:r>
-              <a:rPr sz="1800">
-                <a:solidFill>
-                  <a:srgbClr val="222A33"/>
-                </a:solidFill>
-                <a:latin typeface="Calibri"/>
-              </a:rPr>
-              <a:t>•  Every missing value → "Skipped this Question" — 3 cases conflated (counts inflated)</a:t>
-            </a:r>
-          </a:p>
-        </p:txBody>
-      </p:sp>
-      <p:sp>
-        <p:nvSpPr>
-          <p:cNvPr id="6" name="TextBox 5"/>
-          <p:cNvSpPr txBox="1"/>
-          <p:nvPr/>
-        </p:nvSpPr>
-        <p:spPr>
-          <a:xfrm>
-            <a:off x="640080" y="5669280"/>
-            <a:ext cx="10789920" cy="640080"/>
-          </a:xfrm>
-          <a:prstGeom prst="rect">
-            <a:avLst/>
-          </a:prstGeom>
-          <a:noFill/>
-        </p:spPr>
-        <p:txBody>
-          <a:bodyPr wrap="square">
-            <a:spAutoFit/>
-          </a:bodyPr>
-          <a:lstStyle/>
-          <a:p>
             <a:pPr algn="l"/>
             <a:r>
-              <a:rPr sz="1500" b="0" i="1">
+              <a:rPr sz="1100" b="0" i="1">
                 <a:solidFill>
                   <a:srgbClr val="5A636E"/>
                 </a:solidFill>
                 <a:latin typeface="Calibri"/>
               </a:rPr>
-              <a:t>→ The model does the merge once (GROUP BY concept), generates labels, and makes skip/loops data.</a:t>
+              <a:t>Honest limits: ~35% are pure value/type/length checks; the skip-gated rest needs the richer skip-logic model (~8% complex tail authored once). Module 4 ≈ 50% custom.</a:t>
             </a:r>
           </a:p>
         </p:txBody>
@@ -12642,7 +12792,7 @@
 </p:sld>
 </file>
 
-<file path=ppt/slides/slide6.xml><?xml version="1.0" encoding="utf-8"?>
+<file path=ppt/slides/slide7.xml><?xml version="1.0" encoding="utf-8"?>
 <p:sld xmlns:a="http://schemas.openxmlformats.org/drawingml/2006/main" xmlns:p="http://schemas.openxmlformats.org/presentationml/2006/main" xmlns:r="http://schemas.openxmlformats.org/officeDocument/2006/relationships">
   <p:cSld>
     <p:spTree>
@@ -12700,7 +12850,7 @@
                 </a:solidFill>
                 <a:latin typeface="Calibri"/>
               </a:rPr>
-              <a:t>Exhibit 2 — the QA/QC engine</a:t>
+              <a:t>Exhibit 3 — geocoding &amp; unharmonized concept IDs</a:t>
             </a:r>
           </a:p>
           <a:p>
@@ -12710,7 +12860,7 @@
                   <a:srgbClr val="BBD5D7"/>
                 </a:solidFill>
               </a:rPr>
-              <a:t>1,271-line engine + 14 Excel workbooks = 7,025 hand-written rules</a:t>
+              <a:t>Same field, no relationship linking its variants</a:t>
             </a:r>
           </a:p>
         </p:txBody>
@@ -12759,519 +12909,16 @@
           </a:p>
         </p:txBody>
       </p:sp>
-      <p:graphicFrame>
-        <p:nvGraphicFramePr>
-          <p:cNvPr id="4" name="Table 3"/>
-          <p:cNvGraphicFramePr>
-            <a:graphicFrameLocks noGrp="1"/>
-          </p:cNvGraphicFramePr>
-          <p:nvPr/>
-        </p:nvGraphicFramePr>
-        <p:xfrm>
-          <a:off x="548640" y="1371600"/>
-          <a:ext cx="11064240" cy="3383280"/>
-        </p:xfrm>
-        <a:graphic>
-          <a:graphicData uri="http://schemas.openxmlformats.org/drawingml/2006/table">
-            <a:tbl>
-              <a:tblPr firstRow="1" bandRow="1">
-                <a:tableStyleId>{5C22544A-7EE6-4342-B048-85BDC9FD1C3A}</a:tableStyleId>
-              </a:tblPr>
-              <a:tblGrid>
-                <a:gridCol w="4206240"/>
-                <a:gridCol w="3017520"/>
-                <a:gridCol w="3840480"/>
-              </a:tblGrid>
-              <a:tr h="483325">
-                <a:tc>
-                  <a:txBody>
-                    <a:bodyPr wrap="square"/>
-                    <a:lstStyle/>
-                    <a:p>
-                      <a:r>
-                        <a:rPr b="1" sz="1400">
-                          <a:solidFill>
-                            <a:srgbClr val="FFFFFF"/>
-                          </a:solidFill>
-                          <a:latin typeface="Calibri"/>
-                        </a:rPr>
-                        <a:t>The rule checks…</a:t>
-                      </a:r>
-                    </a:p>
-                  </a:txBody>
-                  <a:tcPr marL="73152" marR="73152" marT="27432" marB="27432" anchor="ctr">
-                    <a:solidFill>
-                      <a:srgbClr val="16324F"/>
-                    </a:solidFill>
-                  </a:tcPr>
-                </a:tc>
-                <a:tc>
-                  <a:txBody>
-                    <a:bodyPr wrap="square"/>
-                    <a:lstStyle/>
-                    <a:p>
-                      <a:r>
-                        <a:rPr b="1" sz="1400">
-                          <a:solidFill>
-                            <a:srgbClr val="FFFFFF"/>
-                          </a:solidFill>
-                          <a:latin typeface="Calibri"/>
-                        </a:rPr>
-                        <a:t># (all 14 workbooks)</a:t>
-                      </a:r>
-                    </a:p>
-                  </a:txBody>
-                  <a:tcPr marL="73152" marR="73152" marT="27432" marB="27432" anchor="ctr">
-                    <a:solidFill>
-                      <a:srgbClr val="16324F"/>
-                    </a:solidFill>
-                  </a:tcPr>
-                </a:tc>
-                <a:tc>
-                  <a:txBody>
-                    <a:bodyPr wrap="square"/>
-                    <a:lstStyle/>
-                    <a:p>
-                      <a:r>
-                        <a:rPr b="1" sz="1400">
-                          <a:solidFill>
-                            <a:srgbClr val="FFFFFF"/>
-                          </a:solidFill>
-                          <a:latin typeface="Calibri"/>
-                        </a:rPr>
-                        <a:t>Already in the model as</a:t>
-                      </a:r>
-                    </a:p>
-                  </a:txBody>
-                  <a:tcPr marL="73152" marR="73152" marT="27432" marB="27432" anchor="ctr">
-                    <a:solidFill>
-                      <a:srgbClr val="16324F"/>
-                    </a:solidFill>
-                  </a:tcPr>
-                </a:tc>
-              </a:tr>
-              <a:tr h="483325">
-                <a:tc>
-                  <a:txBody>
-                    <a:bodyPr wrap="square"/>
-                    <a:lstStyle/>
-                    <a:p>
-                      <a:r>
-                        <a:rPr sz="1400" b="1">
-                          <a:solidFill>
-                            <a:srgbClr val="222A33"/>
-                          </a:solidFill>
-                          <a:latin typeface="Calibri"/>
-                        </a:rPr>
-                        <a:t>Cross-variable condition</a:t>
-                      </a:r>
-                    </a:p>
-                  </a:txBody>
-                  <a:tcPr marL="73152" marR="73152" marT="27432" marB="27432" anchor="ctr">
-                    <a:solidFill>
-                      <a:srgbClr val="FFFFFF"/>
-                    </a:solidFill>
-                  </a:tcPr>
-                </a:tc>
-                <a:tc>
-                  <a:txBody>
-                    <a:bodyPr wrap="square"/>
-                    <a:lstStyle/>
-                    <a:p>
-                      <a:r>
-                        <a:rPr sz="1400">
-                          <a:solidFill>
-                            <a:srgbClr val="222A33"/>
-                          </a:solidFill>
-                          <a:latin typeface="Calibri"/>
-                        </a:rPr>
-                        <a:t>3,454  (49%)</a:t>
-                      </a:r>
-                    </a:p>
-                  </a:txBody>
-                  <a:tcPr marL="73152" marR="73152" marT="27432" marB="27432" anchor="ctr">
-                    <a:solidFill>
-                      <a:srgbClr val="FFFFFF"/>
-                    </a:solidFill>
-                  </a:tcPr>
-                </a:tc>
-                <a:tc>
-                  <a:txBody>
-                    <a:bodyPr wrap="square"/>
-                    <a:lstStyle/>
-                    <a:p>
-                      <a:r>
-                        <a:rPr sz="1400">
-                          <a:solidFill>
-                            <a:srgbClr val="222A33"/>
-                          </a:solidFill>
-                          <a:latin typeface="Calibri"/>
-                        </a:rPr>
-                        <a:t>skip_logic</a:t>
-                      </a:r>
-                    </a:p>
-                  </a:txBody>
-                  <a:tcPr marL="73152" marR="73152" marT="27432" marB="27432" anchor="ctr">
-                    <a:solidFill>
-                      <a:srgbClr val="FFFFFF"/>
-                    </a:solidFill>
-                  </a:tcPr>
-                </a:tc>
-              </a:tr>
-              <a:tr h="483325">
-                <a:tc>
-                  <a:txBody>
-                    <a:bodyPr wrap="square"/>
-                    <a:lstStyle/>
-                    <a:p>
-                      <a:r>
-                        <a:rPr sz="1400" b="1">
-                          <a:solidFill>
-                            <a:srgbClr val="222A33"/>
-                          </a:solidFill>
-                          <a:latin typeface="Calibri"/>
-                        </a:rPr>
-                        <a:t>Numeric / date / time</a:t>
-                      </a:r>
-                    </a:p>
-                  </a:txBody>
-                  <a:tcPr marL="73152" marR="73152" marT="27432" marB="27432" anchor="ctr">
-                    <a:solidFill>
-                      <a:srgbClr val="EDF1F5"/>
-                    </a:solidFill>
-                  </a:tcPr>
-                </a:tc>
-                <a:tc>
-                  <a:txBody>
-                    <a:bodyPr wrap="square"/>
-                    <a:lstStyle/>
-                    <a:p>
-                      <a:r>
-                        <a:rPr sz="1400">
-                          <a:solidFill>
-                            <a:srgbClr val="222A33"/>
-                          </a:solidFill>
-                          <a:latin typeface="Calibri"/>
-                        </a:rPr>
-                        <a:t>883  (13%)</a:t>
-                      </a:r>
-                    </a:p>
-                  </a:txBody>
-                  <a:tcPr marL="73152" marR="73152" marT="27432" marB="27432" anchor="ctr">
-                    <a:solidFill>
-                      <a:srgbClr val="EDF1F5"/>
-                    </a:solidFill>
-                  </a:tcPr>
-                </a:tc>
-                <a:tc>
-                  <a:txBody>
-                    <a:bodyPr wrap="square"/>
-                    <a:lstStyle/>
-                    <a:p>
-                      <a:r>
-                        <a:rPr sz="1400">
-                          <a:solidFill>
-                            <a:srgbClr val="222A33"/>
-                          </a:solidFill>
-                          <a:latin typeface="Calibri"/>
-                        </a:rPr>
-                        <a:t>variable_metadata.variable_type</a:t>
-                      </a:r>
-                    </a:p>
-                  </a:txBody>
-                  <a:tcPr marL="73152" marR="73152" marT="27432" marB="27432" anchor="ctr">
-                    <a:solidFill>
-                      <a:srgbClr val="EDF1F5"/>
-                    </a:solidFill>
-                  </a:tcPr>
-                </a:tc>
-              </a:tr>
-              <a:tr h="483325">
-                <a:tc>
-                  <a:txBody>
-                    <a:bodyPr wrap="square"/>
-                    <a:lstStyle/>
-                    <a:p>
-                      <a:r>
-                        <a:rPr sz="1400" b="1">
-                          <a:solidFill>
-                            <a:srgbClr val="222A33"/>
-                          </a:solidFill>
-                          <a:latin typeface="Calibri"/>
-                        </a:rPr>
-                        <a:t>String length</a:t>
-                      </a:r>
-                    </a:p>
-                  </a:txBody>
-                  <a:tcPr marL="73152" marR="73152" marT="27432" marB="27432" anchor="ctr">
-                    <a:solidFill>
-                      <a:srgbClr val="FFFFFF"/>
-                    </a:solidFill>
-                  </a:tcPr>
-                </a:tc>
-                <a:tc>
-                  <a:txBody>
-                    <a:bodyPr wrap="square"/>
-                    <a:lstStyle/>
-                    <a:p>
-                      <a:r>
-                        <a:rPr sz="1400">
-                          <a:solidFill>
-                            <a:srgbClr val="222A33"/>
-                          </a:solidFill>
-                          <a:latin typeface="Calibri"/>
-                        </a:rPr>
-                        <a:t>792  (11%)</a:t>
-                      </a:r>
-                    </a:p>
-                  </a:txBody>
-                  <a:tcPr marL="73152" marR="73152" marT="27432" marB="27432" anchor="ctr">
-                    <a:solidFill>
-                      <a:srgbClr val="FFFFFF"/>
-                    </a:solidFill>
-                  </a:tcPr>
-                </a:tc>
-                <a:tc>
-                  <a:txBody>
-                    <a:bodyPr wrap="square"/>
-                    <a:lstStyle/>
-                    <a:p>
-                      <a:r>
-                        <a:rPr sz="1400">
-                          <a:solidFill>
-                            <a:srgbClr val="222A33"/>
-                          </a:solidFill>
-                          <a:latin typeface="Calibri"/>
-                        </a:rPr>
-                        <a:t>variable_metadata.variable_length</a:t>
-                      </a:r>
-                    </a:p>
-                  </a:txBody>
-                  <a:tcPr marL="73152" marR="73152" marT="27432" marB="27432" anchor="ctr">
-                    <a:solidFill>
-                      <a:srgbClr val="FFFFFF"/>
-                    </a:solidFill>
-                  </a:tcPr>
-                </a:tc>
-              </a:tr>
-              <a:tr h="483325">
-                <a:tc>
-                  <a:txBody>
-                    <a:bodyPr wrap="square"/>
-                    <a:lstStyle/>
-                    <a:p>
-                      <a:r>
-                        <a:rPr sz="1400" b="1">
-                          <a:solidFill>
-                            <a:srgbClr val="222A33"/>
-                          </a:solidFill>
-                          <a:latin typeface="Calibri"/>
-                        </a:rPr>
-                        <a:t>Answer ∈ valid option set</a:t>
-                      </a:r>
-                    </a:p>
-                  </a:txBody>
-                  <a:tcPr marL="73152" marR="73152" marT="27432" marB="27432" anchor="ctr">
-                    <a:solidFill>
-                      <a:srgbClr val="EDF1F5"/>
-                    </a:solidFill>
-                  </a:tcPr>
-                </a:tc>
-                <a:tc>
-                  <a:txBody>
-                    <a:bodyPr wrap="square"/>
-                    <a:lstStyle/>
-                    <a:p>
-                      <a:r>
-                        <a:rPr sz="1400">
-                          <a:solidFill>
-                            <a:srgbClr val="222A33"/>
-                          </a:solidFill>
-                          <a:latin typeface="Calibri"/>
-                        </a:rPr>
-                        <a:t>773  (11%)</a:t>
-                      </a:r>
-                    </a:p>
-                  </a:txBody>
-                  <a:tcPr marL="73152" marR="73152" marT="27432" marB="27432" anchor="ctr">
-                    <a:solidFill>
-                      <a:srgbClr val="EDF1F5"/>
-                    </a:solidFill>
-                  </a:tcPr>
-                </a:tc>
-                <a:tc>
-                  <a:txBody>
-                    <a:bodyPr wrap="square"/>
-                    <a:lstStyle/>
-                    <a:p>
-                      <a:r>
-                        <a:rPr sz="1400">
-                          <a:solidFill>
-                            <a:srgbClr val="222A33"/>
-                          </a:solidFill>
-                          <a:latin typeface="Calibri"/>
-                        </a:rPr>
-                        <a:t>response_options</a:t>
-                      </a:r>
-                    </a:p>
-                  </a:txBody>
-                  <a:tcPr marL="73152" marR="73152" marT="27432" marB="27432" anchor="ctr">
-                    <a:solidFill>
-                      <a:srgbClr val="EDF1F5"/>
-                    </a:solidFill>
-                  </a:tcPr>
-                </a:tc>
-              </a:tr>
-              <a:tr h="483325">
-                <a:tc>
-                  <a:txBody>
-                    <a:bodyPr wrap="square"/>
-                    <a:lstStyle/>
-                    <a:p>
-                      <a:r>
-                        <a:rPr sz="1400" b="1">
-                          <a:solidFill>
-                            <a:srgbClr val="222A33"/>
-                          </a:solidFill>
-                          <a:latin typeface="Calibri"/>
-                        </a:rPr>
-                        <a:t>Populated / required</a:t>
-                      </a:r>
-                    </a:p>
-                  </a:txBody>
-                  <a:tcPr marL="73152" marR="73152" marT="27432" marB="27432" anchor="ctr">
-                    <a:solidFill>
-                      <a:srgbClr val="FFFFFF"/>
-                    </a:solidFill>
-                  </a:tcPr>
-                </a:tc>
-                <a:tc>
-                  <a:txBody>
-                    <a:bodyPr wrap="square"/>
-                    <a:lstStyle/>
-                    <a:p>
-                      <a:r>
-                        <a:rPr sz="1400">
-                          <a:solidFill>
-                            <a:srgbClr val="222A33"/>
-                          </a:solidFill>
-                          <a:latin typeface="Calibri"/>
-                        </a:rPr>
-                        <a:t>65  (1%)</a:t>
-                      </a:r>
-                    </a:p>
-                  </a:txBody>
-                  <a:tcPr marL="73152" marR="73152" marT="27432" marB="27432" anchor="ctr">
-                    <a:solidFill>
-                      <a:srgbClr val="FFFFFF"/>
-                    </a:solidFill>
-                  </a:tcPr>
-                </a:tc>
-                <a:tc>
-                  <a:txBody>
-                    <a:bodyPr wrap="square"/>
-                    <a:lstStyle/>
-                    <a:p>
-                      <a:r>
-                        <a:rPr sz="1400">
-                          <a:solidFill>
-                            <a:srgbClr val="222A33"/>
-                          </a:solidFill>
-                          <a:latin typeface="Calibri"/>
-                        </a:rPr>
-                        <a:t>skip_logic / is_required</a:t>
-                      </a:r>
-                    </a:p>
-                  </a:txBody>
-                  <a:tcPr marL="73152" marR="73152" marT="27432" marB="27432" anchor="ctr">
-                    <a:solidFill>
-                      <a:srgbClr val="FFFFFF"/>
-                    </a:solidFill>
-                  </a:tcPr>
-                </a:tc>
-              </a:tr>
-              <a:tr h="483330">
-                <a:tc>
-                  <a:txBody>
-                    <a:bodyPr wrap="square"/>
-                    <a:lstStyle/>
-                    <a:p>
-                      <a:r>
-                        <a:rPr sz="1400" b="1">
-                          <a:solidFill>
-                            <a:srgbClr val="222A33"/>
-                          </a:solidFill>
-                          <a:latin typeface="Calibri"/>
-                        </a:rPr>
-                        <a:t>Genuinely custom</a:t>
-                      </a:r>
-                    </a:p>
-                  </a:txBody>
-                  <a:tcPr marL="73152" marR="73152" marT="27432" marB="27432" anchor="ctr">
-                    <a:solidFill>
-                      <a:srgbClr val="EDF1F5"/>
-                    </a:solidFill>
-                  </a:tcPr>
-                </a:tc>
-                <a:tc>
-                  <a:txBody>
-                    <a:bodyPr wrap="square"/>
-                    <a:lstStyle/>
-                    <a:p>
-                      <a:r>
-                        <a:rPr sz="1400">
-                          <a:solidFill>
-                            <a:srgbClr val="222A33"/>
-                          </a:solidFill>
-                          <a:latin typeface="Calibri"/>
-                        </a:rPr>
-                        <a:t>1,058  (15%)</a:t>
-                      </a:r>
-                    </a:p>
-                  </a:txBody>
-                  <a:tcPr marL="73152" marR="73152" marT="27432" marB="27432" anchor="ctr">
-                    <a:solidFill>
-                      <a:srgbClr val="EDF1F5"/>
-                    </a:solidFill>
-                  </a:tcPr>
-                </a:tc>
-                <a:tc>
-                  <a:txBody>
-                    <a:bodyPr wrap="square"/>
-                    <a:lstStyle/>
-                    <a:p>
-                      <a:r>
-                        <a:rPr sz="1400">
-                          <a:solidFill>
-                            <a:srgbClr val="222A33"/>
-                          </a:solidFill>
-                          <a:latin typeface="Calibri"/>
-                        </a:rPr>
-                        <a:t>— needs authoring</a:t>
-                      </a:r>
-                    </a:p>
-                  </a:txBody>
-                  <a:tcPr marL="73152" marR="73152" marT="27432" marB="27432" anchor="ctr">
-                    <a:solidFill>
-                      <a:srgbClr val="EDF1F5"/>
-                    </a:solidFill>
-                  </a:tcPr>
-                </a:tc>
-              </a:tr>
-            </a:tbl>
-          </a:graphicData>
-        </a:graphic>
-      </p:graphicFrame>
-      <p:sp>
-        <p:nvSpPr>
-          <p:cNvPr id="5" name="TextBox 4"/>
+      <p:sp>
+        <p:nvSpPr>
+          <p:cNvPr id="4" name="TextBox 3"/>
           <p:cNvSpPr txBox="1"/>
           <p:nvPr/>
         </p:nvSpPr>
         <p:spPr>
           <a:xfrm>
-            <a:off x="548640" y="5623560"/>
-            <a:ext cx="11064240" cy="502920"/>
+            <a:off x="640080" y="1463040"/>
+            <a:ext cx="10881360" cy="2926080"/>
           </a:xfrm>
           <a:prstGeom prst="rect">
             <a:avLst/>
@@ -13284,29 +12931,81 @@
           </a:bodyPr>
           <a:lstStyle/>
           <a:p>
-            <a:pPr algn="l"/>
-            <a:r>
-              <a:rPr sz="1500" b="1" i="0">
+            <a:pPr>
+              <a:spcAft>
+                <a:spcPts val="1300"/>
+              </a:spcAft>
+            </a:pPr>
+            <a:r>
+              <a:rPr sz="1900">
                 <a:solidFill>
-                  <a:srgbClr val="CC7D15"/>
+                  <a:srgbClr val="222A33"/>
                 </a:solidFill>
                 <a:latin typeface="Calibri"/>
               </a:rPr>
-              <a:t>Most re-state metadata the model centralizes; complex cross-variable logic is authored once — not re-coded in 3 places.</a:t>
-            </a:r>
-          </a:p>
-        </p:txBody>
-      </p:sp>
-      <p:sp>
-        <p:nvSpPr>
-          <p:cNvPr id="6" name="TextBox 5"/>
+              <a:t>•  "Street name of a residence" = ~27 unrelated concept IDs (home ×11, seasonal ×10, work, school, childhood…)</a:t>
+            </a:r>
+          </a:p>
+          <a:p>
+            <a:pPr>
+              <a:spcAft>
+                <a:spcPts val="1300"/>
+              </a:spcAft>
+            </a:pPr>
+            <a:r>
+              <a:rPr sz="1900">
+                <a:solidFill>
+                  <a:srgbClr val="222A33"/>
+                </a:solidFill>
+                <a:latin typeface="Calibri"/>
+              </a:rPr>
+              <a:t>•  Three separate codebases each rebuild the same address crosswalk</a:t>
+            </a:r>
+          </a:p>
+          <a:p>
+            <a:pPr>
+              <a:spcAft>
+                <a:spcPts val="1300"/>
+              </a:spcAft>
+            </a:pPr>
+            <a:r>
+              <a:rPr sz="1900">
+                <a:solidFill>
+                  <a:srgbClr val="222A33"/>
+                </a:solidFill>
+                <a:latin typeface="Calibri"/>
+              </a:rPr>
+              <a:t>•  One even string-matches question labels as join keys (fragile — labels drift)</a:t>
+            </a:r>
+          </a:p>
+          <a:p>
+            <a:pPr>
+              <a:spcAft>
+                <a:spcPts val="1300"/>
+              </a:spcAft>
+            </a:pPr>
+            <a:r>
+              <a:rPr sz="1900">
+                <a:solidFill>
+                  <a:srgbClr val="222A33"/>
+                </a:solidFill>
+                <a:latin typeface="Calibri"/>
+              </a:rPr>
+              <a:t>•  No "address" or "street_name" concept generalizes → nothing reusable</a:t>
+            </a:r>
+          </a:p>
+        </p:txBody>
+      </p:sp>
+      <p:sp>
+        <p:nvSpPr>
+          <p:cNvPr id="5" name="TextBox 4"/>
           <p:cNvSpPr txBox="1"/>
           <p:nvPr/>
         </p:nvSpPr>
         <p:spPr>
           <a:xfrm>
-            <a:off x="548640" y="6144768"/>
-            <a:ext cx="11064240" cy="502920"/>
+            <a:off x="640080" y="5577840"/>
+            <a:ext cx="10881360" cy="731520"/>
           </a:xfrm>
           <a:prstGeom prst="rect">
             <a:avLst/>
@@ -13321,13 +13020,13 @@
           <a:p>
             <a:pPr algn="l"/>
             <a:r>
-              <a:rPr sz="1100" b="0" i="1">
+              <a:rPr sz="1600" b="1" i="0">
                 <a:solidFill>
-                  <a:srgbClr val="5A636E"/>
+                  <a:srgbClr val="CC7D15"/>
                 </a:solidFill>
                 <a:latin typeface="Calibri"/>
               </a:rPr>
-              <a:t>Honest limits: ~35% are pure value/type/length checks; the skip-gated rest needs the richer skip-logic model (~8% complex tail authored once). Module 4 ≈ 50% custom.</a:t>
+              <a:t>Fix: concept_relationship / question_equivalence — author "these are the same field" once, as data.</a:t>
             </a:r>
           </a:p>
         </p:txBody>
@@ -13340,7 +13039,7 @@
 </p:sld>
 </file>
 
-<file path=ppt/slides/slide7.xml><?xml version="1.0" encoding="utf-8"?>
+<file path=ppt/slides/slide8.xml><?xml version="1.0" encoding="utf-8"?>
 <p:sld xmlns:a="http://schemas.openxmlformats.org/drawingml/2006/main" xmlns:p="http://schemas.openxmlformats.org/presentationml/2006/main" xmlns:r="http://schemas.openxmlformats.org/officeDocument/2006/relationships">
   <p:cSld>
     <p:spTree>
@@ -13398,7 +13097,7 @@
                 </a:solidFill>
                 <a:latin typeface="Calibri"/>
               </a:rPr>
-              <a:t>Exhibit 3 — geocoding &amp; unharmonized concept IDs</a:t>
+              <a:t>The idea — answers become rows</a:t>
             </a:r>
           </a:p>
           <a:p>
@@ -13408,7 +13107,7 @@
                   <a:srgbClr val="BBD5D7"/>
                 </a:solidFill>
               </a:rPr>
-              <a:t>Same field, no relationship linking its variants</a:t>
+              <a:t>The model: the dictionary as-is + one long responses table</a:t>
             </a:r>
           </a:p>
         </p:txBody>
@@ -13457,253 +13156,6 @@
           </a:p>
         </p:txBody>
       </p:sp>
-      <p:sp>
-        <p:nvSpPr>
-          <p:cNvPr id="4" name="TextBox 3"/>
-          <p:cNvSpPr txBox="1"/>
-          <p:nvPr/>
-        </p:nvSpPr>
-        <p:spPr>
-          <a:xfrm>
-            <a:off x="640080" y="1463040"/>
-            <a:ext cx="10881360" cy="2926080"/>
-          </a:xfrm>
-          <a:prstGeom prst="rect">
-            <a:avLst/>
-          </a:prstGeom>
-          <a:noFill/>
-        </p:spPr>
-        <p:txBody>
-          <a:bodyPr wrap="square">
-            <a:spAutoFit/>
-          </a:bodyPr>
-          <a:lstStyle/>
-          <a:p>
-            <a:pPr>
-              <a:spcAft>
-                <a:spcPts val="1300"/>
-              </a:spcAft>
-            </a:pPr>
-            <a:r>
-              <a:rPr sz="1900">
-                <a:solidFill>
-                  <a:srgbClr val="222A33"/>
-                </a:solidFill>
-                <a:latin typeface="Calibri"/>
-              </a:rPr>
-              <a:t>•  "Street name of a residence" = ~27 unrelated concept IDs (home ×11, seasonal ×10, work, school, childhood…)</a:t>
-            </a:r>
-          </a:p>
-          <a:p>
-            <a:pPr>
-              <a:spcAft>
-                <a:spcPts val="1300"/>
-              </a:spcAft>
-            </a:pPr>
-            <a:r>
-              <a:rPr sz="1900">
-                <a:solidFill>
-                  <a:srgbClr val="222A33"/>
-                </a:solidFill>
-                <a:latin typeface="Calibri"/>
-              </a:rPr>
-              <a:t>•  Three separate codebases each rebuild the same address crosswalk</a:t>
-            </a:r>
-          </a:p>
-          <a:p>
-            <a:pPr>
-              <a:spcAft>
-                <a:spcPts val="1300"/>
-              </a:spcAft>
-            </a:pPr>
-            <a:r>
-              <a:rPr sz="1900">
-                <a:solidFill>
-                  <a:srgbClr val="222A33"/>
-                </a:solidFill>
-                <a:latin typeface="Calibri"/>
-              </a:rPr>
-              <a:t>•  One even string-matches question labels as join keys (fragile — labels drift)</a:t>
-            </a:r>
-          </a:p>
-          <a:p>
-            <a:pPr>
-              <a:spcAft>
-                <a:spcPts val="1300"/>
-              </a:spcAft>
-            </a:pPr>
-            <a:r>
-              <a:rPr sz="1900">
-                <a:solidFill>
-                  <a:srgbClr val="222A33"/>
-                </a:solidFill>
-                <a:latin typeface="Calibri"/>
-              </a:rPr>
-              <a:t>•  No "address" or "street_name" concept generalizes → nothing reusable</a:t>
-            </a:r>
-          </a:p>
-        </p:txBody>
-      </p:sp>
-      <p:sp>
-        <p:nvSpPr>
-          <p:cNvPr id="5" name="TextBox 4"/>
-          <p:cNvSpPr txBox="1"/>
-          <p:nvPr/>
-        </p:nvSpPr>
-        <p:spPr>
-          <a:xfrm>
-            <a:off x="640080" y="5577840"/>
-            <a:ext cx="10881360" cy="731520"/>
-          </a:xfrm>
-          <a:prstGeom prst="rect">
-            <a:avLst/>
-          </a:prstGeom>
-          <a:noFill/>
-        </p:spPr>
-        <p:txBody>
-          <a:bodyPr wrap="square">
-            <a:spAutoFit/>
-          </a:bodyPr>
-          <a:lstStyle/>
-          <a:p>
-            <a:pPr algn="l"/>
-            <a:r>
-              <a:rPr sz="1600" b="1" i="0">
-                <a:solidFill>
-                  <a:srgbClr val="CC7D15"/>
-                </a:solidFill>
-                <a:latin typeface="Calibri"/>
-              </a:rPr>
-              <a:t>Fix: concept_relationship / question_equivalence — author "these are the same field" once, as data.</a:t>
-            </a:r>
-          </a:p>
-        </p:txBody>
-      </p:sp>
-    </p:spTree>
-  </p:cSld>
-  <p:clrMapOvr>
-    <a:masterClrMapping/>
-  </p:clrMapOvr>
-</p:sld>
-</file>
-
-<file path=ppt/slides/slide8.xml><?xml version="1.0" encoding="utf-8"?>
-<p:sld xmlns:a="http://schemas.openxmlformats.org/drawingml/2006/main" xmlns:p="http://schemas.openxmlformats.org/presentationml/2006/main" xmlns:r="http://schemas.openxmlformats.org/officeDocument/2006/relationships">
-  <p:cSld>
-    <p:spTree>
-      <p:nvGrpSpPr>
-        <p:cNvPr id="1" name=""/>
-        <p:cNvGrpSpPr/>
-        <p:nvPr/>
-      </p:nvGrpSpPr>
-      <p:grpSpPr/>
-      <p:sp>
-        <p:nvSpPr>
-          <p:cNvPr id="2" name="Rectangle 1"/>
-          <p:cNvSpPr/>
-          <p:nvPr/>
-        </p:nvSpPr>
-        <p:spPr>
-          <a:xfrm>
-            <a:off x="0" y="0"/>
-            <a:ext cx="12191695" cy="1051560"/>
-          </a:xfrm>
-          <a:prstGeom prst="rect">
-            <a:avLst/>
-          </a:prstGeom>
-          <a:solidFill>
-            <a:srgbClr val="16324F"/>
-          </a:solidFill>
-          <a:ln>
-            <a:noFill/>
-          </a:ln>
-          <a:effectLst/>
-        </p:spPr>
-        <p:style>
-          <a:lnRef idx="1">
-            <a:schemeClr val="accent1"/>
-          </a:lnRef>
-          <a:fillRef idx="3">
-            <a:schemeClr val="accent1"/>
-          </a:fillRef>
-          <a:effectRef idx="2">
-            <a:schemeClr val="accent1"/>
-          </a:effectRef>
-          <a:fontRef idx="minor">
-            <a:schemeClr val="lt1"/>
-          </a:fontRef>
-        </p:style>
-        <p:txBody>
-          <a:bodyPr rtlCol="0" anchor="ctr" lIns="457200" tIns="109728"/>
-          <a:lstStyle/>
-          <a:p>
-            <a:pPr algn="ctr"/>
-            <a:r>
-              <a:rPr sz="2800" b="1">
-                <a:solidFill>
-                  <a:srgbClr val="FFFFFF"/>
-                </a:solidFill>
-                <a:latin typeface="Calibri"/>
-              </a:rPr>
-              <a:t>The idea — answers become rows</a:t>
-            </a:r>
-          </a:p>
-          <a:p>
-            <a:r>
-              <a:rPr sz="1300" i="1">
-                <a:solidFill>
-                  <a:srgbClr val="BBD5D7"/>
-                </a:solidFill>
-              </a:rPr>
-              <a:t>Phase 1: the dictionary as-is + one long responses table</a:t>
-            </a:r>
-          </a:p>
-        </p:txBody>
-      </p:sp>
-      <p:sp>
-        <p:nvSpPr>
-          <p:cNvPr id="3" name="Rectangle 2"/>
-          <p:cNvSpPr/>
-          <p:nvPr/>
-        </p:nvSpPr>
-        <p:spPr>
-          <a:xfrm>
-            <a:off x="0" y="1051560"/>
-            <a:ext cx="12191695" cy="54864"/>
-          </a:xfrm>
-          <a:prstGeom prst="rect">
-            <a:avLst/>
-          </a:prstGeom>
-          <a:solidFill>
-            <a:srgbClr val="2E8B8B"/>
-          </a:solidFill>
-          <a:ln>
-            <a:noFill/>
-          </a:ln>
-          <a:effectLst/>
-        </p:spPr>
-        <p:style>
-          <a:lnRef idx="1">
-            <a:schemeClr val="accent1"/>
-          </a:lnRef>
-          <a:fillRef idx="3">
-            <a:schemeClr val="accent1"/>
-          </a:fillRef>
-          <a:effectRef idx="2">
-            <a:schemeClr val="accent1"/>
-          </a:effectRef>
-          <a:fontRef idx="minor">
-            <a:schemeClr val="lt1"/>
-          </a:fontRef>
-        </p:style>
-        <p:txBody>
-          <a:bodyPr rtlCol="0" anchor="ctr"/>
-          <a:lstStyle/>
-          <a:p>
-            <a:pPr algn="ctr"/>
-          </a:p>
-        </p:txBody>
-      </p:sp>
       <p:pic>
         <p:nvPicPr>
           <p:cNvPr id="4" name="Picture 3" descr="model_a_full.png"/>
@@ -13758,7 +13210,7 @@
                 </a:solidFill>
                 <a:latin typeface="Calibri"/>
               </a:rPr>
-              <a:t>New answers / options / loops are rows, never new columns. Full Phase 1 ERD (Dictionary-Direct).</a:t>
+              <a:t>New answers / options / loops are rows, never new columns. Full model ERD (Dictionary-Direct).</a:t>
             </a:r>
           </a:p>
         </p:txBody>
